--- a/reports/ITN_Allocation_Ashesi.pptx
+++ b/reports/ITN_Allocation_Ashesi.pptx
@@ -1256,7 +1256,7 @@
           </a:p>
           <a:p>
             <a:r>
-              <a:t>Sources: PROSIT1_verify.py section B (500 seeds; leave-one-region-out on region_code with the Ridge pipeline from notebook 03). Literature: Ploton et al. 2020, Nature Communications 11:4540, doi:10.1038/s41467-020-18321-y; Kattenborn et al. 2022, ISPRS Open Journal of Photogrammetry and Remote Sensing, doi:10.1016/j.ophoto.2022.100018 (up to 28% overestimation of F1-score).</a:t>
+              <a:t>Sources: notebooks/03_pipeline_leakage.ipynb, cells leak_cd12 (500 seeds) and leak_cd14 (whole region held out, via io.split_data(..., hold_out=region)). Literature: Ploton et al. 2020, Nature Communications 11:4540, doi:10.1038/s41467-020-18321-y; Kattenborn et al. 2022, ISPRS Open Journal of Photogrammetry and Remote Sensing, doi:10.1016/j.ophoto.2022.100018 (up to 28% overestimation of F1-score).</a:t>
             </a:r>
           </a:p>
         </p:txBody>
@@ -1331,7 +1331,7 @@
           </a:p>
           <a:p>
             <a:r>
-              <a:t>Sources: src/models.py compute_allocation; PROSIT1_verify.py section C (coefficient +0.0823, p = 1.7e-7; upper-to-predicted ratios 1.1976, 1.3422, 1.1623) and section E (nets per 1,000 people 8.51, 9.17, 16.02). Coverage values: notebooks/02 cell cd06 and PROSIT1_verify.py section D.</a:t>
+              <a:t>Sources: notebooks/04_allocation.ipynb cell alloc_cd11 (coefficient +0.0823, p = 1.7e-07; upper-to-expected ratios 1.198, 1.342, 1.162; nets per 1,000 people). Coverage values: notebooks/02 cell cd06 and scripts/verify_claims.py section D.</a:t>
             </a:r>
           </a:p>
         </p:txBody>
@@ -1406,7 +1406,7 @@
           </a:p>
           <a:p>
             <a:r>
-              <a:t>Sources: the 50-district schedule in reports/allocation.md reproduces exactly from notebooks/04_allocation.ipynb (cells 818b4cc5 and d30e4cb4; PROSIT1_verify.py section C checks all 50 rows). Map drawn with src/viz.plot_district_choropleth from the same allocation, zoomed to the north, with the colour bar labelled as nets (figures/c2_allocation_map.png labels it as positives per 100k by mistake). The three pre-2018 districts later split (Garu-Tempane, Savelugu-Nanton, Bunkpurugu-Yunyoo) show their total on both successor areas.</a:t>
+              <a:t>Sources: the 50-district schedule in reports/allocation.md reproduces exactly from notebooks/04_allocation.ipynb (cells alloc_cd07 and alloc_cd09; scripts/verify_claims.py section C checks all 50 rows). Map drawn with src/viz.plot_district_choropleth from the same allocation, zoomed to the north. The three pre-2018 districts later split (Garu-Tempane, Savelugu-Nanton, Bunkpurugu-Yunyoo) show their total on both successor areas.</a:t>
             </a:r>
           </a:p>
         </p:txBody>
@@ -1481,7 +1481,7 @@
           </a:p>
           <a:p>
             <a:r>
-              <a:t>Sources: gains and losses from the schedule (PROSIT1_verify.py section E); cases-per-person ranks (PROSIT1_verify.py section C: Tamale lowest of 50; Nabdam 2.02 and Bole 2.52 times their region medians). Ghana's ITN strategy: PMI Ghana Malaria Operational Plan FY2017. Tamale Teaching Hospital as the only tertiary provider for the three northern regions: https://tth.gov.gh/about</a:t>
+              <a:t>Sources: gains and losses: notebooks/04_allocation.ipynb alloc_cd09; cases-per-person ranks: alloc_cd11 (Tamale lowest of 50, Nabdam highest of 50, Bole highest in its region). Ghana's ITN strategy: PMI Ghana Malaria Operational Plan FY2017. Tamale Teaching Hospital as the only tertiary provider for the three northern regions: https://tth.gov.gh/about</a:t>
             </a:r>
           </a:p>
         </p:txBody>
@@ -1556,7 +1556,7 @@
           </a:p>
           <a:p>
             <a:r>
-              <a:t>Sources: PROSIT1_verify.py sections C and E. Savannah and North East coverage from the survey (79.05% and 62.79%; published 79.1% and 62.6%, GDHS 2022 Table 12.1). Northern coverage bounds 61.4% and 74.0%: notebooks/02 cell cd39.</a:t>
+              <a:t>Sources: notebooks/04_allocation.ipynb cell alloc_cd13, which also prints the coverage it uses (Savannah 79.1%, North East 62.8%; published 79.1% and 62.6%, GDHS 2022 Table 12.1) and the Northern cluster-bootstrap bounds 61.4% and 74.0% (as in notebooks/02 cell cd39).</a:t>
             </a:r>
           </a:p>
         </p:txBody>
@@ -1631,7 +1631,7 @@
           </a:p>
           <a:p>
             <a:r>
-              <a:t>Sources: 207 of 260 districts: PROSIT1_verify.py (map join). Test positivity and cases per person by region: PROSIT1_verify.py section E. Spraying and chemoprevention counts: PROSIT1_verify.py section E, from data/raw/northern-ghana-districts-routine-data-2014-17.xlsx (these columns are not in ghana_district_cases.csv). Campaign rules: PMI Ghana Malaria Operational Plan FY2017. Privacy: git history holds no data files and no notebook outputs (checked 2026-09-22).</a:t>
+              <a:t>Sources: 207 of 260 districts: scripts/verify_claims.py (map join). Test positivity and cases per person by region: scripts/verify_claims.py section E. Spraying and chemoprevention counts: scripts/verify_claims.py section E, from data/raw/northern-ghana-districts-routine-data-2014-17.xlsx (these columns are not in ghana_district_cases.csv). Campaign rules: PMI Ghana Malaria Operational Plan FY2017. Privacy: git history holds no data files and no notebook outputs (checked 2026-09-22).</a:t>
             </a:r>
           </a:p>
         </p:txBody>
@@ -1706,7 +1706,7 @@
           </a:p>
           <a:p>
             <a:r>
-              <a:t>Sources: 11 districts and 3,740 nets: PROSIT1_verify.py section C. 79.1% and 62.8%: survey-weighted, PROSIT1_verify.py section D. 39 of 50 districts: PROSIT1_verify.py section E. Empty ITN intervals: notebooks/02 cell cd37. No district identifier or parasitaemia: notebooks/02 cell cd06.</a:t>
+              <a:t>Sources: 11 districts, 3,740 nets, 79.1% and 62.8%: notebooks/04_allocation.ipynb alloc_cd13. 39 of 50 districts: scripts/verify_claims.py section E. Empty ITN intervals: notebooks/02 cell cd37. No district identifier or parasitaemia: notebooks/02 cell cd06.</a:t>
             </a:r>
           </a:p>
         </p:txBody>
@@ -1926,7 +1926,7 @@
           </a:p>
           <a:p>
             <a:r>
-              <a:t>Sources: regional totals are sums of the 50-district schedule in reports/allocation.md, which reproduces exactly from notebooks/04_allocation.ipynb (cells 818b4cc5, d30e4cb4; PROSIT1_verify.py section C). Nets per 1,000 people: PROSIT1_verify.py section E. 7,720 nets moved under the region-effects model: PROSIT1_verify.py sections C and E.</a:t>
+              <a:t>Sources: notebooks/04_allocation.ipynb, cell alloc_cd07 (regional totals), alloc_cd11 (nets per 1,000 people) and alloc_cd13 (7,720 nets moved under the region-effects model).</a:t>
             </a:r>
           </a:p>
         </p:txBody>
@@ -2076,7 +2076,7 @@
           </a:p>
           <a:p>
             <a:r>
-              <a:t>Sources: 17,933 households and 618 clusters: data dictionary and notebooks/02 cell cd03. 71.0% vs 66.8% (claim C-01): notebooks/01_eda.ipynb cell eda_cd05. 50 districts on 53 polygons, 207 of 260 districts without data: PROSIT1_verify.py (map join, same logic as src/viz.py). Maps: figures/b1_data_availability.png and figures/b1_district_case_rate.png from notebook 01, with their titles trimmed.</a:t>
+              <a:t>Sources: 17,933 households and 618 clusters: data dictionary and notebooks/02 cell cd03. 71.0% vs 66.8% (claim C-01): notebooks/01_eda.ipynb cell eda_cd05. 50 districts on 53 polygons, 207 of 260 districts without data: scripts/verify_claims.py (map join, same logic as src/viz.py). Maps: figures/b1_data_availability.png and figures/b1_district_case_rate.png from notebook 01, with their titles trimmed.</a:t>
             </a:r>
           </a:p>
         </p:txBody>
@@ -2226,7 +2226,7 @@
           </a:p>
           <a:p>
             <a:r>
-              <a:t>Sources: notebooks/02_distributions.ipynb cells cd31 (582 households, 20 clusters), cd33 and cd34 (15.20 vs 7.17, 2.12 times, design effect 4.50), cd37 (published ITN intervals empty, 0 of 76), cd39 (67.69% vs 67.6%). Seed spread 4.46 to 5.39 and design-based 4.18: PROSIT1_verify.py section A. Rank 10th of 16: PROSIT1_verify.py section D. Figure: figures/a4_bootstrap_ci_comparison.png, title trimmed.</a:t>
+              <a:t>Sources: notebooks/02_distributions.ipynb cells cd31 (582 households, 20 clusters), cd33 and cd34 (15.20 vs 7.17, 2.12 times, design effect 4.50), cd37 (published ITN intervals empty, 0 of 76), cd39 (67.69% vs 67.6%). Seed spread 4.46 to 5.39 and design-based 4.18: scripts/verify_claims.py section A. Rank 10th of 16: scripts/verify_claims.py section D. Figure: figures/a4_bootstrap_ci_comparison.png, title trimmed.</a:t>
             </a:r>
           </a:p>
         </p:txBody>
@@ -2301,12 +2301,7 @@
           </a:p>
           <a:p>
             <a:r>
-              <a:t>Sources: notebooks/03_pipeline_leakage.ipynb cells leak_cd04 (87,144 vs 87,356), leak_cd06 (R² 1.0000 vs 0.2618), leak_cd08. 500-seed results and leave-one-region-out: PROSIT1_verify.py section B.</a:t>
-            </a:r>
-          </a:p>
-          <a:p>
-            <a:r>
-              <a:t>Before presenting: add the 500-seed loop and the leave-one-region-out split to notebook 03 so these numbers come from a notebook cell, and correct reports/leakage_audit.md (it still quotes R² 0.49 and a 45.5% spatial effect, neither of which reproduces).</a:t>
+              <a:t>Sources: notebooks/03_pipeline_leakage.ipynb cells leak_cd04 (87,144 vs 87,356), leak_cd06 (R² 1.0000 vs 0.2618), leak_cd08 (one seed), leak_cd12 (500 seeds) and leak_cd14 (whole region held out); the table itself is leak_cd10.</a:t>
             </a:r>
           </a:p>
         </p:txBody>
@@ -7204,7 +7199,7 @@
                           </a:solidFill>
                           <a:latin typeface="Candara"/>
                         </a:rPr>
-                        <a:t>Real mechanism, negligible here: 212 cases at seed 42, 43 on average over 500 seeds</a:t>
+                        <a:t>Real mechanism, negligible here: 212 cases at seed 42, 44 on average over 500 seeds</a:t>
                       </a:r>
                     </a:p>
                   </a:txBody>

--- a/reports/ITN_Allocation_Ashesi.pptx
+++ b/reports/ITN_Allocation_Ashesi.pptx
@@ -1777,6 +1777,11 @@
           <a:p>
             <a:r>
               <a:t>Say: Thank you. Every number in this deck has its source in the speaker notes; we are happy to take questions on any of them.</a:t>
+            </a:r>
+          </a:p>
+          <a:p>
+            <a:r>
+              <a:t>The footnote is the group's AI declaration. Each member's own AI-use declaration is part of their individual reflection.</a:t>
             </a:r>
           </a:p>
         </p:txBody>
@@ -10341,6 +10346,54 @@
           </a:p>
         </p:txBody>
       </p:sp>
+      <p:sp>
+        <p:nvSpPr>
+          <p:cNvPr id="4" name="TextBox 3"/>
+          <p:cNvSpPr txBox="1"/>
+          <p:nvPr/>
+        </p:nvSpPr>
+        <p:spPr>
+          <a:xfrm>
+            <a:off x="1069848" y="5806440"/>
+            <a:ext cx="10058400" cy="640080"/>
+          </a:xfrm>
+          <a:prstGeom prst="rect">
+            <a:avLst/>
+          </a:prstGeom>
+          <a:noFill/>
+        </p:spPr>
+        <p:txBody>
+          <a:bodyPr wrap="square" anchor="t" lIns="0" rIns="0" tIns="0" bIns="0">
+            <a:spAutoFit/>
+          </a:bodyPr>
+          <a:lstStyle/>
+          <a:p>
+            <a:pPr algn="ctr">
+              <a:spcAft>
+                <a:spcPts val="600"/>
+              </a:spcAft>
+            </a:pPr>
+            <a:r>
+              <a:rPr sz="1200" b="1" i="0">
+                <a:solidFill>
+                  <a:srgbClr val="FEBA5A"/>
+                </a:solidFill>
+                <a:latin typeface="Candara"/>
+              </a:rPr>
+              <a:t>AI declaration: </a:t>
+            </a:r>
+            <a:r>
+              <a:rPr sz="1200" b="0" i="0">
+                <a:solidFill>
+                  <a:srgbClr val="FFFFFF"/>
+                </a:solidFill>
+                <a:latin typeface="Candara"/>
+              </a:rPr>
+              <a:t>we used AI tools to help aggregate our information and to generate this presentation from our aggregated information. How AI was used is logged in the project's WORKLOG.md.</a:t>
+            </a:r>
+          </a:p>
+        </p:txBody>
+      </p:sp>
     </p:spTree>
   </p:cSld>
   <p:clrMapOvr>

--- a/reports/ITN_Allocation_Ashesi.pptx
+++ b/reports/ITN_Allocation_Ashesi.pptx
@@ -23,6 +23,7 @@
     <p:sldId id="278" r:id="rId31"/>
     <p:sldId id="279" r:id="rId32"/>
     <p:sldId id="280" r:id="rId33"/>
+    <p:sldId id="281" r:id="rId34"/>
   </p:sldIdLst>
   <p:sldSz cx="12192000" cy="6858000"/>
   <p:notesSz cx="6858000" cy="9144000"/>
@@ -1401,12 +1402,12 @@
           <a:lstStyle/>
           <a:p>
             <a:r>
-              <a:t>Say: This is the allocation our current rule produces.</a:t>
-            </a:r>
-          </a:p>
-          <a:p>
-            <a:r>
-              <a:t>Sources: the 50-district schedule in reports/allocation.md reproduces exactly from notebooks/04_allocation.ipynb (cells alloc_cd07 and alloc_cd09; scripts/verify_claims.py section C checks all 50 rows). Map drawn with src/viz.plot_district_choropleth from the same allocation, zoomed to the north. The three pre-2018 districts later split (Garu-Tempane, Savelugu-Nanton, Bunkpurugu-Yunyoo) show their total on both successor areas.</a:t>
+              <a:t>Say: The left map shows reported burden: confirmed cases per person over 2014-17. It is highest in Upper East and Upper West and lowest across Northern Region, where the test data point to under-testing. The right map shows how sure we are: the upper end of our 95% interval sits 20% above the estimate in Northern, 34% in Upper East and 16% in Upper West. It is one number per region because coverage is. Our rule uses that upper bound, so it leans towards the region we are least sure about.</a:t>
+            </a:r>
+          </a:p>
+          <a:p>
+            <a:r>
+              <a:t>Sources: cases per person and the upper-to-expected ratios 1.198, 1.342 and 1.162: notebooks/04_allocation.ipynb cell alloc_cd11. Both maps are drawn with src/viz.plot_district_choropleth from models.compute_allocation, zoomed to the north like the allocation map. The two-map layout (burden next to uncertainty) follows the course roadmap.</a:t>
             </a:r>
           </a:p>
         </p:txBody>
@@ -1476,12 +1477,12 @@
           <a:lstStyle/>
           <a:p>
             <a:r>
-              <a:t>Say: Against a case-proportional comparator, nets move from districts with high reported cases per person to populous districts. That follows from treating everyone in a region as equally at risk. Referral bias may exist, but our data do not show it: Bolgatanga ranks only 4th of 13 in Upper East on cases per person, and Nabdam, often named as a sending district, ranks 1st.</a:t>
-            </a:r>
-          </a:p>
-          <a:p>
-            <a:r>
-              <a:t>Sources: gains and losses: notebooks/04_allocation.ipynb alloc_cd09; cases-per-person ranks: alloc_cd11 (Tamale lowest of 50, Nabdam highest of 50, Bole highest in its region). Ghana's ITN strategy: PMI Ghana Malaria Operational Plan FY2017. Tamale Teaching Hospital as the only tertiary provider for the three northern regions: https://tth.gov.gh/about</a:t>
+              <a:t>Say: This is the allocation our current rule produces.</a:t>
+            </a:r>
+          </a:p>
+          <a:p>
+            <a:r>
+              <a:t>Sources: the 50-district schedule in reports/allocation.md reproduces exactly from notebooks/04_allocation.ipynb (cells alloc_cd07 and alloc_cd09; scripts/verify_claims.py section C checks all 50 rows). Map drawn with src/viz.plot_district_choropleth from the same allocation, zoomed to the north. The three pre-2018 districts later split (Garu-Tempane, Savelugu-Nanton, Bunkpurugu-Yunyoo) show their total on both successor areas.</a:t>
             </a:r>
           </a:p>
         </p:txBody>
@@ -1551,12 +1552,12 @@
           <a:lstStyle/>
           <a:p>
             <a:r>
-              <a:t>Say: This is where we volunteer our weak points. A region-effects model, which fits the data better, moves 7,720 nets. Correcting the coverage of 11 districts moves 3,740. Lowering Northern Region's coverage gives it fewer nets, not more, because of the positive coverage coefficient.</a:t>
-            </a:r>
-          </a:p>
-          <a:p>
-            <a:r>
-              <a:t>Sources: notebooks/04_allocation.ipynb cell alloc_cd13, which also prints the coverage it uses (Savannah 79.1%, North East 62.8%; published 79.1% and 62.6%, GDHS 2022 Table 12.1) and the Northern cluster-bootstrap bounds 61.4% and 74.0% (as in notebooks/02 cell cd39).</a:t>
+              <a:t>Say: Against a case-proportional comparator, nets move from districts with high reported cases per person to populous districts. That follows from treating everyone in a region as equally at risk. Referral bias may exist, but our data do not show it: Bolgatanga ranks only 4th of 13 in Upper East on cases per person, and Nabdam, often named as a sending district, ranks 1st.</a:t>
+            </a:r>
+          </a:p>
+          <a:p>
+            <a:r>
+              <a:t>Sources: gains and losses: notebooks/04_allocation.ipynb alloc_cd09; cases-per-person ranks: alloc_cd11 (Tamale lowest of 50, Nabdam highest of 50, Bole highest in its region). Ghana's ITN strategy: PMI Ghana Malaria Operational Plan FY2017. Tamale Teaching Hospital as the only tertiary provider for the three northern regions: https://tth.gov.gh/about</a:t>
             </a:r>
           </a:p>
         </p:txBody>
@@ -1626,12 +1627,12 @@
           <a:lstStyle/>
           <a:p>
             <a:r>
-              <a:t>Say: Equity is about who the rule helps and who it cannot see.</a:t>
-            </a:r>
-          </a:p>
-          <a:p>
-            <a:r>
-              <a:t>Sources: 207 of 260 districts: scripts/verify_claims.py (map join). Test positivity and cases per person by region: scripts/verify_claims.py section E. Spraying and chemoprevention counts: scripts/verify_claims.py section E, from data/raw/northern-ghana-districts-routine-data-2014-17.xlsx (these columns are not in ghana_district_cases.csv). Campaign rules: PMI Ghana Malaria Operational Plan FY2017. Privacy: git history holds no data files and no notebook outputs (checked 2026-09-22).</a:t>
+              <a:t>Say: This is where we volunteer our weak points. A region-effects model, which fits the data better, moves 7,720 nets. Correcting the coverage of 11 districts moves 3,740. Lowering Northern Region's coverage gives it fewer nets, not more, because of the positive coverage coefficient.</a:t>
+            </a:r>
+          </a:p>
+          <a:p>
+            <a:r>
+              <a:t>Sources: notebooks/04_allocation.ipynb cell alloc_cd13, which also prints the coverage it uses (Savannah 79.1%, North East 62.8%; published 79.1% and 62.6%, GDHS 2022 Table 12.1) and the Northern cluster-bootstrap bounds 61.4% and 74.0% (as in notebooks/02 cell cd39).</a:t>
             </a:r>
           </a:p>
         </p:txBody>
@@ -1701,12 +1702,12 @@
           <a:lstStyle/>
           <a:p>
             <a:r>
-              <a:t>Say: These are the limits we know about, and what we would do before any real distribution.</a:t>
-            </a:r>
-          </a:p>
-          <a:p>
-            <a:r>
-              <a:t>Sources: 11 districts, 3,740 nets, 79.1% and 62.8%: notebooks/04_allocation.ipynb alloc_cd13. 39 of 50 districts: scripts/verify_claims.py section E. Empty ITN intervals: notebooks/02 cell cd37. No district identifier or parasitaemia: notebooks/02 cell cd06.</a:t>
+              <a:t>Say: Equity is about who the rule helps and who it cannot see.</a:t>
+            </a:r>
+          </a:p>
+          <a:p>
+            <a:r>
+              <a:t>Sources: 207 of 260 districts: scripts/verify_claims.py (map join). Test positivity and cases per person by region: scripts/verify_claims.py section E. Spraying and chemoprevention counts: scripts/verify_claims.py section E, from data/raw/northern-ghana-districts-routine-data-2014-17.xlsx (these columns are not in ghana_district_cases.csv). Campaign rules: PMI Ghana Malaria Operational Plan FY2017. Privacy: git history holds no data files and no notebook outputs (checked 2026-09-22).</a:t>
             </a:r>
           </a:p>
         </p:txBody>
@@ -1776,6 +1777,81 @@
           <a:lstStyle/>
           <a:p>
             <a:r>
+              <a:t>Say: These are the limits we know about, and what we would do before any real distribution.</a:t>
+            </a:r>
+          </a:p>
+          <a:p>
+            <a:r>
+              <a:t>Sources: 11 districts, 3,740 nets, 79.1% and 62.8%: notebooks/04_allocation.ipynb alloc_cd13. 39 of 50 districts: scripts/verify_claims.py section E. Empty ITN intervals: notebooks/02 cell cd37. No district identifier or parasitaemia: notebooks/02 cell cd06.</a:t>
+            </a:r>
+          </a:p>
+        </p:txBody>
+      </p:sp>
+      <p:sp>
+        <p:nvSpPr>
+          <p:cNvPr id="4" name="Slide Number Placeholder 3"/>
+          <p:cNvSpPr>
+            <a:spLocks noGrp="1"/>
+          </p:cNvSpPr>
+          <p:nvPr>
+            <p:ph type="sldNum" idx="5" sz="quarter"/>
+          </p:nvPr>
+        </p:nvSpPr>
+        <p:spPr/>
+      </p:sp>
+    </p:spTree>
+  </p:cSld>
+  <p:clrMapOvr>
+    <a:masterClrMapping/>
+  </p:clrMapOvr>
+</p:notes>
+</file>
+
+<file path=ppt/notesSlides/notesSlide18.xml><?xml version="1.0" encoding="utf-8"?>
+<p:notes xmlns:a="http://schemas.openxmlformats.org/drawingml/2006/main" xmlns:p="http://schemas.openxmlformats.org/presentationml/2006/main" xmlns:r="http://schemas.openxmlformats.org/officeDocument/2006/relationships">
+  <p:cSld>
+    <p:spTree>
+      <p:nvGrpSpPr>
+        <p:cNvPr id="1" name=""/>
+        <p:cNvGrpSpPr/>
+        <p:nvPr/>
+      </p:nvGrpSpPr>
+      <p:grpSpPr>
+        <a:xfrm>
+          <a:off x="0" y="0"/>
+          <a:ext cx="0" cy="0"/>
+          <a:chOff x="0" y="0"/>
+          <a:chExt cx="0" cy="0"/>
+        </a:xfrm>
+      </p:grpSpPr>
+      <p:sp>
+        <p:nvSpPr>
+          <p:cNvPr id="2" name="Slide Image Placeholder 1"/>
+          <p:cNvSpPr>
+            <a:spLocks noGrp="1"/>
+          </p:cNvSpPr>
+          <p:nvPr>
+            <p:ph type="sldImg" idx="2"/>
+          </p:nvPr>
+        </p:nvSpPr>
+        <p:spPr/>
+      </p:sp>
+      <p:sp>
+        <p:nvSpPr>
+          <p:cNvPr id="3" name="Notes Placeholder 2"/>
+          <p:cNvSpPr>
+            <a:spLocks noGrp="1"/>
+          </p:cNvSpPr>
+          <p:nvPr>
+            <p:ph type="body" idx="3" sz="quarter"/>
+          </p:nvPr>
+        </p:nvSpPr>
+        <p:spPr/>
+        <p:txBody>
+          <a:bodyPr/>
+          <a:lstStyle/>
+          <a:p>
+            <a:r>
               <a:t>Say: Thank you. Every number in this deck has its source in the speaker notes; we are happy to take questions on any of them.</a:t>
             </a:r>
           </a:p>
@@ -1926,7 +2002,7 @@
           <a:lstStyle/>
           <a:p>
             <a:r>
-              <a:t>Say: Within each region the rule allocates in proportion to population; regional totals come from our negative binomial model. Be upfront that the regional split depends on the model.</a:t>
+              <a:t>Say: Within each region the rule allocates in proportion to population, because coverage is measured once per region. The regional totals come from our negative binomial model and are our base case; be upfront that the regional split depends on the model.</a:t>
             </a:r>
           </a:p>
           <a:p>
@@ -5671,8 +5747,8 @@
         </p:nvSpPr>
         <p:spPr>
           <a:xfrm>
-            <a:off x="566928" y="4800600"/>
-            <a:ext cx="11055096" cy="914400"/>
+            <a:off x="566928" y="4663440"/>
+            <a:ext cx="11055096" cy="1188720"/>
           </a:xfrm>
           <a:prstGeom prst="rect">
             <a:avLst/>
@@ -5691,7 +5767,32 @@
               </a:spcAft>
             </a:pPr>
             <a:r>
-              <a:rPr sz="1600" b="1" i="0">
+              <a:rPr sz="1500" b="1" i="0">
+                <a:solidFill>
+                  <a:srgbClr val="AB3D3F"/>
+                </a:solidFill>
+                <a:latin typeface="Candara"/>
+              </a:rPr>
+              <a:t>Why population within a region: </a:t>
+            </a:r>
+            <a:r>
+              <a:rPr sz="1500" b="0" i="0">
+                <a:solidFill>
+                  <a:srgbClr val="262626"/>
+                </a:solidFill>
+                <a:latin typeface="Candara"/>
+              </a:rPr>
+              <a:t>net coverage is measured once per region, so our data cannot tell two districts in the same region apart.</a:t>
+            </a:r>
+          </a:p>
+          <a:p>
+            <a:pPr algn="l">
+              <a:spcAft>
+                <a:spcPts val="600"/>
+              </a:spcAft>
+            </a:pPr>
+            <a:r>
+              <a:rPr sz="1500" b="1" i="0">
                 <a:solidFill>
                   <a:srgbClr val="AB3D3F"/>
                 </a:solidFill>
@@ -5700,13 +5801,13 @@
               <a:t>How sure we are: </a:t>
             </a:r>
             <a:r>
-              <a:rPr sz="1600" b="0" i="0">
+              <a:rPr sz="1500" b="0" i="0">
                 <a:solidFill>
                   <a:srgbClr val="262626"/>
                 </a:solidFill>
                 <a:latin typeface="Candara"/>
               </a:rPr>
-              <a:t>district shares within a region are robust; the regional split is not. A better-fitting model moves 7,720 nets between regions (slide 12).</a:t>
+              <a:t>the shares within each region are robust. The regional totals are our base case: a better-fitting model moves 7,720 nets between regions (slide 13).</a:t>
             </a:r>
           </a:p>
         </p:txBody>
@@ -5971,7 +6072,7 @@
                 </a:solidFill>
                 <a:latin typeface="Candara"/>
               </a:rPr>
-              <a:t>Different ages and tests, so this is not like for like. The point is the spread: one regional figure can hide districts at very high risk. That is why we work at district level wherever the data allow.</a:t>
+              <a:t>Different ages and tests, so this is not like for like. The point is the spread: one regional figure can hide districts at very high risk. That is why we wanted district-level targeting; the next slide shows how far our data allow it.</a:t>
             </a:r>
           </a:p>
         </p:txBody>
@@ -6173,7 +6274,7 @@
         <p:spPr>
           <a:xfrm>
             <a:off x="7635240" y="1417320"/>
-            <a:ext cx="3986784" cy="3611880"/>
+            <a:ext cx="3986784" cy="4343400"/>
           </a:xfrm>
           <a:prstGeom prst="roundRect">
             <a:avLst>
@@ -6208,7 +6309,7 @@
           <a:p>
             <a:pPr algn="l">
               <a:spcAft>
-                <a:spcPts val="1000"/>
+                <a:spcPts val="800"/>
               </a:spcAft>
             </a:pPr>
             <a:r>
@@ -6224,7 +6325,7 @@
           <a:p>
             <a:pPr algn="l" marL="219456" indent="-219456">
               <a:spcAft>
-                <a:spcPts val="1000"/>
+                <a:spcPts val="800"/>
               </a:spcAft>
               <a:buClr>
                 <a:srgbClr val="AB3D3F"/>
@@ -6233,7 +6334,7 @@
               <a:buChar char="•"/>
             </a:pPr>
             <a:r>
-              <a:rPr sz="1600" b="1" i="0">
+              <a:rPr sz="1500" b="1" i="0">
                 <a:solidFill>
                   <a:srgbClr val="262626"/>
                 </a:solidFill>
@@ -6242,7 +6343,7 @@
               <a:t>Weights matter. </a:t>
             </a:r>
             <a:r>
-              <a:rPr sz="1600" b="0" i="0">
+              <a:rPr sz="1500" b="0" i="0">
                 <a:solidFill>
                   <a:srgbClr val="262626"/>
                 </a:solidFill>
@@ -6254,7 +6355,7 @@
           <a:p>
             <a:pPr algn="l" marL="219456" indent="-219456">
               <a:spcAft>
-                <a:spcPts val="1000"/>
+                <a:spcPts val="800"/>
               </a:spcAft>
               <a:buClr>
                 <a:srgbClr val="AB3D3F"/>
@@ -6263,7 +6364,7 @@
               <a:buChar char="•"/>
             </a:pPr>
             <a:r>
-              <a:rPr sz="1600" b="1" i="0">
+              <a:rPr sz="1500" b="1" i="0">
                 <a:solidFill>
                   <a:srgbClr val="262626"/>
                 </a:solidFill>
@@ -6272,7 +6373,7 @@
               <a:t>Different years. </a:t>
             </a:r>
             <a:r>
-              <a:rPr sz="1600" b="0" i="0">
+              <a:rPr sz="1500" b="0" i="0">
                 <a:solidFill>
                   <a:srgbClr val="262626"/>
                 </a:solidFill>
@@ -6284,7 +6385,7 @@
           <a:p>
             <a:pPr algn="l" marL="219456" indent="-219456">
               <a:spcAft>
-                <a:spcPts val="1000"/>
+                <a:spcPts val="800"/>
               </a:spcAft>
               <a:buClr>
                 <a:srgbClr val="AB3D3F"/>
@@ -6293,7 +6394,7 @@
               <a:buChar char="•"/>
             </a:pPr>
             <a:r>
-              <a:rPr sz="1600" b="1" i="0">
+              <a:rPr sz="1500" b="1" i="0">
                 <a:solidFill>
                   <a:srgbClr val="262626"/>
                 </a:solidFill>
@@ -6302,7 +6403,7 @@
               <a:t>Coarse coverage. </a:t>
             </a:r>
             <a:r>
-              <a:rPr sz="1600" b="0" i="0">
+              <a:rPr sz="1500" b="0" i="0">
                 <a:solidFill>
                   <a:srgbClr val="262626"/>
                 </a:solidFill>
@@ -6314,7 +6415,7 @@
           <a:p>
             <a:pPr algn="l" marL="219456" indent="-219456">
               <a:spcAft>
-                <a:spcPts val="600"/>
+                <a:spcPts val="1200"/>
               </a:spcAft>
               <a:buClr>
                 <a:srgbClr val="AB3D3F"/>
@@ -6323,7 +6424,7 @@
               <a:buChar char="•"/>
             </a:pPr>
             <a:r>
-              <a:rPr sz="1600" b="1" i="0">
+              <a:rPr sz="1500" b="1" i="0">
                 <a:solidFill>
                   <a:srgbClr val="262626"/>
                 </a:solidFill>
@@ -6332,13 +6433,38 @@
               <a:t>No district survey data. </a:t>
             </a:r>
             <a:r>
-              <a:rPr sz="1600" b="0" i="0">
+              <a:rPr sz="1500" b="0" i="0">
                 <a:solidFill>
                   <a:srgbClr val="262626"/>
                 </a:solidFill>
                 <a:latin typeface="Candara"/>
               </a:rPr>
               <a:t>The survey can rank regions, not districts.</a:t>
+            </a:r>
+          </a:p>
+          <a:p>
+            <a:pPr algn="l">
+              <a:spcAft>
+                <a:spcPts val="600"/>
+              </a:spcAft>
+            </a:pPr>
+            <a:r>
+              <a:rPr sz="1500" b="1" i="0">
+                <a:solidFill>
+                  <a:srgbClr val="AB3D3F"/>
+                </a:solidFill>
+                <a:latin typeface="Candara"/>
+              </a:rPr>
+              <a:t>So: </a:t>
+            </a:r>
+            <a:r>
+              <a:rPr sz="1500" b="0" i="0">
+                <a:solidFill>
+                  <a:srgbClr val="262626"/>
+                </a:solidFill>
+                <a:latin typeface="Candara"/>
+              </a:rPr>
+              <a:t>our rule, expected cases × the share of households without a net, can separate regions but not districts within a region.</a:t>
             </a:r>
           </a:p>
         </p:txBody>
@@ -7796,7 +7922,7 @@
           <a:lstStyle/>
           <a:p>
             <a:r>
-              <a:t>What our allocation rule actually does</a:t>
+              <a:t>What our rule does with our data</a:t>
             </a:r>
           </a:p>
         </p:txBody>
@@ -7987,7 +8113,7 @@
                 </a:solidFill>
                 <a:latin typeface="Candara"/>
               </a:rPr>
-              <a:t>Nets per 1,000 people by region, with the share of households owning a net (DHS 2022). Allocation rises with coverage, the opposite of the intent.</a:t>
+              <a:t>Nets per 1,000 people by region, with the share of households owning a net (DHS 2022). Upper East has the highest coverage and the most nets per person: the coefficient reflects region, not the effect of nets, so the regional split is uncertain (slide 13).</a:t>
             </a:r>
           </a:p>
         </p:txBody>
@@ -8001,6 +8127,243 @@
 </file>
 
 <file path=ppt/slides/slide19.xml><?xml version="1.0" encoding="utf-8"?>
+<p:sld xmlns:a="http://schemas.openxmlformats.org/drawingml/2006/main" xmlns:p="http://schemas.openxmlformats.org/presentationml/2006/main" xmlns:r="http://schemas.openxmlformats.org/officeDocument/2006/relationships">
+  <p:cSld>
+    <p:spTree>
+      <p:nvGrpSpPr>
+        <p:cNvPr id="1" name=""/>
+        <p:cNvGrpSpPr/>
+        <p:nvPr/>
+      </p:nvGrpSpPr>
+      <p:grpSpPr/>
+      <p:sp>
+        <p:nvSpPr>
+          <p:cNvPr id="2" name="Text Placeholder 1"/>
+          <p:cNvSpPr>
+            <a:spLocks noGrp="1"/>
+          </p:cNvSpPr>
+          <p:nvPr>
+            <p:ph type="body" idx="11" sz="quarter"/>
+          </p:nvPr>
+        </p:nvSpPr>
+        <p:spPr>
+          <a:xfrm>
+            <a:off x="571500" y="571500"/>
+            <a:ext cx="11055096" cy="737700"/>
+          </a:xfrm>
+        </p:spPr>
+        <p:txBody>
+          <a:bodyPr/>
+          <a:lstStyle/>
+          <a:p>
+            <a:r>
+              <a:rPr sz="3000"/>
+              <a:t>Where the need looks highest, and how sure we are</a:t>
+            </a:r>
+          </a:p>
+        </p:txBody>
+      </p:sp>
+      <p:pic>
+        <p:nvPicPr>
+          <p:cNvPr id="3" name="Picture 2" descr="burden_map.png"/>
+          <p:cNvPicPr>
+            <a:picLocks noChangeAspect="1"/>
+          </p:cNvPicPr>
+          <p:nvPr/>
+        </p:nvPicPr>
+        <p:blipFill>
+          <a:blip r:embed="rId2"/>
+          <a:stretch>
+            <a:fillRect/>
+          </a:stretch>
+        </p:blipFill>
+        <p:spPr>
+          <a:xfrm>
+            <a:off x="1524535" y="1325880"/>
+            <a:ext cx="3479744" cy="3474720"/>
+          </a:xfrm>
+          <a:prstGeom prst="rect">
+            <a:avLst/>
+          </a:prstGeom>
+        </p:spPr>
+      </p:pic>
+      <p:sp>
+        <p:nvSpPr>
+          <p:cNvPr id="4" name="TextBox 3"/>
+          <p:cNvSpPr txBox="1"/>
+          <p:nvPr/>
+        </p:nvSpPr>
+        <p:spPr>
+          <a:xfrm>
+            <a:off x="566928" y="4892040"/>
+            <a:ext cx="5394960" cy="548640"/>
+          </a:xfrm>
+          <a:prstGeom prst="rect">
+            <a:avLst/>
+          </a:prstGeom>
+          <a:noFill/>
+        </p:spPr>
+        <p:txBody>
+          <a:bodyPr wrap="square" anchor="t" lIns="0" rIns="0" tIns="0" bIns="0">
+            <a:spAutoFit/>
+          </a:bodyPr>
+          <a:lstStyle/>
+          <a:p>
+            <a:pPr algn="l">
+              <a:spcAft>
+                <a:spcPts val="600"/>
+              </a:spcAft>
+            </a:pPr>
+            <a:r>
+              <a:rPr sz="1200" b="1" i="0">
+                <a:solidFill>
+                  <a:srgbClr val="262626"/>
+                </a:solidFill>
+                <a:latin typeface="Candara"/>
+              </a:rPr>
+              <a:t>Reported burden. </a:t>
+            </a:r>
+            <a:r>
+              <a:rPr sz="1200" b="0" i="0">
+                <a:solidFill>
+                  <a:srgbClr val="262626"/>
+                </a:solidFill>
+                <a:latin typeface="Candara"/>
+              </a:rPr>
+              <a:t>Confirmed cases per person, 2014-17: highest in Upper East and Upper West, lowest across Northern Region. Grey areas have no case data of their own.</a:t>
+            </a:r>
+          </a:p>
+        </p:txBody>
+      </p:sp>
+      <p:pic>
+        <p:nvPicPr>
+          <p:cNvPr id="5" name="Picture 4" descr="uncertainty_map.png"/>
+          <p:cNvPicPr>
+            <a:picLocks noChangeAspect="1"/>
+          </p:cNvPicPr>
+          <p:nvPr/>
+        </p:nvPicPr>
+        <p:blipFill>
+          <a:blip r:embed="rId3"/>
+          <a:stretch>
+            <a:fillRect/>
+          </a:stretch>
+        </p:blipFill>
+        <p:spPr>
+          <a:xfrm>
+            <a:off x="7184671" y="1325880"/>
+            <a:ext cx="3479744" cy="3474720"/>
+          </a:xfrm>
+          <a:prstGeom prst="rect">
+            <a:avLst/>
+          </a:prstGeom>
+        </p:spPr>
+      </p:pic>
+      <p:sp>
+        <p:nvSpPr>
+          <p:cNvPr id="6" name="TextBox 5"/>
+          <p:cNvSpPr txBox="1"/>
+          <p:nvPr/>
+        </p:nvSpPr>
+        <p:spPr>
+          <a:xfrm>
+            <a:off x="6227064" y="4892040"/>
+            <a:ext cx="5394960" cy="548640"/>
+          </a:xfrm>
+          <a:prstGeom prst="rect">
+            <a:avLst/>
+          </a:prstGeom>
+          <a:noFill/>
+        </p:spPr>
+        <p:txBody>
+          <a:bodyPr wrap="square" anchor="t" lIns="0" rIns="0" tIns="0" bIns="0">
+            <a:spAutoFit/>
+          </a:bodyPr>
+          <a:lstStyle/>
+          <a:p>
+            <a:pPr algn="l">
+              <a:spcAft>
+                <a:spcPts val="600"/>
+              </a:spcAft>
+            </a:pPr>
+            <a:r>
+              <a:rPr sz="1200" b="1" i="0">
+                <a:solidFill>
+                  <a:srgbClr val="262626"/>
+                </a:solidFill>
+                <a:latin typeface="Candara"/>
+              </a:rPr>
+              <a:t>How sure we are. </a:t>
+            </a:r>
+            <a:r>
+              <a:rPr sz="1200" b="0" i="0">
+                <a:solidFill>
+                  <a:srgbClr val="262626"/>
+                </a:solidFill>
+                <a:latin typeface="Candara"/>
+              </a:rPr>
+              <a:t>Our upper bound sits 20% above the estimate in Northern, 34% in Upper East and 16% in Upper West: one number per region, because coverage is.</a:t>
+            </a:r>
+          </a:p>
+        </p:txBody>
+      </p:sp>
+      <p:sp>
+        <p:nvSpPr>
+          <p:cNvPr id="7" name="TextBox 6"/>
+          <p:cNvSpPr txBox="1"/>
+          <p:nvPr/>
+        </p:nvSpPr>
+        <p:spPr>
+          <a:xfrm>
+            <a:off x="566928" y="5504688"/>
+            <a:ext cx="11055096" cy="365760"/>
+          </a:xfrm>
+          <a:prstGeom prst="rect">
+            <a:avLst/>
+          </a:prstGeom>
+          <a:noFill/>
+        </p:spPr>
+        <p:txBody>
+          <a:bodyPr wrap="square" anchor="t" lIns="0" rIns="0" tIns="0" bIns="0">
+            <a:spAutoFit/>
+          </a:bodyPr>
+          <a:lstStyle/>
+          <a:p>
+            <a:pPr algn="l">
+              <a:spcAft>
+                <a:spcPts val="600"/>
+              </a:spcAft>
+            </a:pPr>
+            <a:r>
+              <a:rPr sz="1400" b="1" i="0">
+                <a:solidFill>
+                  <a:srgbClr val="AB3D3F"/>
+                </a:solidFill>
+                <a:latin typeface="Candara"/>
+              </a:rPr>
+              <a:t>Takeaway: </a:t>
+            </a:r>
+            <a:r>
+              <a:rPr sz="1400" b="0" i="0">
+                <a:solidFill>
+                  <a:srgbClr val="262626"/>
+                </a:solidFill>
+                <a:latin typeface="Candara"/>
+              </a:rPr>
+              <a:t>the rule uses the upper bound, so it leans towards the region we are least sure about.</a:t>
+            </a:r>
+          </a:p>
+        </p:txBody>
+      </p:sp>
+    </p:spTree>
+  </p:cSld>
+  <p:clrMapOvr>
+    <a:masterClrMapping/>
+  </p:clrMapOvr>
+</p:sld>
+</file>
+
+<file path=ppt/slides/slide20.xml><?xml version="1.0" encoding="utf-8"?>
 <p:sld xmlns:a="http://schemas.openxmlformats.org/drawingml/2006/main" xmlns:p="http://schemas.openxmlformats.org/presentationml/2006/main" xmlns:r="http://schemas.openxmlformats.org/officeDocument/2006/relationships">
   <p:cSld>
     <p:spTree>
@@ -8227,7 +8590,7 @@
 </p:sld>
 </file>
 
-<file path=ppt/slides/slide20.xml><?xml version="1.0" encoding="utf-8"?>
+<file path=ppt/slides/slide21.xml><?xml version="1.0" encoding="utf-8"?>
 <p:sld xmlns:a="http://schemas.openxmlformats.org/drawingml/2006/main" xmlns:p="http://schemas.openxmlformats.org/presentationml/2006/main" xmlns:r="http://schemas.openxmlformats.org/officeDocument/2006/relationships">
   <p:cSld>
     <p:spTree>
@@ -8456,7 +8819,7 @@
 </p:sld>
 </file>
 
-<file path=ppt/slides/slide21.xml><?xml version="1.0" encoding="utf-8"?>
+<file path=ppt/slides/slide22.xml><?xml version="1.0" encoding="utf-8"?>
 <p:sld xmlns:a="http://schemas.openxmlformats.org/drawingml/2006/main" xmlns:p="http://schemas.openxmlformats.org/presentationml/2006/main" xmlns:r="http://schemas.openxmlformats.org/officeDocument/2006/relationships">
   <p:cSld>
     <p:spTree>
@@ -9536,7 +9899,7 @@
 </p:sld>
 </file>
 
-<file path=ppt/slides/slide22.xml><?xml version="1.0" encoding="utf-8"?>
+<file path=ppt/slides/slide23.xml><?xml version="1.0" encoding="utf-8"?>
 <p:sld xmlns:a="http://schemas.openxmlformats.org/drawingml/2006/main" xmlns:p="http://schemas.openxmlformats.org/presentationml/2006/main" xmlns:r="http://schemas.openxmlformats.org/officeDocument/2006/relationships">
   <p:cSld>
     <p:spTree>
@@ -9945,7 +10308,7 @@
 </p:sld>
 </file>
 
-<file path=ppt/slides/slide23.xml><?xml version="1.0" encoding="utf-8"?>
+<file path=ppt/slides/slide24.xml><?xml version="1.0" encoding="utf-8"?>
 <p:sld xmlns:a="http://schemas.openxmlformats.org/drawingml/2006/main" xmlns:p="http://schemas.openxmlformats.org/presentationml/2006/main" xmlns:r="http://schemas.openxmlformats.org/officeDocument/2006/relationships">
   <p:cSld>
     <p:spTree>
@@ -10275,7 +10638,7 @@
 </p:sld>
 </file>
 
-<file path=ppt/slides/slide24.xml><?xml version="1.0" encoding="utf-8"?>
+<file path=ppt/slides/slide25.xml><?xml version="1.0" encoding="utf-8"?>
 <p:sld xmlns:a="http://schemas.openxmlformats.org/drawingml/2006/main" xmlns:p="http://schemas.openxmlformats.org/presentationml/2006/main" xmlns:r="http://schemas.openxmlformats.org/officeDocument/2006/relationships">
   <p:cSld>
     <p:spTree>

--- a/reports/ITN_Allocation_Ashesi.pptx
+++ b/reports/ITN_Allocation_Ashesi.pptx
@@ -1327,12 +1327,17 @@
           <a:lstStyle/>
           <a:p>
             <a:r>
-              <a:t>Say: Because coverage is a single regional number, the model can only tell regions apart, so within a region every district gets the same nets per person. The coverage coefficient is positive because nets went where malaria was worst, and coverage is from 2022 while cases are from 2014-17, so it cannot be read as a protective effect.</a:t>
-            </a:r>
-          </a:p>
-          <a:p>
-            <a:r>
-              <a:t>Sources: notebooks/04_allocation.ipynb cell alloc_cd11 (coefficient +0.0823, p = 1.7e-07; upper-to-expected ratios 1.198, 1.342, 1.162; nets per 1,000 people). Coverage values: notebooks/02 cell cd06 and scripts/verify_claims.py section D.</a:t>
+              <a:t>Say: The slide writes the rule as math; say it in words. Line one: expected confirmed cases grow in proportion to population and depend on the region's net coverage (a negative binomial model with a population offset). Line two: each district's weight is the cautious upper end of its expected cases times the share of homes without a net. Line three: Hamilton's largest-remainder method turns the weights into exactly 50,000 whole nets. Then: because coverage is one number per region, inside a region nets follow population; the upper bound adds one multiplier per region; and the coverage coefficient is positive because nets went where malaria was worst, so the split between regions is uncertain.</a:t>
+            </a:r>
+          </a:p>
+          <a:p>
+            <a:r>
+              <a:t>Symbols: i = district (the unit); mu_i = expected confirmed cases, 2014-17 (the target); w_i = allocation weight (the metric); pop_i = population; c_i = % of homes owning a net in i's region (DHS 2022); U_i = upper 95% confidence bound for mu_i; q_i = exact share; A_i = nets.</a:t>
+            </a:r>
+          </a:p>
+          <a:p>
+            <a:r>
+              <a:t>Sources: notebooks/04_allocation.ipynb cells alloc_cd05 (alpha 0.2677) and alloc_cd11 (beta_1 = +0.0823, p = 1.7e-07; U_i / mu_i = 1.198, 1.342, 1.162; nets per 1,000 people); src/models.py compute_allocation and hamilton. Coverage values: notebooks/02 cell cd06 and scripts/verify_claims.py section D.</a:t>
             </a:r>
           </a:p>
         </p:txBody>
@@ -7935,8 +7940,8 @@
         </p:nvSpPr>
         <p:spPr>
           <a:xfrm>
-            <a:off x="566928" y="1417320"/>
-            <a:ext cx="5486400" cy="4389120"/>
+            <a:off x="566928" y="1325880"/>
+            <a:ext cx="6263640" cy="4572000"/>
           </a:xfrm>
           <a:prstGeom prst="rect">
             <a:avLst/>
@@ -7955,29 +7960,518 @@
               </a:spcAft>
             </a:pPr>
             <a:r>
-              <a:rPr sz="1800" b="1" i="0">
+              <a:rPr sz="1700" b="1" i="0">
                 <a:solidFill>
                   <a:srgbClr val="AB3D3F"/>
                 </a:solidFill>
                 <a:latin typeface="Candara"/>
               </a:rPr>
-              <a:t>The rule</a:t>
+              <a:t>The rule, for each district i</a:t>
             </a:r>
           </a:p>
           <a:p>
             <a:pPr algn="l">
               <a:spcAft>
-                <a:spcPts val="1400"/>
+                <a:spcPts val="200"/>
               </a:spcAft>
             </a:pPr>
             <a:r>
-              <a:rPr sz="1400" b="0" i="0">
+              <a:rPr sz="1800" b="0" i="0">
                 <a:solidFill>
                   <a:srgbClr val="262626"/>
                 </a:solidFill>
-                <a:latin typeface="Candara"/>
-              </a:rPr>
-              <a:t>Weight = upper 95% bound of expected cases (negative binomial with a population offset) × (1 - net coverage). Hamilton's largest-remainder method turns the weights into exactly 50,000 whole nets.</a:t>
+                <a:latin typeface="Cambria Math"/>
+              </a:rPr>
+              <a:t>log μ</a:t>
+            </a:r>
+            <a:r>
+              <a:rPr baseline="-25000" sz="1800" b="0" i="0">
+                <a:solidFill>
+                  <a:srgbClr val="262626"/>
+                </a:solidFill>
+                <a:latin typeface="Cambria Math"/>
+              </a:rPr>
+              <a:t>i</a:t>
+            </a:r>
+            <a:r>
+              <a:rPr sz="1800" b="0" i="0">
+                <a:solidFill>
+                  <a:srgbClr val="262626"/>
+                </a:solidFill>
+                <a:latin typeface="Cambria Math"/>
+              </a:rPr>
+              <a:t> = log pop</a:t>
+            </a:r>
+            <a:r>
+              <a:rPr baseline="-25000" sz="1800" b="0" i="0">
+                <a:solidFill>
+                  <a:srgbClr val="262626"/>
+                </a:solidFill>
+                <a:latin typeface="Cambria Math"/>
+              </a:rPr>
+              <a:t>i</a:t>
+            </a:r>
+            <a:r>
+              <a:rPr sz="1800" b="0" i="0">
+                <a:solidFill>
+                  <a:srgbClr val="262626"/>
+                </a:solidFill>
+                <a:latin typeface="Cambria Math"/>
+              </a:rPr>
+              <a:t> + β</a:t>
+            </a:r>
+            <a:r>
+              <a:rPr baseline="-25000" sz="1800" b="0" i="0">
+                <a:solidFill>
+                  <a:srgbClr val="262626"/>
+                </a:solidFill>
+                <a:latin typeface="Cambria Math"/>
+              </a:rPr>
+              <a:t>0</a:t>
+            </a:r>
+            <a:r>
+              <a:rPr sz="1800" b="0" i="0">
+                <a:solidFill>
+                  <a:srgbClr val="262626"/>
+                </a:solidFill>
+                <a:latin typeface="Cambria Math"/>
+              </a:rPr>
+              <a:t> + β</a:t>
+            </a:r>
+            <a:r>
+              <a:rPr baseline="-25000" sz="1800" b="0" i="0">
+                <a:solidFill>
+                  <a:srgbClr val="262626"/>
+                </a:solidFill>
+                <a:latin typeface="Cambria Math"/>
+              </a:rPr>
+              <a:t>1</a:t>
+            </a:r>
+            <a:r>
+              <a:rPr sz="1800" b="0" i="0">
+                <a:solidFill>
+                  <a:srgbClr val="262626"/>
+                </a:solidFill>
+                <a:latin typeface="Cambria Math"/>
+              </a:rPr>
+              <a:t> c</a:t>
+            </a:r>
+            <a:r>
+              <a:rPr baseline="-25000" sz="1800" b="0" i="0">
+                <a:solidFill>
+                  <a:srgbClr val="262626"/>
+                </a:solidFill>
+                <a:latin typeface="Cambria Math"/>
+              </a:rPr>
+              <a:t>i</a:t>
+            </a:r>
+          </a:p>
+          <a:p>
+            <a:pPr algn="l">
+              <a:spcAft>
+                <a:spcPts val="200"/>
+              </a:spcAft>
+            </a:pPr>
+            <a:r>
+              <a:rPr sz="1800" b="0" i="0">
+                <a:solidFill>
+                  <a:srgbClr val="262626"/>
+                </a:solidFill>
+                <a:latin typeface="Cambria Math"/>
+              </a:rPr>
+              <a:t>w</a:t>
+            </a:r>
+            <a:r>
+              <a:rPr baseline="-25000" sz="1800" b="0" i="0">
+                <a:solidFill>
+                  <a:srgbClr val="262626"/>
+                </a:solidFill>
+                <a:latin typeface="Cambria Math"/>
+              </a:rPr>
+              <a:t>i</a:t>
+            </a:r>
+            <a:r>
+              <a:rPr sz="1800" b="0" i="0">
+                <a:solidFill>
+                  <a:srgbClr val="262626"/>
+                </a:solidFill>
+                <a:latin typeface="Cambria Math"/>
+              </a:rPr>
+              <a:t> = U</a:t>
+            </a:r>
+            <a:r>
+              <a:rPr baseline="-25000" sz="1800" b="0" i="0">
+                <a:solidFill>
+                  <a:srgbClr val="262626"/>
+                </a:solidFill>
+                <a:latin typeface="Cambria Math"/>
+              </a:rPr>
+              <a:t>i</a:t>
+            </a:r>
+            <a:r>
+              <a:rPr sz="1800" b="0" i="0">
+                <a:solidFill>
+                  <a:srgbClr val="262626"/>
+                </a:solidFill>
+                <a:latin typeface="Cambria Math"/>
+              </a:rPr>
+              <a:t> × (1 − c</a:t>
+            </a:r>
+            <a:r>
+              <a:rPr baseline="-25000" sz="1800" b="0" i="0">
+                <a:solidFill>
+                  <a:srgbClr val="262626"/>
+                </a:solidFill>
+                <a:latin typeface="Cambria Math"/>
+              </a:rPr>
+              <a:t>i</a:t>
+            </a:r>
+            <a:r>
+              <a:rPr sz="1800" b="0" i="0">
+                <a:solidFill>
+                  <a:srgbClr val="262626"/>
+                </a:solidFill>
+                <a:latin typeface="Cambria Math"/>
+              </a:rPr>
+              <a:t> / 100)</a:t>
+            </a:r>
+          </a:p>
+          <a:p>
+            <a:pPr algn="l">
+              <a:spcAft>
+                <a:spcPts val="600"/>
+              </a:spcAft>
+            </a:pPr>
+            <a:r>
+              <a:rPr sz="1500" b="0" i="0">
+                <a:solidFill>
+                  <a:srgbClr val="262626"/>
+                </a:solidFill>
+                <a:latin typeface="Cambria Math"/>
+              </a:rPr>
+              <a:t>q</a:t>
+            </a:r>
+            <a:r>
+              <a:rPr baseline="-25000" sz="1500" b="0" i="0">
+                <a:solidFill>
+                  <a:srgbClr val="262626"/>
+                </a:solidFill>
+                <a:latin typeface="Cambria Math"/>
+              </a:rPr>
+              <a:t>i</a:t>
+            </a:r>
+            <a:r>
+              <a:rPr sz="1500" b="0" i="0">
+                <a:solidFill>
+                  <a:srgbClr val="262626"/>
+                </a:solidFill>
+                <a:latin typeface="Cambria Math"/>
+              </a:rPr>
+              <a:t> = 50,000 × w</a:t>
+            </a:r>
+            <a:r>
+              <a:rPr baseline="-25000" sz="1500" b="0" i="0">
+                <a:solidFill>
+                  <a:srgbClr val="262626"/>
+                </a:solidFill>
+                <a:latin typeface="Cambria Math"/>
+              </a:rPr>
+              <a:t>i</a:t>
+            </a:r>
+            <a:r>
+              <a:rPr sz="1500" b="0" i="0">
+                <a:solidFill>
+                  <a:srgbClr val="262626"/>
+                </a:solidFill>
+                <a:latin typeface="Cambria Math"/>
+              </a:rPr>
+              <a:t> / Σ</a:t>
+            </a:r>
+            <a:r>
+              <a:rPr baseline="-25000" sz="1500" b="0" i="0">
+                <a:solidFill>
+                  <a:srgbClr val="262626"/>
+                </a:solidFill>
+                <a:latin typeface="Cambria Math"/>
+              </a:rPr>
+              <a:t>j</a:t>
+            </a:r>
+            <a:r>
+              <a:rPr sz="1500" b="0" i="0">
+                <a:solidFill>
+                  <a:srgbClr val="262626"/>
+                </a:solidFill>
+                <a:latin typeface="Cambria Math"/>
+              </a:rPr>
+              <a:t> w</a:t>
+            </a:r>
+            <a:r>
+              <a:rPr baseline="-25000" sz="1500" b="0" i="0">
+                <a:solidFill>
+                  <a:srgbClr val="262626"/>
+                </a:solidFill>
+                <a:latin typeface="Cambria Math"/>
+              </a:rPr>
+              <a:t>j</a:t>
+            </a:r>
+            <a:r>
+              <a:rPr sz="1500" b="0" i="0">
+                <a:solidFill>
+                  <a:srgbClr val="262626"/>
+                </a:solidFill>
+                <a:latin typeface="Cambria Math"/>
+              </a:rPr>
+              <a:t>,   A</a:t>
+            </a:r>
+            <a:r>
+              <a:rPr baseline="-25000" sz="1500" b="0" i="0">
+                <a:solidFill>
+                  <a:srgbClr val="262626"/>
+                </a:solidFill>
+                <a:latin typeface="Cambria Math"/>
+              </a:rPr>
+              <a:t>i</a:t>
+            </a:r>
+            <a:r>
+              <a:rPr sz="1500" b="0" i="0">
+                <a:solidFill>
+                  <a:srgbClr val="262626"/>
+                </a:solidFill>
+                <a:latin typeface="Cambria Math"/>
+              </a:rPr>
+              <a:t> = ⌊q</a:t>
+            </a:r>
+            <a:r>
+              <a:rPr baseline="-25000" sz="1500" b="0" i="0">
+                <a:solidFill>
+                  <a:srgbClr val="262626"/>
+                </a:solidFill>
+                <a:latin typeface="Cambria Math"/>
+              </a:rPr>
+              <a:t>i</a:t>
+            </a:r>
+            <a:r>
+              <a:rPr sz="1500" b="0" i="0">
+                <a:solidFill>
+                  <a:srgbClr val="262626"/>
+                </a:solidFill>
+                <a:latin typeface="Cambria Math"/>
+              </a:rPr>
+              <a:t>⌋ or ⌊q</a:t>
+            </a:r>
+            <a:r>
+              <a:rPr baseline="-25000" sz="1500" b="0" i="0">
+                <a:solidFill>
+                  <a:srgbClr val="262626"/>
+                </a:solidFill>
+                <a:latin typeface="Cambria Math"/>
+              </a:rPr>
+              <a:t>i</a:t>
+            </a:r>
+            <a:r>
+              <a:rPr sz="1500" b="0" i="0">
+                <a:solidFill>
+                  <a:srgbClr val="262626"/>
+                </a:solidFill>
+                <a:latin typeface="Cambria Math"/>
+              </a:rPr>
+              <a:t>⌋ + 1,   Σ</a:t>
+            </a:r>
+            <a:r>
+              <a:rPr baseline="-25000" sz="1500" b="0" i="0">
+                <a:solidFill>
+                  <a:srgbClr val="262626"/>
+                </a:solidFill>
+                <a:latin typeface="Cambria Math"/>
+              </a:rPr>
+              <a:t>i</a:t>
+            </a:r>
+            <a:r>
+              <a:rPr sz="1500" b="0" i="0">
+                <a:solidFill>
+                  <a:srgbClr val="262626"/>
+                </a:solidFill>
+                <a:latin typeface="Cambria Math"/>
+              </a:rPr>
+              <a:t> A</a:t>
+            </a:r>
+            <a:r>
+              <a:rPr baseline="-25000" sz="1500" b="0" i="0">
+                <a:solidFill>
+                  <a:srgbClr val="262626"/>
+                </a:solidFill>
+                <a:latin typeface="Cambria Math"/>
+              </a:rPr>
+              <a:t>i</a:t>
+            </a:r>
+            <a:r>
+              <a:rPr sz="1500" b="0" i="0">
+                <a:solidFill>
+                  <a:srgbClr val="262626"/>
+                </a:solidFill>
+                <a:latin typeface="Cambria Math"/>
+              </a:rPr>
+              <a:t> = 50,000</a:t>
+            </a:r>
+          </a:p>
+          <a:p>
+            <a:pPr algn="l">
+              <a:spcAft>
+                <a:spcPts val="1000"/>
+              </a:spcAft>
+            </a:pPr>
+            <a:r>
+              <a:rPr sz="1150" b="0" i="0">
+                <a:solidFill>
+                  <a:srgbClr val="595959"/>
+                </a:solidFill>
+                <a:latin typeface="Candara"/>
+              </a:rPr>
+              <a:t>Unit: district i. Target: μ</a:t>
+            </a:r>
+            <a:r>
+              <a:rPr baseline="-25000" sz="1150" b="0" i="0">
+                <a:solidFill>
+                  <a:srgbClr val="595959"/>
+                </a:solidFill>
+                <a:latin typeface="Candara"/>
+              </a:rPr>
+              <a:t>i</a:t>
+            </a:r>
+            <a:r>
+              <a:rPr sz="1150" b="0" i="0">
+                <a:solidFill>
+                  <a:srgbClr val="595959"/>
+                </a:solidFill>
+                <a:latin typeface="Candara"/>
+              </a:rPr>
+              <a:t>, expected confirmed cases 2014-17, from a negative binomial (variance μ</a:t>
+            </a:r>
+            <a:r>
+              <a:rPr baseline="-25000" sz="1150" b="0" i="0">
+                <a:solidFill>
+                  <a:srgbClr val="595959"/>
+                </a:solidFill>
+                <a:latin typeface="Candara"/>
+              </a:rPr>
+              <a:t>i</a:t>
+            </a:r>
+            <a:r>
+              <a:rPr sz="1150" b="0" i="0">
+                <a:solidFill>
+                  <a:srgbClr val="595959"/>
+                </a:solidFill>
+                <a:latin typeface="Candara"/>
+              </a:rPr>
+              <a:t> + αμ</a:t>
+            </a:r>
+            <a:r>
+              <a:rPr baseline="-25000" sz="1150" b="0" i="0">
+                <a:solidFill>
+                  <a:srgbClr val="595959"/>
+                </a:solidFill>
+                <a:latin typeface="Candara"/>
+              </a:rPr>
+              <a:t>i</a:t>
+            </a:r>
+            <a:r>
+              <a:rPr sz="1150" b="0" i="0">
+                <a:solidFill>
+                  <a:srgbClr val="595959"/>
+                </a:solidFill>
+                <a:latin typeface="Candara"/>
+              </a:rPr>
+              <a:t>², α = 0.268). Metric: the weight w</a:t>
+            </a:r>
+            <a:r>
+              <a:rPr baseline="-25000" sz="1150" b="0" i="0">
+                <a:solidFill>
+                  <a:srgbClr val="595959"/>
+                </a:solidFill>
+                <a:latin typeface="Candara"/>
+              </a:rPr>
+              <a:t>i</a:t>
+            </a:r>
+            <a:r>
+              <a:rPr sz="1150" b="0" i="0">
+                <a:solidFill>
+                  <a:srgbClr val="595959"/>
+                </a:solidFill>
+                <a:latin typeface="Candara"/>
+              </a:rPr>
+              <a:t>. U</a:t>
+            </a:r>
+            <a:r>
+              <a:rPr baseline="-25000" sz="1150" b="0" i="0">
+                <a:solidFill>
+                  <a:srgbClr val="595959"/>
+                </a:solidFill>
+                <a:latin typeface="Candara"/>
+              </a:rPr>
+              <a:t>i</a:t>
+            </a:r>
+            <a:r>
+              <a:rPr sz="1150" b="0" i="0">
+                <a:solidFill>
+                  <a:srgbClr val="595959"/>
+                </a:solidFill>
+                <a:latin typeface="Candara"/>
+              </a:rPr>
+              <a:t>: upper 95% confidence bound for μ</a:t>
+            </a:r>
+            <a:r>
+              <a:rPr baseline="-25000" sz="1150" b="0" i="0">
+                <a:solidFill>
+                  <a:srgbClr val="595959"/>
+                </a:solidFill>
+                <a:latin typeface="Candara"/>
+              </a:rPr>
+              <a:t>i</a:t>
+            </a:r>
+            <a:r>
+              <a:rPr sz="1150" b="0" i="0">
+                <a:solidFill>
+                  <a:srgbClr val="595959"/>
+                </a:solidFill>
+                <a:latin typeface="Candara"/>
+              </a:rPr>
+              <a:t>. c</a:t>
+            </a:r>
+            <a:r>
+              <a:rPr baseline="-25000" sz="1150" b="0" i="0">
+                <a:solidFill>
+                  <a:srgbClr val="595959"/>
+                </a:solidFill>
+                <a:latin typeface="Candara"/>
+              </a:rPr>
+              <a:t>i</a:t>
+            </a:r>
+            <a:r>
+              <a:rPr sz="1150" b="0" i="0">
+                <a:solidFill>
+                  <a:srgbClr val="595959"/>
+                </a:solidFill>
+                <a:latin typeface="Candara"/>
+              </a:rPr>
+              <a:t>: % of homes with a net in i's region. A</a:t>
+            </a:r>
+            <a:r>
+              <a:rPr baseline="-25000" sz="1150" b="0" i="0">
+                <a:solidFill>
+                  <a:srgbClr val="595959"/>
+                </a:solidFill>
+                <a:latin typeface="Candara"/>
+              </a:rPr>
+              <a:t>i</a:t>
+            </a:r>
+            <a:r>
+              <a:rPr sz="1150" b="0" i="0">
+                <a:solidFill>
+                  <a:srgbClr val="595959"/>
+                </a:solidFill>
+                <a:latin typeface="Candara"/>
+              </a:rPr>
+              <a:t>: nets, by Hamilton's largest-remainder method.</a:t>
             </a:r>
           </a:p>
           <a:p>
@@ -7987,55 +8481,13 @@
               </a:spcAft>
             </a:pPr>
             <a:r>
-              <a:rPr sz="1800" b="1" i="0">
+              <a:rPr sz="1700" b="1" i="0">
                 <a:solidFill>
                   <a:srgbClr val="AB3D3F"/>
                 </a:solidFill>
                 <a:latin typeface="Candara"/>
               </a:rPr>
-              <a:t>What it does in practice</a:t>
-            </a:r>
-          </a:p>
-          <a:p>
-            <a:pPr algn="l" marL="219456" indent="-219456">
-              <a:spcAft>
-                <a:spcPts val="800"/>
-              </a:spcAft>
-              <a:buClr>
-                <a:srgbClr val="AB3D3F"/>
-              </a:buClr>
-              <a:buFont typeface="Arial"/>
-              <a:buChar char="•"/>
-            </a:pPr>
-            <a:r>
-              <a:rPr sz="1400" b="0" i="0">
-                <a:solidFill>
-                  <a:srgbClr val="262626"/>
-                </a:solidFill>
-                <a:latin typeface="Candara"/>
-              </a:rPr>
-              <a:t>Coverage is one number per region, so expected cases are population times a regional rate. Within a region, nets follow population exactly.</a:t>
-            </a:r>
-          </a:p>
-          <a:p>
-            <a:pPr algn="l" marL="219456" indent="-219456">
-              <a:spcAft>
-                <a:spcPts val="800"/>
-              </a:spcAft>
-              <a:buClr>
-                <a:srgbClr val="AB3D3F"/>
-              </a:buClr>
-              <a:buFont typeface="Arial"/>
-              <a:buChar char="•"/>
-            </a:pPr>
-            <a:r>
-              <a:rPr sz="1400" b="0" i="0">
-                <a:solidFill>
-                  <a:srgbClr val="262626"/>
-                </a:solidFill>
-                <a:latin typeface="Candara"/>
-              </a:rPr>
-              <a:t>The upper bound is a confidence interval for the mean, not a prediction interval. It adds one multiplier per region: 1.20, 1.34 and 1.16.</a:t>
+              <a:t>What it does with our data</a:t>
             </a:r>
           </a:p>
           <a:p>
@@ -8050,13 +8502,127 @@
               <a:buChar char="•"/>
             </a:pPr>
             <a:r>
-              <a:rPr sz="1400" b="0" i="0">
+              <a:rPr sz="1300" b="0" i="0">
                 <a:solidFill>
                   <a:srgbClr val="262626"/>
                 </a:solidFill>
                 <a:latin typeface="Candara"/>
               </a:rPr>
-              <a:t>The coverage coefficient is positive (+0.082 per point): regions with more nets had more malaria. So higher coverage earns more nets per person.</a:t>
+              <a:t>c</a:t>
+            </a:r>
+            <a:r>
+              <a:rPr baseline="-25000" sz="1300" b="0" i="0">
+                <a:solidFill>
+                  <a:srgbClr val="262626"/>
+                </a:solidFill>
+                <a:latin typeface="Candara"/>
+              </a:rPr>
+              <a:t>i</a:t>
+            </a:r>
+            <a:r>
+              <a:rPr sz="1300" b="0" i="0">
+                <a:solidFill>
+                  <a:srgbClr val="262626"/>
+                </a:solidFill>
+                <a:latin typeface="Candara"/>
+              </a:rPr>
+              <a:t> takes one value per region, so inside a region nets follow population: 8.5, 16.0 and 9.2 per 1,000 people.</a:t>
+            </a:r>
+          </a:p>
+          <a:p>
+            <a:pPr algn="l" marL="219456" indent="-219456">
+              <a:spcAft>
+                <a:spcPts val="600"/>
+              </a:spcAft>
+              <a:buClr>
+                <a:srgbClr val="AB3D3F"/>
+              </a:buClr>
+              <a:buFont typeface="Arial"/>
+              <a:buChar char="•"/>
+            </a:pPr>
+            <a:r>
+              <a:rPr sz="1300" b="0" i="0">
+                <a:solidFill>
+                  <a:srgbClr val="262626"/>
+                </a:solidFill>
+                <a:latin typeface="Candara"/>
+              </a:rPr>
+              <a:t>U</a:t>
+            </a:r>
+            <a:r>
+              <a:rPr baseline="-25000" sz="1300" b="0" i="0">
+                <a:solidFill>
+                  <a:srgbClr val="262626"/>
+                </a:solidFill>
+                <a:latin typeface="Candara"/>
+              </a:rPr>
+              <a:t>i</a:t>
+            </a:r>
+            <a:r>
+              <a:rPr sz="1300" b="0" i="0">
+                <a:solidFill>
+                  <a:srgbClr val="262626"/>
+                </a:solidFill>
+                <a:latin typeface="Candara"/>
+              </a:rPr>
+              <a:t> = μ</a:t>
+            </a:r>
+            <a:r>
+              <a:rPr baseline="-25000" sz="1300" b="0" i="0">
+                <a:solidFill>
+                  <a:srgbClr val="262626"/>
+                </a:solidFill>
+                <a:latin typeface="Candara"/>
+              </a:rPr>
+              <a:t>i</a:t>
+            </a:r>
+            <a:r>
+              <a:rPr sz="1300" b="0" i="0">
+                <a:solidFill>
+                  <a:srgbClr val="262626"/>
+                </a:solidFill>
+                <a:latin typeface="Candara"/>
+              </a:rPr>
+              <a:t> × 1.20, 1.34 or 1.16: one multiplier per region, from a confidence interval for the mean.</a:t>
+            </a:r>
+          </a:p>
+          <a:p>
+            <a:pPr algn="l" marL="219456" indent="-219456">
+              <a:spcAft>
+                <a:spcPts val="600"/>
+              </a:spcAft>
+              <a:buClr>
+                <a:srgbClr val="AB3D3F"/>
+              </a:buClr>
+              <a:buFont typeface="Arial"/>
+              <a:buChar char="•"/>
+            </a:pPr>
+            <a:r>
+              <a:rPr sz="1300" b="0" i="0">
+                <a:solidFill>
+                  <a:srgbClr val="262626"/>
+                </a:solidFill>
+                <a:latin typeface="Candara"/>
+              </a:rPr>
+              <a:t>β</a:t>
+            </a:r>
+            <a:r>
+              <a:rPr baseline="-25000" sz="1300" b="0" i="0">
+                <a:solidFill>
+                  <a:srgbClr val="262626"/>
+                </a:solidFill>
+                <a:latin typeface="Candara"/>
+              </a:rPr>
+              <a:t>1</a:t>
+            </a:r>
+            <a:r>
+              <a:rPr sz="1300" b="0" i="0">
+                <a:solidFill>
+                  <a:srgbClr val="262626"/>
+                </a:solidFill>
+                <a:latin typeface="Candara"/>
+              </a:rPr>
+              <a:t> = +0.082 per point: more nets went with more malaria, so the split between regions is uncertain.</a:t>
             </a:r>
           </a:p>
         </p:txBody>
@@ -8070,8 +8636,8 @@
           <p:nvPr/>
         </p:nvGraphicFramePr>
         <p:xfrm>
-          <a:off x="6400800" y="1417320"/>
-          <a:ext cx="5212080" cy="3840480"/>
+          <a:off x="7040880" y="1417320"/>
+          <a:ext cx="4572000" cy="3840480"/>
         </p:xfrm>
         <a:graphic>
           <a:graphicData uri="http://schemas.openxmlformats.org/drawingml/2006/chart">
@@ -8087,8 +8653,8 @@
         </p:nvSpPr>
         <p:spPr>
           <a:xfrm>
-            <a:off x="6400800" y="5303520"/>
-            <a:ext cx="5212080" cy="502920"/>
+            <a:off x="7040880" y="5303520"/>
+            <a:ext cx="4572000" cy="548640"/>
           </a:xfrm>
           <a:prstGeom prst="rect">
             <a:avLst/>

--- a/reports/ITN_Allocation_Ashesi.pptx
+++ b/reports/ITN_Allocation_Ashesi.pptx
@@ -1252,12 +1252,12 @@
           <a:lstStyle/>
           <a:p>
             <a:r>
-              <a:t>Say: Stratifying by region keeps every region in both training and test, so neighbours still leak. Only holding a whole region out tests what the model does somewhere new, and the error roughly quadruples.</a:t>
-            </a:r>
-          </a:p>
-          <a:p>
-            <a:r>
-              <a:t>Sources: notebooks/03_pipeline_leakage.ipynb, cells leak_cd12 (500 seeds) and leak_cd14 (whole region held out, via io.split_data(..., hold_out=region)). Literature: Ploton et al. 2020, Nature Communications 11:4540, doi:10.1038/s41467-020-18321-y; Kattenborn et al. 2022, ISPRS Open Journal of Photogrammetry and Remote Sensing, doi:10.1016/j.ophoto.2022.100018 (up to 28% overestimation of F1-score).</a:t>
+              <a:t>Symbols: i = district (the unit); mu_i = expected confirmed cases, 2014-17 (the target); w_i = allocation weight (the metric); pop_i = population; c_i = % of homes owning a net in i's region (DHS 2022); U_i = upper 95% confidence bound for mu_i; q_i = exact share; A_i = nets.</a:t>
+            </a:r>
+          </a:p>
+          <a:p>
+            <a:r>
+              <a:t>Sources: notebooks/04_allocation.ipynb cells alloc_cd05 (alpha 0.2677) and alloc_cd11 (beta_1 = +0.0823, p = 1.7e-07; U_i / mu_i = 1.198, 1.342, 1.162; nets per 1,000 people); src/models.py compute_allocation and hamilton. Coverage values: notebooks/02 cell cd06 and scripts/verify_claims.py section D.</a:t>
             </a:r>
           </a:p>
         </p:txBody>
@@ -1327,17 +1327,7 @@
           <a:lstStyle/>
           <a:p>
             <a:r>
-              <a:t>Say: The slide writes the rule as math; say it in words. Line one: expected confirmed cases grow in proportion to population and depend on the region's net coverage (a negative binomial model with a population offset). Line two: each district's weight is the cautious upper end of its expected cases times the share of homes without a net. Line three: Hamilton's largest-remainder method turns the weights into exactly 50,000 whole nets. Then: because coverage is one number per region, inside a region nets follow population; the upper bound adds one multiplier per region; and the coverage coefficient is positive because nets went where malaria was worst, so the split between regions is uncertain.</a:t>
-            </a:r>
-          </a:p>
-          <a:p>
-            <a:r>
-              <a:t>Symbols: i = district (the unit); mu_i = expected confirmed cases, 2014-17 (the target); w_i = allocation weight (the metric); pop_i = population; c_i = % of homes owning a net in i's region (DHS 2022); U_i = upper 95% confidence bound for mu_i; q_i = exact share; A_i = nets.</a:t>
-            </a:r>
-          </a:p>
-          <a:p>
-            <a:r>
-              <a:t>Sources: notebooks/04_allocation.ipynb cells alloc_cd05 (alpha 0.2677) and alloc_cd11 (beta_1 = +0.0823, p = 1.7e-07; U_i / mu_i = 1.198, 1.342, 1.162; nets per 1,000 people); src/models.py compute_allocation and hamilton. Coverage values: notebooks/02 cell cd06 and scripts/verify_claims.py section D.</a:t>
+              <a:t>Sources: cases per person and the upper-to-expected ratios 1.198, 1.342 and 1.162: notebooks/04_allocation.ipynb cell alloc_cd11. Both maps are drawn with src/viz.plot_district_choropleth from models.compute_allocation, zoomed to the north like the allocation map. The two-map layout (burden next to uncertainty) follows the course roadmap.</a:t>
             </a:r>
           </a:p>
         </p:txBody>
@@ -1407,12 +1397,7 @@
           <a:lstStyle/>
           <a:p>
             <a:r>
-              <a:t>Say: The left map shows reported burden: confirmed cases per person over 2014-17. It is highest in Upper East and Upper West and lowest across Northern Region, where the test data point to under-testing. The right map shows how sure we are: the upper end of our 95% interval sits 20% above the estimate in Northern, 34% in Upper East and 16% in Upper West. It is one number per region because coverage is. Our rule uses that upper bound, so it leans towards the region we are least sure about.</a:t>
-            </a:r>
-          </a:p>
-          <a:p>
-            <a:r>
-              <a:t>Sources: cases per person and the upper-to-expected ratios 1.198, 1.342 and 1.162: notebooks/04_allocation.ipynb cell alloc_cd11. Both maps are drawn with src/viz.plot_district_choropleth from models.compute_allocation, zoomed to the north like the allocation map. The two-map layout (burden next to uncertainty) follows the course roadmap.</a:t>
+              <a:t>Sources: the 50-district schedule in reports/allocation.md reproduces exactly from notebooks/04_allocation.ipynb (cells alloc_cd07 and alloc_cd09; scripts/verify_claims.py section C checks all 50 rows). Map drawn with src/viz.plot_district_choropleth from the same allocation, zoomed to the north. The three pre-2018 districts later split (Garu-Tempane, Savelugu-Nanton, Bunkpurugu-Yunyoo) show their total on both successor areas.</a:t>
             </a:r>
           </a:p>
         </p:txBody>
@@ -1482,12 +1467,7 @@
           <a:lstStyle/>
           <a:p>
             <a:r>
-              <a:t>Say: This is the allocation our current rule produces.</a:t>
-            </a:r>
-          </a:p>
-          <a:p>
-            <a:r>
-              <a:t>Sources: the 50-district schedule in reports/allocation.md reproduces exactly from notebooks/04_allocation.ipynb (cells alloc_cd07 and alloc_cd09; scripts/verify_claims.py section C checks all 50 rows). Map drawn with src/viz.plot_district_choropleth from the same allocation, zoomed to the north. The three pre-2018 districts later split (Garu-Tempane, Savelugu-Nanton, Bunkpurugu-Yunyoo) show their total on both successor areas.</a:t>
+              <a:t>Sources: gains and losses: notebooks/04_allocation.ipynb alloc_cd09; cases-per-person ranks: alloc_cd11 (Tamale lowest of 50, Nabdam highest of 50, Bole highest in its region). Ghana's ITN strategy: PMI Ghana Malaria Operational Plan FY2017. Tamale Teaching Hospital as the only tertiary provider for the three northern regions: https://tth.gov.gh/about</a:t>
             </a:r>
           </a:p>
         </p:txBody>
@@ -1557,12 +1537,7 @@
           <a:lstStyle/>
           <a:p>
             <a:r>
-              <a:t>Say: Against a case-proportional comparator, nets move from districts with high reported cases per person to populous districts. That follows from treating everyone in a region as equally at risk. Referral bias may exist, but our data do not show it: Bolgatanga ranks only 4th of 13 in Upper East on cases per person, and Nabdam, often named as a sending district, ranks 1st.</a:t>
-            </a:r>
-          </a:p>
-          <a:p>
-            <a:r>
-              <a:t>Sources: gains and losses: notebooks/04_allocation.ipynb alloc_cd09; cases-per-person ranks: alloc_cd11 (Tamale lowest of 50, Nabdam highest of 50, Bole highest in its region). Ghana's ITN strategy: PMI Ghana Malaria Operational Plan FY2017. Tamale Teaching Hospital as the only tertiary provider for the three northern regions: https://tth.gov.gh/about</a:t>
+              <a:t>Sources: notebooks/04_allocation.ipynb cell alloc_cd13, which also prints the coverage it uses (Savannah 79.1%, North East 62.8%; published 79.1% and 62.6%, GDHS 2022 Table 12.1) and the Northern cluster-bootstrap bounds 61.4% and 74.0% (as in notebooks/02 cell cd39).</a:t>
             </a:r>
           </a:p>
         </p:txBody>
@@ -1632,12 +1607,7 @@
           <a:lstStyle/>
           <a:p>
             <a:r>
-              <a:t>Say: This is where we volunteer our weak points. A region-effects model, which fits the data better, moves 7,720 nets. Correcting the coverage of 11 districts moves 3,740. Lowering Northern Region's coverage gives it fewer nets, not more, because of the positive coverage coefficient.</a:t>
-            </a:r>
-          </a:p>
-          <a:p>
-            <a:r>
-              <a:t>Sources: notebooks/04_allocation.ipynb cell alloc_cd13, which also prints the coverage it uses (Savannah 79.1%, North East 62.8%; published 79.1% and 62.6%, GDHS 2022 Table 12.1) and the Northern cluster-bootstrap bounds 61.4% and 74.0% (as in notebooks/02 cell cd39).</a:t>
+              <a:t>Sources: 207 of 260 districts: scripts/verify_claims.py (map join). Test positivity and cases per person by region: scripts/verify_claims.py section E. Spraying and chemoprevention counts: scripts/verify_claims.py section E, from the raw surveillance workbook in the course data package (these columns are not in the curated district file). Campaign rules: PMI Ghana Malaria Operational Plan FY2017. Privacy: git history holds no data files and no notebook outputs (checked 2026-09-22).</a:t>
             </a:r>
           </a:p>
         </p:txBody>
@@ -1707,12 +1677,7 @@
           <a:lstStyle/>
           <a:p>
             <a:r>
-              <a:t>Say: Equity is about who the rule helps and who it cannot see.</a:t>
-            </a:r>
-          </a:p>
-          <a:p>
-            <a:r>
-              <a:t>Sources: 207 of 260 districts: scripts/verify_claims.py (map join). Test positivity and cases per person by region: scripts/verify_claims.py section E. Spraying and chemoprevention counts: scripts/verify_claims.py section E, from data/raw/northern-ghana-districts-routine-data-2014-17.xlsx (these columns are not in ghana_district_cases.csv). Campaign rules: PMI Ghana Malaria Operational Plan FY2017. Privacy: git history holds no data files and no notebook outputs (checked 2026-09-22).</a:t>
+              <a:t>Sources: 11 districts, 3,740 nets, 79.1% and 62.8%: notebooks/04_allocation.ipynb alloc_cd13. 39 of 50 districts: scripts/verify_claims.py section E. Empty ITN intervals: notebooks/02 cell cd37. No district identifier or parasitaemia: notebooks/02 cell cd06.</a:t>
             </a:r>
           </a:p>
         </p:txBody>
@@ -1782,86 +1747,6 @@
           <a:lstStyle/>
           <a:p>
             <a:r>
-              <a:t>Say: These are the limits we know about, and what we would do before any real distribution.</a:t>
-            </a:r>
-          </a:p>
-          <a:p>
-            <a:r>
-              <a:t>Sources: 11 districts, 3,740 nets, 79.1% and 62.8%: notebooks/04_allocation.ipynb alloc_cd13. 39 of 50 districts: scripts/verify_claims.py section E. Empty ITN intervals: notebooks/02 cell cd37. No district identifier or parasitaemia: notebooks/02 cell cd06.</a:t>
-            </a:r>
-          </a:p>
-        </p:txBody>
-      </p:sp>
-      <p:sp>
-        <p:nvSpPr>
-          <p:cNvPr id="4" name="Slide Number Placeholder 3"/>
-          <p:cNvSpPr>
-            <a:spLocks noGrp="1"/>
-          </p:cNvSpPr>
-          <p:nvPr>
-            <p:ph type="sldNum" idx="5" sz="quarter"/>
-          </p:nvPr>
-        </p:nvSpPr>
-        <p:spPr/>
-      </p:sp>
-    </p:spTree>
-  </p:cSld>
-  <p:clrMapOvr>
-    <a:masterClrMapping/>
-  </p:clrMapOvr>
-</p:notes>
-</file>
-
-<file path=ppt/notesSlides/notesSlide18.xml><?xml version="1.0" encoding="utf-8"?>
-<p:notes xmlns:a="http://schemas.openxmlformats.org/drawingml/2006/main" xmlns:p="http://schemas.openxmlformats.org/presentationml/2006/main" xmlns:r="http://schemas.openxmlformats.org/officeDocument/2006/relationships">
-  <p:cSld>
-    <p:spTree>
-      <p:nvGrpSpPr>
-        <p:cNvPr id="1" name=""/>
-        <p:cNvGrpSpPr/>
-        <p:nvPr/>
-      </p:nvGrpSpPr>
-      <p:grpSpPr>
-        <a:xfrm>
-          <a:off x="0" y="0"/>
-          <a:ext cx="0" cy="0"/>
-          <a:chOff x="0" y="0"/>
-          <a:chExt cx="0" cy="0"/>
-        </a:xfrm>
-      </p:grpSpPr>
-      <p:sp>
-        <p:nvSpPr>
-          <p:cNvPr id="2" name="Slide Image Placeholder 1"/>
-          <p:cNvSpPr>
-            <a:spLocks noGrp="1"/>
-          </p:cNvSpPr>
-          <p:nvPr>
-            <p:ph type="sldImg" idx="2"/>
-          </p:nvPr>
-        </p:nvSpPr>
-        <p:spPr/>
-      </p:sp>
-      <p:sp>
-        <p:nvSpPr>
-          <p:cNvPr id="3" name="Notes Placeholder 2"/>
-          <p:cNvSpPr>
-            <a:spLocks noGrp="1"/>
-          </p:cNvSpPr>
-          <p:nvPr>
-            <p:ph type="body" idx="3" sz="quarter"/>
-          </p:nvPr>
-        </p:nvSpPr>
-        <p:spPr/>
-        <p:txBody>
-          <a:bodyPr/>
-          <a:lstStyle/>
-          <a:p>
-            <a:r>
-              <a:t>Say: Thank you. Every number in this deck has its source in the speaker notes; we are happy to take questions on any of them.</a:t>
-            </a:r>
-          </a:p>
-          <a:p>
-            <a:r>
               <a:t>The footnote is the group's AI declaration. Each member's own AI-use declaration is part of their individual reflection.</a:t>
             </a:r>
           </a:p>
@@ -1932,12 +1817,7 @@
           <a:lstStyle/>
           <a:p>
             <a:r>
-              <a:t>Say: We were asked where a limited delivery of 50,000 insecticide-treated nets should go across northern Ghana, and how confident we can be in the district numbers behind that choice. We start with our recommendation, then show the evidence and its limits.</a:t>
-            </a:r>
-          </a:p>
-          <a:p>
-            <a:r>
-              <a:t>Add the presenters' names to this slide before the panel.</a:t>
+              <a:t>Sources: notebooks/04_allocation.ipynb, cell alloc_cd07 (regional totals), alloc_cd11 (nets per 1,000 people) and alloc_cd13 (7,720 nets moved under the region-effects model).</a:t>
             </a:r>
           </a:p>
         </p:txBody>
@@ -2007,12 +1887,7 @@
           <a:lstStyle/>
           <a:p>
             <a:r>
-              <a:t>Say: Within each region the rule allocates in proportion to population, because coverage is measured once per region. The regional totals come from our negative binomial model and are our base case; be upfront that the regional split depends on the model.</a:t>
-            </a:r>
-          </a:p>
-          <a:p>
-            <a:r>
-              <a:t>Sources: notebooks/04_allocation.ipynb, cell alloc_cd07 (regional totals), alloc_cd11 (nets per 1,000 people) and alloc_cd13 (7,720 nets moved under the region-effects model).</a:t>
+              <a:t>Sources: Oppong et al., Malaria Journal, doi:10.1186/s12936-025-05724-9 (https://pmc.ncbi.nlm.nih.gov/articles/PMC12829291/); Ghana DHS 2022 final report FR387, Table 12.15.</a:t>
             </a:r>
           </a:p>
         </p:txBody>
@@ -2082,12 +1957,7 @@
           <a:lstStyle/>
           <a:p>
             <a:r>
-              <a:t>Say: This is why district detail matters. Be careful with the wording: the 49% is a model prediction for children aged 6 months to 10 years, and its highest values fall in forest areas, not slums. The 2% is the 2022 DHS microscopy figure for children under five (3.4% by rapid test).</a:t>
-            </a:r>
-          </a:p>
-          <a:p>
-            <a:r>
-              <a:t>Sources: Oppong et al., Malaria Journal, doi:10.1186/s12936-025-05724-9 (https://pmc.ncbi.nlm.nih.gov/articles/PMC12829291/); Ghana DHS 2022 final report FR387, Table 12.15.</a:t>
+              <a:t>Sources: 17,933 households and 618 clusters: data dictionary and notebooks/02 cell cd03. 71.0% vs 66.8% (claim C-01): notebooks/01_eda.ipynb cell eda_cd05. 50 districts on 53 polygons, 207 of 260 districts without data: scripts/verify_claims.py (map join, same logic as src/viz.py). Maps: figures/b1_data_availability.png and figures/b1_district_case_rate.png from notebook 01, with their titles trimmed.</a:t>
             </a:r>
           </a:p>
         </p:txBody>
@@ -2157,12 +2027,7 @@
           <a:lstStyle/>
           <a:p>
             <a:r>
-              <a:t>Say: We have two very different sources. The survey is representative but only resolves to region; the surveillance has district detail but only for the north.</a:t>
-            </a:r>
-          </a:p>
-          <a:p>
-            <a:r>
-              <a:t>Sources: 17,933 households and 618 clusters: data dictionary and notebooks/02 cell cd03. 71.0% vs 66.8% (claim C-01): notebooks/01_eda.ipynb cell eda_cd05. 50 districts on 53 polygons, 207 of 260 districts without data: scripts/verify_claims.py (map join, same logic as src/viz.py). Maps: figures/b1_data_availability.png and figures/b1_district_case_rate.png from notebook 01, with their titles trimmed.</a:t>
+              <a:t>Sources: notebooks/02_distributions.ipynb cells cd09 (77,183), cd15 (442, 122,882, 278 times), cd18 (0.395), cd25 and cd26 (54,147; alpha 0.2677; AIC gap 2,393,669). Figure: figures/a3_poisson_vs_nb.png, title trimmed.</a:t>
             </a:r>
           </a:p>
         </p:txBody>
@@ -2232,12 +2097,7 @@
           <a:lstStyle/>
           <a:p>
             <a:r>
-              <a:t>Say: Under a Poisson model the variance equals the mean. Here the variance is 77,183 times the mean, and even after adjusting for population the dispersion ratio is 54,147. The negative binomial adds one dispersion parameter and fits far better. The figure's curves use no covariates (alpha 0.395); the model we use has a population offset (alpha 0.268).</a:t>
-            </a:r>
-          </a:p>
-          <a:p>
-            <a:r>
-              <a:t>Sources: notebooks/02_distributions.ipynb cells cd09 (77,183), cd15 (442, 122,882, 278 times), cd18 (0.395), cd25 and cd26 (54,147; alpha 0.2677; AIC gap 2,393,669). Figure: figures/a3_poisson_vs_nb.png, title trimmed.</a:t>
+              <a:t>Sources: notebooks/02_distributions.ipynb cells cd31 (582 households, 20 clusters), cd33 and cd34 (15.20 vs 7.17, 2.12 times, design effect 4.50), cd37 (published ITN intervals empty, 0 of 76), cd39 (67.69% vs 67.6%). Seed spread 4.46 to 5.39 and design-based 4.18: scripts/verify_claims.py section A. Rank 10th of 16: scripts/verify_claims.py section D. Figure: figures/a4_bootstrap_ci_comparison.png, title trimmed.</a:t>
             </a:r>
           </a:p>
         </p:txBody>
@@ -2307,12 +2167,7 @@
           <a:lstStyle/>
           <a:p>
             <a:r>
-              <a:t>Say: The survey samples clusters, then households. Resampling households alone pretends each is independent and gives an interval half as wide as it should be.</a:t>
-            </a:r>
-          </a:p>
-          <a:p>
-            <a:r>
-              <a:t>Sources: notebooks/02_distributions.ipynb cells cd31 (582 households, 20 clusters), cd33 and cd34 (15.20 vs 7.17, 2.12 times, design effect 4.50), cd37 (published ITN intervals empty, 0 of 76), cd39 (67.69% vs 67.6%). Seed spread 4.46 to 5.39 and design-based 4.18: scripts/verify_claims.py section A. Rank 10th of 16: scripts/verify_claims.py section D. Figure: figures/a4_bootstrap_ci_comparison.png, title trimmed.</a:t>
+              <a:t>Sources: notebooks/03_pipeline_leakage.ipynb cells leak_cd04 (87,144 vs 87,356), leak_cd06 (R² 1.0000 vs 0.2618), leak_cd08 (one seed), leak_cd12 (500 seeds) and leak_cd14 (whole region held out); the table itself is leak_cd10.</a:t>
             </a:r>
           </a:p>
         </p:txBody>
@@ -2382,12 +2237,7 @@
           <a:lstStyle/>
           <a:p>
             <a:r>
-              <a:t>Say: We built each leak deliberately and compared it with the disciplined version. The spatial one needed a different test from the one we first used: comparing a random split with a stratified split at a single seed compares two different random test sets, and across seeds the difference disappears.</a:t>
-            </a:r>
-          </a:p>
-          <a:p>
-            <a:r>
-              <a:t>Sources: notebooks/03_pipeline_leakage.ipynb cells leak_cd04 (87,144 vs 87,356), leak_cd06 (R² 1.0000 vs 0.2618), leak_cd08 (one seed), leak_cd12 (500 seeds) and leak_cd14 (whole region held out); the table itself is leak_cd10.</a:t>
+              <a:t>Sources: notebooks/03_pipeline_leakage.ipynb, cells leak_cd12 (500 seeds) and leak_cd14 (whole region held out, via io.split_data(..., hold_out=region)). Literature: Ploton et al. 2020, Nature Communications 11:4540, doi:10.1038/s41467-020-18321-y; Kattenborn et al. 2022, ISPRS Open Journal of Photogrammetry and Remote Sensing, doi:10.1016/j.ophoto.2022.100018 (up to 28% overestimation of F1-score).</a:t>
             </a:r>
           </a:p>
         </p:txBody>

--- a/reports/ITN_Allocation_Ashesi.pptx
+++ b/reports/ITN_Allocation_Ashesi.pptx
@@ -5,25 +5,25 @@
     <p:sldMasterId id="2147483648" r:id="rId4"/>
   </p:sldMasterIdLst>
   <p:notesMasterIdLst>
-    <p:notesMasterId r:id="rId14"/>
+    <p:notesMasterId r:id="rId21"/>
   </p:notesMasterIdLst>
   <p:sldIdLst>
-    <p:sldId id="266" r:id="rId19"/>
-    <p:sldId id="267" r:id="rId20"/>
-    <p:sldId id="268" r:id="rId21"/>
-    <p:sldId id="269" r:id="rId22"/>
-    <p:sldId id="270" r:id="rId23"/>
-    <p:sldId id="271" r:id="rId24"/>
-    <p:sldId id="272" r:id="rId25"/>
-    <p:sldId id="273" r:id="rId26"/>
-    <p:sldId id="274" r:id="rId27"/>
-    <p:sldId id="275" r:id="rId28"/>
-    <p:sldId id="276" r:id="rId29"/>
-    <p:sldId id="277" r:id="rId30"/>
-    <p:sldId id="278" r:id="rId31"/>
-    <p:sldId id="279" r:id="rId32"/>
-    <p:sldId id="280" r:id="rId33"/>
-    <p:sldId id="281" r:id="rId34"/>
+    <p:sldId id="266" r:id="rId5"/>
+    <p:sldId id="267" r:id="rId6"/>
+    <p:sldId id="268" r:id="rId7"/>
+    <p:sldId id="269" r:id="rId8"/>
+    <p:sldId id="270" r:id="rId9"/>
+    <p:sldId id="271" r:id="rId10"/>
+    <p:sldId id="272" r:id="rId11"/>
+    <p:sldId id="273" r:id="rId12"/>
+    <p:sldId id="274" r:id="rId13"/>
+    <p:sldId id="275" r:id="rId14"/>
+    <p:sldId id="276" r:id="rId15"/>
+    <p:sldId id="277" r:id="rId16"/>
+    <p:sldId id="278" r:id="rId17"/>
+    <p:sldId id="279" r:id="rId18"/>
+    <p:sldId id="280" r:id="rId19"/>
+    <p:sldId id="281" r:id="rId20"/>
   </p:sldIdLst>
   <p:sldSz cx="12192000" cy="6858000"/>
   <p:notesSz cx="6858000" cy="9144000"/>
@@ -142,14 +142,19 @@
 </file>
 
 <file path=ppt/charts/chart1.xml><?xml version="1.0" encoding="utf-8"?>
-<c:chartSpace xmlns:c="http://schemas.openxmlformats.org/drawingml/2006/chart" xmlns:a="http://schemas.openxmlformats.org/drawingml/2006/main" xmlns:r="http://schemas.openxmlformats.org/officeDocument/2006/relationships">
+<c:chartSpace xmlns:c="http://schemas.openxmlformats.org/drawingml/2006/chart" xmlns:a="http://schemas.openxmlformats.org/drawingml/2006/main" xmlns:r="http://schemas.openxmlformats.org/officeDocument/2006/relationships" xmlns:c16r2="http://schemas.microsoft.com/office/drawing/2015/06/chart">
   <c:date1904 val="0"/>
+  <c:lang val="en-US"/>
+  <c:roundedCorners val="1"/>
+  <c:style val="2"/>
   <c:chart>
     <c:autoTitleDeleted val="1"/>
     <c:plotArea>
+      <c:layout/>
       <c:barChart>
         <c:barDir val="col"/>
         <c:grouping val="clustered"/>
+        <c:varyColors val="1"/>
         <c:ser>
           <c:idx val="0"/>
           <c:order val="0"/>
@@ -168,30 +173,81 @@
           <c:dPt>
             <c:idx val="0"/>
             <c:invertIfNegative val="0"/>
+            <c:bubble3D val="0"/>
             <c:spPr>
               <a:solidFill>
                 <a:srgbClr val="A6A6A6"/>
               </a:solidFill>
             </c:spPr>
+            <c:extLst>
+              <c:ext xmlns:c16="http://schemas.microsoft.com/office/drawing/2014/chart" uri="{C3380CC4-5D6E-409C-BE32-E72D297353CC}">
+                <c16:uniqueId val="{00000001-F607-2C49-86CD-52E683328AB2}"/>
+              </c:ext>
+            </c:extLst>
           </c:dPt>
           <c:dPt>
             <c:idx val="1"/>
             <c:invertIfNegative val="0"/>
+            <c:bubble3D val="0"/>
             <c:spPr>
               <a:solidFill>
                 <a:srgbClr val="A6A6A6"/>
               </a:solidFill>
             </c:spPr>
+            <c:extLst>
+              <c:ext xmlns:c16="http://schemas.microsoft.com/office/drawing/2014/chart" uri="{C3380CC4-5D6E-409C-BE32-E72D297353CC}">
+                <c16:uniqueId val="{00000003-F607-2C49-86CD-52E683328AB2}"/>
+              </c:ext>
+            </c:extLst>
           </c:dPt>
           <c:dPt>
             <c:idx val="2"/>
             <c:invertIfNegative val="0"/>
+            <c:bubble3D val="0"/>
             <c:spPr>
               <a:solidFill>
                 <a:srgbClr val="AB3D3F"/>
               </a:solidFill>
             </c:spPr>
+            <c:extLst>
+              <c:ext xmlns:c16="http://schemas.microsoft.com/office/drawing/2014/chart" uri="{C3380CC4-5D6E-409C-BE32-E72D297353CC}">
+                <c16:uniqueId val="{00000005-F607-2C49-86CD-52E683328AB2}"/>
+              </c:ext>
+            </c:extLst>
           </c:dPt>
+          <c:dLbls>
+            <c:numFmt formatCode="#,##0" sourceLinked="0"/>
+            <c:spPr>
+              <a:noFill/>
+              <a:ln>
+                <a:noFill/>
+              </a:ln>
+              <a:effectLst/>
+            </c:spPr>
+            <c:txPr>
+              <a:bodyPr/>
+              <a:lstStyle/>
+              <a:p>
+                <a:pPr>
+                  <a:defRPr sz="1300" b="1"/>
+                </a:pPr>
+                <a:endParaRPr lang="en-US"/>
+              </a:p>
+            </c:txPr>
+            <c:dLblPos val="outEnd"/>
+            <c:showLegendKey val="0"/>
+            <c:showVal val="1"/>
+            <c:showCatName val="0"/>
+            <c:showSerName val="0"/>
+            <c:showPercent val="0"/>
+            <c:showBubbleSize val="0"/>
+            <c:showLeaderLines val="0"/>
+            <c:extLst>
+              <c:ext xmlns:c15="http://schemas.microsoft.com/office/drawing/2012/chart" uri="{CE6537A1-D6FC-4f65-9D91-7224C49458BB}">
+                <c15:showLeaderLines val="0"/>
+              </c:ext>
+            </c:extLst>
+          </c:dLbls>
           <c:cat>
             <c:strRef>
               <c:f>Sheet1!$A$2:$A$4</c:f>
@@ -227,18 +283,13 @@
               </c:numCache>
             </c:numRef>
           </c:val>
+          <c:extLst>
+            <c:ext xmlns:c16="http://schemas.microsoft.com/office/drawing/2014/chart" uri="{C3380CC4-5D6E-409C-BE32-E72D297353CC}">
+              <c16:uniqueId val="{00000006-F607-2C49-86CD-52E683328AB2}"/>
+            </c:ext>
+          </c:extLst>
         </c:ser>
         <c:dLbls>
-          <c:numFmt formatCode="#,##0" sourceLinked="0"/>
-          <c:txPr>
-            <a:bodyPr/>
-            <a:lstStyle/>
-            <a:p>
-              <a:pPr>
-                <a:defRPr sz="1300" b="1"/>
-              </a:pPr>
-            </a:p>
-          </c:txPr>
           <c:dLblPos val="outEnd"/>
           <c:showLegendKey val="0"/>
           <c:showVal val="1"/>
@@ -246,7 +297,6 @@
           <c:showSerName val="0"/>
           <c:showPercent val="0"/>
           <c:showBubbleSize val="0"/>
-          <c:showLeaderLines val="1"/>
         </c:dLbls>
         <c:gapWidth val="60"/>
         <c:axId val="-2068027336"/>
@@ -259,6 +309,7 @@
         </c:scaling>
         <c:delete val="0"/>
         <c:axPos val="b"/>
+        <c:numFmt formatCode="General" sourceLinked="0"/>
         <c:majorTickMark val="none"/>
         <c:minorTickMark val="none"/>
         <c:tickLblPos val="nextTo"/>
@@ -276,6 +327,7 @@
             <a:pPr>
               <a:defRPr sz="1200"/>
             </a:pPr>
+            <a:endParaRPr lang="en-US"/>
           </a:p>
         </c:txPr>
         <c:crossAx val="-2113994440"/>
@@ -287,7 +339,9 @@
       </c:catAx>
       <c:valAx>
         <c:axId val="-2113994440"/>
-        <c:scaling/>
+        <c:scaling>
+          <c:orientation val="minMax"/>
+        </c:scaling>
         <c:delete val="0"/>
         <c:axPos val="l"/>
         <c:majorGridlines>
@@ -319,13 +373,17 @@
                 </a:solidFill>
               </a:defRPr>
             </a:pPr>
+            <a:endParaRPr lang="en-US"/>
           </a:p>
         </c:txPr>
         <c:crossAx val="-2068027336"/>
         <c:crosses val="autoZero"/>
+        <c:crossBetween val="between"/>
       </c:valAx>
     </c:plotArea>
+    <c:plotVisOnly val="1"/>
     <c:dispBlanksAs val="gap"/>
+    <c:showDLblsOverMax val="1"/>
   </c:chart>
   <c:txPr>
     <a:bodyPr/>
@@ -349,14 +407,19 @@
 </file>
 
 <file path=ppt/charts/chart2.xml><?xml version="1.0" encoding="utf-8"?>
-<c:chartSpace xmlns:c="http://schemas.openxmlformats.org/drawingml/2006/chart" xmlns:a="http://schemas.openxmlformats.org/drawingml/2006/main" xmlns:r="http://schemas.openxmlformats.org/officeDocument/2006/relationships">
+<c:chartSpace xmlns:c="http://schemas.openxmlformats.org/drawingml/2006/chart" xmlns:a="http://schemas.openxmlformats.org/drawingml/2006/main" xmlns:r="http://schemas.openxmlformats.org/officeDocument/2006/relationships" xmlns:c16r2="http://schemas.microsoft.com/office/drawing/2015/06/chart">
   <c:date1904 val="0"/>
+  <c:lang val="en-US"/>
+  <c:roundedCorners val="1"/>
+  <c:style val="2"/>
   <c:chart>
     <c:autoTitleDeleted val="1"/>
     <c:plotArea>
+      <c:layout/>
       <c:barChart>
         <c:barDir val="col"/>
         <c:grouping val="clustered"/>
+        <c:varyColors val="1"/>
         <c:ser>
           <c:idx val="0"/>
           <c:order val="0"/>
@@ -375,30 +438,81 @@
           <c:dPt>
             <c:idx val="0"/>
             <c:invertIfNegative val="0"/>
+            <c:bubble3D val="0"/>
             <c:spPr>
               <a:solidFill>
                 <a:srgbClr val="AB3D3F"/>
               </a:solidFill>
             </c:spPr>
+            <c:extLst>
+              <c:ext xmlns:c16="http://schemas.microsoft.com/office/drawing/2014/chart" uri="{C3380CC4-5D6E-409C-BE32-E72D297353CC}">
+                <c16:uniqueId val="{00000001-550C-A841-8C9E-5B534031EFD3}"/>
+              </c:ext>
+            </c:extLst>
           </c:dPt>
           <c:dPt>
             <c:idx val="1"/>
             <c:invertIfNegative val="0"/>
+            <c:bubble3D val="0"/>
             <c:spPr>
               <a:solidFill>
                 <a:srgbClr val="AB3D3F"/>
               </a:solidFill>
             </c:spPr>
+            <c:extLst>
+              <c:ext xmlns:c16="http://schemas.microsoft.com/office/drawing/2014/chart" uri="{C3380CC4-5D6E-409C-BE32-E72D297353CC}">
+                <c16:uniqueId val="{00000003-550C-A841-8C9E-5B534031EFD3}"/>
+              </c:ext>
+            </c:extLst>
           </c:dPt>
           <c:dPt>
             <c:idx val="2"/>
             <c:invertIfNegative val="0"/>
+            <c:bubble3D val="0"/>
             <c:spPr>
               <a:solidFill>
                 <a:srgbClr val="AB3D3F"/>
               </a:solidFill>
             </c:spPr>
+            <c:extLst>
+              <c:ext xmlns:c16="http://schemas.microsoft.com/office/drawing/2014/chart" uri="{C3380CC4-5D6E-409C-BE32-E72D297353CC}">
+                <c16:uniqueId val="{00000005-550C-A841-8C9E-5B534031EFD3}"/>
+              </c:ext>
+            </c:extLst>
           </c:dPt>
+          <c:dLbls>
+            <c:numFmt formatCode="0.0" sourceLinked="0"/>
+            <c:spPr>
+              <a:noFill/>
+              <a:ln>
+                <a:noFill/>
+              </a:ln>
+              <a:effectLst/>
+            </c:spPr>
+            <c:txPr>
+              <a:bodyPr/>
+              <a:lstStyle/>
+              <a:p>
+                <a:pPr>
+                  <a:defRPr sz="1300" b="1"/>
+                </a:pPr>
+                <a:endParaRPr lang="en-US"/>
+              </a:p>
+            </c:txPr>
+            <c:dLblPos val="outEnd"/>
+            <c:showLegendKey val="0"/>
+            <c:showVal val="1"/>
+            <c:showCatName val="0"/>
+            <c:showSerName val="0"/>
+            <c:showPercent val="0"/>
+            <c:showBubbleSize val="0"/>
+            <c:showLeaderLines val="0"/>
+            <c:extLst>
+              <c:ext xmlns:c15="http://schemas.microsoft.com/office/drawing/2012/chart" uri="{CE6537A1-D6FC-4f65-9D91-7224C49458BB}">
+                <c15:showLeaderLines val="0"/>
+              </c:ext>
+            </c:extLst>
+          </c:dLbls>
           <c:cat>
             <c:strRef>
               <c:f>Sheet1!$A$2:$A$4</c:f>
@@ -434,18 +548,13 @@
               </c:numCache>
             </c:numRef>
           </c:val>
+          <c:extLst>
+            <c:ext xmlns:c16="http://schemas.microsoft.com/office/drawing/2014/chart" uri="{C3380CC4-5D6E-409C-BE32-E72D297353CC}">
+              <c16:uniqueId val="{00000006-550C-A841-8C9E-5B534031EFD3}"/>
+            </c:ext>
+          </c:extLst>
         </c:ser>
         <c:dLbls>
-          <c:numFmt formatCode="0.0" sourceLinked="0"/>
-          <c:txPr>
-            <a:bodyPr/>
-            <a:lstStyle/>
-            <a:p>
-              <a:pPr>
-                <a:defRPr sz="1300" b="1"/>
-              </a:pPr>
-            </a:p>
-          </c:txPr>
           <c:dLblPos val="outEnd"/>
           <c:showLegendKey val="0"/>
           <c:showVal val="1"/>
@@ -453,7 +562,6 @@
           <c:showSerName val="0"/>
           <c:showPercent val="0"/>
           <c:showBubbleSize val="0"/>
-          <c:showLeaderLines val="1"/>
         </c:dLbls>
         <c:gapWidth val="60"/>
         <c:axId val="-2068027336"/>
@@ -466,6 +574,7 @@
         </c:scaling>
         <c:delete val="0"/>
         <c:axPos val="b"/>
+        <c:numFmt formatCode="General" sourceLinked="0"/>
         <c:majorTickMark val="none"/>
         <c:minorTickMark val="none"/>
         <c:tickLblPos val="nextTo"/>
@@ -483,6 +592,7 @@
             <a:pPr>
               <a:defRPr sz="1200"/>
             </a:pPr>
+            <a:endParaRPr lang="en-US"/>
           </a:p>
         </c:txPr>
         <c:crossAx val="-2113994440"/>
@@ -494,7 +604,9 @@
       </c:catAx>
       <c:valAx>
         <c:axId val="-2113994440"/>
-        <c:scaling/>
+        <c:scaling>
+          <c:orientation val="minMax"/>
+        </c:scaling>
         <c:delete val="0"/>
         <c:axPos val="l"/>
         <c:majorGridlines>
@@ -526,13 +638,17 @@
                 </a:solidFill>
               </a:defRPr>
             </a:pPr>
+            <a:endParaRPr lang="en-US"/>
           </a:p>
         </c:txPr>
         <c:crossAx val="-2068027336"/>
         <c:crosses val="autoZero"/>
+        <c:crossBetween val="between"/>
       </c:valAx>
     </c:plotArea>
+    <c:plotVisOnly val="1"/>
     <c:dispBlanksAs val="gap"/>
+    <c:showDLblsOverMax val="1"/>
   </c:chart>
   <c:txPr>
     <a:bodyPr/>
@@ -556,14 +672,19 @@
 </file>
 
 <file path=ppt/charts/chart3.xml><?xml version="1.0" encoding="utf-8"?>
-<c:chartSpace xmlns:c="http://schemas.openxmlformats.org/drawingml/2006/chart" xmlns:a="http://schemas.openxmlformats.org/drawingml/2006/main" xmlns:r="http://schemas.openxmlformats.org/officeDocument/2006/relationships">
+<c:chartSpace xmlns:c="http://schemas.openxmlformats.org/drawingml/2006/chart" xmlns:a="http://schemas.openxmlformats.org/drawingml/2006/main" xmlns:r="http://schemas.openxmlformats.org/officeDocument/2006/relationships" xmlns:c16r2="http://schemas.microsoft.com/office/drawing/2015/06/chart">
   <c:date1904 val="0"/>
+  <c:lang val="en-US"/>
+  <c:roundedCorners val="1"/>
+  <c:style val="2"/>
   <c:chart>
     <c:autoTitleDeleted val="1"/>
     <c:plotArea>
+      <c:layout/>
       <c:barChart>
         <c:barDir val="bar"/>
         <c:grouping val="clustered"/>
+        <c:varyColors val="1"/>
         <c:ser>
           <c:idx val="0"/>
           <c:order val="0"/>
@@ -582,93 +703,186 @@
           <c:dPt>
             <c:idx val="0"/>
             <c:invertIfNegative val="0"/>
+            <c:bubble3D val="0"/>
             <c:spPr>
               <a:solidFill>
                 <a:srgbClr val="A6A6A6"/>
               </a:solidFill>
             </c:spPr>
+            <c:extLst>
+              <c:ext xmlns:c16="http://schemas.microsoft.com/office/drawing/2014/chart" uri="{C3380CC4-5D6E-409C-BE32-E72D297353CC}">
+                <c16:uniqueId val="{00000001-8DFC-5F40-892D-7CF2BF52F2C1}"/>
+              </c:ext>
+            </c:extLst>
           </c:dPt>
           <c:dPt>
             <c:idx val="1"/>
             <c:invertIfNegative val="0"/>
+            <c:bubble3D val="0"/>
             <c:spPr>
               <a:solidFill>
                 <a:srgbClr val="A6A6A6"/>
               </a:solidFill>
             </c:spPr>
+            <c:extLst>
+              <c:ext xmlns:c16="http://schemas.microsoft.com/office/drawing/2014/chart" uri="{C3380CC4-5D6E-409C-BE32-E72D297353CC}">
+                <c16:uniqueId val="{00000003-8DFC-5F40-892D-7CF2BF52F2C1}"/>
+              </c:ext>
+            </c:extLst>
           </c:dPt>
           <c:dPt>
             <c:idx val="2"/>
             <c:invertIfNegative val="0"/>
+            <c:bubble3D val="0"/>
             <c:spPr>
               <a:solidFill>
                 <a:srgbClr val="A6A6A6"/>
               </a:solidFill>
             </c:spPr>
+            <c:extLst>
+              <c:ext xmlns:c16="http://schemas.microsoft.com/office/drawing/2014/chart" uri="{C3380CC4-5D6E-409C-BE32-E72D297353CC}">
+                <c16:uniqueId val="{00000005-8DFC-5F40-892D-7CF2BF52F2C1}"/>
+              </c:ext>
+            </c:extLst>
           </c:dPt>
           <c:dPt>
             <c:idx val="3"/>
             <c:invertIfNegative val="0"/>
+            <c:bubble3D val="0"/>
             <c:spPr>
               <a:solidFill>
                 <a:srgbClr val="A6A6A6"/>
               </a:solidFill>
             </c:spPr>
+            <c:extLst>
+              <c:ext xmlns:c16="http://schemas.microsoft.com/office/drawing/2014/chart" uri="{C3380CC4-5D6E-409C-BE32-E72D297353CC}">
+                <c16:uniqueId val="{00000007-8DFC-5F40-892D-7CF2BF52F2C1}"/>
+              </c:ext>
+            </c:extLst>
           </c:dPt>
           <c:dPt>
             <c:idx val="4"/>
             <c:invertIfNegative val="0"/>
+            <c:bubble3D val="0"/>
             <c:spPr>
               <a:solidFill>
                 <a:srgbClr val="A6A6A6"/>
               </a:solidFill>
             </c:spPr>
+            <c:extLst>
+              <c:ext xmlns:c16="http://schemas.microsoft.com/office/drawing/2014/chart" uri="{C3380CC4-5D6E-409C-BE32-E72D297353CC}">
+                <c16:uniqueId val="{00000009-8DFC-5F40-892D-7CF2BF52F2C1}"/>
+              </c:ext>
+            </c:extLst>
           </c:dPt>
           <c:dPt>
             <c:idx val="5"/>
             <c:invertIfNegative val="0"/>
+            <c:bubble3D val="0"/>
             <c:spPr>
               <a:solidFill>
                 <a:srgbClr val="AB3D3F"/>
               </a:solidFill>
             </c:spPr>
+            <c:extLst>
+              <c:ext xmlns:c16="http://schemas.microsoft.com/office/drawing/2014/chart" uri="{C3380CC4-5D6E-409C-BE32-E72D297353CC}">
+                <c16:uniqueId val="{0000000B-8DFC-5F40-892D-7CF2BF52F2C1}"/>
+              </c:ext>
+            </c:extLst>
           </c:dPt>
           <c:dPt>
             <c:idx val="6"/>
             <c:invertIfNegative val="0"/>
+            <c:bubble3D val="0"/>
             <c:spPr>
               <a:solidFill>
                 <a:srgbClr val="AB3D3F"/>
               </a:solidFill>
             </c:spPr>
+            <c:extLst>
+              <c:ext xmlns:c16="http://schemas.microsoft.com/office/drawing/2014/chart" uri="{C3380CC4-5D6E-409C-BE32-E72D297353CC}">
+                <c16:uniqueId val="{0000000D-8DFC-5F40-892D-7CF2BF52F2C1}"/>
+              </c:ext>
+            </c:extLst>
           </c:dPt>
           <c:dPt>
             <c:idx val="7"/>
             <c:invertIfNegative val="0"/>
+            <c:bubble3D val="0"/>
             <c:spPr>
               <a:solidFill>
                 <a:srgbClr val="AB3D3F"/>
               </a:solidFill>
             </c:spPr>
+            <c:extLst>
+              <c:ext xmlns:c16="http://schemas.microsoft.com/office/drawing/2014/chart" uri="{C3380CC4-5D6E-409C-BE32-E72D297353CC}">
+                <c16:uniqueId val="{0000000F-8DFC-5F40-892D-7CF2BF52F2C1}"/>
+              </c:ext>
+            </c:extLst>
           </c:dPt>
           <c:dPt>
             <c:idx val="8"/>
             <c:invertIfNegative val="0"/>
+            <c:bubble3D val="0"/>
             <c:spPr>
               <a:solidFill>
                 <a:srgbClr val="AB3D3F"/>
               </a:solidFill>
             </c:spPr>
+            <c:extLst>
+              <c:ext xmlns:c16="http://schemas.microsoft.com/office/drawing/2014/chart" uri="{C3380CC4-5D6E-409C-BE32-E72D297353CC}">
+                <c16:uniqueId val="{00000011-8DFC-5F40-892D-7CF2BF52F2C1}"/>
+              </c:ext>
+            </c:extLst>
           </c:dPt>
           <c:dPt>
             <c:idx val="9"/>
             <c:invertIfNegative val="0"/>
+            <c:bubble3D val="0"/>
             <c:spPr>
               <a:solidFill>
                 <a:srgbClr val="AB3D3F"/>
               </a:solidFill>
             </c:spPr>
+            <c:extLst>
+              <c:ext xmlns:c16="http://schemas.microsoft.com/office/drawing/2014/chart" uri="{C3380CC4-5D6E-409C-BE32-E72D297353CC}">
+                <c16:uniqueId val="{00000013-8DFC-5F40-892D-7CF2BF52F2C1}"/>
+              </c:ext>
+            </c:extLst>
           </c:dPt>
+          <c:dLbls>
+            <c:numFmt formatCode="\+#,##0;\-#,##0" sourceLinked="0"/>
+            <c:spPr>
+              <a:noFill/>
+              <a:ln>
+                <a:noFill/>
+              </a:ln>
+              <a:effectLst/>
+            </c:spPr>
+            <c:txPr>
+              <a:bodyPr/>
+              <a:lstStyle/>
+              <a:p>
+                <a:pPr>
+                  <a:defRPr sz="1300" b="1"/>
+                </a:pPr>
+                <a:endParaRPr lang="en-US"/>
+              </a:p>
+            </c:txPr>
+            <c:dLblPos val="outEnd"/>
+            <c:showLegendKey val="0"/>
+            <c:showVal val="1"/>
+            <c:showCatName val="0"/>
+            <c:showSerName val="0"/>
+            <c:showPercent val="0"/>
+            <c:showBubbleSize val="0"/>
+            <c:showLeaderLines val="0"/>
+            <c:extLst>
+              <c:ext xmlns:c15="http://schemas.microsoft.com/office/drawing/2012/chart" uri="{CE6537A1-D6FC-4f65-9D91-7224C49458BB}">
+                <c15:showLeaderLines val="0"/>
+              </c:ext>
+            </c:extLst>
+          </c:dLbls>
           <c:cat>
             <c:strRef>
               <c:f>Sheet1!$A$2:$A$11</c:f>
@@ -746,18 +960,13 @@
               </c:numCache>
             </c:numRef>
           </c:val>
+          <c:extLst>
+            <c:ext xmlns:c16="http://schemas.microsoft.com/office/drawing/2014/chart" uri="{C3380CC4-5D6E-409C-BE32-E72D297353CC}">
+              <c16:uniqueId val="{00000014-8DFC-5F40-892D-7CF2BF52F2C1}"/>
+            </c:ext>
+          </c:extLst>
         </c:ser>
         <c:dLbls>
-          <c:numFmt formatCode="+#,##0;-#,##0" sourceLinked="0"/>
-          <c:txPr>
-            <a:bodyPr/>
-            <a:lstStyle/>
-            <a:p>
-              <a:pPr>
-                <a:defRPr sz="1300" b="1"/>
-              </a:pPr>
-            </a:p>
-          </c:txPr>
           <c:dLblPos val="outEnd"/>
           <c:showLegendKey val="0"/>
           <c:showVal val="1"/>
@@ -765,7 +974,6 @@
           <c:showSerName val="0"/>
           <c:showPercent val="0"/>
           <c:showBubbleSize val="0"/>
-          <c:showLeaderLines val="1"/>
         </c:dLbls>
         <c:gapWidth val="60"/>
         <c:axId val="-2068027336"/>
@@ -778,6 +986,7 @@
         </c:scaling>
         <c:delete val="0"/>
         <c:axPos val="l"/>
+        <c:numFmt formatCode="General" sourceLinked="0"/>
         <c:majorTickMark val="none"/>
         <c:minorTickMark val="none"/>
         <c:tickLblPos val="low"/>
@@ -795,6 +1004,7 @@
             <a:pPr>
               <a:defRPr sz="1200"/>
             </a:pPr>
+            <a:endParaRPr lang="en-US"/>
           </a:p>
         </c:txPr>
         <c:crossAx val="-2113994440"/>
@@ -806,36 +1016,23 @@
       </c:catAx>
       <c:valAx>
         <c:axId val="-2113994440"/>
-        <c:scaling/>
-        <c:delete/>
+        <c:scaling>
+          <c:orientation val="minMax"/>
+        </c:scaling>
+        <c:delete val="1"/>
         <c:axPos val="b"/>
-        <c:numFmt formatCode="+#,##0;-#,##0" sourceLinked="0"/>
+        <c:numFmt formatCode="\+#,##0;\-#,##0" sourceLinked="0"/>
         <c:majorTickMark val="none"/>
         <c:minorTickMark val="none"/>
         <c:tickLblPos val="nextTo"/>
-        <c:spPr>
-          <a:ln>
-            <a:noFill/>
-          </a:ln>
-        </c:spPr>
-        <c:txPr>
-          <a:bodyPr/>
-          <a:lstStyle/>
-          <a:p>
-            <a:pPr>
-              <a:defRPr sz="1100">
-                <a:solidFill>
-                  <a:srgbClr val="595959"/>
-                </a:solidFill>
-              </a:defRPr>
-            </a:pPr>
-          </a:p>
-        </c:txPr>
         <c:crossAx val="-2068027336"/>
         <c:crosses val="autoZero"/>
+        <c:crossBetween val="between"/>
       </c:valAx>
     </c:plotArea>
+    <c:plotVisOnly val="1"/>
     <c:dispBlanksAs val="gap"/>
+    <c:showDLblsOverMax val="1"/>
   </c:chart>
   <c:txPr>
     <a:bodyPr/>
@@ -940,7 +1137,7 @@
           <a:p>
             <a:fld id="{CFDBAACF-1FE1-3041-8D48-9BE4F9D3A142}" type="datetimeFigureOut">
               <a:rPr lang="en-US" smtClean="0"/>
-              <a:t>2/3/26</a:t>
+              <a:t>9/25/26</a:t>
             </a:fld>
             <a:endParaRPr lang="en-US"/>
           </a:p>
@@ -1207,8 +1404,8 @@
 </p:notesMaster>
 </file>
 
-<file path=ppt/notesSlides/notesSlide10.xml><?xml version="1.0" encoding="utf-8"?>
-<p:notes xmlns:a="http://schemas.openxmlformats.org/drawingml/2006/main" xmlns:p="http://schemas.openxmlformats.org/presentationml/2006/main" xmlns:r="http://schemas.openxmlformats.org/officeDocument/2006/relationships">
+<file path=ppt/notesSlides/notesSlide1.xml><?xml version="1.0" encoding="utf-8"?>
+<p:notes xmlns:a="http://schemas.openxmlformats.org/drawingml/2006/main" xmlns:r="http://schemas.openxmlformats.org/officeDocument/2006/relationships" xmlns:p="http://schemas.openxmlformats.org/presentationml/2006/main">
   <p:cSld>
     <p:spTree>
       <p:nvGrpSpPr>
@@ -1228,7 +1425,7 @@
         <p:nvSpPr>
           <p:cNvPr id="2" name="Slide Image Placeholder 1"/>
           <p:cNvSpPr>
-            <a:spLocks noGrp="1"/>
+            <a:spLocks noGrp="1" noRot="1" noChangeAspect="1"/>
           </p:cNvSpPr>
           <p:nvPr>
             <p:ph type="sldImg" idx="2"/>
@@ -1243,7 +1440,7 @@
             <a:spLocks noGrp="1"/>
           </p:cNvSpPr>
           <p:nvPr>
-            <p:ph type="body" idx="3" sz="quarter"/>
+            <p:ph type="body" sz="quarter" idx="3"/>
           </p:nvPr>
         </p:nvSpPr>
         <p:spPr/>
@@ -1252,12 +1449,7 @@
           <a:lstStyle/>
           <a:p>
             <a:r>
-              <a:t>Symbols: i = district (the unit); mu_i = expected confirmed cases, 2014-17 (the target); w_i = allocation weight (the metric); pop_i = population; c_i = % of homes owning a net in i's region (DHS 2022); U_i = upper 95% confidence bound for mu_i; q_i = exact share; A_i = nets.</a:t>
-            </a:r>
-          </a:p>
-          <a:p>
-            <a:r>
-              <a:t>Sources: notebooks/04_allocation.ipynb cells alloc_cd05 (alpha 0.2677) and alloc_cd11 (beta_1 = +0.0823, p = 1.7e-07; U_i / mu_i = 1.198, 1.342, 1.162; nets per 1,000 people); src/models.py compute_allocation and hamilton. Coverage values: notebooks/02 cell cd06 and scripts/verify_claims.py section D.</a:t>
+              <a:t>Sources: notebooks/04_allocation.ipynb, cell alloc_cd07 (regional totals), alloc_cd11 (nets per 1,000 people) and alloc_cd13 (7,720 nets moved under the region-effects model).</a:t>
             </a:r>
           </a:p>
         </p:txBody>
@@ -1269,7 +1461,7 @@
             <a:spLocks noGrp="1"/>
           </p:cNvSpPr>
           <p:nvPr>
-            <p:ph type="sldNum" idx="5" sz="quarter"/>
+            <p:ph type="sldNum" sz="quarter" idx="5"/>
           </p:nvPr>
         </p:nvSpPr>
         <p:spPr/>
@@ -1282,8 +1474,8 @@
 </p:notes>
 </file>
 
-<file path=ppt/notesSlides/notesSlide11.xml><?xml version="1.0" encoding="utf-8"?>
-<p:notes xmlns:a="http://schemas.openxmlformats.org/drawingml/2006/main" xmlns:p="http://schemas.openxmlformats.org/presentationml/2006/main" xmlns:r="http://schemas.openxmlformats.org/officeDocument/2006/relationships">
+<file path=ppt/notesSlides/notesSlide10.xml><?xml version="1.0" encoding="utf-8"?>
+<p:notes xmlns:a="http://schemas.openxmlformats.org/drawingml/2006/main" xmlns:r="http://schemas.openxmlformats.org/officeDocument/2006/relationships" xmlns:p="http://schemas.openxmlformats.org/presentationml/2006/main">
   <p:cSld>
     <p:spTree>
       <p:nvGrpSpPr>
@@ -1303,7 +1495,7 @@
         <p:nvSpPr>
           <p:cNvPr id="2" name="Slide Image Placeholder 1"/>
           <p:cNvSpPr>
-            <a:spLocks noGrp="1"/>
+            <a:spLocks noGrp="1" noRot="1" noChangeAspect="1"/>
           </p:cNvSpPr>
           <p:nvPr>
             <p:ph type="sldImg" idx="2"/>
@@ -1318,7 +1510,7 @@
             <a:spLocks noGrp="1"/>
           </p:cNvSpPr>
           <p:nvPr>
-            <p:ph type="body" idx="3" sz="quarter"/>
+            <p:ph type="body" sz="quarter" idx="3"/>
           </p:nvPr>
         </p:nvSpPr>
         <p:spPr/>
@@ -1327,7 +1519,7 @@
           <a:lstStyle/>
           <a:p>
             <a:r>
-              <a:t>Sources: cases per person and the upper-to-expected ratios 1.198, 1.342 and 1.162: notebooks/04_allocation.ipynb cell alloc_cd11. Both maps are drawn with src/viz.plot_district_choropleth from models.compute_allocation, zoomed to the north like the allocation map. The two-map layout (burden next to uncertainty) follows the course roadmap.</a:t>
+              <a:t>Sources: the 50-district schedule in reports/allocation.md reproduces exactly from notebooks/04_allocation.ipynb (cells alloc_cd07 and alloc_cd09; scripts/verify_claims.py section C checks all 50 rows). Map drawn with src/viz.plot_district_choropleth from the same allocation, zoomed to the north. The three pre-2018 districts later split (Garu-Tempane, Savelugu-Nanton, Bunkpurugu-Yunyoo) show their total on both successor areas.</a:t>
             </a:r>
           </a:p>
         </p:txBody>
@@ -1339,7 +1531,7 @@
             <a:spLocks noGrp="1"/>
           </p:cNvSpPr>
           <p:nvPr>
-            <p:ph type="sldNum" idx="5" sz="quarter"/>
+            <p:ph type="sldNum" sz="quarter" idx="5"/>
           </p:nvPr>
         </p:nvSpPr>
         <p:spPr/>
@@ -1352,8 +1544,8 @@
 </p:notes>
 </file>
 
-<file path=ppt/notesSlides/notesSlide12.xml><?xml version="1.0" encoding="utf-8"?>
-<p:notes xmlns:a="http://schemas.openxmlformats.org/drawingml/2006/main" xmlns:p="http://schemas.openxmlformats.org/presentationml/2006/main" xmlns:r="http://schemas.openxmlformats.org/officeDocument/2006/relationships">
+<file path=ppt/notesSlides/notesSlide11.xml><?xml version="1.0" encoding="utf-8"?>
+<p:notes xmlns:a="http://schemas.openxmlformats.org/drawingml/2006/main" xmlns:r="http://schemas.openxmlformats.org/officeDocument/2006/relationships" xmlns:p="http://schemas.openxmlformats.org/presentationml/2006/main">
   <p:cSld>
     <p:spTree>
       <p:nvGrpSpPr>
@@ -1373,7 +1565,7 @@
         <p:nvSpPr>
           <p:cNvPr id="2" name="Slide Image Placeholder 1"/>
           <p:cNvSpPr>
-            <a:spLocks noGrp="1"/>
+            <a:spLocks noGrp="1" noRot="1" noChangeAspect="1"/>
           </p:cNvSpPr>
           <p:nvPr>
             <p:ph type="sldImg" idx="2"/>
@@ -1388,7 +1580,7 @@
             <a:spLocks noGrp="1"/>
           </p:cNvSpPr>
           <p:nvPr>
-            <p:ph type="body" idx="3" sz="quarter"/>
+            <p:ph type="body" sz="quarter" idx="3"/>
           </p:nvPr>
         </p:nvSpPr>
         <p:spPr/>
@@ -1397,7 +1589,7 @@
           <a:lstStyle/>
           <a:p>
             <a:r>
-              <a:t>Sources: the 50-district schedule in reports/allocation.md reproduces exactly from notebooks/04_allocation.ipynb (cells alloc_cd07 and alloc_cd09; scripts/verify_claims.py section C checks all 50 rows). Map drawn with src/viz.plot_district_choropleth from the same allocation, zoomed to the north. The three pre-2018 districts later split (Garu-Tempane, Savelugu-Nanton, Bunkpurugu-Yunyoo) show their total on both successor areas.</a:t>
+              <a:t>Sources: gains and losses: notebooks/04_allocation.ipynb alloc_cd09; cases-per-person ranks: alloc_cd11 (Tamale lowest of 50, Nabdam highest of 50, Bole highest in its region). Ghana's ITN strategy: PMI Ghana Malaria Operational Plan FY2017. Tamale Teaching Hospital as the only tertiary provider for the three northern regions: https://tth.gov.gh/about</a:t>
             </a:r>
           </a:p>
         </p:txBody>
@@ -1409,7 +1601,7 @@
             <a:spLocks noGrp="1"/>
           </p:cNvSpPr>
           <p:nvPr>
-            <p:ph type="sldNum" idx="5" sz="quarter"/>
+            <p:ph type="sldNum" sz="quarter" idx="5"/>
           </p:nvPr>
         </p:nvSpPr>
         <p:spPr/>
@@ -1422,8 +1614,8 @@
 </p:notes>
 </file>
 
-<file path=ppt/notesSlides/notesSlide13.xml><?xml version="1.0" encoding="utf-8"?>
-<p:notes xmlns:a="http://schemas.openxmlformats.org/drawingml/2006/main" xmlns:p="http://schemas.openxmlformats.org/presentationml/2006/main" xmlns:r="http://schemas.openxmlformats.org/officeDocument/2006/relationships">
+<file path=ppt/notesSlides/notesSlide12.xml><?xml version="1.0" encoding="utf-8"?>
+<p:notes xmlns:a="http://schemas.openxmlformats.org/drawingml/2006/main" xmlns:r="http://schemas.openxmlformats.org/officeDocument/2006/relationships" xmlns:p="http://schemas.openxmlformats.org/presentationml/2006/main">
   <p:cSld>
     <p:spTree>
       <p:nvGrpSpPr>
@@ -1443,7 +1635,7 @@
         <p:nvSpPr>
           <p:cNvPr id="2" name="Slide Image Placeholder 1"/>
           <p:cNvSpPr>
-            <a:spLocks noGrp="1"/>
+            <a:spLocks noGrp="1" noRot="1" noChangeAspect="1"/>
           </p:cNvSpPr>
           <p:nvPr>
             <p:ph type="sldImg" idx="2"/>
@@ -1458,7 +1650,7 @@
             <a:spLocks noGrp="1"/>
           </p:cNvSpPr>
           <p:nvPr>
-            <p:ph type="body" idx="3" sz="quarter"/>
+            <p:ph type="body" sz="quarter" idx="3"/>
           </p:nvPr>
         </p:nvSpPr>
         <p:spPr/>
@@ -1467,7 +1659,7 @@
           <a:lstStyle/>
           <a:p>
             <a:r>
-              <a:t>Sources: gains and losses: notebooks/04_allocation.ipynb alloc_cd09; cases-per-person ranks: alloc_cd11 (Tamale lowest of 50, Nabdam highest of 50, Bole highest in its region). Ghana's ITN strategy: PMI Ghana Malaria Operational Plan FY2017. Tamale Teaching Hospital as the only tertiary provider for the three northern regions: https://tth.gov.gh/about</a:t>
+              <a:t>Sources: notebooks/04_allocation.ipynb cell alloc_cd13, which also prints the coverage it uses (Savannah 79.1%, North East 62.8%; published 79.1% and 62.6%, GDHS 2022 Table 12.1) and the Northern cluster-bootstrap bounds 61.4% and 74.0% (as in notebooks/02 cell cd39).</a:t>
             </a:r>
           </a:p>
         </p:txBody>
@@ -1479,7 +1671,7 @@
             <a:spLocks noGrp="1"/>
           </p:cNvSpPr>
           <p:nvPr>
-            <p:ph type="sldNum" idx="5" sz="quarter"/>
+            <p:ph type="sldNum" sz="quarter" idx="5"/>
           </p:nvPr>
         </p:nvSpPr>
         <p:spPr/>
@@ -1492,8 +1684,8 @@
 </p:notes>
 </file>
 
-<file path=ppt/notesSlides/notesSlide14.xml><?xml version="1.0" encoding="utf-8"?>
-<p:notes xmlns:a="http://schemas.openxmlformats.org/drawingml/2006/main" xmlns:p="http://schemas.openxmlformats.org/presentationml/2006/main" xmlns:r="http://schemas.openxmlformats.org/officeDocument/2006/relationships">
+<file path=ppt/notesSlides/notesSlide13.xml><?xml version="1.0" encoding="utf-8"?>
+<p:notes xmlns:a="http://schemas.openxmlformats.org/drawingml/2006/main" xmlns:r="http://schemas.openxmlformats.org/officeDocument/2006/relationships" xmlns:p="http://schemas.openxmlformats.org/presentationml/2006/main">
   <p:cSld>
     <p:spTree>
       <p:nvGrpSpPr>
@@ -1513,7 +1705,7 @@
         <p:nvSpPr>
           <p:cNvPr id="2" name="Slide Image Placeholder 1"/>
           <p:cNvSpPr>
-            <a:spLocks noGrp="1"/>
+            <a:spLocks noGrp="1" noRot="1" noChangeAspect="1"/>
           </p:cNvSpPr>
           <p:nvPr>
             <p:ph type="sldImg" idx="2"/>
@@ -1528,7 +1720,7 @@
             <a:spLocks noGrp="1"/>
           </p:cNvSpPr>
           <p:nvPr>
-            <p:ph type="body" idx="3" sz="quarter"/>
+            <p:ph type="body" sz="quarter" idx="3"/>
           </p:nvPr>
         </p:nvSpPr>
         <p:spPr/>
@@ -1537,7 +1729,7 @@
           <a:lstStyle/>
           <a:p>
             <a:r>
-              <a:t>Sources: notebooks/04_allocation.ipynb cell alloc_cd13, which also prints the coverage it uses (Savannah 79.1%, North East 62.8%; published 79.1% and 62.6%, GDHS 2022 Table 12.1) and the Northern cluster-bootstrap bounds 61.4% and 74.0% (as in notebooks/02 cell cd39).</a:t>
+              <a:t>Sources: 207 of 260 districts: scripts/verify_claims.py (map join). Test positivity and cases per person by region: scripts/verify_claims.py section E. Spraying and chemoprevention counts: scripts/verify_claims.py section E, from the raw surveillance workbook in the course data package (these columns are not in the curated district file). Campaign rules: PMI Ghana Malaria Operational Plan FY2017. Privacy: git history holds no data files and no notebook outputs (checked 2026-09-22).</a:t>
             </a:r>
           </a:p>
         </p:txBody>
@@ -1549,7 +1741,7 @@
             <a:spLocks noGrp="1"/>
           </p:cNvSpPr>
           <p:nvPr>
-            <p:ph type="sldNum" idx="5" sz="quarter"/>
+            <p:ph type="sldNum" sz="quarter" idx="5"/>
           </p:nvPr>
         </p:nvSpPr>
         <p:spPr/>
@@ -1562,8 +1754,8 @@
 </p:notes>
 </file>
 
-<file path=ppt/notesSlides/notesSlide15.xml><?xml version="1.0" encoding="utf-8"?>
-<p:notes xmlns:a="http://schemas.openxmlformats.org/drawingml/2006/main" xmlns:p="http://schemas.openxmlformats.org/presentationml/2006/main" xmlns:r="http://schemas.openxmlformats.org/officeDocument/2006/relationships">
+<file path=ppt/notesSlides/notesSlide14.xml><?xml version="1.0" encoding="utf-8"?>
+<p:notes xmlns:a="http://schemas.openxmlformats.org/drawingml/2006/main" xmlns:r="http://schemas.openxmlformats.org/officeDocument/2006/relationships" xmlns:p="http://schemas.openxmlformats.org/presentationml/2006/main">
   <p:cSld>
     <p:spTree>
       <p:nvGrpSpPr>
@@ -1583,7 +1775,7 @@
         <p:nvSpPr>
           <p:cNvPr id="2" name="Slide Image Placeholder 1"/>
           <p:cNvSpPr>
-            <a:spLocks noGrp="1"/>
+            <a:spLocks noGrp="1" noRot="1" noChangeAspect="1"/>
           </p:cNvSpPr>
           <p:nvPr>
             <p:ph type="sldImg" idx="2"/>
@@ -1598,7 +1790,7 @@
             <a:spLocks noGrp="1"/>
           </p:cNvSpPr>
           <p:nvPr>
-            <p:ph type="body" idx="3" sz="quarter"/>
+            <p:ph type="body" sz="quarter" idx="3"/>
           </p:nvPr>
         </p:nvSpPr>
         <p:spPr/>
@@ -1607,7 +1799,7 @@
           <a:lstStyle/>
           <a:p>
             <a:r>
-              <a:t>Sources: 207 of 260 districts: scripts/verify_claims.py (map join). Test positivity and cases per person by region: scripts/verify_claims.py section E. Spraying and chemoprevention counts: scripts/verify_claims.py section E, from the raw surveillance workbook in the course data package (these columns are not in the curated district file). Campaign rules: PMI Ghana Malaria Operational Plan FY2017. Privacy: git history holds no data files and no notebook outputs (checked 2026-09-22).</a:t>
+              <a:t>Sources: 11 districts, 3,740 nets, 79.1% and 62.8%: notebooks/04_allocation.ipynb alloc_cd13. 39 of 50 districts: scripts/verify_claims.py section E. Empty ITN intervals: notebooks/02 cell cd37. No district identifier or parasitaemia: notebooks/02 cell cd06.</a:t>
             </a:r>
           </a:p>
         </p:txBody>
@@ -1619,7 +1811,7 @@
             <a:spLocks noGrp="1"/>
           </p:cNvSpPr>
           <p:nvPr>
-            <p:ph type="sldNum" idx="5" sz="quarter"/>
+            <p:ph type="sldNum" sz="quarter" idx="5"/>
           </p:nvPr>
         </p:nvSpPr>
         <p:spPr/>
@@ -1632,8 +1824,8 @@
 </p:notes>
 </file>
 
-<file path=ppt/notesSlides/notesSlide16.xml><?xml version="1.0" encoding="utf-8"?>
-<p:notes xmlns:a="http://schemas.openxmlformats.org/drawingml/2006/main" xmlns:p="http://schemas.openxmlformats.org/presentationml/2006/main" xmlns:r="http://schemas.openxmlformats.org/officeDocument/2006/relationships">
+<file path=ppt/notesSlides/notesSlide15.xml><?xml version="1.0" encoding="utf-8"?>
+<p:notes xmlns:a="http://schemas.openxmlformats.org/drawingml/2006/main" xmlns:r="http://schemas.openxmlformats.org/officeDocument/2006/relationships" xmlns:p="http://schemas.openxmlformats.org/presentationml/2006/main">
   <p:cSld>
     <p:spTree>
       <p:nvGrpSpPr>
@@ -1653,7 +1845,7 @@
         <p:nvSpPr>
           <p:cNvPr id="2" name="Slide Image Placeholder 1"/>
           <p:cNvSpPr>
-            <a:spLocks noGrp="1"/>
+            <a:spLocks noGrp="1" noRot="1" noChangeAspect="1"/>
           </p:cNvSpPr>
           <p:nvPr>
             <p:ph type="sldImg" idx="2"/>
@@ -1668,7 +1860,7 @@
             <a:spLocks noGrp="1"/>
           </p:cNvSpPr>
           <p:nvPr>
-            <p:ph type="body" idx="3" sz="quarter"/>
+            <p:ph type="body" sz="quarter" idx="3"/>
           </p:nvPr>
         </p:nvSpPr>
         <p:spPr/>
@@ -1677,7 +1869,7 @@
           <a:lstStyle/>
           <a:p>
             <a:r>
-              <a:t>Sources: 11 districts, 3,740 nets, 79.1% and 62.8%: notebooks/04_allocation.ipynb alloc_cd13. 39 of 50 districts: scripts/verify_claims.py section E. Empty ITN intervals: notebooks/02 cell cd37. No district identifier or parasitaemia: notebooks/02 cell cd06.</a:t>
+              <a:t>The footnote is the group's AI declaration. Each member's own AI-use declaration is part of their individual reflection.</a:t>
             </a:r>
           </a:p>
         </p:txBody>
@@ -1689,7 +1881,7 @@
             <a:spLocks noGrp="1"/>
           </p:cNvSpPr>
           <p:nvPr>
-            <p:ph type="sldNum" idx="5" sz="quarter"/>
+            <p:ph type="sldNum" sz="quarter" idx="5"/>
           </p:nvPr>
         </p:nvSpPr>
         <p:spPr/>
@@ -1702,8 +1894,8 @@
 </p:notes>
 </file>
 
-<file path=ppt/notesSlides/notesSlide17.xml><?xml version="1.0" encoding="utf-8"?>
-<p:notes xmlns:a="http://schemas.openxmlformats.org/drawingml/2006/main" xmlns:p="http://schemas.openxmlformats.org/presentationml/2006/main" xmlns:r="http://schemas.openxmlformats.org/officeDocument/2006/relationships">
+<file path=ppt/notesSlides/notesSlide2.xml><?xml version="1.0" encoding="utf-8"?>
+<p:notes xmlns:a="http://schemas.openxmlformats.org/drawingml/2006/main" xmlns:r="http://schemas.openxmlformats.org/officeDocument/2006/relationships" xmlns:p="http://schemas.openxmlformats.org/presentationml/2006/main">
   <p:cSld>
     <p:spTree>
       <p:nvGrpSpPr>
@@ -1723,7 +1915,7 @@
         <p:nvSpPr>
           <p:cNvPr id="2" name="Slide Image Placeholder 1"/>
           <p:cNvSpPr>
-            <a:spLocks noGrp="1"/>
+            <a:spLocks noGrp="1" noRot="1" noChangeAspect="1"/>
           </p:cNvSpPr>
           <p:nvPr>
             <p:ph type="sldImg" idx="2"/>
@@ -1738,7 +1930,7 @@
             <a:spLocks noGrp="1"/>
           </p:cNvSpPr>
           <p:nvPr>
-            <p:ph type="body" idx="3" sz="quarter"/>
+            <p:ph type="body" sz="quarter" idx="3"/>
           </p:nvPr>
         </p:nvSpPr>
         <p:spPr/>
@@ -1747,7 +1939,7 @@
           <a:lstStyle/>
           <a:p>
             <a:r>
-              <a:t>The footnote is the group's AI declaration. Each member's own AI-use declaration is part of their individual reflection.</a:t>
+              <a:t>Sources: Oppong et al., Malaria Journal, doi:10.1186/s12936-025-05724-9 (https://pmc.ncbi.nlm.nih.gov/articles/PMC12829291/); Ghana DHS 2022 final report FR387, Table 12.15.</a:t>
             </a:r>
           </a:p>
         </p:txBody>
@@ -1759,7 +1951,7 @@
             <a:spLocks noGrp="1"/>
           </p:cNvSpPr>
           <p:nvPr>
-            <p:ph type="sldNum" idx="5" sz="quarter"/>
+            <p:ph type="sldNum" sz="quarter" idx="5"/>
           </p:nvPr>
         </p:nvSpPr>
         <p:spPr/>
@@ -1773,7 +1965,7 @@
 </file>
 
 <file path=ppt/notesSlides/notesSlide3.xml><?xml version="1.0" encoding="utf-8"?>
-<p:notes xmlns:a="http://schemas.openxmlformats.org/drawingml/2006/main" xmlns:p="http://schemas.openxmlformats.org/presentationml/2006/main" xmlns:r="http://schemas.openxmlformats.org/officeDocument/2006/relationships">
+<p:notes xmlns:a="http://schemas.openxmlformats.org/drawingml/2006/main" xmlns:r="http://schemas.openxmlformats.org/officeDocument/2006/relationships" xmlns:p="http://schemas.openxmlformats.org/presentationml/2006/main">
   <p:cSld>
     <p:spTree>
       <p:nvGrpSpPr>
@@ -1793,7 +1985,7 @@
         <p:nvSpPr>
           <p:cNvPr id="2" name="Slide Image Placeholder 1"/>
           <p:cNvSpPr>
-            <a:spLocks noGrp="1"/>
+            <a:spLocks noGrp="1" noRot="1" noChangeAspect="1"/>
           </p:cNvSpPr>
           <p:nvPr>
             <p:ph type="sldImg" idx="2"/>
@@ -1808,7 +2000,7 @@
             <a:spLocks noGrp="1"/>
           </p:cNvSpPr>
           <p:nvPr>
-            <p:ph type="body" idx="3" sz="quarter"/>
+            <p:ph type="body" sz="quarter" idx="3"/>
           </p:nvPr>
         </p:nvSpPr>
         <p:spPr/>
@@ -1817,7 +2009,7 @@
           <a:lstStyle/>
           <a:p>
             <a:r>
-              <a:t>Sources: notebooks/04_allocation.ipynb, cell alloc_cd07 (regional totals), alloc_cd11 (nets per 1,000 people) and alloc_cd13 (7,720 nets moved under the region-effects model).</a:t>
+              <a:t>Sources: 17,933 households and 618 clusters: data dictionary and notebooks/02 cell cd03. 71.0% vs 66.8% (claim C-01): notebooks/01_eda.ipynb cell eda_cd05. 50 districts on 53 polygons, 207 of 260 districts without data: scripts/verify_claims.py (map join, same logic as src/viz.py). Maps: figures/b1_data_availability.png and figures/b1_district_case_rate.png from notebook 01, with their titles trimmed.</a:t>
             </a:r>
           </a:p>
         </p:txBody>
@@ -1829,7 +2021,7 @@
             <a:spLocks noGrp="1"/>
           </p:cNvSpPr>
           <p:nvPr>
-            <p:ph type="sldNum" idx="5" sz="quarter"/>
+            <p:ph type="sldNum" sz="quarter" idx="5"/>
           </p:nvPr>
         </p:nvSpPr>
         <p:spPr/>
@@ -1843,7 +2035,7 @@
 </file>
 
 <file path=ppt/notesSlides/notesSlide4.xml><?xml version="1.0" encoding="utf-8"?>
-<p:notes xmlns:a="http://schemas.openxmlformats.org/drawingml/2006/main" xmlns:p="http://schemas.openxmlformats.org/presentationml/2006/main" xmlns:r="http://schemas.openxmlformats.org/officeDocument/2006/relationships">
+<p:notes xmlns:a="http://schemas.openxmlformats.org/drawingml/2006/main" xmlns:r="http://schemas.openxmlformats.org/officeDocument/2006/relationships" xmlns:p="http://schemas.openxmlformats.org/presentationml/2006/main">
   <p:cSld>
     <p:spTree>
       <p:nvGrpSpPr>
@@ -1863,7 +2055,7 @@
         <p:nvSpPr>
           <p:cNvPr id="2" name="Slide Image Placeholder 1"/>
           <p:cNvSpPr>
-            <a:spLocks noGrp="1"/>
+            <a:spLocks noGrp="1" noRot="1" noChangeAspect="1"/>
           </p:cNvSpPr>
           <p:nvPr>
             <p:ph type="sldImg" idx="2"/>
@@ -1878,7 +2070,7 @@
             <a:spLocks noGrp="1"/>
           </p:cNvSpPr>
           <p:nvPr>
-            <p:ph type="body" idx="3" sz="quarter"/>
+            <p:ph type="body" sz="quarter" idx="3"/>
           </p:nvPr>
         </p:nvSpPr>
         <p:spPr/>
@@ -1887,7 +2079,7 @@
           <a:lstStyle/>
           <a:p>
             <a:r>
-              <a:t>Sources: Oppong et al., Malaria Journal, doi:10.1186/s12936-025-05724-9 (https://pmc.ncbi.nlm.nih.gov/articles/PMC12829291/); Ghana DHS 2022 final report FR387, Table 12.15.</a:t>
+              <a:t>Sources: notebooks/02_distributions.ipynb cells cd09 (77,183), cd15 (442, 122,882, 278 times), cd18 (0.395), cd25 and cd26 (54,147; alpha 0.2677; AIC gap 2,393,669). Figure: figures/a3_poisson_vs_nb.png, title trimmed.</a:t>
             </a:r>
           </a:p>
         </p:txBody>
@@ -1899,7 +2091,7 @@
             <a:spLocks noGrp="1"/>
           </p:cNvSpPr>
           <p:nvPr>
-            <p:ph type="sldNum" idx="5" sz="quarter"/>
+            <p:ph type="sldNum" sz="quarter" idx="5"/>
           </p:nvPr>
         </p:nvSpPr>
         <p:spPr/>
@@ -1913,7 +2105,7 @@
 </file>
 
 <file path=ppt/notesSlides/notesSlide5.xml><?xml version="1.0" encoding="utf-8"?>
-<p:notes xmlns:a="http://schemas.openxmlformats.org/drawingml/2006/main" xmlns:p="http://schemas.openxmlformats.org/presentationml/2006/main" xmlns:r="http://schemas.openxmlformats.org/officeDocument/2006/relationships">
+<p:notes xmlns:a="http://schemas.openxmlformats.org/drawingml/2006/main" xmlns:r="http://schemas.openxmlformats.org/officeDocument/2006/relationships" xmlns:p="http://schemas.openxmlformats.org/presentationml/2006/main">
   <p:cSld>
     <p:spTree>
       <p:nvGrpSpPr>
@@ -1933,7 +2125,7 @@
         <p:nvSpPr>
           <p:cNvPr id="2" name="Slide Image Placeholder 1"/>
           <p:cNvSpPr>
-            <a:spLocks noGrp="1"/>
+            <a:spLocks noGrp="1" noRot="1" noChangeAspect="1"/>
           </p:cNvSpPr>
           <p:nvPr>
             <p:ph type="sldImg" idx="2"/>
@@ -1948,7 +2140,7 @@
             <a:spLocks noGrp="1"/>
           </p:cNvSpPr>
           <p:nvPr>
-            <p:ph type="body" idx="3" sz="quarter"/>
+            <p:ph type="body" sz="quarter" idx="3"/>
           </p:nvPr>
         </p:nvSpPr>
         <p:spPr/>
@@ -1957,7 +2149,7 @@
           <a:lstStyle/>
           <a:p>
             <a:r>
-              <a:t>Sources: 17,933 households and 618 clusters: data dictionary and notebooks/02 cell cd03. 71.0% vs 66.8% (claim C-01): notebooks/01_eda.ipynb cell eda_cd05. 50 districts on 53 polygons, 207 of 260 districts without data: scripts/verify_claims.py (map join, same logic as src/viz.py). Maps: figures/b1_data_availability.png and figures/b1_district_case_rate.png from notebook 01, with their titles trimmed.</a:t>
+              <a:t>Sources: notebooks/02_distributions.ipynb cells cd31 (582 households, 20 clusters), cd33 and cd34 (15.20 vs 7.17, 2.12 times, design effect 4.50), cd37 (published ITN intervals empty, 0 of 76), cd39 (67.69% vs 67.6%). Seed spread 4.46 to 5.39 and design-based 4.18: scripts/verify_claims.py section A. Rank 10th of 16: scripts/verify_claims.py section D. Figure: figures/a4_bootstrap_ci_comparison.png, title trimmed.</a:t>
             </a:r>
           </a:p>
         </p:txBody>
@@ -1969,7 +2161,7 @@
             <a:spLocks noGrp="1"/>
           </p:cNvSpPr>
           <p:nvPr>
-            <p:ph type="sldNum" idx="5" sz="quarter"/>
+            <p:ph type="sldNum" sz="quarter" idx="5"/>
           </p:nvPr>
         </p:nvSpPr>
         <p:spPr/>
@@ -1983,7 +2175,7 @@
 </file>
 
 <file path=ppt/notesSlides/notesSlide6.xml><?xml version="1.0" encoding="utf-8"?>
-<p:notes xmlns:a="http://schemas.openxmlformats.org/drawingml/2006/main" xmlns:p="http://schemas.openxmlformats.org/presentationml/2006/main" xmlns:r="http://schemas.openxmlformats.org/officeDocument/2006/relationships">
+<p:notes xmlns:a="http://schemas.openxmlformats.org/drawingml/2006/main" xmlns:r="http://schemas.openxmlformats.org/officeDocument/2006/relationships" xmlns:p="http://schemas.openxmlformats.org/presentationml/2006/main">
   <p:cSld>
     <p:spTree>
       <p:nvGrpSpPr>
@@ -2003,7 +2195,7 @@
         <p:nvSpPr>
           <p:cNvPr id="2" name="Slide Image Placeholder 1"/>
           <p:cNvSpPr>
-            <a:spLocks noGrp="1"/>
+            <a:spLocks noGrp="1" noRot="1" noChangeAspect="1"/>
           </p:cNvSpPr>
           <p:nvPr>
             <p:ph type="sldImg" idx="2"/>
@@ -2018,7 +2210,7 @@
             <a:spLocks noGrp="1"/>
           </p:cNvSpPr>
           <p:nvPr>
-            <p:ph type="body" idx="3" sz="quarter"/>
+            <p:ph type="body" sz="quarter" idx="3"/>
           </p:nvPr>
         </p:nvSpPr>
         <p:spPr/>
@@ -2027,7 +2219,7 @@
           <a:lstStyle/>
           <a:p>
             <a:r>
-              <a:t>Sources: notebooks/02_distributions.ipynb cells cd09 (77,183), cd15 (442, 122,882, 278 times), cd18 (0.395), cd25 and cd26 (54,147; alpha 0.2677; AIC gap 2,393,669). Figure: figures/a3_poisson_vs_nb.png, title trimmed.</a:t>
+              <a:t>Sources: notebooks/03_pipeline_leakage.ipynb cells leak_cd04 (87,144 vs 87,356), leak_cd06 (R² 1.0000 vs 0.2618), leak_cd08 (one seed), leak_cd12 (500 seeds) and leak_cd14 (whole region held out); the table itself is leak_cd10.</a:t>
             </a:r>
           </a:p>
         </p:txBody>
@@ -2039,7 +2231,7 @@
             <a:spLocks noGrp="1"/>
           </p:cNvSpPr>
           <p:nvPr>
-            <p:ph type="sldNum" idx="5" sz="quarter"/>
+            <p:ph type="sldNum" sz="quarter" idx="5"/>
           </p:nvPr>
         </p:nvSpPr>
         <p:spPr/>
@@ -2053,7 +2245,7 @@
 </file>
 
 <file path=ppt/notesSlides/notesSlide7.xml><?xml version="1.0" encoding="utf-8"?>
-<p:notes xmlns:a="http://schemas.openxmlformats.org/drawingml/2006/main" xmlns:p="http://schemas.openxmlformats.org/presentationml/2006/main" xmlns:r="http://schemas.openxmlformats.org/officeDocument/2006/relationships">
+<p:notes xmlns:a="http://schemas.openxmlformats.org/drawingml/2006/main" xmlns:r="http://schemas.openxmlformats.org/officeDocument/2006/relationships" xmlns:p="http://schemas.openxmlformats.org/presentationml/2006/main">
   <p:cSld>
     <p:spTree>
       <p:nvGrpSpPr>
@@ -2073,7 +2265,7 @@
         <p:nvSpPr>
           <p:cNvPr id="2" name="Slide Image Placeholder 1"/>
           <p:cNvSpPr>
-            <a:spLocks noGrp="1"/>
+            <a:spLocks noGrp="1" noRot="1" noChangeAspect="1"/>
           </p:cNvSpPr>
           <p:nvPr>
             <p:ph type="sldImg" idx="2"/>
@@ -2088,7 +2280,7 @@
             <a:spLocks noGrp="1"/>
           </p:cNvSpPr>
           <p:nvPr>
-            <p:ph type="body" idx="3" sz="quarter"/>
+            <p:ph type="body" sz="quarter" idx="3"/>
           </p:nvPr>
         </p:nvSpPr>
         <p:spPr/>
@@ -2097,7 +2289,7 @@
           <a:lstStyle/>
           <a:p>
             <a:r>
-              <a:t>Sources: notebooks/02_distributions.ipynb cells cd31 (582 households, 20 clusters), cd33 and cd34 (15.20 vs 7.17, 2.12 times, design effect 4.50), cd37 (published ITN intervals empty, 0 of 76), cd39 (67.69% vs 67.6%). Seed spread 4.46 to 5.39 and design-based 4.18: scripts/verify_claims.py section A. Rank 10th of 16: scripts/verify_claims.py section D. Figure: figures/a4_bootstrap_ci_comparison.png, title trimmed.</a:t>
+              <a:t>Sources: notebooks/03_pipeline_leakage.ipynb, cells leak_cd12 (500 seeds) and leak_cd14 (whole region held out, via io.split_data(..., hold_out=region)). Literature: Ploton et al. 2020, Nature Communications 11:4540, doi:10.1038/s41467-020-18321-y; Kattenborn et al. 2022, ISPRS Open Journal of Photogrammetry and Remote Sensing, doi:10.1016/j.ophoto.2022.100018 (up to 28% overestimation of F1-score).</a:t>
             </a:r>
           </a:p>
         </p:txBody>
@@ -2109,7 +2301,7 @@
             <a:spLocks noGrp="1"/>
           </p:cNvSpPr>
           <p:nvPr>
-            <p:ph type="sldNum" idx="5" sz="quarter"/>
+            <p:ph type="sldNum" sz="quarter" idx="5"/>
           </p:nvPr>
         </p:nvSpPr>
         <p:spPr/>
@@ -2123,7 +2315,7 @@
 </file>
 
 <file path=ppt/notesSlides/notesSlide8.xml><?xml version="1.0" encoding="utf-8"?>
-<p:notes xmlns:a="http://schemas.openxmlformats.org/drawingml/2006/main" xmlns:p="http://schemas.openxmlformats.org/presentationml/2006/main" xmlns:r="http://schemas.openxmlformats.org/officeDocument/2006/relationships">
+<p:notes xmlns:a="http://schemas.openxmlformats.org/drawingml/2006/main" xmlns:r="http://schemas.openxmlformats.org/officeDocument/2006/relationships" xmlns:p="http://schemas.openxmlformats.org/presentationml/2006/main">
   <p:cSld>
     <p:spTree>
       <p:nvGrpSpPr>
@@ -2143,7 +2335,7 @@
         <p:nvSpPr>
           <p:cNvPr id="2" name="Slide Image Placeholder 1"/>
           <p:cNvSpPr>
-            <a:spLocks noGrp="1"/>
+            <a:spLocks noGrp="1" noRot="1" noChangeAspect="1"/>
           </p:cNvSpPr>
           <p:nvPr>
             <p:ph type="sldImg" idx="2"/>
@@ -2158,7 +2350,7 @@
             <a:spLocks noGrp="1"/>
           </p:cNvSpPr>
           <p:nvPr>
-            <p:ph type="body" idx="3" sz="quarter"/>
+            <p:ph type="body" sz="quarter" idx="3"/>
           </p:nvPr>
         </p:nvSpPr>
         <p:spPr/>
@@ -2167,7 +2359,12 @@
           <a:lstStyle/>
           <a:p>
             <a:r>
-              <a:t>Sources: notebooks/03_pipeline_leakage.ipynb cells leak_cd04 (87,144 vs 87,356), leak_cd06 (R² 1.0000 vs 0.2618), leak_cd08 (one seed), leak_cd12 (500 seeds) and leak_cd14 (whole region held out); the table itself is leak_cd10.</a:t>
+              <a:t>Symbols: i = district (the unit); mu_i = expected confirmed cases, 2014-17 (the target); w_i = allocation weight (the metric); pop_i = population; c_i = % of homes owning a net in i's region (DHS 2022); U_i = upper 95% confidence bound for mu_i; q_i = exact share; A_i = nets.</a:t>
+            </a:r>
+          </a:p>
+          <a:p>
+            <a:r>
+              <a:t>Sources: notebooks/04_allocation.ipynb cells alloc_cd05 (alpha 0.2677) and alloc_cd11 (beta_1 = +0.0823, p = 1.7e-07; U_i / mu_i = 1.198, 1.342, 1.162; nets per 1,000 people); src/models.py compute_allocation and hamilton. Coverage values: notebooks/02 cell cd06 and scripts/verify_claims.py section D.</a:t>
             </a:r>
           </a:p>
         </p:txBody>
@@ -2179,7 +2376,7 @@
             <a:spLocks noGrp="1"/>
           </p:cNvSpPr>
           <p:nvPr>
-            <p:ph type="sldNum" idx="5" sz="quarter"/>
+            <p:ph type="sldNum" sz="quarter" idx="5"/>
           </p:nvPr>
         </p:nvSpPr>
         <p:spPr/>
@@ -2193,7 +2390,7 @@
 </file>
 
 <file path=ppt/notesSlides/notesSlide9.xml><?xml version="1.0" encoding="utf-8"?>
-<p:notes xmlns:a="http://schemas.openxmlformats.org/drawingml/2006/main" xmlns:p="http://schemas.openxmlformats.org/presentationml/2006/main" xmlns:r="http://schemas.openxmlformats.org/officeDocument/2006/relationships">
+<p:notes xmlns:a="http://schemas.openxmlformats.org/drawingml/2006/main" xmlns:r="http://schemas.openxmlformats.org/officeDocument/2006/relationships" xmlns:p="http://schemas.openxmlformats.org/presentationml/2006/main">
   <p:cSld>
     <p:spTree>
       <p:nvGrpSpPr>
@@ -2213,7 +2410,7 @@
         <p:nvSpPr>
           <p:cNvPr id="2" name="Slide Image Placeholder 1"/>
           <p:cNvSpPr>
-            <a:spLocks noGrp="1"/>
+            <a:spLocks noGrp="1" noRot="1" noChangeAspect="1"/>
           </p:cNvSpPr>
           <p:nvPr>
             <p:ph type="sldImg" idx="2"/>
@@ -2228,7 +2425,7 @@
             <a:spLocks noGrp="1"/>
           </p:cNvSpPr>
           <p:nvPr>
-            <p:ph type="body" idx="3" sz="quarter"/>
+            <p:ph type="body" sz="quarter" idx="3"/>
           </p:nvPr>
         </p:nvSpPr>
         <p:spPr/>
@@ -2237,7 +2434,7 @@
           <a:lstStyle/>
           <a:p>
             <a:r>
-              <a:t>Sources: notebooks/03_pipeline_leakage.ipynb, cells leak_cd12 (500 seeds) and leak_cd14 (whole region held out, via io.split_data(..., hold_out=region)). Literature: Ploton et al. 2020, Nature Communications 11:4540, doi:10.1038/s41467-020-18321-y; Kattenborn et al. 2022, ISPRS Open Journal of Photogrammetry and Remote Sensing, doi:10.1016/j.ophoto.2022.100018 (up to 28% overestimation of F1-score).</a:t>
+              <a:t>Sources: cases per person and the upper-to-expected ratios 1.198, 1.342 and 1.162: notebooks/04_allocation.ipynb cell alloc_cd11. Both maps are drawn with src/viz.plot_district_choropleth from models.compute_allocation, zoomed to the north like the allocation map. The two-map layout (burden next to uncertainty) follows the course roadmap.</a:t>
             </a:r>
           </a:p>
         </p:txBody>
@@ -2249,7 +2446,7 @@
             <a:spLocks noGrp="1"/>
           </p:cNvSpPr>
           <p:nvPr>
-            <p:ph type="sldNum" idx="5" sz="quarter"/>
+            <p:ph type="sldNum" sz="quarter" idx="5"/>
           </p:nvPr>
         </p:nvSpPr>
         <p:spPr/>
@@ -4721,7 +4918,7 @@
           <a:p>
             <a:fld id="{64B04F34-8FD2-3341-B014-12F06072F6DE}" type="datetimeFigureOut">
               <a:rPr lang="en-US" smtClean="0"/>
-              <a:t>2/3/26</a:t>
+              <a:t>9/25/26</a:t>
             </a:fld>
             <a:endParaRPr lang="en-US"/>
           </a:p>
@@ -5124,8 +5321,8 @@
 </p:sldMaster>
 </file>
 
-<file path=ppt/slides/slide10.xml><?xml version="1.0" encoding="utf-8"?>
-<p:sld xmlns:a="http://schemas.openxmlformats.org/drawingml/2006/main" xmlns:p="http://schemas.openxmlformats.org/presentationml/2006/main" xmlns:r="http://schemas.openxmlformats.org/officeDocument/2006/relationships">
+<file path=ppt/slides/slide1.xml><?xml version="1.0" encoding="utf-8"?>
+<p:sld xmlns:a="http://schemas.openxmlformats.org/drawingml/2006/main" xmlns:r="http://schemas.openxmlformats.org/officeDocument/2006/relationships" xmlns:p="http://schemas.openxmlformats.org/presentationml/2006/main">
   <p:cSld>
     <p:spTree>
       <p:nvGrpSpPr>
@@ -5133,7 +5330,14 @@
         <p:cNvGrpSpPr/>
         <p:nvPr/>
       </p:nvGrpSpPr>
-      <p:grpSpPr/>
+      <p:grpSpPr>
+        <a:xfrm>
+          <a:off x="0" y="0"/>
+          <a:ext cx="0" cy="0"/>
+          <a:chOff x="0" y="0"/>
+          <a:chExt cx="0" cy="0"/>
+        </a:xfrm>
+      </p:grpSpPr>
       <p:sp>
         <p:nvSpPr>
           <p:cNvPr id="2" name="Title 1"/>
@@ -5216,6 +5420,250 @@
                 <a:latin typeface="Candara"/>
               </a:rPr>
               <a:t>ICS553 Machine Learning Essentials · Group 3 · Ashesi University · September 2026</a:t>
+            </a:r>
+          </a:p>
+        </p:txBody>
+      </p:sp>
+    </p:spTree>
+  </p:cSld>
+  <p:clrMapOvr>
+    <a:masterClrMapping/>
+  </p:clrMapOvr>
+</p:sld>
+</file>
+
+<file path=ppt/slides/slide10.xml><?xml version="1.0" encoding="utf-8"?>
+<p:sld xmlns:a="http://schemas.openxmlformats.org/drawingml/2006/main" xmlns:r="http://schemas.openxmlformats.org/officeDocument/2006/relationships" xmlns:p="http://schemas.openxmlformats.org/presentationml/2006/main">
+  <p:cSld>
+    <p:spTree>
+      <p:nvGrpSpPr>
+        <p:cNvPr id="1" name=""/>
+        <p:cNvGrpSpPr/>
+        <p:nvPr/>
+      </p:nvGrpSpPr>
+      <p:grpSpPr>
+        <a:xfrm>
+          <a:off x="0" y="0"/>
+          <a:ext cx="0" cy="0"/>
+          <a:chOff x="0" y="0"/>
+          <a:chExt cx="0" cy="0"/>
+        </a:xfrm>
+      </p:grpSpPr>
+      <p:sp>
+        <p:nvSpPr>
+          <p:cNvPr id="2" name="Text Placeholder 1"/>
+          <p:cNvSpPr>
+            <a:spLocks noGrp="1"/>
+          </p:cNvSpPr>
+          <p:nvPr>
+            <p:ph type="body" sz="quarter" idx="11"/>
+          </p:nvPr>
+        </p:nvSpPr>
+        <p:spPr>
+          <a:xfrm>
+            <a:off x="571500" y="571500"/>
+            <a:ext cx="11055096" cy="737700"/>
+          </a:xfrm>
+        </p:spPr>
+        <p:txBody>
+          <a:bodyPr/>
+          <a:lstStyle/>
+          <a:p>
+            <a:r>
+              <a:rPr sz="3000"/>
+              <a:t>Where the need looks highest, and how sure we are</a:t>
+            </a:r>
+          </a:p>
+        </p:txBody>
+      </p:sp>
+      <p:pic>
+        <p:nvPicPr>
+          <p:cNvPr id="3" name="Picture 2" descr="burden_map.png"/>
+          <p:cNvPicPr>
+            <a:picLocks noChangeAspect="1"/>
+          </p:cNvPicPr>
+          <p:nvPr/>
+        </p:nvPicPr>
+        <p:blipFill>
+          <a:blip r:embed="rId3"/>
+          <a:stretch>
+            <a:fillRect/>
+          </a:stretch>
+        </p:blipFill>
+        <p:spPr>
+          <a:xfrm>
+            <a:off x="1524535" y="1325880"/>
+            <a:ext cx="3479744" cy="3474720"/>
+          </a:xfrm>
+          <a:prstGeom prst="rect">
+            <a:avLst/>
+          </a:prstGeom>
+        </p:spPr>
+      </p:pic>
+      <p:sp>
+        <p:nvSpPr>
+          <p:cNvPr id="4" name="TextBox 3"/>
+          <p:cNvSpPr txBox="1"/>
+          <p:nvPr/>
+        </p:nvSpPr>
+        <p:spPr>
+          <a:xfrm>
+            <a:off x="566928" y="4892040"/>
+            <a:ext cx="5394960" cy="548640"/>
+          </a:xfrm>
+          <a:prstGeom prst="rect">
+            <a:avLst/>
+          </a:prstGeom>
+          <a:noFill/>
+        </p:spPr>
+        <p:txBody>
+          <a:bodyPr wrap="square" lIns="0" tIns="0" rIns="0" bIns="0" anchor="t">
+            <a:spAutoFit/>
+          </a:bodyPr>
+          <a:lstStyle/>
+          <a:p>
+            <a:pPr algn="l">
+              <a:spcAft>
+                <a:spcPts val="600"/>
+              </a:spcAft>
+            </a:pPr>
+            <a:r>
+              <a:rPr sz="1200" b="1" i="0">
+                <a:solidFill>
+                  <a:srgbClr val="262626"/>
+                </a:solidFill>
+                <a:latin typeface="Candara"/>
+              </a:rPr>
+              <a:t>Reported burden. </a:t>
+            </a:r>
+            <a:r>
+              <a:rPr sz="1200" b="0" i="0">
+                <a:solidFill>
+                  <a:srgbClr val="262626"/>
+                </a:solidFill>
+                <a:latin typeface="Candara"/>
+              </a:rPr>
+              <a:t>Confirmed cases per person, 2014-17: highest in Upper East and Upper West, lowest across Northern Region. Grey areas have no case data of their own.</a:t>
+            </a:r>
+          </a:p>
+        </p:txBody>
+      </p:sp>
+      <p:pic>
+        <p:nvPicPr>
+          <p:cNvPr id="5" name="Picture 4" descr="uncertainty_map.png"/>
+          <p:cNvPicPr>
+            <a:picLocks noChangeAspect="1"/>
+          </p:cNvPicPr>
+          <p:nvPr/>
+        </p:nvPicPr>
+        <p:blipFill>
+          <a:blip r:embed="rId4"/>
+          <a:stretch>
+            <a:fillRect/>
+          </a:stretch>
+        </p:blipFill>
+        <p:spPr>
+          <a:xfrm>
+            <a:off x="7184671" y="1325880"/>
+            <a:ext cx="3479744" cy="3474720"/>
+          </a:xfrm>
+          <a:prstGeom prst="rect">
+            <a:avLst/>
+          </a:prstGeom>
+        </p:spPr>
+      </p:pic>
+      <p:sp>
+        <p:nvSpPr>
+          <p:cNvPr id="6" name="TextBox 5"/>
+          <p:cNvSpPr txBox="1"/>
+          <p:nvPr/>
+        </p:nvSpPr>
+        <p:spPr>
+          <a:xfrm>
+            <a:off x="6227064" y="4892040"/>
+            <a:ext cx="5394960" cy="548640"/>
+          </a:xfrm>
+          <a:prstGeom prst="rect">
+            <a:avLst/>
+          </a:prstGeom>
+          <a:noFill/>
+        </p:spPr>
+        <p:txBody>
+          <a:bodyPr wrap="square" lIns="0" tIns="0" rIns="0" bIns="0" anchor="t">
+            <a:spAutoFit/>
+          </a:bodyPr>
+          <a:lstStyle/>
+          <a:p>
+            <a:pPr algn="l">
+              <a:spcAft>
+                <a:spcPts val="600"/>
+              </a:spcAft>
+            </a:pPr>
+            <a:r>
+              <a:rPr sz="1200" b="1" i="0">
+                <a:solidFill>
+                  <a:srgbClr val="262626"/>
+                </a:solidFill>
+                <a:latin typeface="Candara"/>
+              </a:rPr>
+              <a:t>How sure we are. </a:t>
+            </a:r>
+            <a:r>
+              <a:rPr sz="1200" b="0" i="0">
+                <a:solidFill>
+                  <a:srgbClr val="262626"/>
+                </a:solidFill>
+                <a:latin typeface="Candara"/>
+              </a:rPr>
+              <a:t>Our upper bound sits 20% above the estimate in Northern, 34% in Upper East and 16% in Upper West: one number per region, because coverage is.</a:t>
+            </a:r>
+          </a:p>
+        </p:txBody>
+      </p:sp>
+      <p:sp>
+        <p:nvSpPr>
+          <p:cNvPr id="7" name="TextBox 6"/>
+          <p:cNvSpPr txBox="1"/>
+          <p:nvPr/>
+        </p:nvSpPr>
+        <p:spPr>
+          <a:xfrm>
+            <a:off x="566928" y="5504688"/>
+            <a:ext cx="11055096" cy="365760"/>
+          </a:xfrm>
+          <a:prstGeom prst="rect">
+            <a:avLst/>
+          </a:prstGeom>
+          <a:noFill/>
+        </p:spPr>
+        <p:txBody>
+          <a:bodyPr wrap="square" lIns="0" tIns="0" rIns="0" bIns="0" anchor="t">
+            <a:spAutoFit/>
+          </a:bodyPr>
+          <a:lstStyle/>
+          <a:p>
+            <a:pPr algn="l">
+              <a:spcAft>
+                <a:spcPts val="600"/>
+              </a:spcAft>
+            </a:pPr>
+            <a:r>
+              <a:rPr sz="1400" b="1" i="0">
+                <a:solidFill>
+                  <a:srgbClr val="AB3D3F"/>
+                </a:solidFill>
+                <a:latin typeface="Candara"/>
+              </a:rPr>
+              <a:t>Takeaway: </a:t>
+            </a:r>
+            <a:r>
+              <a:rPr sz="1400" b="0" i="0">
+                <a:solidFill>
+                  <a:srgbClr val="262626"/>
+                </a:solidFill>
+                <a:latin typeface="Candara"/>
+              </a:rPr>
+              <a:t>the rule uses the upper bound, so it leans towards the region we are least sure about.</a:t>
             </a:r>
           </a:p>
         </p:txBody>
@@ -5229,7 +5677,7 @@
 </file>
 
 <file path=ppt/slides/slide11.xml><?xml version="1.0" encoding="utf-8"?>
-<p:sld xmlns:a="http://schemas.openxmlformats.org/drawingml/2006/main" xmlns:p="http://schemas.openxmlformats.org/presentationml/2006/main" xmlns:r="http://schemas.openxmlformats.org/officeDocument/2006/relationships">
+<p:sld xmlns:a="http://schemas.openxmlformats.org/drawingml/2006/main" xmlns:r="http://schemas.openxmlformats.org/officeDocument/2006/relationships" xmlns:p="http://schemas.openxmlformats.org/presentationml/2006/main">
   <p:cSld>
     <p:spTree>
       <p:nvGrpSpPr>
@@ -5237,7 +5685,249 @@
         <p:cNvGrpSpPr/>
         <p:nvPr/>
       </p:nvGrpSpPr>
-      <p:grpSpPr/>
+      <p:grpSpPr>
+        <a:xfrm>
+          <a:off x="0" y="0"/>
+          <a:ext cx="0" cy="0"/>
+          <a:chOff x="0" y="0"/>
+          <a:chExt cx="0" cy="0"/>
+        </a:xfrm>
+      </p:grpSpPr>
+      <p:sp>
+        <p:nvSpPr>
+          <p:cNvPr id="3" name="Text Placeholder 2"/>
+          <p:cNvSpPr>
+            <a:spLocks noGrp="1"/>
+          </p:cNvSpPr>
+          <p:nvPr>
+            <p:ph type="body" sz="quarter" idx="10"/>
+          </p:nvPr>
+        </p:nvSpPr>
+        <p:spPr/>
+        <p:txBody>
+          <a:bodyPr/>
+          <a:lstStyle/>
+          <a:p>
+            <a:pPr algn="l">
+              <a:spcAft>
+                <a:spcPts val="400"/>
+              </a:spcAft>
+            </a:pPr>
+            <a:r>
+              <a:rPr sz="1800" b="1" i="0">
+                <a:solidFill>
+                  <a:srgbClr val="AB3D3F"/>
+                </a:solidFill>
+                <a:latin typeface="Candara"/>
+              </a:rPr>
+              <a:t>Regional totals</a:t>
+            </a:r>
+          </a:p>
+          <a:p>
+            <a:pPr algn="l">
+              <a:spcAft>
+                <a:spcPts val="1400"/>
+              </a:spcAft>
+            </a:pPr>
+            <a:r>
+              <a:rPr sz="1600" b="0" i="0">
+                <a:solidFill>
+                  <a:srgbClr val="262626"/>
+                </a:solidFill>
+                <a:latin typeface="Candara"/>
+              </a:rPr>
+              <a:t>Northern 24,196 · Upper East 18,631 · Upper West 7,173</a:t>
+            </a:r>
+          </a:p>
+          <a:p>
+            <a:pPr algn="l">
+              <a:spcAft>
+                <a:spcPts val="400"/>
+              </a:spcAft>
+            </a:pPr>
+            <a:r>
+              <a:rPr sz="1800" b="1" i="0">
+                <a:solidFill>
+                  <a:srgbClr val="AB3D3F"/>
+                </a:solidFill>
+                <a:latin typeface="Candara"/>
+              </a:rPr>
+              <a:t>Largest allocations</a:t>
+            </a:r>
+          </a:p>
+          <a:p>
+            <a:pPr algn="l">
+              <a:spcAft>
+                <a:spcPts val="1400"/>
+              </a:spcAft>
+            </a:pPr>
+            <a:r>
+              <a:rPr sz="1600" b="0" i="0">
+                <a:solidFill>
+                  <a:srgbClr val="262626"/>
+                </a:solidFill>
+                <a:latin typeface="Candara"/>
+              </a:rPr>
+              <a:t>Bolgatanga 2,350 · Garu-Tempane 2,309 · Tamale 2,175 · Kasena-Nankana 1,954 · Bawku 1,750</a:t>
+            </a:r>
+          </a:p>
+          <a:p>
+            <a:pPr algn="l">
+              <a:spcAft>
+                <a:spcPts val="400"/>
+              </a:spcAft>
+            </a:pPr>
+            <a:r>
+              <a:rPr sz="1800" b="1" i="0">
+                <a:solidFill>
+                  <a:srgbClr val="AB3D3F"/>
+                </a:solidFill>
+                <a:latin typeface="Candara"/>
+              </a:rPr>
+              <a:t>Smallest</a:t>
+            </a:r>
+          </a:p>
+          <a:p>
+            <a:pPr algn="l">
+              <a:spcAft>
+                <a:spcPts val="600"/>
+              </a:spcAft>
+            </a:pPr>
+            <a:r>
+              <a:rPr sz="1600" b="0" i="0">
+                <a:solidFill>
+                  <a:srgbClr val="262626"/>
+                </a:solidFill>
+                <a:latin typeface="Candara"/>
+              </a:rPr>
+              <a:t>Daffiama-Bussie-Issa, 335. Every district receives nets, and the total is exactly 50,000.</a:t>
+            </a:r>
+          </a:p>
+        </p:txBody>
+      </p:sp>
+      <p:sp>
+        <p:nvSpPr>
+          <p:cNvPr id="4" name="Text Placeholder 3"/>
+          <p:cNvSpPr>
+            <a:spLocks noGrp="1"/>
+          </p:cNvSpPr>
+          <p:nvPr>
+            <p:ph type="body" sz="quarter" idx="11"/>
+          </p:nvPr>
+        </p:nvSpPr>
+        <p:spPr>
+          <a:xfrm>
+            <a:off x="571500" y="571500"/>
+            <a:ext cx="5669280" cy="825785"/>
+          </a:xfrm>
+        </p:spPr>
+        <p:txBody>
+          <a:bodyPr/>
+          <a:lstStyle/>
+          <a:p>
+            <a:r>
+              <a:rPr sz="3000"/>
+              <a:t>The proposed allocation</a:t>
+            </a:r>
+          </a:p>
+        </p:txBody>
+      </p:sp>
+      <p:sp>
+        <p:nvSpPr>
+          <p:cNvPr id="5" name="Rounded Rectangle 4"/>
+          <p:cNvSpPr/>
+          <p:nvPr/>
+        </p:nvSpPr>
+        <p:spPr>
+          <a:xfrm>
+            <a:off x="6858000" y="640080"/>
+            <a:ext cx="4983480" cy="5257800"/>
+          </a:xfrm>
+          <a:prstGeom prst="roundRect">
+            <a:avLst>
+              <a:gd name="adj" fmla="val 5000"/>
+            </a:avLst>
+          </a:prstGeom>
+          <a:solidFill>
+            <a:srgbClr val="FFFFFF"/>
+          </a:solidFill>
+          <a:ln>
+            <a:noFill/>
+          </a:ln>
+          <a:effectLst/>
+        </p:spPr>
+        <p:style>
+          <a:lnRef idx="1">
+            <a:schemeClr val="accent1"/>
+          </a:lnRef>
+          <a:fillRef idx="3">
+            <a:schemeClr val="accent1"/>
+          </a:fillRef>
+          <a:effectRef idx="2">
+            <a:schemeClr val="accent1"/>
+          </a:effectRef>
+          <a:fontRef idx="minor">
+            <a:schemeClr val="lt1"/>
+          </a:fontRef>
+        </p:style>
+        <p:txBody>
+          <a:bodyPr wrap="square" lIns="201168" tIns="160934" rIns="201168" bIns="160934" rtlCol="0" anchor="t"/>
+          <a:lstStyle/>
+          <a:p>
+            <a:pPr algn="ctr"/>
+            <a:endParaRPr/>
+          </a:p>
+        </p:txBody>
+      </p:sp>
+      <p:pic>
+        <p:nvPicPr>
+          <p:cNvPr id="6" name="Picture 5" descr="alloc_map.png"/>
+          <p:cNvPicPr>
+            <a:picLocks noChangeAspect="1"/>
+          </p:cNvPicPr>
+          <p:nvPr/>
+        </p:nvPicPr>
+        <p:blipFill>
+          <a:blip r:embed="rId3"/>
+          <a:stretch>
+            <a:fillRect/>
+          </a:stretch>
+        </p:blipFill>
+        <p:spPr>
+          <a:xfrm>
+            <a:off x="6995160" y="917800"/>
+            <a:ext cx="4709160" cy="4702359"/>
+          </a:xfrm>
+          <a:prstGeom prst="rect">
+            <a:avLst/>
+          </a:prstGeom>
+        </p:spPr>
+      </p:pic>
+    </p:spTree>
+  </p:cSld>
+  <p:clrMapOvr>
+    <a:masterClrMapping/>
+  </p:clrMapOvr>
+</p:sld>
+</file>
+
+<file path=ppt/slides/slide12.xml><?xml version="1.0" encoding="utf-8"?>
+<p:sld xmlns:a="http://schemas.openxmlformats.org/drawingml/2006/main" xmlns:r="http://schemas.openxmlformats.org/officeDocument/2006/relationships" xmlns:p="http://schemas.openxmlformats.org/presentationml/2006/main">
+  <p:cSld>
+    <p:spTree>
+      <p:nvGrpSpPr>
+        <p:cNvPr id="1" name=""/>
+        <p:cNvGrpSpPr/>
+        <p:nvPr/>
+      </p:nvGrpSpPr>
+      <p:grpSpPr>
+        <a:xfrm>
+          <a:off x="0" y="0"/>
+          <a:ext cx="0" cy="0"/>
+          <a:chOff x="0" y="0"/>
+          <a:chExt cx="0" cy="0"/>
+        </a:xfrm>
+      </p:grpSpPr>
       <p:sp>
         <p:nvSpPr>
           <p:cNvPr id="2" name="Text Placeholder 1"/>
@@ -5245,7 +5935,2297 @@
             <a:spLocks noGrp="1"/>
           </p:cNvSpPr>
           <p:nvPr>
-            <p:ph type="body" idx="11" sz="quarter"/>
+            <p:ph type="body" sz="quarter" idx="11"/>
+          </p:nvPr>
+        </p:nvSpPr>
+        <p:spPr>
+          <a:xfrm>
+            <a:off x="571500" y="571500"/>
+            <a:ext cx="11055096" cy="737700"/>
+          </a:xfrm>
+        </p:spPr>
+        <p:txBody>
+          <a:bodyPr/>
+          <a:lstStyle/>
+          <a:p>
+            <a:r>
+              <a:t>Who gains, who loses, and why</a:t>
+            </a:r>
+          </a:p>
+        </p:txBody>
+      </p:sp>
+      <p:sp>
+        <p:nvSpPr>
+          <p:cNvPr id="3" name="TextBox 2"/>
+          <p:cNvSpPr txBox="1"/>
+          <p:nvPr/>
+        </p:nvSpPr>
+        <p:spPr>
+          <a:xfrm>
+            <a:off x="566928" y="1417320"/>
+            <a:ext cx="5029200" cy="4434840"/>
+          </a:xfrm>
+          <a:prstGeom prst="rect">
+            <a:avLst/>
+          </a:prstGeom>
+          <a:noFill/>
+        </p:spPr>
+        <p:txBody>
+          <a:bodyPr wrap="square" lIns="0" tIns="0" rIns="0" bIns="0" anchor="t">
+            <a:spAutoFit/>
+          </a:bodyPr>
+          <a:lstStyle/>
+          <a:p>
+            <a:pPr marL="219456" indent="-219456" algn="l">
+              <a:spcAft>
+                <a:spcPts val="900"/>
+              </a:spcAft>
+              <a:buClr>
+                <a:srgbClr val="AB3D3F"/>
+              </a:buClr>
+              <a:buFont typeface="Arial"/>
+              <a:buChar char="•"/>
+            </a:pPr>
+            <a:r>
+              <a:rPr sz="1400" b="0" i="0">
+                <a:solidFill>
+                  <a:srgbClr val="262626"/>
+                </a:solidFill>
+                <a:latin typeface="Candara"/>
+              </a:rPr>
+              <a:t>Our comparator gives nets in proportion to reported cases. It is not Ghana's practice: national campaigns allocate by population, about one net per two people.</a:t>
+            </a:r>
+          </a:p>
+          <a:p>
+            <a:pPr marL="219456" indent="-219456" algn="l">
+              <a:spcAft>
+                <a:spcPts val="900"/>
+              </a:spcAft>
+              <a:buClr>
+                <a:srgbClr val="AB3D3F"/>
+              </a:buClr>
+              <a:buFont typeface="Arial"/>
+              <a:buChar char="•"/>
+            </a:pPr>
+            <a:r>
+              <a:rPr sz="1400" b="0" i="0">
+                <a:solidFill>
+                  <a:srgbClr val="262626"/>
+                </a:solidFill>
+                <a:latin typeface="Candara"/>
+              </a:rPr>
+              <a:t>Tamale gains most (+1,692): the largest population, and the lowest reported cases per person of all 50 districts.</a:t>
+            </a:r>
+          </a:p>
+          <a:p>
+            <a:pPr marL="219456" indent="-219456" algn="l">
+              <a:spcAft>
+                <a:spcPts val="900"/>
+              </a:spcAft>
+              <a:buClr>
+                <a:srgbClr val="AB3D3F"/>
+              </a:buClr>
+              <a:buFont typeface="Arial"/>
+              <a:buChar char="•"/>
+            </a:pPr>
+            <a:r>
+              <a:rPr sz="1400" b="0" i="0">
+                <a:solidFill>
+                  <a:srgbClr val="262626"/>
+                </a:solidFill>
+                <a:latin typeface="Candara"/>
+              </a:rPr>
+              <a:t>Within each region, the more cases per person a district reported, the more nets per person it gives up. Nabdam and Bole, the highest in their regions, lose 761 and 376.</a:t>
+            </a:r>
+          </a:p>
+          <a:p>
+            <a:pPr marL="219456" indent="-219456" algn="l">
+              <a:spcAft>
+                <a:spcPts val="900"/>
+              </a:spcAft>
+              <a:buClr>
+                <a:srgbClr val="AB3D3F"/>
+              </a:buClr>
+              <a:buFont typeface="Arial"/>
+              <a:buChar char="•"/>
+            </a:pPr>
+            <a:r>
+              <a:rPr sz="1400" b="0" i="0">
+                <a:solidFill>
+                  <a:srgbClr val="262626"/>
+                </a:solidFill>
+                <a:latin typeface="Candara"/>
+              </a:rPr>
+              <a:t>We treat everyone in a region as equally at risk. That is a value judgement, and we make it openly.</a:t>
+            </a:r>
+          </a:p>
+          <a:p>
+            <a:pPr marL="219456" indent="-219456" algn="l">
+              <a:spcAft>
+                <a:spcPts val="600"/>
+              </a:spcAft>
+              <a:buClr>
+                <a:srgbClr val="AB3D3F"/>
+              </a:buClr>
+              <a:buFont typeface="Arial"/>
+              <a:buChar char="•"/>
+            </a:pPr>
+            <a:r>
+              <a:rPr sz="1400" b="0" i="0">
+                <a:solidFill>
+                  <a:srgbClr val="262626"/>
+                </a:solidFill>
+                <a:latin typeface="Candara"/>
+              </a:rPr>
+              <a:t>Referral bias at Wa and Bolgatanga is a hypothesis, not a finding: Tamale hosts the north's only tertiary hospital yet reports the lowest rate.</a:t>
+            </a:r>
+          </a:p>
+        </p:txBody>
+      </p:sp>
+      <p:graphicFrame>
+        <p:nvGraphicFramePr>
+          <p:cNvPr id="4" name="Chart 3"/>
+          <p:cNvGraphicFramePr>
+            <a:graphicFrameLocks noGrp="1"/>
+          </p:cNvGraphicFramePr>
+          <p:nvPr/>
+        </p:nvGraphicFramePr>
+        <p:xfrm>
+          <a:off x="5806440" y="1325880"/>
+          <a:ext cx="5852160" cy="4023360"/>
+        </p:xfrm>
+        <a:graphic>
+          <a:graphicData uri="http://schemas.openxmlformats.org/drawingml/2006/chart">
+            <c:chart xmlns:c="http://schemas.openxmlformats.org/drawingml/2006/chart" xmlns:r="http://schemas.openxmlformats.org/officeDocument/2006/relationships" r:id="rId3"/>
+          </a:graphicData>
+        </a:graphic>
+      </p:graphicFrame>
+      <p:sp>
+        <p:nvSpPr>
+          <p:cNvPr id="5" name="TextBox 4"/>
+          <p:cNvSpPr txBox="1"/>
+          <p:nvPr/>
+        </p:nvSpPr>
+        <p:spPr>
+          <a:xfrm>
+            <a:off x="5806440" y="5394960"/>
+            <a:ext cx="5852160" cy="411480"/>
+          </a:xfrm>
+          <a:prstGeom prst="rect">
+            <a:avLst/>
+          </a:prstGeom>
+          <a:noFill/>
+        </p:spPr>
+        <p:txBody>
+          <a:bodyPr wrap="square" lIns="0" tIns="0" rIns="0" bIns="0" anchor="t">
+            <a:spAutoFit/>
+          </a:bodyPr>
+          <a:lstStyle/>
+          <a:p>
+            <a:pPr algn="l">
+              <a:spcAft>
+                <a:spcPts val="600"/>
+              </a:spcAft>
+            </a:pPr>
+            <a:r>
+              <a:rPr sz="1100" b="0" i="0">
+                <a:solidFill>
+                  <a:srgbClr val="595959"/>
+                </a:solidFill>
+                <a:latin typeface="Candara"/>
+              </a:rPr>
+              <a:t>Change in nets against case-proportional allocation: the five largest gains and losses.</a:t>
+            </a:r>
+          </a:p>
+        </p:txBody>
+      </p:sp>
+    </p:spTree>
+  </p:cSld>
+  <p:clrMapOvr>
+    <a:masterClrMapping/>
+  </p:clrMapOvr>
+</p:sld>
+</file>
+
+<file path=ppt/slides/slide13.xml><?xml version="1.0" encoding="utf-8"?>
+<p:sld xmlns:a="http://schemas.openxmlformats.org/drawingml/2006/main" xmlns:r="http://schemas.openxmlformats.org/officeDocument/2006/relationships" xmlns:p="http://schemas.openxmlformats.org/presentationml/2006/main">
+  <p:cSld>
+    <p:spTree>
+      <p:nvGrpSpPr>
+        <p:cNvPr id="1" name=""/>
+        <p:cNvGrpSpPr/>
+        <p:nvPr/>
+      </p:nvGrpSpPr>
+      <p:grpSpPr>
+        <a:xfrm>
+          <a:off x="0" y="0"/>
+          <a:ext cx="0" cy="0"/>
+          <a:chOff x="0" y="0"/>
+          <a:chExt cx="0" cy="0"/>
+        </a:xfrm>
+      </p:grpSpPr>
+      <p:sp>
+        <p:nvSpPr>
+          <p:cNvPr id="3" name="Text Placeholder 2"/>
+          <p:cNvSpPr>
+            <a:spLocks noGrp="1"/>
+          </p:cNvSpPr>
+          <p:nvPr>
+            <p:ph type="body" sz="quarter" idx="11"/>
+          </p:nvPr>
+        </p:nvSpPr>
+        <p:spPr>
+          <a:xfrm>
+            <a:off x="1061243" y="571500"/>
+            <a:ext cx="10067544" cy="737700"/>
+          </a:xfrm>
+        </p:spPr>
+        <p:txBody>
+          <a:bodyPr/>
+          <a:lstStyle/>
+          <a:p>
+            <a:r>
+              <a:t>What would change the answer</a:t>
+            </a:r>
+          </a:p>
+        </p:txBody>
+      </p:sp>
+      <p:graphicFrame>
+        <p:nvGraphicFramePr>
+          <p:cNvPr id="4" name="Table 3"/>
+          <p:cNvGraphicFramePr>
+            <a:graphicFrameLocks noGrp="1"/>
+          </p:cNvGraphicFramePr>
+          <p:nvPr/>
+        </p:nvGraphicFramePr>
+        <p:xfrm>
+          <a:off x="1060704" y="1463040"/>
+          <a:ext cx="10067544" cy="3429000"/>
+        </p:xfrm>
+        <a:graphic>
+          <a:graphicData uri="http://schemas.openxmlformats.org/drawingml/2006/table">
+            <a:tbl>
+              <a:tblPr firstRow="1">
+                <a:tableStyleId>{5C22544A-7EE6-4342-B048-85BDC9FD1C3A}</a:tableStyleId>
+              </a:tblPr>
+              <a:tblGrid>
+                <a:gridCol w="4946904">
+                  <a:extLst>
+                    <a:ext uri="{9D8B030D-6E8A-4147-A177-3AD203B41FA5}">
+                      <a16:colId xmlns:a16="http://schemas.microsoft.com/office/drawing/2014/main" val="20000"/>
+                    </a:ext>
+                  </a:extLst>
+                </a:gridCol>
+                <a:gridCol w="1280160">
+                  <a:extLst>
+                    <a:ext uri="{9D8B030D-6E8A-4147-A177-3AD203B41FA5}">
+                      <a16:colId xmlns:a16="http://schemas.microsoft.com/office/drawing/2014/main" val="20001"/>
+                    </a:ext>
+                  </a:extLst>
+                </a:gridCol>
+                <a:gridCol w="1280160">
+                  <a:extLst>
+                    <a:ext uri="{9D8B030D-6E8A-4147-A177-3AD203B41FA5}">
+                      <a16:colId xmlns:a16="http://schemas.microsoft.com/office/drawing/2014/main" val="20002"/>
+                    </a:ext>
+                  </a:extLst>
+                </a:gridCol>
+                <a:gridCol w="1280160">
+                  <a:extLst>
+                    <a:ext uri="{9D8B030D-6E8A-4147-A177-3AD203B41FA5}">
+                      <a16:colId xmlns:a16="http://schemas.microsoft.com/office/drawing/2014/main" val="20003"/>
+                    </a:ext>
+                  </a:extLst>
+                </a:gridCol>
+                <a:gridCol w="1280160">
+                  <a:extLst>
+                    <a:ext uri="{9D8B030D-6E8A-4147-A177-3AD203B41FA5}">
+                      <a16:colId xmlns:a16="http://schemas.microsoft.com/office/drawing/2014/main" val="20004"/>
+                    </a:ext>
+                  </a:extLst>
+                </a:gridCol>
+              </a:tblGrid>
+              <a:tr h="411480">
+                <a:tc>
+                  <a:txBody>
+                    <a:bodyPr/>
+                    <a:lstStyle/>
+                    <a:p>
+                      <a:pPr algn="l">
+                        <a:spcAft>
+                          <a:spcPts val="0"/>
+                        </a:spcAft>
+                      </a:pPr>
+                      <a:r>
+                        <a:rPr sz="1400" b="1" i="0">
+                          <a:solidFill>
+                            <a:srgbClr val="FFFFFF"/>
+                          </a:solidFill>
+                          <a:latin typeface="Candara"/>
+                        </a:rPr>
+                        <a:t>Scenario</a:t>
+                      </a:r>
+                    </a:p>
+                  </a:txBody>
+                  <a:tcPr marT="36576" marB="36576" anchor="ctr">
+                    <a:solidFill>
+                      <a:srgbClr val="AB3D3F"/>
+                    </a:solidFill>
+                  </a:tcPr>
+                </a:tc>
+                <a:tc>
+                  <a:txBody>
+                    <a:bodyPr/>
+                    <a:lstStyle/>
+                    <a:p>
+                      <a:pPr algn="r">
+                        <a:spcAft>
+                          <a:spcPts val="0"/>
+                        </a:spcAft>
+                      </a:pPr>
+                      <a:r>
+                        <a:rPr sz="1400" b="1" i="0">
+                          <a:solidFill>
+                            <a:srgbClr val="FFFFFF"/>
+                          </a:solidFill>
+                          <a:latin typeface="Candara"/>
+                        </a:rPr>
+                        <a:t>Northern</a:t>
+                      </a:r>
+                    </a:p>
+                  </a:txBody>
+                  <a:tcPr marT="36576" marB="36576" anchor="ctr">
+                    <a:solidFill>
+                      <a:srgbClr val="AB3D3F"/>
+                    </a:solidFill>
+                  </a:tcPr>
+                </a:tc>
+                <a:tc>
+                  <a:txBody>
+                    <a:bodyPr/>
+                    <a:lstStyle/>
+                    <a:p>
+                      <a:pPr algn="r">
+                        <a:spcAft>
+                          <a:spcPts val="0"/>
+                        </a:spcAft>
+                      </a:pPr>
+                      <a:r>
+                        <a:rPr sz="1400" b="1" i="0">
+                          <a:solidFill>
+                            <a:srgbClr val="FFFFFF"/>
+                          </a:solidFill>
+                          <a:latin typeface="Candara"/>
+                        </a:rPr>
+                        <a:t>Upper East</a:t>
+                      </a:r>
+                    </a:p>
+                  </a:txBody>
+                  <a:tcPr marT="36576" marB="36576" anchor="ctr">
+                    <a:solidFill>
+                      <a:srgbClr val="AB3D3F"/>
+                    </a:solidFill>
+                  </a:tcPr>
+                </a:tc>
+                <a:tc>
+                  <a:txBody>
+                    <a:bodyPr/>
+                    <a:lstStyle/>
+                    <a:p>
+                      <a:pPr algn="r">
+                        <a:spcAft>
+                          <a:spcPts val="0"/>
+                        </a:spcAft>
+                      </a:pPr>
+                      <a:r>
+                        <a:rPr sz="1400" b="1" i="0">
+                          <a:solidFill>
+                            <a:srgbClr val="FFFFFF"/>
+                          </a:solidFill>
+                          <a:latin typeface="Candara"/>
+                        </a:rPr>
+                        <a:t>Upper West</a:t>
+                      </a:r>
+                    </a:p>
+                  </a:txBody>
+                  <a:tcPr marT="36576" marB="36576" anchor="ctr">
+                    <a:solidFill>
+                      <a:srgbClr val="AB3D3F"/>
+                    </a:solidFill>
+                  </a:tcPr>
+                </a:tc>
+                <a:tc>
+                  <a:txBody>
+                    <a:bodyPr/>
+                    <a:lstStyle/>
+                    <a:p>
+                      <a:pPr algn="r">
+                        <a:spcAft>
+                          <a:spcPts val="0"/>
+                        </a:spcAft>
+                      </a:pPr>
+                      <a:r>
+                        <a:rPr sz="1400" b="1" i="0">
+                          <a:solidFill>
+                            <a:srgbClr val="FFFFFF"/>
+                          </a:solidFill>
+                          <a:latin typeface="Candara"/>
+                        </a:rPr>
+                        <a:t>Nets moved</a:t>
+                      </a:r>
+                    </a:p>
+                  </a:txBody>
+                  <a:tcPr marT="36576" marB="36576" anchor="ctr">
+                    <a:solidFill>
+                      <a:srgbClr val="AB3D3F"/>
+                    </a:solidFill>
+                  </a:tcPr>
+                </a:tc>
+                <a:extLst>
+                  <a:ext uri="{0D108BD9-81ED-4DB2-BD59-A6C34878D82A}">
+                    <a16:rowId xmlns:a16="http://schemas.microsoft.com/office/drawing/2014/main" val="10000"/>
+                  </a:ext>
+                </a:extLst>
+              </a:tr>
+              <a:tr h="502920">
+                <a:tc>
+                  <a:txBody>
+                    <a:bodyPr/>
+                    <a:lstStyle/>
+                    <a:p>
+                      <a:pPr algn="l">
+                        <a:spcAft>
+                          <a:spcPts val="0"/>
+                        </a:spcAft>
+                      </a:pPr>
+                      <a:r>
+                        <a:rPr sz="1300" b="1" i="0">
+                          <a:solidFill>
+                            <a:srgbClr val="262626"/>
+                          </a:solidFill>
+                          <a:latin typeface="Candara"/>
+                        </a:rPr>
+                        <a:t>As proposed</a:t>
+                      </a:r>
+                    </a:p>
+                  </a:txBody>
+                  <a:tcPr marT="36576" marB="36576" anchor="ctr">
+                    <a:solidFill>
+                      <a:srgbClr val="FFFFFF"/>
+                    </a:solidFill>
+                  </a:tcPr>
+                </a:tc>
+                <a:tc>
+                  <a:txBody>
+                    <a:bodyPr/>
+                    <a:lstStyle/>
+                    <a:p>
+                      <a:pPr algn="r">
+                        <a:spcAft>
+                          <a:spcPts val="0"/>
+                        </a:spcAft>
+                      </a:pPr>
+                      <a:r>
+                        <a:rPr sz="1300" b="1" i="0">
+                          <a:solidFill>
+                            <a:srgbClr val="262626"/>
+                          </a:solidFill>
+                          <a:latin typeface="Candara"/>
+                        </a:rPr>
+                        <a:t>24,196</a:t>
+                      </a:r>
+                    </a:p>
+                  </a:txBody>
+                  <a:tcPr marT="36576" marB="36576" anchor="ctr">
+                    <a:solidFill>
+                      <a:srgbClr val="FFFFFF"/>
+                    </a:solidFill>
+                  </a:tcPr>
+                </a:tc>
+                <a:tc>
+                  <a:txBody>
+                    <a:bodyPr/>
+                    <a:lstStyle/>
+                    <a:p>
+                      <a:pPr algn="r">
+                        <a:spcAft>
+                          <a:spcPts val="0"/>
+                        </a:spcAft>
+                      </a:pPr>
+                      <a:r>
+                        <a:rPr sz="1300" b="1" i="0">
+                          <a:solidFill>
+                            <a:srgbClr val="262626"/>
+                          </a:solidFill>
+                          <a:latin typeface="Candara"/>
+                        </a:rPr>
+                        <a:t>18,631</a:t>
+                      </a:r>
+                    </a:p>
+                  </a:txBody>
+                  <a:tcPr marT="36576" marB="36576" anchor="ctr">
+                    <a:solidFill>
+                      <a:srgbClr val="FFFFFF"/>
+                    </a:solidFill>
+                  </a:tcPr>
+                </a:tc>
+                <a:tc>
+                  <a:txBody>
+                    <a:bodyPr/>
+                    <a:lstStyle/>
+                    <a:p>
+                      <a:pPr algn="r">
+                        <a:spcAft>
+                          <a:spcPts val="0"/>
+                        </a:spcAft>
+                      </a:pPr>
+                      <a:r>
+                        <a:rPr sz="1300" b="1" i="0">
+                          <a:solidFill>
+                            <a:srgbClr val="262626"/>
+                          </a:solidFill>
+                          <a:latin typeface="Candara"/>
+                        </a:rPr>
+                        <a:t>7,173</a:t>
+                      </a:r>
+                    </a:p>
+                  </a:txBody>
+                  <a:tcPr marT="36576" marB="36576" anchor="ctr">
+                    <a:solidFill>
+                      <a:srgbClr val="FFFFFF"/>
+                    </a:solidFill>
+                  </a:tcPr>
+                </a:tc>
+                <a:tc>
+                  <a:txBody>
+                    <a:bodyPr/>
+                    <a:lstStyle/>
+                    <a:p>
+                      <a:pPr algn="r">
+                        <a:spcAft>
+                          <a:spcPts val="0"/>
+                        </a:spcAft>
+                      </a:pPr>
+                      <a:r>
+                        <a:rPr sz="1300" b="1" i="0">
+                          <a:solidFill>
+                            <a:srgbClr val="262626"/>
+                          </a:solidFill>
+                          <a:latin typeface="Candara"/>
+                        </a:rPr>
+                        <a:t>baseline</a:t>
+                      </a:r>
+                    </a:p>
+                  </a:txBody>
+                  <a:tcPr marT="36576" marB="36576" anchor="ctr">
+                    <a:solidFill>
+                      <a:srgbClr val="FFFFFF"/>
+                    </a:solidFill>
+                  </a:tcPr>
+                </a:tc>
+                <a:extLst>
+                  <a:ext uri="{0D108BD9-81ED-4DB2-BD59-A6C34878D82A}">
+                    <a16:rowId xmlns:a16="http://schemas.microsoft.com/office/drawing/2014/main" val="10001"/>
+                  </a:ext>
+                </a:extLst>
+              </a:tr>
+              <a:tr h="502920">
+                <a:tc>
+                  <a:txBody>
+                    <a:bodyPr/>
+                    <a:lstStyle/>
+                    <a:p>
+                      <a:pPr algn="l">
+                        <a:spcAft>
+                          <a:spcPts val="0"/>
+                        </a:spcAft>
+                      </a:pPr>
+                      <a:r>
+                        <a:rPr sz="1300" b="1" i="0">
+                          <a:solidFill>
+                            <a:srgbClr val="262626"/>
+                          </a:solidFill>
+                          <a:latin typeface="Candara"/>
+                        </a:rPr>
+                        <a:t>Point estimate instead of the upper bound</a:t>
+                      </a:r>
+                    </a:p>
+                  </a:txBody>
+                  <a:tcPr marT="36576" marB="36576" anchor="ctr">
+                    <a:solidFill>
+                      <a:srgbClr val="F3F3F3"/>
+                    </a:solidFill>
+                  </a:tcPr>
+                </a:tc>
+                <a:tc>
+                  <a:txBody>
+                    <a:bodyPr/>
+                    <a:lstStyle/>
+                    <a:p>
+                      <a:pPr algn="r">
+                        <a:spcAft>
+                          <a:spcPts val="0"/>
+                        </a:spcAft>
+                      </a:pPr>
+                      <a:r>
+                        <a:rPr sz="1300" b="0" i="0">
+                          <a:solidFill>
+                            <a:srgbClr val="262626"/>
+                          </a:solidFill>
+                          <a:latin typeface="Candara"/>
+                        </a:rPr>
+                        <a:t>25,095</a:t>
+                      </a:r>
+                    </a:p>
+                  </a:txBody>
+                  <a:tcPr marT="36576" marB="36576" anchor="ctr">
+                    <a:solidFill>
+                      <a:srgbClr val="F3F3F3"/>
+                    </a:solidFill>
+                  </a:tcPr>
+                </a:tc>
+                <a:tc>
+                  <a:txBody>
+                    <a:bodyPr/>
+                    <a:lstStyle/>
+                    <a:p>
+                      <a:pPr algn="r">
+                        <a:spcAft>
+                          <a:spcPts val="0"/>
+                        </a:spcAft>
+                      </a:pPr>
+                      <a:r>
+                        <a:rPr sz="1300" b="0" i="0">
+                          <a:solidFill>
+                            <a:srgbClr val="262626"/>
+                          </a:solidFill>
+                          <a:latin typeface="Candara"/>
+                        </a:rPr>
+                        <a:t>17,240</a:t>
+                      </a:r>
+                    </a:p>
+                  </a:txBody>
+                  <a:tcPr marT="36576" marB="36576" anchor="ctr">
+                    <a:solidFill>
+                      <a:srgbClr val="F3F3F3"/>
+                    </a:solidFill>
+                  </a:tcPr>
+                </a:tc>
+                <a:tc>
+                  <a:txBody>
+                    <a:bodyPr/>
+                    <a:lstStyle/>
+                    <a:p>
+                      <a:pPr algn="r">
+                        <a:spcAft>
+                          <a:spcPts val="0"/>
+                        </a:spcAft>
+                      </a:pPr>
+                      <a:r>
+                        <a:rPr sz="1300" b="0" i="0">
+                          <a:solidFill>
+                            <a:srgbClr val="262626"/>
+                          </a:solidFill>
+                          <a:latin typeface="Candara"/>
+                        </a:rPr>
+                        <a:t>7,665</a:t>
+                      </a:r>
+                    </a:p>
+                  </a:txBody>
+                  <a:tcPr marT="36576" marB="36576" anchor="ctr">
+                    <a:solidFill>
+                      <a:srgbClr val="F3F3F3"/>
+                    </a:solidFill>
+                  </a:tcPr>
+                </a:tc>
+                <a:tc>
+                  <a:txBody>
+                    <a:bodyPr/>
+                    <a:lstStyle/>
+                    <a:p>
+                      <a:pPr algn="r">
+                        <a:spcAft>
+                          <a:spcPts val="0"/>
+                        </a:spcAft>
+                      </a:pPr>
+                      <a:r>
+                        <a:rPr sz="1300" b="0" i="0">
+                          <a:solidFill>
+                            <a:srgbClr val="262626"/>
+                          </a:solidFill>
+                          <a:latin typeface="Candara"/>
+                        </a:rPr>
+                        <a:t>1,391</a:t>
+                      </a:r>
+                    </a:p>
+                  </a:txBody>
+                  <a:tcPr marT="36576" marB="36576" anchor="ctr">
+                    <a:solidFill>
+                      <a:srgbClr val="F3F3F3"/>
+                    </a:solidFill>
+                  </a:tcPr>
+                </a:tc>
+                <a:extLst>
+                  <a:ext uri="{0D108BD9-81ED-4DB2-BD59-A6C34878D82A}">
+                    <a16:rowId xmlns:a16="http://schemas.microsoft.com/office/drawing/2014/main" val="10002"/>
+                  </a:ext>
+                </a:extLst>
+              </a:tr>
+              <a:tr h="502920">
+                <a:tc>
+                  <a:txBody>
+                    <a:bodyPr/>
+                    <a:lstStyle/>
+                    <a:p>
+                      <a:pPr algn="l">
+                        <a:spcAft>
+                          <a:spcPts val="0"/>
+                        </a:spcAft>
+                      </a:pPr>
+                      <a:r>
+                        <a:rPr sz="1300" b="1" i="0">
+                          <a:solidFill>
+                            <a:srgbClr val="262626"/>
+                          </a:solidFill>
+                          <a:latin typeface="Candara"/>
+                        </a:rPr>
+                        <a:t>Region-effects model (fits better: AIC 1,253.8 vs 1,286.8)</a:t>
+                      </a:r>
+                    </a:p>
+                  </a:txBody>
+                  <a:tcPr marT="36576" marB="36576" anchor="ctr">
+                    <a:solidFill>
+                      <a:srgbClr val="FFFFFF"/>
+                    </a:solidFill>
+                  </a:tcPr>
+                </a:tc>
+                <a:tc>
+                  <a:txBody>
+                    <a:bodyPr/>
+                    <a:lstStyle/>
+                    <a:p>
+                      <a:pPr algn="r">
+                        <a:spcAft>
+                          <a:spcPts val="0"/>
+                        </a:spcAft>
+                      </a:pPr>
+                      <a:r>
+                        <a:rPr sz="1300" b="0" i="0">
+                          <a:solidFill>
+                            <a:srgbClr val="262626"/>
+                          </a:solidFill>
+                          <a:latin typeface="Candara"/>
+                        </a:rPr>
+                        <a:t>18,634</a:t>
+                      </a:r>
+                    </a:p>
+                  </a:txBody>
+                  <a:tcPr marT="36576" marB="36576" anchor="ctr">
+                    <a:solidFill>
+                      <a:srgbClr val="FFFFFF"/>
+                    </a:solidFill>
+                  </a:tcPr>
+                </a:tc>
+                <a:tc>
+                  <a:txBody>
+                    <a:bodyPr/>
+                    <a:lstStyle/>
+                    <a:p>
+                      <a:pPr algn="r">
+                        <a:spcAft>
+                          <a:spcPts val="0"/>
+                        </a:spcAft>
+                      </a:pPr>
+                      <a:r>
+                        <a:rPr sz="1300" b="0" i="0">
+                          <a:solidFill>
+                            <a:srgbClr val="262626"/>
+                          </a:solidFill>
+                          <a:latin typeface="Candara"/>
+                        </a:rPr>
+                        <a:t>16,473</a:t>
+                      </a:r>
+                    </a:p>
+                  </a:txBody>
+                  <a:tcPr marT="36576" marB="36576" anchor="ctr">
+                    <a:solidFill>
+                      <a:srgbClr val="FFFFFF"/>
+                    </a:solidFill>
+                  </a:tcPr>
+                </a:tc>
+                <a:tc>
+                  <a:txBody>
+                    <a:bodyPr/>
+                    <a:lstStyle/>
+                    <a:p>
+                      <a:pPr algn="r">
+                        <a:spcAft>
+                          <a:spcPts val="0"/>
+                        </a:spcAft>
+                      </a:pPr>
+                      <a:r>
+                        <a:rPr sz="1300" b="0" i="0">
+                          <a:solidFill>
+                            <a:srgbClr val="262626"/>
+                          </a:solidFill>
+                          <a:latin typeface="Candara"/>
+                        </a:rPr>
+                        <a:t>14,893</a:t>
+                      </a:r>
+                    </a:p>
+                  </a:txBody>
+                  <a:tcPr marT="36576" marB="36576" anchor="ctr">
+                    <a:solidFill>
+                      <a:srgbClr val="FFFFFF"/>
+                    </a:solidFill>
+                  </a:tcPr>
+                </a:tc>
+                <a:tc>
+                  <a:txBody>
+                    <a:bodyPr/>
+                    <a:lstStyle/>
+                    <a:p>
+                      <a:pPr algn="r">
+                        <a:spcAft>
+                          <a:spcPts val="0"/>
+                        </a:spcAft>
+                      </a:pPr>
+                      <a:r>
+                        <a:rPr sz="1300" b="0" i="0">
+                          <a:solidFill>
+                            <a:srgbClr val="262626"/>
+                          </a:solidFill>
+                          <a:latin typeface="Candara"/>
+                        </a:rPr>
+                        <a:t>7,720</a:t>
+                      </a:r>
+                    </a:p>
+                  </a:txBody>
+                  <a:tcPr marT="36576" marB="36576" anchor="ctr">
+                    <a:solidFill>
+                      <a:srgbClr val="FFFFFF"/>
+                    </a:solidFill>
+                  </a:tcPr>
+                </a:tc>
+                <a:extLst>
+                  <a:ext uri="{0D108BD9-81ED-4DB2-BD59-A6C34878D82A}">
+                    <a16:rowId xmlns:a16="http://schemas.microsoft.com/office/drawing/2014/main" val="10003"/>
+                  </a:ext>
+                </a:extLst>
+              </a:tr>
+              <a:tr h="502920">
+                <a:tc>
+                  <a:txBody>
+                    <a:bodyPr/>
+                    <a:lstStyle/>
+                    <a:p>
+                      <a:pPr algn="l">
+                        <a:spcAft>
+                          <a:spcPts val="0"/>
+                        </a:spcAft>
+                      </a:pPr>
+                      <a:r>
+                        <a:rPr sz="1300" b="1" i="0">
+                          <a:solidFill>
+                            <a:srgbClr val="262626"/>
+                          </a:solidFill>
+                          <a:latin typeface="Candara"/>
+                        </a:rPr>
+                        <a:t>Coverage corrected for the 11 districts now in Savannah or North East</a:t>
+                      </a:r>
+                    </a:p>
+                  </a:txBody>
+                  <a:tcPr marT="36576" marB="36576" anchor="ctr">
+                    <a:solidFill>
+                      <a:srgbClr val="F3F3F3"/>
+                    </a:solidFill>
+                  </a:tcPr>
+                </a:tc>
+                <a:tc>
+                  <a:txBody>
+                    <a:bodyPr/>
+                    <a:lstStyle/>
+                    <a:p>
+                      <a:pPr algn="r">
+                        <a:spcAft>
+                          <a:spcPts val="0"/>
+                        </a:spcAft>
+                      </a:pPr>
+                      <a:r>
+                        <a:rPr sz="1300" b="0" i="0">
+                          <a:solidFill>
+                            <a:srgbClr val="262626"/>
+                          </a:solidFill>
+                          <a:latin typeface="Candara"/>
+                        </a:rPr>
+                        <a:t>27,686</a:t>
+                      </a:r>
+                    </a:p>
+                  </a:txBody>
+                  <a:tcPr marT="36576" marB="36576" anchor="ctr">
+                    <a:solidFill>
+                      <a:srgbClr val="F3F3F3"/>
+                    </a:solidFill>
+                  </a:tcPr>
+                </a:tc>
+                <a:tc>
+                  <a:txBody>
+                    <a:bodyPr/>
+                    <a:lstStyle/>
+                    <a:p>
+                      <a:pPr algn="r">
+                        <a:spcAft>
+                          <a:spcPts val="0"/>
+                        </a:spcAft>
+                      </a:pPr>
+                      <a:r>
+                        <a:rPr sz="1300" b="0" i="0">
+                          <a:solidFill>
+                            <a:srgbClr val="262626"/>
+                          </a:solidFill>
+                          <a:latin typeface="Candara"/>
+                        </a:rPr>
+                        <a:t>14,891</a:t>
+                      </a:r>
+                    </a:p>
+                  </a:txBody>
+                  <a:tcPr marT="36576" marB="36576" anchor="ctr">
+                    <a:solidFill>
+                      <a:srgbClr val="F3F3F3"/>
+                    </a:solidFill>
+                  </a:tcPr>
+                </a:tc>
+                <a:tc>
+                  <a:txBody>
+                    <a:bodyPr/>
+                    <a:lstStyle/>
+                    <a:p>
+                      <a:pPr algn="r">
+                        <a:spcAft>
+                          <a:spcPts val="0"/>
+                        </a:spcAft>
+                      </a:pPr>
+                      <a:r>
+                        <a:rPr sz="1300" b="0" i="0">
+                          <a:solidFill>
+                            <a:srgbClr val="262626"/>
+                          </a:solidFill>
+                          <a:latin typeface="Candara"/>
+                        </a:rPr>
+                        <a:t>7,423</a:t>
+                      </a:r>
+                    </a:p>
+                  </a:txBody>
+                  <a:tcPr marT="36576" marB="36576" anchor="ctr">
+                    <a:solidFill>
+                      <a:srgbClr val="F3F3F3"/>
+                    </a:solidFill>
+                  </a:tcPr>
+                </a:tc>
+                <a:tc>
+                  <a:txBody>
+                    <a:bodyPr/>
+                    <a:lstStyle/>
+                    <a:p>
+                      <a:pPr algn="r">
+                        <a:spcAft>
+                          <a:spcPts val="0"/>
+                        </a:spcAft>
+                      </a:pPr>
+                      <a:r>
+                        <a:rPr sz="1300" b="0" i="0">
+                          <a:solidFill>
+                            <a:srgbClr val="262626"/>
+                          </a:solidFill>
+                          <a:latin typeface="Candara"/>
+                        </a:rPr>
+                        <a:t>3,740</a:t>
+                      </a:r>
+                    </a:p>
+                  </a:txBody>
+                  <a:tcPr marT="36576" marB="36576" anchor="ctr">
+                    <a:solidFill>
+                      <a:srgbClr val="F3F3F3"/>
+                    </a:solidFill>
+                  </a:tcPr>
+                </a:tc>
+                <a:extLst>
+                  <a:ext uri="{0D108BD9-81ED-4DB2-BD59-A6C34878D82A}">
+                    <a16:rowId xmlns:a16="http://schemas.microsoft.com/office/drawing/2014/main" val="10004"/>
+                  </a:ext>
+                </a:extLst>
+              </a:tr>
+              <a:tr h="502920">
+                <a:tc>
+                  <a:txBody>
+                    <a:bodyPr/>
+                    <a:lstStyle/>
+                    <a:p>
+                      <a:pPr algn="l">
+                        <a:spcAft>
+                          <a:spcPts val="0"/>
+                        </a:spcAft>
+                      </a:pPr>
+                      <a:r>
+                        <a:rPr sz="1300" b="1" i="0">
+                          <a:solidFill>
+                            <a:srgbClr val="262626"/>
+                          </a:solidFill>
+                          <a:latin typeface="Candara"/>
+                        </a:rPr>
+                        <a:t>Northern coverage at its lower interval bound (61.4%)</a:t>
+                      </a:r>
+                    </a:p>
+                  </a:txBody>
+                  <a:tcPr marT="36576" marB="36576" anchor="ctr">
+                    <a:solidFill>
+                      <a:srgbClr val="FFFFFF"/>
+                    </a:solidFill>
+                  </a:tcPr>
+                </a:tc>
+                <a:tc>
+                  <a:txBody>
+                    <a:bodyPr/>
+                    <a:lstStyle/>
+                    <a:p>
+                      <a:pPr algn="r">
+                        <a:spcAft>
+                          <a:spcPts val="0"/>
+                        </a:spcAft>
+                      </a:pPr>
+                      <a:r>
+                        <a:rPr sz="1300" b="0" i="0">
+                          <a:solidFill>
+                            <a:srgbClr val="262626"/>
+                          </a:solidFill>
+                          <a:latin typeface="Candara"/>
+                        </a:rPr>
+                        <a:t>22,939</a:t>
+                      </a:r>
+                    </a:p>
+                  </a:txBody>
+                  <a:tcPr marT="36576" marB="36576" anchor="ctr">
+                    <a:solidFill>
+                      <a:srgbClr val="FFFFFF"/>
+                    </a:solidFill>
+                  </a:tcPr>
+                </a:tc>
+                <a:tc>
+                  <a:txBody>
+                    <a:bodyPr/>
+                    <a:lstStyle/>
+                    <a:p>
+                      <a:pPr algn="r">
+                        <a:spcAft>
+                          <a:spcPts val="0"/>
+                        </a:spcAft>
+                      </a:pPr>
+                      <a:r>
+                        <a:rPr sz="1300" b="0" i="0">
+                          <a:solidFill>
+                            <a:srgbClr val="262626"/>
+                          </a:solidFill>
+                          <a:latin typeface="Candara"/>
+                        </a:rPr>
+                        <a:t>18,596</a:t>
+                      </a:r>
+                    </a:p>
+                  </a:txBody>
+                  <a:tcPr marT="36576" marB="36576" anchor="ctr">
+                    <a:solidFill>
+                      <a:srgbClr val="FFFFFF"/>
+                    </a:solidFill>
+                  </a:tcPr>
+                </a:tc>
+                <a:tc>
+                  <a:txBody>
+                    <a:bodyPr/>
+                    <a:lstStyle/>
+                    <a:p>
+                      <a:pPr algn="r">
+                        <a:spcAft>
+                          <a:spcPts val="0"/>
+                        </a:spcAft>
+                      </a:pPr>
+                      <a:r>
+                        <a:rPr sz="1300" b="0" i="0">
+                          <a:solidFill>
+                            <a:srgbClr val="262626"/>
+                          </a:solidFill>
+                          <a:latin typeface="Candara"/>
+                        </a:rPr>
+                        <a:t>8,465</a:t>
+                      </a:r>
+                    </a:p>
+                  </a:txBody>
+                  <a:tcPr marT="36576" marB="36576" anchor="ctr">
+                    <a:solidFill>
+                      <a:srgbClr val="FFFFFF"/>
+                    </a:solidFill>
+                  </a:tcPr>
+                </a:tc>
+                <a:tc>
+                  <a:txBody>
+                    <a:bodyPr/>
+                    <a:lstStyle/>
+                    <a:p>
+                      <a:pPr algn="r">
+                        <a:spcAft>
+                          <a:spcPts val="0"/>
+                        </a:spcAft>
+                      </a:pPr>
+                      <a:r>
+                        <a:rPr sz="1300" b="0" i="0">
+                          <a:solidFill>
+                            <a:srgbClr val="262626"/>
+                          </a:solidFill>
+                          <a:latin typeface="Candara"/>
+                        </a:rPr>
+                        <a:t>1,292</a:t>
+                      </a:r>
+                    </a:p>
+                  </a:txBody>
+                  <a:tcPr marT="36576" marB="36576" anchor="ctr">
+                    <a:solidFill>
+                      <a:srgbClr val="FFFFFF"/>
+                    </a:solidFill>
+                  </a:tcPr>
+                </a:tc>
+                <a:extLst>
+                  <a:ext uri="{0D108BD9-81ED-4DB2-BD59-A6C34878D82A}">
+                    <a16:rowId xmlns:a16="http://schemas.microsoft.com/office/drawing/2014/main" val="10005"/>
+                  </a:ext>
+                </a:extLst>
+              </a:tr>
+              <a:tr h="502920">
+                <a:tc>
+                  <a:txBody>
+                    <a:bodyPr/>
+                    <a:lstStyle/>
+                    <a:p>
+                      <a:pPr algn="l">
+                        <a:spcAft>
+                          <a:spcPts val="0"/>
+                        </a:spcAft>
+                      </a:pPr>
+                      <a:r>
+                        <a:rPr sz="1300" b="1" i="0">
+                          <a:solidFill>
+                            <a:srgbClr val="262626"/>
+                          </a:solidFill>
+                          <a:latin typeface="Candara"/>
+                        </a:rPr>
+                        <a:t>Northern coverage at its upper interval bound (74.0%)</a:t>
+                      </a:r>
+                    </a:p>
+                  </a:txBody>
+                  <a:tcPr marT="36576" marB="36576" anchor="ctr">
+                    <a:solidFill>
+                      <a:srgbClr val="F3F3F3"/>
+                    </a:solidFill>
+                  </a:tcPr>
+                </a:tc>
+                <a:tc>
+                  <a:txBody>
+                    <a:bodyPr/>
+                    <a:lstStyle/>
+                    <a:p>
+                      <a:pPr algn="r">
+                        <a:spcAft>
+                          <a:spcPts val="0"/>
+                        </a:spcAft>
+                      </a:pPr>
+                      <a:r>
+                        <a:rPr sz="1300" b="0" i="0">
+                          <a:solidFill>
+                            <a:srgbClr val="262626"/>
+                          </a:solidFill>
+                          <a:latin typeface="Candara"/>
+                        </a:rPr>
+                        <a:t>29,004</a:t>
+                      </a:r>
+                    </a:p>
+                  </a:txBody>
+                  <a:tcPr marT="36576" marB="36576" anchor="ctr">
+                    <a:solidFill>
+                      <a:srgbClr val="F3F3F3"/>
+                    </a:solidFill>
+                  </a:tcPr>
+                </a:tc>
+                <a:tc>
+                  <a:txBody>
+                    <a:bodyPr/>
+                    <a:lstStyle/>
+                    <a:p>
+                      <a:pPr algn="r">
+                        <a:spcAft>
+                          <a:spcPts val="0"/>
+                        </a:spcAft>
+                      </a:pPr>
+                      <a:r>
+                        <a:rPr sz="1300" b="0" i="0">
+                          <a:solidFill>
+                            <a:srgbClr val="262626"/>
+                          </a:solidFill>
+                          <a:latin typeface="Candara"/>
+                        </a:rPr>
+                        <a:t>11,951</a:t>
+                      </a:r>
+                    </a:p>
+                  </a:txBody>
+                  <a:tcPr marT="36576" marB="36576" anchor="ctr">
+                    <a:solidFill>
+                      <a:srgbClr val="F3F3F3"/>
+                    </a:solidFill>
+                  </a:tcPr>
+                </a:tc>
+                <a:tc>
+                  <a:txBody>
+                    <a:bodyPr/>
+                    <a:lstStyle/>
+                    <a:p>
+                      <a:pPr algn="r">
+                        <a:spcAft>
+                          <a:spcPts val="0"/>
+                        </a:spcAft>
+                      </a:pPr>
+                      <a:r>
+                        <a:rPr sz="1300" b="0" i="0">
+                          <a:solidFill>
+                            <a:srgbClr val="262626"/>
+                          </a:solidFill>
+                          <a:latin typeface="Candara"/>
+                        </a:rPr>
+                        <a:t>9,045</a:t>
+                      </a:r>
+                    </a:p>
+                  </a:txBody>
+                  <a:tcPr marT="36576" marB="36576" anchor="ctr">
+                    <a:solidFill>
+                      <a:srgbClr val="F3F3F3"/>
+                    </a:solidFill>
+                  </a:tcPr>
+                </a:tc>
+                <a:tc>
+                  <a:txBody>
+                    <a:bodyPr/>
+                    <a:lstStyle/>
+                    <a:p>
+                      <a:pPr algn="r">
+                        <a:spcAft>
+                          <a:spcPts val="0"/>
+                        </a:spcAft>
+                      </a:pPr>
+                      <a:r>
+                        <a:rPr sz="1300" b="0" i="0">
+                          <a:solidFill>
+                            <a:srgbClr val="262626"/>
+                          </a:solidFill>
+                          <a:latin typeface="Candara"/>
+                        </a:rPr>
+                        <a:t>6,680</a:t>
+                      </a:r>
+                    </a:p>
+                  </a:txBody>
+                  <a:tcPr marT="36576" marB="36576" anchor="ctr">
+                    <a:solidFill>
+                      <a:srgbClr val="F3F3F3"/>
+                    </a:solidFill>
+                  </a:tcPr>
+                </a:tc>
+                <a:extLst>
+                  <a:ext uri="{0D108BD9-81ED-4DB2-BD59-A6C34878D82A}">
+                    <a16:rowId xmlns:a16="http://schemas.microsoft.com/office/drawing/2014/main" val="10006"/>
+                  </a:ext>
+                </a:extLst>
+              </a:tr>
+            </a:tbl>
+          </a:graphicData>
+        </a:graphic>
+      </p:graphicFrame>
+      <p:sp>
+        <p:nvSpPr>
+          <p:cNvPr id="5" name="TextBox 4"/>
+          <p:cNvSpPr txBox="1"/>
+          <p:nvPr/>
+        </p:nvSpPr>
+        <p:spPr>
+          <a:xfrm>
+            <a:off x="1060704" y="5029200"/>
+            <a:ext cx="10067544" cy="777240"/>
+          </a:xfrm>
+          <a:prstGeom prst="rect">
+            <a:avLst/>
+          </a:prstGeom>
+          <a:noFill/>
+        </p:spPr>
+        <p:txBody>
+          <a:bodyPr wrap="square" lIns="0" tIns="0" rIns="0" bIns="0" anchor="t">
+            <a:spAutoFit/>
+          </a:bodyPr>
+          <a:lstStyle/>
+          <a:p>
+            <a:pPr algn="l">
+              <a:spcAft>
+                <a:spcPts val="600"/>
+              </a:spcAft>
+            </a:pPr>
+            <a:r>
+              <a:rPr sz="1500" b="1" i="0">
+                <a:solidFill>
+                  <a:srgbClr val="AB3D3F"/>
+                </a:solidFill>
+                <a:latin typeface="Candara"/>
+              </a:rPr>
+              <a:t>Takeaway: </a:t>
+            </a:r>
+            <a:r>
+              <a:rPr sz="1500" b="0" i="0">
+                <a:solidFill>
+                  <a:srgbClr val="262626"/>
+                </a:solidFill>
+                <a:latin typeface="Candara"/>
+              </a:rPr>
+              <a:t>within a region, nets follow population in every scenario except the coverage correction. The regional split is the uncertain part, so treat regional totals as a range, not a point.</a:t>
+            </a:r>
+          </a:p>
+        </p:txBody>
+      </p:sp>
+    </p:spTree>
+  </p:cSld>
+  <p:clrMapOvr>
+    <a:masterClrMapping/>
+  </p:clrMapOvr>
+</p:sld>
+</file>
+
+<file path=ppt/slides/slide14.xml><?xml version="1.0" encoding="utf-8"?>
+<p:sld xmlns:a="http://schemas.openxmlformats.org/drawingml/2006/main" xmlns:r="http://schemas.openxmlformats.org/officeDocument/2006/relationships" xmlns:p="http://schemas.openxmlformats.org/presentationml/2006/main">
+  <p:cSld>
+    <p:spTree>
+      <p:nvGrpSpPr>
+        <p:cNvPr id="1" name=""/>
+        <p:cNvGrpSpPr/>
+        <p:nvPr/>
+      </p:nvGrpSpPr>
+      <p:grpSpPr>
+        <a:xfrm>
+          <a:off x="0" y="0"/>
+          <a:ext cx="0" cy="0"/>
+          <a:chOff x="0" y="0"/>
+          <a:chExt cx="0" cy="0"/>
+        </a:xfrm>
+      </p:grpSpPr>
+      <p:sp>
+        <p:nvSpPr>
+          <p:cNvPr id="2" name="Text Placeholder 1"/>
+          <p:cNvSpPr>
+            <a:spLocks noGrp="1"/>
+          </p:cNvSpPr>
+          <p:nvPr>
+            <p:ph type="body" sz="quarter" idx="11"/>
+          </p:nvPr>
+        </p:nvSpPr>
+        <p:spPr>
+          <a:xfrm>
+            <a:off x="571500" y="571500"/>
+            <a:ext cx="11055096" cy="737700"/>
+          </a:xfrm>
+        </p:spPr>
+        <p:txBody>
+          <a:bodyPr/>
+          <a:lstStyle/>
+          <a:p>
+            <a:r>
+              <a:rPr sz="3000"/>
+              <a:t>Equity: who this helps, and who it misses</a:t>
+            </a:r>
+          </a:p>
+        </p:txBody>
+      </p:sp>
+      <p:sp>
+        <p:nvSpPr>
+          <p:cNvPr id="3" name="Rounded Rectangle 2"/>
+          <p:cNvSpPr/>
+          <p:nvPr/>
+        </p:nvSpPr>
+        <p:spPr>
+          <a:xfrm>
+            <a:off x="566928" y="1417320"/>
+            <a:ext cx="5431536" cy="2057400"/>
+          </a:xfrm>
+          <a:prstGeom prst="roundRect">
+            <a:avLst>
+              <a:gd name="adj" fmla="val 5000"/>
+            </a:avLst>
+          </a:prstGeom>
+          <a:solidFill>
+            <a:srgbClr val="F3F3F3"/>
+          </a:solidFill>
+          <a:ln>
+            <a:noFill/>
+          </a:ln>
+          <a:effectLst/>
+        </p:spPr>
+        <p:style>
+          <a:lnRef idx="1">
+            <a:schemeClr val="accent1"/>
+          </a:lnRef>
+          <a:fillRef idx="3">
+            <a:schemeClr val="accent1"/>
+          </a:fillRef>
+          <a:effectRef idx="2">
+            <a:schemeClr val="accent1"/>
+          </a:effectRef>
+          <a:fontRef idx="minor">
+            <a:schemeClr val="lt1"/>
+          </a:fontRef>
+        </p:style>
+        <p:txBody>
+          <a:bodyPr wrap="square" lIns="201168" tIns="160934" rIns="201168" bIns="160934" rtlCol="0" anchor="t"/>
+          <a:lstStyle/>
+          <a:p>
+            <a:pPr algn="l">
+              <a:spcAft>
+                <a:spcPts val="0"/>
+              </a:spcAft>
+            </a:pPr>
+            <a:r>
+              <a:rPr sz="1400" b="1" i="0">
+                <a:solidFill>
+                  <a:srgbClr val="595959"/>
+                </a:solidFill>
+                <a:latin typeface="Candara"/>
+              </a:rPr>
+              <a:t>Outside the map</a:t>
+            </a:r>
+          </a:p>
+          <a:p>
+            <a:pPr algn="l">
+              <a:spcAft>
+                <a:spcPts val="200"/>
+              </a:spcAft>
+            </a:pPr>
+            <a:r>
+              <a:rPr sz="3000" b="1" i="0">
+                <a:solidFill>
+                  <a:srgbClr val="AB3D3F"/>
+                </a:solidFill>
+                <a:latin typeface="Candara"/>
+              </a:rPr>
+              <a:t>207 of 260</a:t>
+            </a:r>
+          </a:p>
+          <a:p>
+            <a:pPr algn="l">
+              <a:spcAft>
+                <a:spcPts val="600"/>
+              </a:spcAft>
+            </a:pPr>
+            <a:r>
+              <a:rPr sz="1300" b="0" i="0">
+                <a:solidFill>
+                  <a:srgbClr val="262626"/>
+                </a:solidFill>
+                <a:latin typeface="Candara"/>
+              </a:rPr>
+              <a:t>of Ghana's districts have no district case data in our package. This allocation says nothing about them and should not be stretched to them.</a:t>
+            </a:r>
+          </a:p>
+        </p:txBody>
+      </p:sp>
+      <p:sp>
+        <p:nvSpPr>
+          <p:cNvPr id="4" name="Rounded Rectangle 3"/>
+          <p:cNvSpPr/>
+          <p:nvPr/>
+        </p:nvSpPr>
+        <p:spPr>
+          <a:xfrm>
+            <a:off x="6190488" y="1417320"/>
+            <a:ext cx="5431536" cy="2057400"/>
+          </a:xfrm>
+          <a:prstGeom prst="roundRect">
+            <a:avLst>
+              <a:gd name="adj" fmla="val 5000"/>
+            </a:avLst>
+          </a:prstGeom>
+          <a:solidFill>
+            <a:srgbClr val="F3F3F3"/>
+          </a:solidFill>
+          <a:ln>
+            <a:noFill/>
+          </a:ln>
+          <a:effectLst/>
+        </p:spPr>
+        <p:style>
+          <a:lnRef idx="1">
+            <a:schemeClr val="accent1"/>
+          </a:lnRef>
+          <a:fillRef idx="3">
+            <a:schemeClr val="accent1"/>
+          </a:fillRef>
+          <a:effectRef idx="2">
+            <a:schemeClr val="accent1"/>
+          </a:effectRef>
+          <a:fontRef idx="minor">
+            <a:schemeClr val="lt1"/>
+          </a:fontRef>
+        </p:style>
+        <p:txBody>
+          <a:bodyPr wrap="square" lIns="201168" tIns="160934" rIns="201168" bIns="160934" rtlCol="0" anchor="t"/>
+          <a:lstStyle/>
+          <a:p>
+            <a:pPr algn="l">
+              <a:spcAft>
+                <a:spcPts val="0"/>
+              </a:spcAft>
+            </a:pPr>
+            <a:r>
+              <a:rPr sz="1400" b="1" i="0">
+                <a:solidFill>
+                  <a:srgbClr val="595959"/>
+                </a:solidFill>
+                <a:latin typeface="Candara"/>
+              </a:rPr>
+              <a:t>Testing access</a:t>
+            </a:r>
+          </a:p>
+          <a:p>
+            <a:pPr algn="l">
+              <a:spcAft>
+                <a:spcPts val="200"/>
+              </a:spcAft>
+            </a:pPr>
+            <a:r>
+              <a:rPr sz="3000" b="1" i="0">
+                <a:solidFill>
+                  <a:srgbClr val="AB3D3F"/>
+                </a:solidFill>
+                <a:latin typeface="Candara"/>
+              </a:rPr>
+              <a:t>65%</a:t>
+            </a:r>
+          </a:p>
+          <a:p>
+            <a:pPr algn="l">
+              <a:spcAft>
+                <a:spcPts val="600"/>
+              </a:spcAft>
+            </a:pPr>
+            <a:r>
+              <a:rPr sz="1300" b="0" i="0">
+                <a:solidFill>
+                  <a:srgbClr val="262626"/>
+                </a:solidFill>
+                <a:latin typeface="Candara"/>
+              </a:rPr>
+              <a:t>median test positivity in Northern Region, the highest of the three, yet it reports the fewest cases per person (0.27 a year, against 0.88 and 0.80). That points to under-testing, which a case-based rule would punish.</a:t>
+            </a:r>
+          </a:p>
+        </p:txBody>
+      </p:sp>
+      <p:sp>
+        <p:nvSpPr>
+          <p:cNvPr id="5" name="Rounded Rectangle 4"/>
+          <p:cNvSpPr/>
+          <p:nvPr/>
+        </p:nvSpPr>
+        <p:spPr>
+          <a:xfrm>
+            <a:off x="566928" y="3611880"/>
+            <a:ext cx="5431536" cy="2057400"/>
+          </a:xfrm>
+          <a:prstGeom prst="roundRect">
+            <a:avLst>
+              <a:gd name="adj" fmla="val 5000"/>
+            </a:avLst>
+          </a:prstGeom>
+          <a:solidFill>
+            <a:srgbClr val="F3F3F3"/>
+          </a:solidFill>
+          <a:ln>
+            <a:noFill/>
+          </a:ln>
+          <a:effectLst/>
+        </p:spPr>
+        <p:style>
+          <a:lnRef idx="1">
+            <a:schemeClr val="accent1"/>
+          </a:lnRef>
+          <a:fillRef idx="3">
+            <a:schemeClr val="accent1"/>
+          </a:fillRef>
+          <a:effectRef idx="2">
+            <a:schemeClr val="accent1"/>
+          </a:effectRef>
+          <a:fontRef idx="minor">
+            <a:schemeClr val="lt1"/>
+          </a:fontRef>
+        </p:style>
+        <p:txBody>
+          <a:bodyPr wrap="square" lIns="201168" tIns="160934" rIns="201168" bIns="160934" rtlCol="0" anchor="t"/>
+          <a:lstStyle/>
+          <a:p>
+            <a:pPr algn="l">
+              <a:spcAft>
+                <a:spcPts val="0"/>
+              </a:spcAft>
+            </a:pPr>
+            <a:r>
+              <a:rPr sz="1400" b="1" i="0">
+                <a:solidFill>
+                  <a:srgbClr val="595959"/>
+                </a:solidFill>
+                <a:latin typeface="Candara"/>
+              </a:rPr>
+              <a:t>Interventions we left out</a:t>
+            </a:r>
+          </a:p>
+          <a:p>
+            <a:pPr algn="l">
+              <a:spcAft>
+                <a:spcPts val="200"/>
+              </a:spcAft>
+            </a:pPr>
+            <a:r>
+              <a:rPr sz="3000" b="1" i="0">
+                <a:solidFill>
+                  <a:srgbClr val="AB3D3F"/>
+                </a:solidFill>
+                <a:latin typeface="Candara"/>
+              </a:rPr>
+              <a:t>32 and 24</a:t>
+            </a:r>
+          </a:p>
+          <a:p>
+            <a:pPr algn="l">
+              <a:spcAft>
+                <a:spcPts val="600"/>
+              </a:spcAft>
+            </a:pPr>
+            <a:r>
+              <a:rPr sz="1300" b="0" i="0">
+                <a:solidFill>
+                  <a:srgbClr val="262626"/>
+                </a:solidFill>
+                <a:latin typeface="Candara"/>
+              </a:rPr>
+              <a:t>of the 50 districts had indoor spraying and seasonal chemoprevention in 2014-17, including every Upper East and Upper West district. Both change burden, and sprayed districts are excluded from national net campaigns.</a:t>
+            </a:r>
+          </a:p>
+        </p:txBody>
+      </p:sp>
+      <p:sp>
+        <p:nvSpPr>
+          <p:cNvPr id="6" name="Rounded Rectangle 5"/>
+          <p:cNvSpPr/>
+          <p:nvPr/>
+        </p:nvSpPr>
+        <p:spPr>
+          <a:xfrm>
+            <a:off x="6190488" y="3611880"/>
+            <a:ext cx="5431536" cy="2057400"/>
+          </a:xfrm>
+          <a:prstGeom prst="roundRect">
+            <a:avLst>
+              <a:gd name="adj" fmla="val 5000"/>
+            </a:avLst>
+          </a:prstGeom>
+          <a:solidFill>
+            <a:srgbClr val="F3F3F3"/>
+          </a:solidFill>
+          <a:ln>
+            <a:noFill/>
+          </a:ln>
+          <a:effectLst/>
+        </p:spPr>
+        <p:style>
+          <a:lnRef idx="1">
+            <a:schemeClr val="accent1"/>
+          </a:lnRef>
+          <a:fillRef idx="3">
+            <a:schemeClr val="accent1"/>
+          </a:fillRef>
+          <a:effectRef idx="2">
+            <a:schemeClr val="accent1"/>
+          </a:effectRef>
+          <a:fontRef idx="minor">
+            <a:schemeClr val="lt1"/>
+          </a:fontRef>
+        </p:style>
+        <p:txBody>
+          <a:bodyPr wrap="square" lIns="201168" tIns="160934" rIns="201168" bIns="160934" rtlCol="0" anchor="t"/>
+          <a:lstStyle/>
+          <a:p>
+            <a:pPr algn="l">
+              <a:spcAft>
+                <a:spcPts val="0"/>
+              </a:spcAft>
+            </a:pPr>
+            <a:r>
+              <a:rPr sz="1400" b="1" i="0">
+                <a:solidFill>
+                  <a:srgbClr val="595959"/>
+                </a:solidFill>
+                <a:latin typeface="Candara"/>
+              </a:rPr>
+              <a:t>Privacy by design</a:t>
+            </a:r>
+          </a:p>
+          <a:p>
+            <a:pPr algn="l">
+              <a:spcAft>
+                <a:spcPts val="200"/>
+              </a:spcAft>
+            </a:pPr>
+            <a:r>
+              <a:rPr sz="3000" b="1" i="0">
+                <a:solidFill>
+                  <a:srgbClr val="AB3D3F"/>
+                </a:solidFill>
+                <a:latin typeface="Candara"/>
+              </a:rPr>
+              <a:t>0</a:t>
+            </a:r>
+          </a:p>
+          <a:p>
+            <a:pPr algn="l">
+              <a:spcAft>
+                <a:spcPts val="600"/>
+              </a:spcAft>
+            </a:pPr>
+            <a:r>
+              <a:rPr sz="1300" b="0" i="0">
+                <a:solidFill>
+                  <a:srgbClr val="262626"/>
+                </a:solidFill>
+                <a:latin typeface="Candara"/>
+              </a:rPr>
+              <a:t>data files or notebook outputs in the project's git history. Licensed DHS household records stay out of git and out of this deck; everything shown is an aggregate.</a:t>
+            </a:r>
+          </a:p>
+        </p:txBody>
+      </p:sp>
+    </p:spTree>
+  </p:cSld>
+  <p:clrMapOvr>
+    <a:masterClrMapping/>
+  </p:clrMapOvr>
+</p:sld>
+</file>
+
+<file path=ppt/slides/slide15.xml><?xml version="1.0" encoding="utf-8"?>
+<p:sld xmlns:a="http://schemas.openxmlformats.org/drawingml/2006/main" xmlns:r="http://schemas.openxmlformats.org/officeDocument/2006/relationships" xmlns:p="http://schemas.openxmlformats.org/presentationml/2006/main">
+  <p:cSld>
+    <p:spTree>
+      <p:nvGrpSpPr>
+        <p:cNvPr id="1" name=""/>
+        <p:cNvGrpSpPr/>
+        <p:nvPr/>
+      </p:nvGrpSpPr>
+      <p:grpSpPr>
+        <a:xfrm>
+          <a:off x="0" y="0"/>
+          <a:ext cx="0" cy="0"/>
+          <a:chOff x="0" y="0"/>
+          <a:chExt cx="0" cy="0"/>
+        </a:xfrm>
+      </p:grpSpPr>
+      <p:sp>
+        <p:nvSpPr>
+          <p:cNvPr id="2" name="Text Placeholder 1"/>
+          <p:cNvSpPr>
+            <a:spLocks noGrp="1"/>
+          </p:cNvSpPr>
+          <p:nvPr>
+            <p:ph type="body" sz="quarter" idx="11"/>
+          </p:nvPr>
+        </p:nvSpPr>
+        <p:spPr>
+          <a:xfrm>
+            <a:off x="571500" y="571500"/>
+            <a:ext cx="11055096" cy="737700"/>
+          </a:xfrm>
+        </p:spPr>
+        <p:txBody>
+          <a:bodyPr/>
+          <a:lstStyle/>
+          <a:p>
+            <a:r>
+              <a:t>Limitations, and what we would do next</a:t>
+            </a:r>
+          </a:p>
+        </p:txBody>
+      </p:sp>
+      <p:sp>
+        <p:nvSpPr>
+          <p:cNvPr id="3" name="Rounded Rectangle 2"/>
+          <p:cNvSpPr/>
+          <p:nvPr/>
+        </p:nvSpPr>
+        <p:spPr>
+          <a:xfrm>
+            <a:off x="566928" y="1463040"/>
+            <a:ext cx="5431536" cy="3749039"/>
+          </a:xfrm>
+          <a:prstGeom prst="roundRect">
+            <a:avLst>
+              <a:gd name="adj" fmla="val 5000"/>
+            </a:avLst>
+          </a:prstGeom>
+          <a:solidFill>
+            <a:srgbClr val="F3F3F3"/>
+          </a:solidFill>
+          <a:ln>
+            <a:noFill/>
+          </a:ln>
+          <a:effectLst/>
+        </p:spPr>
+        <p:style>
+          <a:lnRef idx="1">
+            <a:schemeClr val="accent1"/>
+          </a:lnRef>
+          <a:fillRef idx="3">
+            <a:schemeClr val="accent1"/>
+          </a:fillRef>
+          <a:effectRef idx="2">
+            <a:schemeClr val="accent1"/>
+          </a:effectRef>
+          <a:fontRef idx="minor">
+            <a:schemeClr val="lt1"/>
+          </a:fontRef>
+        </p:style>
+        <p:txBody>
+          <a:bodyPr wrap="square" lIns="201168" tIns="160934" rIns="201168" bIns="160934" rtlCol="0" anchor="t"/>
+          <a:lstStyle/>
+          <a:p>
+            <a:pPr algn="l">
+              <a:spcAft>
+                <a:spcPts val="800"/>
+              </a:spcAft>
+            </a:pPr>
+            <a:r>
+              <a:rPr sz="1800" b="1" i="0">
+                <a:solidFill>
+                  <a:srgbClr val="AB3D3F"/>
+                </a:solidFill>
+                <a:latin typeface="Candara"/>
+              </a:rPr>
+              <a:t>Limitations</a:t>
+            </a:r>
+          </a:p>
+          <a:p>
+            <a:pPr marL="219456" indent="-219456" algn="l">
+              <a:spcAft>
+                <a:spcPts val="800"/>
+              </a:spcAft>
+              <a:buClr>
+                <a:srgbClr val="AB3D3F"/>
+              </a:buClr>
+              <a:buFont typeface="Arial"/>
+              <a:buChar char="•"/>
+            </a:pPr>
+            <a:r>
+              <a:rPr sz="1600" b="0" i="0">
+                <a:solidFill>
+                  <a:srgbClr val="262626"/>
+                </a:solidFill>
+                <a:latin typeface="Candara"/>
+              </a:rPr>
+              <a:t>11 districts coded Northern are now in Savannah (79.1% of households own a net) or North East (62.8%). Correcting this moves 3,740 nets.</a:t>
+            </a:r>
+          </a:p>
+          <a:p>
+            <a:pPr marL="219456" indent="-219456" algn="l">
+              <a:spcAft>
+                <a:spcPts val="800"/>
+              </a:spcAft>
+              <a:buClr>
+                <a:srgbClr val="AB3D3F"/>
+              </a:buClr>
+              <a:buFont typeface="Arial"/>
+              <a:buChar char="•"/>
+            </a:pPr>
+            <a:r>
+              <a:rPr sz="1600" b="0" i="0">
+                <a:solidFill>
+                  <a:srgbClr val="262626"/>
+                </a:solidFill>
+                <a:latin typeface="Candara"/>
+              </a:rPr>
+              <a:t>39 of 50 districts report more than one confirmed case per resident over 2014-17: repeat episodes, care-seeking across district lines, or undercounted populations.</a:t>
+            </a:r>
+          </a:p>
+          <a:p>
+            <a:pPr marL="219456" indent="-219456" algn="l">
+              <a:spcAft>
+                <a:spcPts val="800"/>
+              </a:spcAft>
+              <a:buClr>
+                <a:srgbClr val="AB3D3F"/>
+              </a:buClr>
+              <a:buFont typeface="Arial"/>
+              <a:buChar char="•"/>
+            </a:pPr>
+            <a:r>
+              <a:rPr sz="1600" b="0" i="0">
+                <a:solidFill>
+                  <a:srgbClr val="262626"/>
+                </a:solidFill>
+                <a:latin typeface="Candara"/>
+              </a:rPr>
+              <a:t>Coverage is from 2022 and cases from 2014-17.</a:t>
+            </a:r>
+          </a:p>
+          <a:p>
+            <a:pPr marL="219456" indent="-219456" algn="l">
+              <a:spcAft>
+                <a:spcPts val="600"/>
+              </a:spcAft>
+              <a:buClr>
+                <a:srgbClr val="AB3D3F"/>
+              </a:buClr>
+              <a:buFont typeface="Arial"/>
+              <a:buChar char="•"/>
+            </a:pPr>
+            <a:r>
+              <a:rPr sz="1600" b="0" i="0">
+                <a:solidFill>
+                  <a:srgbClr val="262626"/>
+                </a:solidFill>
+                <a:latin typeface="Candara"/>
+              </a:rPr>
+              <a:t>The survey has no district identifier or parasitaemia data, and published ITN intervals are empty.</a:t>
+            </a:r>
+          </a:p>
+        </p:txBody>
+      </p:sp>
+      <p:sp>
+        <p:nvSpPr>
+          <p:cNvPr id="4" name="Rounded Rectangle 3"/>
+          <p:cNvSpPr/>
+          <p:nvPr/>
+        </p:nvSpPr>
+        <p:spPr>
+          <a:xfrm>
+            <a:off x="6190488" y="1463040"/>
+            <a:ext cx="5431536" cy="3749039"/>
+          </a:xfrm>
+          <a:prstGeom prst="roundRect">
+            <a:avLst>
+              <a:gd name="adj" fmla="val 5000"/>
+            </a:avLst>
+          </a:prstGeom>
+          <a:solidFill>
+            <a:srgbClr val="F3F3F3"/>
+          </a:solidFill>
+          <a:ln>
+            <a:noFill/>
+          </a:ln>
+          <a:effectLst/>
+        </p:spPr>
+        <p:style>
+          <a:lnRef idx="1">
+            <a:schemeClr val="accent1"/>
+          </a:lnRef>
+          <a:fillRef idx="3">
+            <a:schemeClr val="accent1"/>
+          </a:fillRef>
+          <a:effectRef idx="2">
+            <a:schemeClr val="accent1"/>
+          </a:effectRef>
+          <a:fontRef idx="minor">
+            <a:schemeClr val="lt1"/>
+          </a:fontRef>
+        </p:style>
+        <p:txBody>
+          <a:bodyPr wrap="square" lIns="201168" tIns="160934" rIns="201168" bIns="160934" rtlCol="0" anchor="t"/>
+          <a:lstStyle/>
+          <a:p>
+            <a:pPr algn="l">
+              <a:spcAft>
+                <a:spcPts val="800"/>
+              </a:spcAft>
+            </a:pPr>
+            <a:r>
+              <a:rPr sz="1800" b="1" i="0">
+                <a:solidFill>
+                  <a:srgbClr val="AB3D3F"/>
+                </a:solidFill>
+                <a:latin typeface="Candara"/>
+              </a:rPr>
+              <a:t>Before any real distribution</a:t>
+            </a:r>
+          </a:p>
+          <a:p>
+            <a:pPr marL="219456" indent="-219456" algn="l">
+              <a:spcAft>
+                <a:spcPts val="1000"/>
+              </a:spcAft>
+              <a:buClr>
+                <a:srgbClr val="AB3D3F"/>
+              </a:buClr>
+              <a:buFont typeface="Arial"/>
+              <a:buChar char="•"/>
+            </a:pPr>
+            <a:r>
+              <a:rPr sz="1600" b="0" i="0">
+                <a:solidFill>
+                  <a:srgbClr val="262626"/>
+                </a:solidFill>
+                <a:latin typeface="Candara"/>
+              </a:rPr>
+              <a:t>Refit with today's regions and district-level spraying and chemoprevention.</a:t>
+            </a:r>
+          </a:p>
+          <a:p>
+            <a:pPr marL="219456" indent="-219456" algn="l">
+              <a:spcAft>
+                <a:spcPts val="1000"/>
+              </a:spcAft>
+              <a:buClr>
+                <a:srgbClr val="AB3D3F"/>
+              </a:buClr>
+              <a:buFont typeface="Arial"/>
+              <a:buChar char="•"/>
+            </a:pPr>
+            <a:r>
+              <a:rPr sz="1600" b="0" i="0">
+                <a:solidFill>
+                  <a:srgbClr val="262626"/>
+                </a:solidFill>
+                <a:latin typeface="Candara"/>
+              </a:rPr>
+              <a:t>Model risk with region effects, and use coverage only in the gap term.</a:t>
+            </a:r>
+          </a:p>
+          <a:p>
+            <a:pPr marL="219456" indent="-219456" algn="l">
+              <a:spcAft>
+                <a:spcPts val="1000"/>
+              </a:spcAft>
+              <a:buClr>
+                <a:srgbClr val="AB3D3F"/>
+              </a:buClr>
+              <a:buFont typeface="Arial"/>
+              <a:buChar char="•"/>
+            </a:pPr>
+            <a:r>
+              <a:rPr sz="1600" b="0" i="0">
+                <a:solidFill>
+                  <a:srgbClr val="262626"/>
+                </a:solidFill>
+                <a:latin typeface="Candara"/>
+              </a:rPr>
+              <a:t>Validate by holding out whole regions, and report the spread across seeds.</a:t>
+            </a:r>
+          </a:p>
+          <a:p>
+            <a:pPr marL="219456" indent="-219456" algn="l">
+              <a:spcAft>
+                <a:spcPts val="600"/>
+              </a:spcAft>
+              <a:buClr>
+                <a:srgbClr val="AB3D3F"/>
+              </a:buClr>
+              <a:buFont typeface="Arial"/>
+              <a:buChar char="•"/>
+            </a:pPr>
+            <a:r>
+              <a:rPr sz="1600" b="0" i="0">
+                <a:solidFill>
+                  <a:srgbClr val="262626"/>
+                </a:solidFill>
+                <a:latin typeface="Candara"/>
+              </a:rPr>
+              <a:t>Deliver through regional medical stores and CHPS compounds, then survey net use after six months.</a:t>
+            </a:r>
+          </a:p>
+        </p:txBody>
+      </p:sp>
+    </p:spTree>
+  </p:cSld>
+  <p:clrMapOvr>
+    <a:masterClrMapping/>
+  </p:clrMapOvr>
+</p:sld>
+</file>
+
+<file path=ppt/slides/slide16.xml><?xml version="1.0" encoding="utf-8"?>
+<p:sld xmlns:a="http://schemas.openxmlformats.org/drawingml/2006/main" xmlns:r="http://schemas.openxmlformats.org/officeDocument/2006/relationships" xmlns:p="http://schemas.openxmlformats.org/presentationml/2006/main">
+  <p:cSld>
+    <p:spTree>
+      <p:nvGrpSpPr>
+        <p:cNvPr id="1" name=""/>
+        <p:cNvGrpSpPr/>
+        <p:nvPr/>
+      </p:nvGrpSpPr>
+      <p:grpSpPr>
+        <a:xfrm>
+          <a:off x="0" y="0"/>
+          <a:ext cx="0" cy="0"/>
+          <a:chOff x="0" y="0"/>
+          <a:chExt cx="0" cy="0"/>
+        </a:xfrm>
+      </p:grpSpPr>
+      <p:sp>
+        <p:nvSpPr>
+          <p:cNvPr id="2" name="Title 1"/>
+          <p:cNvSpPr>
+            <a:spLocks noGrp="1"/>
+          </p:cNvSpPr>
+          <p:nvPr>
+            <p:ph type="ctrTitle"/>
+          </p:nvPr>
+        </p:nvSpPr>
+        <p:spPr/>
+        <p:txBody>
+          <a:bodyPr/>
+          <a:lstStyle/>
+          <a:p>
+            <a:r>
+              <a:rPr sz="6000"/>
+              <a:t>Thank you. Questions?</a:t>
+            </a:r>
+          </a:p>
+        </p:txBody>
+      </p:sp>
+      <p:sp>
+        <p:nvSpPr>
+          <p:cNvPr id="3" name="TextBox 2"/>
+          <p:cNvSpPr txBox="1"/>
+          <p:nvPr/>
+        </p:nvSpPr>
+        <p:spPr>
+          <a:xfrm>
+            <a:off x="1527048" y="5212080"/>
+            <a:ext cx="9144000" cy="457200"/>
+          </a:xfrm>
+          <a:prstGeom prst="rect">
+            <a:avLst/>
+          </a:prstGeom>
+          <a:noFill/>
+        </p:spPr>
+        <p:txBody>
+          <a:bodyPr wrap="square" lIns="0" tIns="0" rIns="0" bIns="0" anchor="t">
+            <a:spAutoFit/>
+          </a:bodyPr>
+          <a:lstStyle/>
+          <a:p>
+            <a:pPr algn="ctr">
+              <a:spcAft>
+                <a:spcPts val="600"/>
+              </a:spcAft>
+            </a:pPr>
+            <a:r>
+              <a:rPr sz="1600" b="0" i="0">
+                <a:solidFill>
+                  <a:srgbClr val="FEBA5A"/>
+                </a:solidFill>
+                <a:latin typeface="Candara"/>
+              </a:rPr>
+              <a:t>ICS553 Machine Learning Essentials · Group 3 · Ashesi University</a:t>
+            </a:r>
+          </a:p>
+        </p:txBody>
+      </p:sp>
+      <p:sp>
+        <p:nvSpPr>
+          <p:cNvPr id="4" name="TextBox 3"/>
+          <p:cNvSpPr txBox="1"/>
+          <p:nvPr/>
+        </p:nvSpPr>
+        <p:spPr>
+          <a:xfrm>
+            <a:off x="1069848" y="5806440"/>
+            <a:ext cx="10058400" cy="184666"/>
+          </a:xfrm>
+          <a:prstGeom prst="rect">
+            <a:avLst/>
+          </a:prstGeom>
+          <a:noFill/>
+        </p:spPr>
+        <p:txBody>
+          <a:bodyPr wrap="square" lIns="0" tIns="0" rIns="0" bIns="0" anchor="t">
+            <a:spAutoFit/>
+          </a:bodyPr>
+          <a:lstStyle/>
+          <a:p>
+            <a:pPr algn="ctr">
+              <a:spcAft>
+                <a:spcPts val="600"/>
+              </a:spcAft>
+            </a:pPr>
+            <a:r>
+              <a:rPr sz="1200" b="1" i="0" dirty="0">
+                <a:solidFill>
+                  <a:srgbClr val="FEBA5A"/>
+                </a:solidFill>
+                <a:latin typeface="Candara"/>
+              </a:rPr>
+              <a:t>AI declaration: </a:t>
+            </a:r>
+            <a:r>
+              <a:rPr sz="1200" b="0" i="0" dirty="0">
+                <a:solidFill>
+                  <a:srgbClr val="FFFFFF"/>
+                </a:solidFill>
+                <a:latin typeface="Candara"/>
+              </a:rPr>
+              <a:t>we used AI tools to help aggregate our information and to generate this presentation from our aggregated </a:t>
+            </a:r>
+            <a:r>
+              <a:rPr sz="1200" b="0" i="0">
+                <a:solidFill>
+                  <a:srgbClr val="FFFFFF"/>
+                </a:solidFill>
+                <a:latin typeface="Candara"/>
+              </a:rPr>
+              <a:t>information.</a:t>
+            </a:r>
+            <a:endParaRPr sz="1200" b="0" i="0" dirty="0">
+              <a:solidFill>
+                <a:srgbClr val="FFFFFF"/>
+              </a:solidFill>
+              <a:latin typeface="Candara"/>
+            </a:endParaRPr>
+          </a:p>
+        </p:txBody>
+      </p:sp>
+    </p:spTree>
+  </p:cSld>
+  <p:clrMapOvr>
+    <a:masterClrMapping/>
+  </p:clrMapOvr>
+</p:sld>
+</file>
+
+<file path=ppt/slides/slide2.xml><?xml version="1.0" encoding="utf-8"?>
+<p:sld xmlns:a="http://schemas.openxmlformats.org/drawingml/2006/main" xmlns:r="http://schemas.openxmlformats.org/officeDocument/2006/relationships" xmlns:p="http://schemas.openxmlformats.org/presentationml/2006/main">
+  <p:cSld>
+    <p:spTree>
+      <p:nvGrpSpPr>
+        <p:cNvPr id="1" name=""/>
+        <p:cNvGrpSpPr/>
+        <p:nvPr/>
+      </p:nvGrpSpPr>
+      <p:grpSpPr>
+        <a:xfrm>
+          <a:off x="0" y="0"/>
+          <a:ext cx="0" cy="0"/>
+          <a:chOff x="0" y="0"/>
+          <a:chExt cx="0" cy="0"/>
+        </a:xfrm>
+      </p:grpSpPr>
+      <p:sp>
+        <p:nvSpPr>
+          <p:cNvPr id="2" name="Text Placeholder 1"/>
+          <p:cNvSpPr>
+            <a:spLocks noGrp="1"/>
+          </p:cNvSpPr>
+          <p:nvPr>
+            <p:ph type="body" sz="quarter" idx="11"/>
           </p:nvPr>
         </p:nvSpPr>
         <p:spPr>
@@ -5281,7 +8261,7 @@
           <a:noFill/>
         </p:spPr>
         <p:txBody>
-          <a:bodyPr wrap="square" anchor="t" lIns="0" rIns="0" tIns="0" bIns="0">
+          <a:bodyPr wrap="square" lIns="0" tIns="0" rIns="0" bIns="0" anchor="t">
             <a:spAutoFit/>
           </a:bodyPr>
           <a:lstStyle/>
@@ -5360,7 +8340,7 @@
           </a:fontRef>
         </p:style>
         <p:txBody>
-          <a:bodyPr rtlCol="0" anchor="ctr" wrap="square" lIns="201168" rIns="201168" tIns="160934" bIns="160934"/>
+          <a:bodyPr wrap="square" lIns="201168" tIns="160934" rIns="201168" bIns="160934" rtlCol="0" anchor="ctr"/>
           <a:lstStyle/>
           <a:p>
             <a:pPr algn="l">
@@ -5451,7 +8431,7 @@
           </a:fontRef>
         </p:style>
         <p:txBody>
-          <a:bodyPr rtlCol="0" anchor="ctr" wrap="square" lIns="201168" rIns="201168" tIns="160934" bIns="160934"/>
+          <a:bodyPr wrap="square" lIns="201168" tIns="160934" rIns="201168" bIns="160934" rtlCol="0" anchor="ctr"/>
           <a:lstStyle/>
           <a:p>
             <a:pPr algn="l">
@@ -5542,7 +8522,7 @@
           </a:fontRef>
         </p:style>
         <p:txBody>
-          <a:bodyPr rtlCol="0" anchor="ctr" wrap="square" lIns="201168" rIns="201168" tIns="160934" bIns="160934"/>
+          <a:bodyPr wrap="square" lIns="201168" tIns="160934" rIns="201168" bIns="160934" rtlCol="0" anchor="ctr"/>
           <a:lstStyle/>
           <a:p>
             <a:pPr algn="l">
@@ -5611,7 +8591,7 @@
           <a:noFill/>
         </p:spPr>
         <p:txBody>
-          <a:bodyPr wrap="square" anchor="t" lIns="0" rIns="0" tIns="0" bIns="0">
+          <a:bodyPr wrap="square" lIns="0" tIns="0" rIns="0" bIns="0" anchor="t">
             <a:spAutoFit/>
           </a:bodyPr>
           <a:lstStyle/>
@@ -5675,8 +8655,8 @@
 </p:sld>
 </file>
 
-<file path=ppt/slides/slide12.xml><?xml version="1.0" encoding="utf-8"?>
-<p:sld xmlns:a="http://schemas.openxmlformats.org/drawingml/2006/main" xmlns:p="http://schemas.openxmlformats.org/presentationml/2006/main" xmlns:r="http://schemas.openxmlformats.org/officeDocument/2006/relationships">
+<file path=ppt/slides/slide3.xml><?xml version="1.0" encoding="utf-8"?>
+<p:sld xmlns:a="http://schemas.openxmlformats.org/drawingml/2006/main" xmlns:r="http://schemas.openxmlformats.org/officeDocument/2006/relationships" xmlns:p="http://schemas.openxmlformats.org/presentationml/2006/main">
   <p:cSld>
     <p:spTree>
       <p:nvGrpSpPr>
@@ -5684,7 +8664,14 @@
         <p:cNvGrpSpPr/>
         <p:nvPr/>
       </p:nvGrpSpPr>
-      <p:grpSpPr/>
+      <p:grpSpPr>
+        <a:xfrm>
+          <a:off x="0" y="0"/>
+          <a:ext cx="0" cy="0"/>
+          <a:chOff x="0" y="0"/>
+          <a:chExt cx="0" cy="0"/>
+        </a:xfrm>
+      </p:grpSpPr>
       <p:sp>
         <p:nvSpPr>
           <p:cNvPr id="2" name="Text Placeholder 1"/>
@@ -5692,7 +8679,7 @@
             <a:spLocks noGrp="1"/>
           </p:cNvSpPr>
           <p:nvPr>
-            <p:ph type="body" idx="11" sz="quarter"/>
+            <p:ph type="body" sz="quarter" idx="11"/>
           </p:nvPr>
         </p:nvSpPr>
         <p:spPr>
@@ -5750,7 +8737,7 @@
           </a:fontRef>
         </p:style>
         <p:txBody>
-          <a:bodyPr rtlCol="0" anchor="t" wrap="square" lIns="274320" rIns="274320" tIns="219456" bIns="219456"/>
+          <a:bodyPr wrap="square" lIns="274320" tIns="219456" rIns="274320" bIns="219456" rtlCol="0" anchor="t"/>
           <a:lstStyle/>
           <a:p>
             <a:pPr algn="l">
@@ -5841,7 +8828,7 @@
           </a:fontRef>
         </p:style>
         <p:txBody>
-          <a:bodyPr rtlCol="0" anchor="t" wrap="square" lIns="274320" rIns="274320" tIns="219456" bIns="219456"/>
+          <a:bodyPr wrap="square" lIns="274320" tIns="219456" rIns="274320" bIns="219456" rtlCol="0" anchor="t"/>
           <a:lstStyle/>
           <a:p>
             <a:pPr algn="l">
@@ -5910,7 +8897,7 @@
           <a:noFill/>
         </p:spPr>
         <p:txBody>
-          <a:bodyPr wrap="square" anchor="t" lIns="0" rIns="0" tIns="0" bIns="0">
+          <a:bodyPr wrap="square" lIns="0" tIns="0" rIns="0" bIns="0" anchor="t">
             <a:spAutoFit/>
           </a:bodyPr>
           <a:lstStyle/>
@@ -5940,8 +8927,8 @@
 </p:sld>
 </file>
 
-<file path=ppt/slides/slide13.xml><?xml version="1.0" encoding="utf-8"?>
-<p:sld xmlns:a="http://schemas.openxmlformats.org/drawingml/2006/main" xmlns:p="http://schemas.openxmlformats.org/presentationml/2006/main" xmlns:r="http://schemas.openxmlformats.org/officeDocument/2006/relationships">
+<file path=ppt/slides/slide4.xml><?xml version="1.0" encoding="utf-8"?>
+<p:sld xmlns:a="http://schemas.openxmlformats.org/drawingml/2006/main" xmlns:r="http://schemas.openxmlformats.org/officeDocument/2006/relationships" xmlns:p="http://schemas.openxmlformats.org/presentationml/2006/main">
   <p:cSld>
     <p:spTree>
       <p:nvGrpSpPr>
@@ -5949,7 +8936,14 @@
         <p:cNvGrpSpPr/>
         <p:nvPr/>
       </p:nvGrpSpPr>
-      <p:grpSpPr/>
+      <p:grpSpPr>
+        <a:xfrm>
+          <a:off x="0" y="0"/>
+          <a:ext cx="0" cy="0"/>
+          <a:chOff x="0" y="0"/>
+          <a:chExt cx="0" cy="0"/>
+        </a:xfrm>
+      </p:grpSpPr>
       <p:sp>
         <p:nvSpPr>
           <p:cNvPr id="2" name="Text Placeholder 1"/>
@@ -5957,7 +8951,7 @@
             <a:spLocks noGrp="1"/>
           </p:cNvSpPr>
           <p:nvPr>
-            <p:ph type="body" idx="11" sz="quarter"/>
+            <p:ph type="body" sz="quarter" idx="11"/>
           </p:nvPr>
         </p:nvSpPr>
         <p:spPr>
@@ -5985,7 +8979,7 @@
           <p:nvPr/>
         </p:nvPicPr>
         <p:blipFill>
-          <a:blip r:embed="rId2"/>
+          <a:blip r:embed="rId3"/>
           <a:stretch>
             <a:fillRect/>
           </a:stretch>
@@ -6009,7 +9003,7 @@
           <p:nvPr/>
         </p:nvPicPr>
         <p:blipFill>
-          <a:blip r:embed="rId3"/>
+          <a:blip r:embed="rId4"/>
           <a:stretch>
             <a:fillRect/>
           </a:stretch>
@@ -6041,7 +9035,7 @@
           <a:noFill/>
         </p:spPr>
         <p:txBody>
-          <a:bodyPr wrap="square" anchor="t" lIns="0" rIns="0" tIns="0" bIns="0">
+          <a:bodyPr wrap="square" lIns="0" tIns="0" rIns="0" bIns="0" anchor="t">
             <a:spAutoFit/>
           </a:bodyPr>
           <a:lstStyle/>
@@ -6089,7 +9083,7 @@
           <a:noFill/>
         </p:spPr>
         <p:txBody>
-          <a:bodyPr wrap="square" anchor="t" lIns="0" rIns="0" tIns="0" bIns="0">
+          <a:bodyPr wrap="square" lIns="0" tIns="0" rIns="0" bIns="0" anchor="t">
             <a:spAutoFit/>
           </a:bodyPr>
           <a:lstStyle/>
@@ -6159,7 +9153,7 @@
           </a:fontRef>
         </p:style>
         <p:txBody>
-          <a:bodyPr rtlCol="0" anchor="t" wrap="square" lIns="201168" rIns="201168" tIns="160934" bIns="160934"/>
+          <a:bodyPr wrap="square" lIns="201168" tIns="160934" rIns="201168" bIns="160934" rtlCol="0" anchor="t"/>
           <a:lstStyle/>
           <a:p>
             <a:pPr algn="l">
@@ -6178,7 +9172,7 @@
             </a:r>
           </a:p>
           <a:p>
-            <a:pPr algn="l" marL="219456" indent="-219456">
+            <a:pPr marL="219456" indent="-219456" algn="l">
               <a:spcAft>
                 <a:spcPts val="800"/>
               </a:spcAft>
@@ -6208,7 +9202,7 @@
             </a:r>
           </a:p>
           <a:p>
-            <a:pPr algn="l" marL="219456" indent="-219456">
+            <a:pPr marL="219456" indent="-219456" algn="l">
               <a:spcAft>
                 <a:spcPts val="800"/>
               </a:spcAft>
@@ -6238,7 +9232,7 @@
             </a:r>
           </a:p>
           <a:p>
-            <a:pPr algn="l" marL="219456" indent="-219456">
+            <a:pPr marL="219456" indent="-219456" algn="l">
               <a:spcAft>
                 <a:spcPts val="800"/>
               </a:spcAft>
@@ -6268,7 +9262,7 @@
             </a:r>
           </a:p>
           <a:p>
-            <a:pPr algn="l" marL="219456" indent="-219456">
+            <a:pPr marL="219456" indent="-219456" algn="l">
               <a:spcAft>
                 <a:spcPts val="1200"/>
               </a:spcAft>
@@ -6332,8 +9326,8 @@
 </p:sld>
 </file>
 
-<file path=ppt/slides/slide14.xml><?xml version="1.0" encoding="utf-8"?>
-<p:sld xmlns:a="http://schemas.openxmlformats.org/drawingml/2006/main" xmlns:p="http://schemas.openxmlformats.org/presentationml/2006/main" xmlns:r="http://schemas.openxmlformats.org/officeDocument/2006/relationships">
+<file path=ppt/slides/slide5.xml><?xml version="1.0" encoding="utf-8"?>
+<p:sld xmlns:a="http://schemas.openxmlformats.org/drawingml/2006/main" xmlns:r="http://schemas.openxmlformats.org/officeDocument/2006/relationships" xmlns:p="http://schemas.openxmlformats.org/presentationml/2006/main">
   <p:cSld>
     <p:spTree>
       <p:nvGrpSpPr>
@@ -6341,7 +9335,14 @@
         <p:cNvGrpSpPr/>
         <p:nvPr/>
       </p:nvGrpSpPr>
-      <p:grpSpPr/>
+      <p:grpSpPr>
+        <a:xfrm>
+          <a:off x="0" y="0"/>
+          <a:ext cx="0" cy="0"/>
+          <a:chOff x="0" y="0"/>
+          <a:chExt cx="0" cy="0"/>
+        </a:xfrm>
+      </p:grpSpPr>
       <p:sp>
         <p:nvSpPr>
           <p:cNvPr id="2" name="Text Placeholder 1"/>
@@ -6349,7 +9350,7 @@
             <a:spLocks noGrp="1"/>
           </p:cNvSpPr>
           <p:nvPr>
-            <p:ph type="body" idx="11" sz="quarter"/>
+            <p:ph type="body" sz="quarter" idx="11"/>
           </p:nvPr>
         </p:nvSpPr>
         <p:spPr>
@@ -6386,7 +9387,7 @@
           <a:noFill/>
         </p:spPr>
         <p:txBody>
-          <a:bodyPr wrap="square" anchor="t" lIns="0" rIns="0" tIns="0" bIns="0">
+          <a:bodyPr wrap="square" lIns="0" tIns="0" rIns="0" bIns="0" anchor="t">
             <a:spAutoFit/>
           </a:bodyPr>
           <a:lstStyle/>
@@ -6441,7 +9442,7 @@
           <a:noFill/>
         </p:spPr>
         <p:txBody>
-          <a:bodyPr wrap="square" anchor="t" lIns="0" rIns="0" tIns="0" bIns="0">
+          <a:bodyPr wrap="square" lIns="0" tIns="0" rIns="0" bIns="0" anchor="t">
             <a:spAutoFit/>
           </a:bodyPr>
           <a:lstStyle/>
@@ -6496,7 +9497,7 @@
           <a:noFill/>
         </p:spPr>
         <p:txBody>
-          <a:bodyPr wrap="square" anchor="t" lIns="0" rIns="0" tIns="0" bIns="0">
+          <a:bodyPr wrap="square" lIns="0" tIns="0" rIns="0" bIns="0" anchor="t">
             <a:spAutoFit/>
           </a:bodyPr>
           <a:lstStyle/>
@@ -6573,7 +9574,7 @@
           </a:fontRef>
         </p:style>
         <p:txBody>
-          <a:bodyPr rtlCol="0" anchor="ctr" wrap="square" lIns="201168" rIns="201168" tIns="160934" bIns="160934"/>
+          <a:bodyPr wrap="square" lIns="201168" tIns="160934" rIns="201168" bIns="160934" rtlCol="0" anchor="ctr"/>
           <a:lstStyle/>
           <a:p>
             <a:pPr algn="l">
@@ -6611,7 +9612,7 @@
           <p:nvPr/>
         </p:nvPicPr>
         <p:blipFill>
-          <a:blip r:embed="rId2"/>
+          <a:blip r:embed="rId3"/>
           <a:stretch>
             <a:fillRect/>
           </a:stretch>
@@ -6643,7 +9644,7 @@
           <a:noFill/>
         </p:spPr>
         <p:txBody>
-          <a:bodyPr wrap="square" anchor="t" lIns="0" rIns="0" tIns="0" bIns="0">
+          <a:bodyPr wrap="square" lIns="0" tIns="0" rIns="0" bIns="0" anchor="t">
             <a:spAutoFit/>
           </a:bodyPr>
           <a:lstStyle/>
@@ -6673,8 +9674,8 @@
 </p:sld>
 </file>
 
-<file path=ppt/slides/slide15.xml><?xml version="1.0" encoding="utf-8"?>
-<p:sld xmlns:a="http://schemas.openxmlformats.org/drawingml/2006/main" xmlns:p="http://schemas.openxmlformats.org/presentationml/2006/main" xmlns:r="http://schemas.openxmlformats.org/officeDocument/2006/relationships">
+<file path=ppt/slides/slide6.xml><?xml version="1.0" encoding="utf-8"?>
+<p:sld xmlns:a="http://schemas.openxmlformats.org/drawingml/2006/main" xmlns:r="http://schemas.openxmlformats.org/officeDocument/2006/relationships" xmlns:p="http://schemas.openxmlformats.org/presentationml/2006/main">
   <p:cSld>
     <p:spTree>
       <p:nvGrpSpPr>
@@ -6682,7 +9683,14 @@
         <p:cNvGrpSpPr/>
         <p:nvPr/>
       </p:nvGrpSpPr>
-      <p:grpSpPr/>
+      <p:grpSpPr>
+        <a:xfrm>
+          <a:off x="0" y="0"/>
+          <a:ext cx="0" cy="0"/>
+          <a:chOff x="0" y="0"/>
+          <a:chExt cx="0" cy="0"/>
+        </a:xfrm>
+      </p:grpSpPr>
       <p:sp>
         <p:nvSpPr>
           <p:cNvPr id="2" name="Text Placeholder 1"/>
@@ -6690,7 +9698,7 @@
             <a:spLocks noGrp="1"/>
           </p:cNvSpPr>
           <p:nvPr>
-            <p:ph type="body" idx="11" sz="quarter"/>
+            <p:ph type="body" sz="quarter" idx="11"/>
           </p:nvPr>
         </p:nvSpPr>
         <p:spPr>
@@ -6726,7 +9734,7 @@
           <a:noFill/>
         </p:spPr>
         <p:txBody>
-          <a:bodyPr wrap="square" anchor="t" lIns="0" rIns="0" tIns="0" bIns="0">
+          <a:bodyPr wrap="square" lIns="0" tIns="0" rIns="0" bIns="0" anchor="t">
             <a:spAutoFit/>
           </a:bodyPr>
           <a:lstStyle/>
@@ -6853,7 +9861,7 @@
           <p:nvPr/>
         </p:nvPicPr>
         <p:blipFill>
-          <a:blip r:embed="rId2"/>
+          <a:blip r:embed="rId3"/>
           <a:stretch>
             <a:fillRect/>
           </a:stretch>
@@ -6885,7 +9893,7 @@
           <a:noFill/>
         </p:spPr>
         <p:txBody>
-          <a:bodyPr wrap="square" anchor="t" lIns="0" rIns="0" tIns="0" bIns="0">
+          <a:bodyPr wrap="square" lIns="0" tIns="0" rIns="0" bIns="0" anchor="t">
             <a:spAutoFit/>
           </a:bodyPr>
           <a:lstStyle/>
@@ -6915,8 +9923,8 @@
 </p:sld>
 </file>
 
-<file path=ppt/slides/slide16.xml><?xml version="1.0" encoding="utf-8"?>
-<p:sld xmlns:a="http://schemas.openxmlformats.org/drawingml/2006/main" xmlns:p="http://schemas.openxmlformats.org/presentationml/2006/main" xmlns:r="http://schemas.openxmlformats.org/officeDocument/2006/relationships">
+<file path=ppt/slides/slide7.xml><?xml version="1.0" encoding="utf-8"?>
+<p:sld xmlns:a="http://schemas.openxmlformats.org/drawingml/2006/main" xmlns:r="http://schemas.openxmlformats.org/officeDocument/2006/relationships" xmlns:p="http://schemas.openxmlformats.org/presentationml/2006/main">
   <p:cSld>
     <p:spTree>
       <p:nvGrpSpPr>
@@ -6924,7 +9932,14 @@
         <p:cNvGrpSpPr/>
         <p:nvPr/>
       </p:nvGrpSpPr>
-      <p:grpSpPr/>
+      <p:grpSpPr>
+        <a:xfrm>
+          <a:off x="0" y="0"/>
+          <a:ext cx="0" cy="0"/>
+          <a:chOff x="0" y="0"/>
+          <a:chExt cx="0" cy="0"/>
+        </a:xfrm>
+      </p:grpSpPr>
       <p:sp>
         <p:nvSpPr>
           <p:cNvPr id="3" name="Text Placeholder 2"/>
@@ -6932,7 +9947,7 @@
             <a:spLocks noGrp="1"/>
           </p:cNvSpPr>
           <p:nvPr>
-            <p:ph type="body" idx="11" sz="quarter"/>
+            <p:ph type="body" sz="quarter" idx="11"/>
           </p:nvPr>
         </p:nvSpPr>
         <p:spPr>
@@ -6971,10 +9986,34 @@
                 <a:tableStyleId>{5C22544A-7EE6-4342-B048-85BDC9FD1C3A}</a:tableStyleId>
               </a:tblPr>
               <a:tblGrid>
-                <a:gridCol w="1600200"/>
-                <a:gridCol w="2606040"/>
-                <a:gridCol w="2606040"/>
-                <a:gridCol w="3255264"/>
+                <a:gridCol w="1600200">
+                  <a:extLst>
+                    <a:ext uri="{9D8B030D-6E8A-4147-A177-3AD203B41FA5}">
+                      <a16:colId xmlns:a16="http://schemas.microsoft.com/office/drawing/2014/main" val="20000"/>
+                    </a:ext>
+                  </a:extLst>
+                </a:gridCol>
+                <a:gridCol w="2606040">
+                  <a:extLst>
+                    <a:ext uri="{9D8B030D-6E8A-4147-A177-3AD203B41FA5}">
+                      <a16:colId xmlns:a16="http://schemas.microsoft.com/office/drawing/2014/main" val="20001"/>
+                    </a:ext>
+                  </a:extLst>
+                </a:gridCol>
+                <a:gridCol w="2606040">
+                  <a:extLst>
+                    <a:ext uri="{9D8B030D-6E8A-4147-A177-3AD203B41FA5}">
+                      <a16:colId xmlns:a16="http://schemas.microsoft.com/office/drawing/2014/main" val="20002"/>
+                    </a:ext>
+                  </a:extLst>
+                </a:gridCol>
+                <a:gridCol w="3255264">
+                  <a:extLst>
+                    <a:ext uri="{9D8B030D-6E8A-4147-A177-3AD203B41FA5}">
+                      <a16:colId xmlns:a16="http://schemas.microsoft.com/office/drawing/2014/main" val="20003"/>
+                    </a:ext>
+                  </a:extLst>
+                </a:gridCol>
               </a:tblGrid>
               <a:tr h="411480">
                 <a:tc>
@@ -6998,7 +10037,7 @@
                       </a:r>
                     </a:p>
                   </a:txBody>
-                  <a:tcPr marL="91440" marR="91440" marT="36576" marB="36576" anchor="ctr">
+                  <a:tcPr marT="36576" marB="36576" anchor="ctr">
                     <a:solidFill>
                       <a:srgbClr val="AB3D3F"/>
                     </a:solidFill>
@@ -7025,7 +10064,7 @@
                       </a:r>
                     </a:p>
                   </a:txBody>
-                  <a:tcPr marL="91440" marR="91440" marT="36576" marB="36576" anchor="ctr">
+                  <a:tcPr marT="36576" marB="36576" anchor="ctr">
                     <a:solidFill>
                       <a:srgbClr val="AB3D3F"/>
                     </a:solidFill>
@@ -7052,7 +10091,7 @@
                       </a:r>
                     </a:p>
                   </a:txBody>
-                  <a:tcPr marL="91440" marR="91440" marT="36576" marB="36576" anchor="ctr">
+                  <a:tcPr marT="36576" marB="36576" anchor="ctr">
                     <a:solidFill>
                       <a:srgbClr val="AB3D3F"/>
                     </a:solidFill>
@@ -7079,12 +10118,17 @@
                       </a:r>
                     </a:p>
                   </a:txBody>
-                  <a:tcPr marL="91440" marR="91440" marT="36576" marB="36576" anchor="ctr">
+                  <a:tcPr marT="36576" marB="36576" anchor="ctr">
                     <a:solidFill>
                       <a:srgbClr val="AB3D3F"/>
                     </a:solidFill>
                   </a:tcPr>
                 </a:tc>
+                <a:extLst>
+                  <a:ext uri="{0D108BD9-81ED-4DB2-BD59-A6C34878D82A}">
+                    <a16:rowId xmlns:a16="http://schemas.microsoft.com/office/drawing/2014/main" val="10000"/>
+                  </a:ext>
+                </a:extLst>
               </a:tr>
               <a:tr h="914400">
                 <a:tc>
@@ -7108,7 +10152,7 @@
                       </a:r>
                     </a:p>
                   </a:txBody>
-                  <a:tcPr marL="91440" marR="91440" marT="36576" marB="36576" anchor="ctr">
+                  <a:tcPr marT="36576" marB="36576" anchor="ctr">
                     <a:solidFill>
                       <a:srgbClr val="FFFFFF"/>
                     </a:solidFill>
@@ -7135,7 +10179,7 @@
                       </a:r>
                     </a:p>
                   </a:txBody>
-                  <a:tcPr marL="91440" marR="91440" marT="36576" marB="36576" anchor="ctr">
+                  <a:tcPr marT="36576" marB="36576" anchor="ctr">
                     <a:solidFill>
                       <a:srgbClr val="FFFFFF"/>
                     </a:solidFill>
@@ -7162,7 +10206,7 @@
                       </a:r>
                     </a:p>
                   </a:txBody>
-                  <a:tcPr marL="91440" marR="91440" marT="36576" marB="36576" anchor="ctr">
+                  <a:tcPr marT="36576" marB="36576" anchor="ctr">
                     <a:solidFill>
                       <a:srgbClr val="FFFFFF"/>
                     </a:solidFill>
@@ -7189,12 +10233,17 @@
                       </a:r>
                     </a:p>
                   </a:txBody>
-                  <a:tcPr marL="91440" marR="91440" marT="36576" marB="36576" anchor="ctr">
+                  <a:tcPr marT="36576" marB="36576" anchor="ctr">
                     <a:solidFill>
                       <a:srgbClr val="FFFFFF"/>
                     </a:solidFill>
                   </a:tcPr>
                 </a:tc>
+                <a:extLst>
+                  <a:ext uri="{0D108BD9-81ED-4DB2-BD59-A6C34878D82A}">
+                    <a16:rowId xmlns:a16="http://schemas.microsoft.com/office/drawing/2014/main" val="10001"/>
+                  </a:ext>
+                </a:extLst>
               </a:tr>
               <a:tr h="777240">
                 <a:tc>
@@ -7218,7 +10267,7 @@
                       </a:r>
                     </a:p>
                   </a:txBody>
-                  <a:tcPr marL="91440" marR="91440" marT="36576" marB="36576" anchor="ctr">
+                  <a:tcPr marT="36576" marB="36576" anchor="ctr">
                     <a:solidFill>
                       <a:srgbClr val="F3F3F3"/>
                     </a:solidFill>
@@ -7245,7 +10294,7 @@
                       </a:r>
                     </a:p>
                   </a:txBody>
-                  <a:tcPr marL="91440" marR="91440" marT="36576" marB="36576" anchor="ctr">
+                  <a:tcPr marT="36576" marB="36576" anchor="ctr">
                     <a:solidFill>
                       <a:srgbClr val="F3F3F3"/>
                     </a:solidFill>
@@ -7272,7 +10321,7 @@
                       </a:r>
                     </a:p>
                   </a:txBody>
-                  <a:tcPr marL="91440" marR="91440" marT="36576" marB="36576" anchor="ctr">
+                  <a:tcPr marT="36576" marB="36576" anchor="ctr">
                     <a:solidFill>
                       <a:srgbClr val="F3F3F3"/>
                     </a:solidFill>
@@ -7299,12 +10348,17 @@
                       </a:r>
                     </a:p>
                   </a:txBody>
-                  <a:tcPr marL="91440" marR="91440" marT="36576" marB="36576" anchor="ctr">
+                  <a:tcPr marT="36576" marB="36576" anchor="ctr">
                     <a:solidFill>
                       <a:srgbClr val="F3F3F3"/>
                     </a:solidFill>
                   </a:tcPr>
                 </a:tc>
+                <a:extLst>
+                  <a:ext uri="{0D108BD9-81ED-4DB2-BD59-A6C34878D82A}">
+                    <a16:rowId xmlns:a16="http://schemas.microsoft.com/office/drawing/2014/main" val="10002"/>
+                  </a:ext>
+                </a:extLst>
               </a:tr>
               <a:tr h="914400">
                 <a:tc>
@@ -7328,7 +10382,7 @@
                       </a:r>
                     </a:p>
                   </a:txBody>
-                  <a:tcPr marL="91440" marR="91440" marT="36576" marB="36576" anchor="ctr">
+                  <a:tcPr marT="36576" marB="36576" anchor="ctr">
                     <a:solidFill>
                       <a:srgbClr val="FFFFFF"/>
                     </a:solidFill>
@@ -7355,7 +10409,7 @@
                       </a:r>
                     </a:p>
                   </a:txBody>
-                  <a:tcPr marL="91440" marR="91440" marT="36576" marB="36576" anchor="ctr">
+                  <a:tcPr marT="36576" marB="36576" anchor="ctr">
                     <a:solidFill>
                       <a:srgbClr val="FFFFFF"/>
                     </a:solidFill>
@@ -7382,7 +10436,7 @@
                       </a:r>
                     </a:p>
                   </a:txBody>
-                  <a:tcPr marL="91440" marR="91440" marT="36576" marB="36576" anchor="ctr">
+                  <a:tcPr marT="36576" marB="36576" anchor="ctr">
                     <a:solidFill>
                       <a:srgbClr val="FFFFFF"/>
                     </a:solidFill>
@@ -7409,12 +10463,17 @@
                       </a:r>
                     </a:p>
                   </a:txBody>
-                  <a:tcPr marL="91440" marR="91440" marT="36576" marB="36576" anchor="ctr">
+                  <a:tcPr marT="36576" marB="36576" anchor="ctr">
                     <a:solidFill>
                       <a:srgbClr val="FFFFFF"/>
                     </a:solidFill>
                   </a:tcPr>
                 </a:tc>
+                <a:extLst>
+                  <a:ext uri="{0D108BD9-81ED-4DB2-BD59-A6C34878D82A}">
+                    <a16:rowId xmlns:a16="http://schemas.microsoft.com/office/drawing/2014/main" val="10003"/>
+                  </a:ext>
+                </a:extLst>
               </a:tr>
               <a:tr h="777240">
                 <a:tc>
@@ -7438,7 +10497,7 @@
                       </a:r>
                     </a:p>
                   </a:txBody>
-                  <a:tcPr marL="91440" marR="91440" marT="36576" marB="36576" anchor="ctr">
+                  <a:tcPr marT="36576" marB="36576" anchor="ctr">
                     <a:solidFill>
                       <a:srgbClr val="F3F3F3"/>
                     </a:solidFill>
@@ -7465,7 +10524,7 @@
                       </a:r>
                     </a:p>
                   </a:txBody>
-                  <a:tcPr marL="91440" marR="91440" marT="36576" marB="36576" anchor="ctr">
+                  <a:tcPr marT="36576" marB="36576" anchor="ctr">
                     <a:solidFill>
                       <a:srgbClr val="F3F3F3"/>
                     </a:solidFill>
@@ -7492,7 +10551,7 @@
                       </a:r>
                     </a:p>
                   </a:txBody>
-                  <a:tcPr marL="91440" marR="91440" marT="36576" marB="36576" anchor="ctr">
+                  <a:tcPr marT="36576" marB="36576" anchor="ctr">
                     <a:solidFill>
                       <a:srgbClr val="F3F3F3"/>
                     </a:solidFill>
@@ -7519,12 +10578,17 @@
                       </a:r>
                     </a:p>
                   </a:txBody>
-                  <a:tcPr marL="91440" marR="91440" marT="36576" marB="36576" anchor="ctr">
+                  <a:tcPr marT="36576" marB="36576" anchor="ctr">
                     <a:solidFill>
                       <a:srgbClr val="F3F3F3"/>
                     </a:solidFill>
                   </a:tcPr>
                 </a:tc>
+                <a:extLst>
+                  <a:ext uri="{0D108BD9-81ED-4DB2-BD59-A6C34878D82A}">
+                    <a16:rowId xmlns:a16="http://schemas.microsoft.com/office/drawing/2014/main" val="10004"/>
+                  </a:ext>
+                </a:extLst>
               </a:tr>
             </a:tbl>
           </a:graphicData>
@@ -7538,8 +10602,8 @@
 </p:sld>
 </file>
 
-<file path=ppt/slides/slide17.xml><?xml version="1.0" encoding="utf-8"?>
-<p:sld xmlns:a="http://schemas.openxmlformats.org/drawingml/2006/main" xmlns:p="http://schemas.openxmlformats.org/presentationml/2006/main" xmlns:r="http://schemas.openxmlformats.org/officeDocument/2006/relationships">
+<file path=ppt/slides/slide8.xml><?xml version="1.0" encoding="utf-8"?>
+<p:sld xmlns:a="http://schemas.openxmlformats.org/drawingml/2006/main" xmlns:r="http://schemas.openxmlformats.org/officeDocument/2006/relationships" xmlns:p="http://schemas.openxmlformats.org/presentationml/2006/main">
   <p:cSld>
     <p:spTree>
       <p:nvGrpSpPr>
@@ -7547,7 +10611,14 @@
         <p:cNvGrpSpPr/>
         <p:nvPr/>
       </p:nvGrpSpPr>
-      <p:grpSpPr/>
+      <p:grpSpPr>
+        <a:xfrm>
+          <a:off x="0" y="0"/>
+          <a:ext cx="0" cy="0"/>
+          <a:chOff x="0" y="0"/>
+          <a:chExt cx="0" cy="0"/>
+        </a:xfrm>
+      </p:grpSpPr>
       <p:sp>
         <p:nvSpPr>
           <p:cNvPr id="2" name="Text Placeholder 1"/>
@@ -7555,7 +10626,7 @@
             <a:spLocks noGrp="1"/>
           </p:cNvSpPr>
           <p:nvPr>
-            <p:ph type="body" idx="11" sz="quarter"/>
+            <p:ph type="body" sz="quarter" idx="11"/>
           </p:nvPr>
         </p:nvSpPr>
         <p:spPr>
@@ -7583,7 +10654,7 @@
         <p:spPr>
           <a:xfrm>
             <a:off x="566928" y="1554480"/>
-            <a:ext cx="4754880" cy="4114800"/>
+            <a:ext cx="4754880" cy="2677656"/>
           </a:xfrm>
           <a:prstGeom prst="rect">
             <a:avLst/>
@@ -7591,12 +10662,12 @@
           <a:noFill/>
         </p:spPr>
         <p:txBody>
-          <a:bodyPr wrap="square" anchor="t" lIns="0" rIns="0" tIns="0" bIns="0">
+          <a:bodyPr wrap="square" lIns="0" tIns="0" rIns="0" bIns="0" anchor="t">
             <a:spAutoFit/>
           </a:bodyPr>
           <a:lstStyle/>
           <a:p>
-            <a:pPr algn="l" marL="219456" indent="-219456">
+            <a:pPr marL="219456" indent="-219456" algn="l">
               <a:spcAft>
                 <a:spcPts val="1200"/>
               </a:spcAft>
@@ -7607,17 +10678,17 @@
               <a:buChar char="•"/>
             </a:pPr>
             <a:r>
-              <a:rPr sz="1600" b="0" i="0">
+              <a:rPr sz="1600" b="0" i="0" dirty="0">
                 <a:solidFill>
                   <a:srgbClr val="262626"/>
                 </a:solidFill>
                 <a:latin typeface="Candara"/>
               </a:rPr>
-              <a:t>A split stratified by region still puts each test district's neighbours in the training set.</a:t>
-            </a:r>
-          </a:p>
-          <a:p>
-            <a:pPr algn="l" marL="219456" indent="-219456">
+              <a:t>A split stratified by region still puts each test district's neighbors in the training set.</a:t>
+            </a:r>
+          </a:p>
+          <a:p>
+            <a:pPr marL="219456" indent="-219456" algn="l">
               <a:spcAft>
                 <a:spcPts val="1200"/>
               </a:spcAft>
@@ -7628,7 +10699,7 @@
               <a:buChar char="•"/>
             </a:pPr>
             <a:r>
-              <a:rPr sz="1600" b="0" i="0">
+              <a:rPr sz="1600" b="0" i="0" dirty="0">
                 <a:solidFill>
                   <a:srgbClr val="262626"/>
                 </a:solidFill>
@@ -7638,7 +10709,7 @@
             </a:r>
           </a:p>
           <a:p>
-            <a:pPr algn="l" marL="219456" indent="-219456">
+            <a:pPr marL="219456" indent="-219456" algn="l">
               <a:spcAft>
                 <a:spcPts val="1200"/>
               </a:spcAft>
@@ -7649,7 +10720,7 @@
               <a:buChar char="•"/>
             </a:pPr>
             <a:r>
-              <a:rPr sz="1600" b="0" i="0">
+              <a:rPr sz="1600" b="0" i="0" dirty="0">
                 <a:solidFill>
                   <a:srgbClr val="262626"/>
                 </a:solidFill>
@@ -7659,7 +10730,7 @@
             </a:r>
           </a:p>
           <a:p>
-            <a:pPr algn="l" marL="219456" indent="-219456">
+            <a:pPr marL="219456" indent="-219456" algn="l">
               <a:spcAft>
                 <a:spcPts val="600"/>
               </a:spcAft>
@@ -7670,13 +10741,31 @@
               <a:buChar char="•"/>
             </a:pPr>
             <a:r>
-              <a:rPr sz="1600" b="0" i="0">
+              <a:rPr sz="1600" b="0" i="0" dirty="0">
                 <a:solidFill>
                   <a:srgbClr val="262626"/>
                 </a:solidFill>
                 <a:latin typeface="Candara"/>
               </a:rPr>
-              <a:t>So the model cannot yet rank districts in a region it has not seen, such as the 207 districts outside our data.</a:t>
+              <a:t>So</a:t>
+            </a:r>
+            <a:r>
+              <a:rPr lang="en-US" sz="1600" b="0" i="0" dirty="0">
+                <a:solidFill>
+                  <a:srgbClr val="262626"/>
+                </a:solidFill>
+                <a:latin typeface="Candara"/>
+              </a:rPr>
+              <a:t>,</a:t>
+            </a:r>
+            <a:r>
+              <a:rPr sz="1600" b="0" i="0" dirty="0">
+                <a:solidFill>
+                  <a:srgbClr val="262626"/>
+                </a:solidFill>
+                <a:latin typeface="Candara"/>
+              </a:rPr>
+              <a:t> the model cannot yet rank districts in a region it has not seen, such as the 207 districts outside our data.</a:t>
             </a:r>
           </a:p>
         </p:txBody>
@@ -7695,7 +10784,7 @@
         </p:xfrm>
         <a:graphic>
           <a:graphicData uri="http://schemas.openxmlformats.org/drawingml/2006/chart">
-            <c:chart xmlns:c="http://schemas.openxmlformats.org/drawingml/2006/chart" r:id="rId2"/>
+            <c:chart xmlns:c="http://schemas.openxmlformats.org/drawingml/2006/chart" xmlns:r="http://schemas.openxmlformats.org/officeDocument/2006/relationships" r:id="rId3"/>
           </a:graphicData>
         </a:graphic>
       </p:graphicFrame>
@@ -7716,7 +10805,7 @@
           <a:noFill/>
         </p:spPr>
         <p:txBody>
-          <a:bodyPr wrap="square" anchor="t" lIns="0" rIns="0" tIns="0" bIns="0">
+          <a:bodyPr wrap="square" lIns="0" tIns="0" rIns="0" bIns="0" anchor="t">
             <a:spAutoFit/>
           </a:bodyPr>
           <a:lstStyle/>
@@ -7746,8 +10835,8 @@
 </p:sld>
 </file>
 
-<file path=ppt/slides/slide18.xml><?xml version="1.0" encoding="utf-8"?>
-<p:sld xmlns:a="http://schemas.openxmlformats.org/drawingml/2006/main" xmlns:p="http://schemas.openxmlformats.org/presentationml/2006/main" xmlns:r="http://schemas.openxmlformats.org/officeDocument/2006/relationships">
+<file path=ppt/slides/slide9.xml><?xml version="1.0" encoding="utf-8"?>
+<p:sld xmlns:a="http://schemas.openxmlformats.org/drawingml/2006/main" xmlns:r="http://schemas.openxmlformats.org/officeDocument/2006/relationships" xmlns:p="http://schemas.openxmlformats.org/presentationml/2006/main">
   <p:cSld>
     <p:spTree>
       <p:nvGrpSpPr>
@@ -7755,7 +10844,14 @@
         <p:cNvGrpSpPr/>
         <p:nvPr/>
       </p:nvGrpSpPr>
-      <p:grpSpPr/>
+      <p:grpSpPr>
+        <a:xfrm>
+          <a:off x="0" y="0"/>
+          <a:ext cx="0" cy="0"/>
+          <a:chOff x="0" y="0"/>
+          <a:chExt cx="0" cy="0"/>
+        </a:xfrm>
+      </p:grpSpPr>
       <p:sp>
         <p:nvSpPr>
           <p:cNvPr id="2" name="Text Placeholder 1"/>
@@ -7763,7 +10859,7 @@
             <a:spLocks noGrp="1"/>
           </p:cNvSpPr>
           <p:nvPr>
-            <p:ph type="body" idx="11" sz="quarter"/>
+            <p:ph type="body" sz="quarter" idx="11"/>
           </p:nvPr>
         </p:nvSpPr>
         <p:spPr>
@@ -7799,7 +10895,7 @@
           <a:noFill/>
         </p:spPr>
         <p:txBody>
-          <a:bodyPr wrap="square" anchor="t" lIns="0" rIns="0" tIns="0" bIns="0">
+          <a:bodyPr wrap="square" lIns="0" tIns="0" rIns="0" bIns="0" anchor="t">
             <a:spAutoFit/>
           </a:bodyPr>
           <a:lstStyle/>
@@ -7835,7 +10931,7 @@
               <a:t>log μ</a:t>
             </a:r>
             <a:r>
-              <a:rPr baseline="-25000" sz="1800" b="0" i="0">
+              <a:rPr sz="1800" b="0" i="0" baseline="-25000">
                 <a:solidFill>
                   <a:srgbClr val="262626"/>
                 </a:solidFill>
@@ -7853,7 +10949,7 @@
               <a:t> = log pop</a:t>
             </a:r>
             <a:r>
-              <a:rPr baseline="-25000" sz="1800" b="0" i="0">
+              <a:rPr sz="1800" b="0" i="0" baseline="-25000">
                 <a:solidFill>
                   <a:srgbClr val="262626"/>
                 </a:solidFill>
@@ -7871,7 +10967,7 @@
               <a:t> + β</a:t>
             </a:r>
             <a:r>
-              <a:rPr baseline="-25000" sz="1800" b="0" i="0">
+              <a:rPr sz="1800" b="0" i="0" baseline="-25000">
                 <a:solidFill>
                   <a:srgbClr val="262626"/>
                 </a:solidFill>
@@ -7889,7 +10985,7 @@
               <a:t> + β</a:t>
             </a:r>
             <a:r>
-              <a:rPr baseline="-25000" sz="1800" b="0" i="0">
+              <a:rPr sz="1800" b="0" i="0" baseline="-25000">
                 <a:solidFill>
                   <a:srgbClr val="262626"/>
                 </a:solidFill>
@@ -7907,7 +11003,7 @@
               <a:t> c</a:t>
             </a:r>
             <a:r>
-              <a:rPr baseline="-25000" sz="1800" b="0" i="0">
+              <a:rPr sz="1800" b="0" i="0" baseline="-25000">
                 <a:solidFill>
                   <a:srgbClr val="262626"/>
                 </a:solidFill>
@@ -7932,7 +11028,7 @@
               <a:t>w</a:t>
             </a:r>
             <a:r>
-              <a:rPr baseline="-25000" sz="1800" b="0" i="0">
+              <a:rPr sz="1800" b="0" i="0" baseline="-25000">
                 <a:solidFill>
                   <a:srgbClr val="262626"/>
                 </a:solidFill>
@@ -7950,7 +11046,7 @@
               <a:t> = U</a:t>
             </a:r>
             <a:r>
-              <a:rPr baseline="-25000" sz="1800" b="0" i="0">
+              <a:rPr sz="1800" b="0" i="0" baseline="-25000">
                 <a:solidFill>
                   <a:srgbClr val="262626"/>
                 </a:solidFill>
@@ -7968,7 +11064,7 @@
               <a:t> × (1 − c</a:t>
             </a:r>
             <a:r>
-              <a:rPr baseline="-25000" sz="1800" b="0" i="0">
+              <a:rPr sz="1800" b="0" i="0" baseline="-25000">
                 <a:solidFill>
                   <a:srgbClr val="262626"/>
                 </a:solidFill>
@@ -8002,7 +11098,7 @@
               <a:t>q</a:t>
             </a:r>
             <a:r>
-              <a:rPr baseline="-25000" sz="1500" b="0" i="0">
+              <a:rPr sz="1500" b="0" i="0" baseline="-25000">
                 <a:solidFill>
                   <a:srgbClr val="262626"/>
                 </a:solidFill>
@@ -8020,7 +11116,7 @@
               <a:t> = 50,000 × w</a:t>
             </a:r>
             <a:r>
-              <a:rPr baseline="-25000" sz="1500" b="0" i="0">
+              <a:rPr sz="1500" b="0" i="0" baseline="-25000">
                 <a:solidFill>
                   <a:srgbClr val="262626"/>
                 </a:solidFill>
@@ -8038,7 +11134,7 @@
               <a:t> / Σ</a:t>
             </a:r>
             <a:r>
-              <a:rPr baseline="-25000" sz="1500" b="0" i="0">
+              <a:rPr sz="1500" b="0" i="0" baseline="-25000">
                 <a:solidFill>
                   <a:srgbClr val="262626"/>
                 </a:solidFill>
@@ -8056,7 +11152,7 @@
               <a:t> w</a:t>
             </a:r>
             <a:r>
-              <a:rPr baseline="-25000" sz="1500" b="0" i="0">
+              <a:rPr sz="1500" b="0" i="0" baseline="-25000">
                 <a:solidFill>
                   <a:srgbClr val="262626"/>
                 </a:solidFill>
@@ -8074,7 +11170,7 @@
               <a:t>,   A</a:t>
             </a:r>
             <a:r>
-              <a:rPr baseline="-25000" sz="1500" b="0" i="0">
+              <a:rPr sz="1500" b="0" i="0" baseline="-25000">
                 <a:solidFill>
                   <a:srgbClr val="262626"/>
                 </a:solidFill>
@@ -8092,7 +11188,7 @@
               <a:t> = ⌊q</a:t>
             </a:r>
             <a:r>
-              <a:rPr baseline="-25000" sz="1500" b="0" i="0">
+              <a:rPr sz="1500" b="0" i="0" baseline="-25000">
                 <a:solidFill>
                   <a:srgbClr val="262626"/>
                 </a:solidFill>
@@ -8110,7 +11206,7 @@
               <a:t>⌋ or ⌊q</a:t>
             </a:r>
             <a:r>
-              <a:rPr baseline="-25000" sz="1500" b="0" i="0">
+              <a:rPr sz="1500" b="0" i="0" baseline="-25000">
                 <a:solidFill>
                   <a:srgbClr val="262626"/>
                 </a:solidFill>
@@ -8128,7 +11224,7 @@
               <a:t>⌋ + 1,   Σ</a:t>
             </a:r>
             <a:r>
-              <a:rPr baseline="-25000" sz="1500" b="0" i="0">
+              <a:rPr sz="1500" b="0" i="0" baseline="-25000">
                 <a:solidFill>
                   <a:srgbClr val="262626"/>
                 </a:solidFill>
@@ -8146,7 +11242,7 @@
               <a:t> A</a:t>
             </a:r>
             <a:r>
-              <a:rPr baseline="-25000" sz="1500" b="0" i="0">
+              <a:rPr sz="1500" b="0" i="0" baseline="-25000">
                 <a:solidFill>
                   <a:srgbClr val="262626"/>
                 </a:solidFill>
@@ -8180,7 +11276,7 @@
               <a:t>Unit: district i. Target: μ</a:t>
             </a:r>
             <a:r>
-              <a:rPr baseline="-25000" sz="1150" b="0" i="0">
+              <a:rPr sz="1150" b="0" i="0" baseline="-25000">
                 <a:solidFill>
                   <a:srgbClr val="595959"/>
                 </a:solidFill>
@@ -8198,7 +11294,7 @@
               <a:t>, expected confirmed cases 2014-17, from a negative binomial (variance μ</a:t>
             </a:r>
             <a:r>
-              <a:rPr baseline="-25000" sz="1150" b="0" i="0">
+              <a:rPr sz="1150" b="0" i="0" baseline="-25000">
                 <a:solidFill>
                   <a:srgbClr val="595959"/>
                 </a:solidFill>
@@ -8216,7 +11312,7 @@
               <a:t> + αμ</a:t>
             </a:r>
             <a:r>
-              <a:rPr baseline="-25000" sz="1150" b="0" i="0">
+              <a:rPr sz="1150" b="0" i="0" baseline="-25000">
                 <a:solidFill>
                   <a:srgbClr val="595959"/>
                 </a:solidFill>
@@ -8234,7 +11330,7 @@
               <a:t>², α = 0.268). Metric: the weight w</a:t>
             </a:r>
             <a:r>
-              <a:rPr baseline="-25000" sz="1150" b="0" i="0">
+              <a:rPr sz="1150" b="0" i="0" baseline="-25000">
                 <a:solidFill>
                   <a:srgbClr val="595959"/>
                 </a:solidFill>
@@ -8252,7 +11348,7 @@
               <a:t>. U</a:t>
             </a:r>
             <a:r>
-              <a:rPr baseline="-25000" sz="1150" b="0" i="0">
+              <a:rPr sz="1150" b="0" i="0" baseline="-25000">
                 <a:solidFill>
                   <a:srgbClr val="595959"/>
                 </a:solidFill>
@@ -8270,7 +11366,7 @@
               <a:t>: upper 95% confidence bound for μ</a:t>
             </a:r>
             <a:r>
-              <a:rPr baseline="-25000" sz="1150" b="0" i="0">
+              <a:rPr sz="1150" b="0" i="0" baseline="-25000">
                 <a:solidFill>
                   <a:srgbClr val="595959"/>
                 </a:solidFill>
@@ -8288,7 +11384,7 @@
               <a:t>. c</a:t>
             </a:r>
             <a:r>
-              <a:rPr baseline="-25000" sz="1150" b="0" i="0">
+              <a:rPr sz="1150" b="0" i="0" baseline="-25000">
                 <a:solidFill>
                   <a:srgbClr val="595959"/>
                 </a:solidFill>
@@ -8306,7 +11402,7 @@
               <a:t>: % of homes with a net in i's region. A</a:t>
             </a:r>
             <a:r>
-              <a:rPr baseline="-25000" sz="1150" b="0" i="0">
+              <a:rPr sz="1150" b="0" i="0" baseline="-25000">
                 <a:solidFill>
                   <a:srgbClr val="595959"/>
                 </a:solidFill>
@@ -8341,7 +11437,7 @@
             </a:r>
           </a:p>
           <a:p>
-            <a:pPr algn="l" marL="219456" indent="-219456">
+            <a:pPr marL="219456" indent="-219456" algn="l">
               <a:spcAft>
                 <a:spcPts val="600"/>
               </a:spcAft>
@@ -8361,7 +11457,7 @@
               <a:t>c</a:t>
             </a:r>
             <a:r>
-              <a:rPr baseline="-25000" sz="1300" b="0" i="0">
+              <a:rPr sz="1300" b="0" i="0" baseline="-25000">
                 <a:solidFill>
                   <a:srgbClr val="262626"/>
                 </a:solidFill>
@@ -8380,7 +11476,7 @@
             </a:r>
           </a:p>
           <a:p>
-            <a:pPr algn="l" marL="219456" indent="-219456">
+            <a:pPr marL="219456" indent="-219456" algn="l">
               <a:spcAft>
                 <a:spcPts val="600"/>
               </a:spcAft>
@@ -8400,7 +11496,7 @@
               <a:t>U</a:t>
             </a:r>
             <a:r>
-              <a:rPr baseline="-25000" sz="1300" b="0" i="0">
+              <a:rPr sz="1300" b="0" i="0" baseline="-25000">
                 <a:solidFill>
                   <a:srgbClr val="262626"/>
                 </a:solidFill>
@@ -8418,7 +11514,7 @@
               <a:t> = μ</a:t>
             </a:r>
             <a:r>
-              <a:rPr baseline="-25000" sz="1300" b="0" i="0">
+              <a:rPr sz="1300" b="0" i="0" baseline="-25000">
                 <a:solidFill>
                   <a:srgbClr val="262626"/>
                 </a:solidFill>
@@ -8437,7 +11533,7 @@
             </a:r>
           </a:p>
           <a:p>
-            <a:pPr algn="l" marL="219456" indent="-219456">
+            <a:pPr marL="219456" indent="-219456" algn="l">
               <a:spcAft>
                 <a:spcPts val="600"/>
               </a:spcAft>
@@ -8457,7 +11553,7 @@
               <a:t>β</a:t>
             </a:r>
             <a:r>
-              <a:rPr baseline="-25000" sz="1300" b="0" i="0">
+              <a:rPr sz="1300" b="0" i="0" baseline="-25000">
                 <a:solidFill>
                   <a:srgbClr val="262626"/>
                 </a:solidFill>
@@ -8491,7 +11587,7 @@
         </p:xfrm>
         <a:graphic>
           <a:graphicData uri="http://schemas.openxmlformats.org/drawingml/2006/chart">
-            <c:chart xmlns:c="http://schemas.openxmlformats.org/drawingml/2006/chart" r:id="rId2"/>
+            <c:chart xmlns:c="http://schemas.openxmlformats.org/drawingml/2006/chart" xmlns:r="http://schemas.openxmlformats.org/officeDocument/2006/relationships" r:id="rId3"/>
           </a:graphicData>
         </a:graphic>
       </p:graphicFrame>
@@ -8512,7 +11608,7 @@
           <a:noFill/>
         </p:spPr>
         <p:txBody>
-          <a:bodyPr wrap="square" anchor="t" lIns="0" rIns="0" tIns="0" bIns="0">
+          <a:bodyPr wrap="square" lIns="0" tIns="0" rIns="0" bIns="0" anchor="t">
             <a:spAutoFit/>
           </a:bodyPr>
           <a:lstStyle/>
@@ -8530,2645 +11626,6 @@
                 <a:latin typeface="Candara"/>
               </a:rPr>
               <a:t>Nets per 1,000 people by region, with the share of households owning a net (DHS 2022). Upper East has the highest coverage and the most nets per person: the coefficient reflects region, not the effect of nets, so the regional split is uncertain (slide 13).</a:t>
-            </a:r>
-          </a:p>
-        </p:txBody>
-      </p:sp>
-    </p:spTree>
-  </p:cSld>
-  <p:clrMapOvr>
-    <a:masterClrMapping/>
-  </p:clrMapOvr>
-</p:sld>
-</file>
-
-<file path=ppt/slides/slide19.xml><?xml version="1.0" encoding="utf-8"?>
-<p:sld xmlns:a="http://schemas.openxmlformats.org/drawingml/2006/main" xmlns:p="http://schemas.openxmlformats.org/presentationml/2006/main" xmlns:r="http://schemas.openxmlformats.org/officeDocument/2006/relationships">
-  <p:cSld>
-    <p:spTree>
-      <p:nvGrpSpPr>
-        <p:cNvPr id="1" name=""/>
-        <p:cNvGrpSpPr/>
-        <p:nvPr/>
-      </p:nvGrpSpPr>
-      <p:grpSpPr/>
-      <p:sp>
-        <p:nvSpPr>
-          <p:cNvPr id="2" name="Text Placeholder 1"/>
-          <p:cNvSpPr>
-            <a:spLocks noGrp="1"/>
-          </p:cNvSpPr>
-          <p:nvPr>
-            <p:ph type="body" idx="11" sz="quarter"/>
-          </p:nvPr>
-        </p:nvSpPr>
-        <p:spPr>
-          <a:xfrm>
-            <a:off x="571500" y="571500"/>
-            <a:ext cx="11055096" cy="737700"/>
-          </a:xfrm>
-        </p:spPr>
-        <p:txBody>
-          <a:bodyPr/>
-          <a:lstStyle/>
-          <a:p>
-            <a:r>
-              <a:rPr sz="3000"/>
-              <a:t>Where the need looks highest, and how sure we are</a:t>
-            </a:r>
-          </a:p>
-        </p:txBody>
-      </p:sp>
-      <p:pic>
-        <p:nvPicPr>
-          <p:cNvPr id="3" name="Picture 2" descr="burden_map.png"/>
-          <p:cNvPicPr>
-            <a:picLocks noChangeAspect="1"/>
-          </p:cNvPicPr>
-          <p:nvPr/>
-        </p:nvPicPr>
-        <p:blipFill>
-          <a:blip r:embed="rId2"/>
-          <a:stretch>
-            <a:fillRect/>
-          </a:stretch>
-        </p:blipFill>
-        <p:spPr>
-          <a:xfrm>
-            <a:off x="1524535" y="1325880"/>
-            <a:ext cx="3479744" cy="3474720"/>
-          </a:xfrm>
-          <a:prstGeom prst="rect">
-            <a:avLst/>
-          </a:prstGeom>
-        </p:spPr>
-      </p:pic>
-      <p:sp>
-        <p:nvSpPr>
-          <p:cNvPr id="4" name="TextBox 3"/>
-          <p:cNvSpPr txBox="1"/>
-          <p:nvPr/>
-        </p:nvSpPr>
-        <p:spPr>
-          <a:xfrm>
-            <a:off x="566928" y="4892040"/>
-            <a:ext cx="5394960" cy="548640"/>
-          </a:xfrm>
-          <a:prstGeom prst="rect">
-            <a:avLst/>
-          </a:prstGeom>
-          <a:noFill/>
-        </p:spPr>
-        <p:txBody>
-          <a:bodyPr wrap="square" anchor="t" lIns="0" rIns="0" tIns="0" bIns="0">
-            <a:spAutoFit/>
-          </a:bodyPr>
-          <a:lstStyle/>
-          <a:p>
-            <a:pPr algn="l">
-              <a:spcAft>
-                <a:spcPts val="600"/>
-              </a:spcAft>
-            </a:pPr>
-            <a:r>
-              <a:rPr sz="1200" b="1" i="0">
-                <a:solidFill>
-                  <a:srgbClr val="262626"/>
-                </a:solidFill>
-                <a:latin typeface="Candara"/>
-              </a:rPr>
-              <a:t>Reported burden. </a:t>
-            </a:r>
-            <a:r>
-              <a:rPr sz="1200" b="0" i="0">
-                <a:solidFill>
-                  <a:srgbClr val="262626"/>
-                </a:solidFill>
-                <a:latin typeface="Candara"/>
-              </a:rPr>
-              <a:t>Confirmed cases per person, 2014-17: highest in Upper East and Upper West, lowest across Northern Region. Grey areas have no case data of their own.</a:t>
-            </a:r>
-          </a:p>
-        </p:txBody>
-      </p:sp>
-      <p:pic>
-        <p:nvPicPr>
-          <p:cNvPr id="5" name="Picture 4" descr="uncertainty_map.png"/>
-          <p:cNvPicPr>
-            <a:picLocks noChangeAspect="1"/>
-          </p:cNvPicPr>
-          <p:nvPr/>
-        </p:nvPicPr>
-        <p:blipFill>
-          <a:blip r:embed="rId3"/>
-          <a:stretch>
-            <a:fillRect/>
-          </a:stretch>
-        </p:blipFill>
-        <p:spPr>
-          <a:xfrm>
-            <a:off x="7184671" y="1325880"/>
-            <a:ext cx="3479744" cy="3474720"/>
-          </a:xfrm>
-          <a:prstGeom prst="rect">
-            <a:avLst/>
-          </a:prstGeom>
-        </p:spPr>
-      </p:pic>
-      <p:sp>
-        <p:nvSpPr>
-          <p:cNvPr id="6" name="TextBox 5"/>
-          <p:cNvSpPr txBox="1"/>
-          <p:nvPr/>
-        </p:nvSpPr>
-        <p:spPr>
-          <a:xfrm>
-            <a:off x="6227064" y="4892040"/>
-            <a:ext cx="5394960" cy="548640"/>
-          </a:xfrm>
-          <a:prstGeom prst="rect">
-            <a:avLst/>
-          </a:prstGeom>
-          <a:noFill/>
-        </p:spPr>
-        <p:txBody>
-          <a:bodyPr wrap="square" anchor="t" lIns="0" rIns="0" tIns="0" bIns="0">
-            <a:spAutoFit/>
-          </a:bodyPr>
-          <a:lstStyle/>
-          <a:p>
-            <a:pPr algn="l">
-              <a:spcAft>
-                <a:spcPts val="600"/>
-              </a:spcAft>
-            </a:pPr>
-            <a:r>
-              <a:rPr sz="1200" b="1" i="0">
-                <a:solidFill>
-                  <a:srgbClr val="262626"/>
-                </a:solidFill>
-                <a:latin typeface="Candara"/>
-              </a:rPr>
-              <a:t>How sure we are. </a:t>
-            </a:r>
-            <a:r>
-              <a:rPr sz="1200" b="0" i="0">
-                <a:solidFill>
-                  <a:srgbClr val="262626"/>
-                </a:solidFill>
-                <a:latin typeface="Candara"/>
-              </a:rPr>
-              <a:t>Our upper bound sits 20% above the estimate in Northern, 34% in Upper East and 16% in Upper West: one number per region, because coverage is.</a:t>
-            </a:r>
-          </a:p>
-        </p:txBody>
-      </p:sp>
-      <p:sp>
-        <p:nvSpPr>
-          <p:cNvPr id="7" name="TextBox 6"/>
-          <p:cNvSpPr txBox="1"/>
-          <p:nvPr/>
-        </p:nvSpPr>
-        <p:spPr>
-          <a:xfrm>
-            <a:off x="566928" y="5504688"/>
-            <a:ext cx="11055096" cy="365760"/>
-          </a:xfrm>
-          <a:prstGeom prst="rect">
-            <a:avLst/>
-          </a:prstGeom>
-          <a:noFill/>
-        </p:spPr>
-        <p:txBody>
-          <a:bodyPr wrap="square" anchor="t" lIns="0" rIns="0" tIns="0" bIns="0">
-            <a:spAutoFit/>
-          </a:bodyPr>
-          <a:lstStyle/>
-          <a:p>
-            <a:pPr algn="l">
-              <a:spcAft>
-                <a:spcPts val="600"/>
-              </a:spcAft>
-            </a:pPr>
-            <a:r>
-              <a:rPr sz="1400" b="1" i="0">
-                <a:solidFill>
-                  <a:srgbClr val="AB3D3F"/>
-                </a:solidFill>
-                <a:latin typeface="Candara"/>
-              </a:rPr>
-              <a:t>Takeaway: </a:t>
-            </a:r>
-            <a:r>
-              <a:rPr sz="1400" b="0" i="0">
-                <a:solidFill>
-                  <a:srgbClr val="262626"/>
-                </a:solidFill>
-                <a:latin typeface="Candara"/>
-              </a:rPr>
-              <a:t>the rule uses the upper bound, so it leans towards the region we are least sure about.</a:t>
-            </a:r>
-          </a:p>
-        </p:txBody>
-      </p:sp>
-    </p:spTree>
-  </p:cSld>
-  <p:clrMapOvr>
-    <a:masterClrMapping/>
-  </p:clrMapOvr>
-</p:sld>
-</file>
-
-<file path=ppt/slides/slide20.xml><?xml version="1.0" encoding="utf-8"?>
-<p:sld xmlns:a="http://schemas.openxmlformats.org/drawingml/2006/main" xmlns:p="http://schemas.openxmlformats.org/presentationml/2006/main" xmlns:r="http://schemas.openxmlformats.org/officeDocument/2006/relationships">
-  <p:cSld>
-    <p:spTree>
-      <p:nvGrpSpPr>
-        <p:cNvPr id="1" name=""/>
-        <p:cNvGrpSpPr/>
-        <p:nvPr/>
-      </p:nvGrpSpPr>
-      <p:grpSpPr/>
-      <p:sp>
-        <p:nvSpPr>
-          <p:cNvPr id="3" name="Text Placeholder 2"/>
-          <p:cNvSpPr>
-            <a:spLocks noGrp="1"/>
-          </p:cNvSpPr>
-          <p:nvPr>
-            <p:ph type="body" idx="10" sz="quarter"/>
-          </p:nvPr>
-        </p:nvSpPr>
-        <p:spPr/>
-        <p:txBody>
-          <a:bodyPr/>
-          <a:lstStyle/>
-          <a:p>
-            <a:pPr algn="l">
-              <a:spcAft>
-                <a:spcPts val="400"/>
-              </a:spcAft>
-            </a:pPr>
-            <a:r>
-              <a:rPr sz="1800" b="1" i="0">
-                <a:solidFill>
-                  <a:srgbClr val="AB3D3F"/>
-                </a:solidFill>
-                <a:latin typeface="Candara"/>
-              </a:rPr>
-              <a:t>Regional totals</a:t>
-            </a:r>
-          </a:p>
-          <a:p>
-            <a:pPr algn="l">
-              <a:spcAft>
-                <a:spcPts val="1400"/>
-              </a:spcAft>
-            </a:pPr>
-            <a:r>
-              <a:rPr sz="1600" b="0" i="0">
-                <a:solidFill>
-                  <a:srgbClr val="262626"/>
-                </a:solidFill>
-                <a:latin typeface="Candara"/>
-              </a:rPr>
-              <a:t>Northern 24,196 · Upper East 18,631 · Upper West 7,173</a:t>
-            </a:r>
-          </a:p>
-          <a:p>
-            <a:pPr algn="l">
-              <a:spcAft>
-                <a:spcPts val="400"/>
-              </a:spcAft>
-            </a:pPr>
-            <a:r>
-              <a:rPr sz="1800" b="1" i="0">
-                <a:solidFill>
-                  <a:srgbClr val="AB3D3F"/>
-                </a:solidFill>
-                <a:latin typeface="Candara"/>
-              </a:rPr>
-              <a:t>Largest allocations</a:t>
-            </a:r>
-          </a:p>
-          <a:p>
-            <a:pPr algn="l">
-              <a:spcAft>
-                <a:spcPts val="1400"/>
-              </a:spcAft>
-            </a:pPr>
-            <a:r>
-              <a:rPr sz="1600" b="0" i="0">
-                <a:solidFill>
-                  <a:srgbClr val="262626"/>
-                </a:solidFill>
-                <a:latin typeface="Candara"/>
-              </a:rPr>
-              <a:t>Bolgatanga 2,350 · Garu-Tempane 2,309 · Tamale 2,175 · Kasena-Nankana 1,954 · Bawku 1,750</a:t>
-            </a:r>
-          </a:p>
-          <a:p>
-            <a:pPr algn="l">
-              <a:spcAft>
-                <a:spcPts val="400"/>
-              </a:spcAft>
-            </a:pPr>
-            <a:r>
-              <a:rPr sz="1800" b="1" i="0">
-                <a:solidFill>
-                  <a:srgbClr val="AB3D3F"/>
-                </a:solidFill>
-                <a:latin typeface="Candara"/>
-              </a:rPr>
-              <a:t>Smallest</a:t>
-            </a:r>
-          </a:p>
-          <a:p>
-            <a:pPr algn="l">
-              <a:spcAft>
-                <a:spcPts val="600"/>
-              </a:spcAft>
-            </a:pPr>
-            <a:r>
-              <a:rPr sz="1600" b="0" i="0">
-                <a:solidFill>
-                  <a:srgbClr val="262626"/>
-                </a:solidFill>
-                <a:latin typeface="Candara"/>
-              </a:rPr>
-              <a:t>Daffiama-Bussie-Issa, 335. Every district receives nets, and the total is exactly 50,000.</a:t>
-            </a:r>
-          </a:p>
-        </p:txBody>
-      </p:sp>
-      <p:sp>
-        <p:nvSpPr>
-          <p:cNvPr id="4" name="Text Placeholder 3"/>
-          <p:cNvSpPr>
-            <a:spLocks noGrp="1"/>
-          </p:cNvSpPr>
-          <p:nvPr>
-            <p:ph type="body" idx="11" sz="quarter"/>
-          </p:nvPr>
-        </p:nvSpPr>
-        <p:spPr>
-          <a:xfrm>
-            <a:off x="571500" y="571500"/>
-            <a:ext cx="5669280" cy="825785"/>
-          </a:xfrm>
-        </p:spPr>
-        <p:txBody>
-          <a:bodyPr/>
-          <a:lstStyle/>
-          <a:p>
-            <a:r>
-              <a:rPr sz="3000"/>
-              <a:t>The proposed allocation</a:t>
-            </a:r>
-          </a:p>
-        </p:txBody>
-      </p:sp>
-      <p:sp>
-        <p:nvSpPr>
-          <p:cNvPr id="5" name="Rounded Rectangle 4"/>
-          <p:cNvSpPr/>
-          <p:nvPr/>
-        </p:nvSpPr>
-        <p:spPr>
-          <a:xfrm>
-            <a:off x="6858000" y="640080"/>
-            <a:ext cx="4983480" cy="5257800"/>
-          </a:xfrm>
-          <a:prstGeom prst="roundRect">
-            <a:avLst>
-              <a:gd name="adj" fmla="val 5000"/>
-            </a:avLst>
-          </a:prstGeom>
-          <a:solidFill>
-            <a:srgbClr val="FFFFFF"/>
-          </a:solidFill>
-          <a:ln>
-            <a:noFill/>
-          </a:ln>
-          <a:effectLst/>
-        </p:spPr>
-        <p:style>
-          <a:lnRef idx="1">
-            <a:schemeClr val="accent1"/>
-          </a:lnRef>
-          <a:fillRef idx="3">
-            <a:schemeClr val="accent1"/>
-          </a:fillRef>
-          <a:effectRef idx="2">
-            <a:schemeClr val="accent1"/>
-          </a:effectRef>
-          <a:fontRef idx="minor">
-            <a:schemeClr val="lt1"/>
-          </a:fontRef>
-        </p:style>
-        <p:txBody>
-          <a:bodyPr rtlCol="0" anchor="t" wrap="square" lIns="201168" rIns="201168" tIns="160934" bIns="160934"/>
-          <a:lstStyle/>
-          <a:p>
-            <a:pPr algn="ctr"/>
-          </a:p>
-        </p:txBody>
-      </p:sp>
-      <p:pic>
-        <p:nvPicPr>
-          <p:cNvPr id="6" name="Picture 5" descr="alloc_map.png"/>
-          <p:cNvPicPr>
-            <a:picLocks noChangeAspect="1"/>
-          </p:cNvPicPr>
-          <p:nvPr/>
-        </p:nvPicPr>
-        <p:blipFill>
-          <a:blip r:embed="rId2"/>
-          <a:stretch>
-            <a:fillRect/>
-          </a:stretch>
-        </p:blipFill>
-        <p:spPr>
-          <a:xfrm>
-            <a:off x="6995160" y="917800"/>
-            <a:ext cx="4709160" cy="4702359"/>
-          </a:xfrm>
-          <a:prstGeom prst="rect">
-            <a:avLst/>
-          </a:prstGeom>
-        </p:spPr>
-      </p:pic>
-    </p:spTree>
-  </p:cSld>
-  <p:clrMapOvr>
-    <a:masterClrMapping/>
-  </p:clrMapOvr>
-</p:sld>
-</file>
-
-<file path=ppt/slides/slide21.xml><?xml version="1.0" encoding="utf-8"?>
-<p:sld xmlns:a="http://schemas.openxmlformats.org/drawingml/2006/main" xmlns:p="http://schemas.openxmlformats.org/presentationml/2006/main" xmlns:r="http://schemas.openxmlformats.org/officeDocument/2006/relationships">
-  <p:cSld>
-    <p:spTree>
-      <p:nvGrpSpPr>
-        <p:cNvPr id="1" name=""/>
-        <p:cNvGrpSpPr/>
-        <p:nvPr/>
-      </p:nvGrpSpPr>
-      <p:grpSpPr/>
-      <p:sp>
-        <p:nvSpPr>
-          <p:cNvPr id="2" name="Text Placeholder 1"/>
-          <p:cNvSpPr>
-            <a:spLocks noGrp="1"/>
-          </p:cNvSpPr>
-          <p:nvPr>
-            <p:ph type="body" idx="11" sz="quarter"/>
-          </p:nvPr>
-        </p:nvSpPr>
-        <p:spPr>
-          <a:xfrm>
-            <a:off x="571500" y="571500"/>
-            <a:ext cx="11055096" cy="737700"/>
-          </a:xfrm>
-        </p:spPr>
-        <p:txBody>
-          <a:bodyPr/>
-          <a:lstStyle/>
-          <a:p>
-            <a:r>
-              <a:t>Who gains, who loses, and why</a:t>
-            </a:r>
-          </a:p>
-        </p:txBody>
-      </p:sp>
-      <p:sp>
-        <p:nvSpPr>
-          <p:cNvPr id="3" name="TextBox 2"/>
-          <p:cNvSpPr txBox="1"/>
-          <p:nvPr/>
-        </p:nvSpPr>
-        <p:spPr>
-          <a:xfrm>
-            <a:off x="566928" y="1417320"/>
-            <a:ext cx="5029200" cy="4434840"/>
-          </a:xfrm>
-          <a:prstGeom prst="rect">
-            <a:avLst/>
-          </a:prstGeom>
-          <a:noFill/>
-        </p:spPr>
-        <p:txBody>
-          <a:bodyPr wrap="square" anchor="t" lIns="0" rIns="0" tIns="0" bIns="0">
-            <a:spAutoFit/>
-          </a:bodyPr>
-          <a:lstStyle/>
-          <a:p>
-            <a:pPr algn="l" marL="219456" indent="-219456">
-              <a:spcAft>
-                <a:spcPts val="900"/>
-              </a:spcAft>
-              <a:buClr>
-                <a:srgbClr val="AB3D3F"/>
-              </a:buClr>
-              <a:buFont typeface="Arial"/>
-              <a:buChar char="•"/>
-            </a:pPr>
-            <a:r>
-              <a:rPr sz="1400" b="0" i="0">
-                <a:solidFill>
-                  <a:srgbClr val="262626"/>
-                </a:solidFill>
-                <a:latin typeface="Candara"/>
-              </a:rPr>
-              <a:t>Our comparator gives nets in proportion to reported cases. It is not Ghana's practice: national campaigns allocate by population, about one net per two people.</a:t>
-            </a:r>
-          </a:p>
-          <a:p>
-            <a:pPr algn="l" marL="219456" indent="-219456">
-              <a:spcAft>
-                <a:spcPts val="900"/>
-              </a:spcAft>
-              <a:buClr>
-                <a:srgbClr val="AB3D3F"/>
-              </a:buClr>
-              <a:buFont typeface="Arial"/>
-              <a:buChar char="•"/>
-            </a:pPr>
-            <a:r>
-              <a:rPr sz="1400" b="0" i="0">
-                <a:solidFill>
-                  <a:srgbClr val="262626"/>
-                </a:solidFill>
-                <a:latin typeface="Candara"/>
-              </a:rPr>
-              <a:t>Tamale gains most (+1,692): the largest population, and the lowest reported cases per person of all 50 districts.</a:t>
-            </a:r>
-          </a:p>
-          <a:p>
-            <a:pPr algn="l" marL="219456" indent="-219456">
-              <a:spcAft>
-                <a:spcPts val="900"/>
-              </a:spcAft>
-              <a:buClr>
-                <a:srgbClr val="AB3D3F"/>
-              </a:buClr>
-              <a:buFont typeface="Arial"/>
-              <a:buChar char="•"/>
-            </a:pPr>
-            <a:r>
-              <a:rPr sz="1400" b="0" i="0">
-                <a:solidFill>
-                  <a:srgbClr val="262626"/>
-                </a:solidFill>
-                <a:latin typeface="Candara"/>
-              </a:rPr>
-              <a:t>Within each region, the more cases per person a district reported, the more nets per person it gives up. Nabdam and Bole, the highest in their regions, lose 761 and 376.</a:t>
-            </a:r>
-          </a:p>
-          <a:p>
-            <a:pPr algn="l" marL="219456" indent="-219456">
-              <a:spcAft>
-                <a:spcPts val="900"/>
-              </a:spcAft>
-              <a:buClr>
-                <a:srgbClr val="AB3D3F"/>
-              </a:buClr>
-              <a:buFont typeface="Arial"/>
-              <a:buChar char="•"/>
-            </a:pPr>
-            <a:r>
-              <a:rPr sz="1400" b="0" i="0">
-                <a:solidFill>
-                  <a:srgbClr val="262626"/>
-                </a:solidFill>
-                <a:latin typeface="Candara"/>
-              </a:rPr>
-              <a:t>We treat everyone in a region as equally at risk. That is a value judgement, and we make it openly.</a:t>
-            </a:r>
-          </a:p>
-          <a:p>
-            <a:pPr algn="l" marL="219456" indent="-219456">
-              <a:spcAft>
-                <a:spcPts val="600"/>
-              </a:spcAft>
-              <a:buClr>
-                <a:srgbClr val="AB3D3F"/>
-              </a:buClr>
-              <a:buFont typeface="Arial"/>
-              <a:buChar char="•"/>
-            </a:pPr>
-            <a:r>
-              <a:rPr sz="1400" b="0" i="0">
-                <a:solidFill>
-                  <a:srgbClr val="262626"/>
-                </a:solidFill>
-                <a:latin typeface="Candara"/>
-              </a:rPr>
-              <a:t>Referral bias at Wa and Bolgatanga is a hypothesis, not a finding: Tamale hosts the north's only tertiary hospital yet reports the lowest rate.</a:t>
-            </a:r>
-          </a:p>
-        </p:txBody>
-      </p:sp>
-      <p:graphicFrame>
-        <p:nvGraphicFramePr>
-          <p:cNvPr id="4" name="Chart 3"/>
-          <p:cNvGraphicFramePr>
-            <a:graphicFrameLocks noGrp="1"/>
-          </p:cNvGraphicFramePr>
-          <p:nvPr/>
-        </p:nvGraphicFramePr>
-        <p:xfrm>
-          <a:off x="5806440" y="1325880"/>
-          <a:ext cx="5852160" cy="4023360"/>
-        </p:xfrm>
-        <a:graphic>
-          <a:graphicData uri="http://schemas.openxmlformats.org/drawingml/2006/chart">
-            <c:chart xmlns:c="http://schemas.openxmlformats.org/drawingml/2006/chart" r:id="rId2"/>
-          </a:graphicData>
-        </a:graphic>
-      </p:graphicFrame>
-      <p:sp>
-        <p:nvSpPr>
-          <p:cNvPr id="5" name="TextBox 4"/>
-          <p:cNvSpPr txBox="1"/>
-          <p:nvPr/>
-        </p:nvSpPr>
-        <p:spPr>
-          <a:xfrm>
-            <a:off x="5806440" y="5394960"/>
-            <a:ext cx="5852160" cy="411480"/>
-          </a:xfrm>
-          <a:prstGeom prst="rect">
-            <a:avLst/>
-          </a:prstGeom>
-          <a:noFill/>
-        </p:spPr>
-        <p:txBody>
-          <a:bodyPr wrap="square" anchor="t" lIns="0" rIns="0" tIns="0" bIns="0">
-            <a:spAutoFit/>
-          </a:bodyPr>
-          <a:lstStyle/>
-          <a:p>
-            <a:pPr algn="l">
-              <a:spcAft>
-                <a:spcPts val="600"/>
-              </a:spcAft>
-            </a:pPr>
-            <a:r>
-              <a:rPr sz="1100" b="0" i="0">
-                <a:solidFill>
-                  <a:srgbClr val="595959"/>
-                </a:solidFill>
-                <a:latin typeface="Candara"/>
-              </a:rPr>
-              <a:t>Change in nets against case-proportional allocation: the five largest gains and losses.</a:t>
-            </a:r>
-          </a:p>
-        </p:txBody>
-      </p:sp>
-    </p:spTree>
-  </p:cSld>
-  <p:clrMapOvr>
-    <a:masterClrMapping/>
-  </p:clrMapOvr>
-</p:sld>
-</file>
-
-<file path=ppt/slides/slide22.xml><?xml version="1.0" encoding="utf-8"?>
-<p:sld xmlns:a="http://schemas.openxmlformats.org/drawingml/2006/main" xmlns:p="http://schemas.openxmlformats.org/presentationml/2006/main" xmlns:r="http://schemas.openxmlformats.org/officeDocument/2006/relationships">
-  <p:cSld>
-    <p:spTree>
-      <p:nvGrpSpPr>
-        <p:cNvPr id="1" name=""/>
-        <p:cNvGrpSpPr/>
-        <p:nvPr/>
-      </p:nvGrpSpPr>
-      <p:grpSpPr/>
-      <p:sp>
-        <p:nvSpPr>
-          <p:cNvPr id="3" name="Text Placeholder 2"/>
-          <p:cNvSpPr>
-            <a:spLocks noGrp="1"/>
-          </p:cNvSpPr>
-          <p:nvPr>
-            <p:ph type="body" idx="11" sz="quarter"/>
-          </p:nvPr>
-        </p:nvSpPr>
-        <p:spPr>
-          <a:xfrm>
-            <a:off x="1061243" y="571500"/>
-            <a:ext cx="10067544" cy="737700"/>
-          </a:xfrm>
-        </p:spPr>
-        <p:txBody>
-          <a:bodyPr/>
-          <a:lstStyle/>
-          <a:p>
-            <a:r>
-              <a:t>What would change the answer</a:t>
-            </a:r>
-          </a:p>
-        </p:txBody>
-      </p:sp>
-      <p:graphicFrame>
-        <p:nvGraphicFramePr>
-          <p:cNvPr id="4" name="Table 3"/>
-          <p:cNvGraphicFramePr>
-            <a:graphicFrameLocks noGrp="1"/>
-          </p:cNvGraphicFramePr>
-          <p:nvPr/>
-        </p:nvGraphicFramePr>
-        <p:xfrm>
-          <a:off x="1060704" y="1463040"/>
-          <a:ext cx="10067544" cy="3429000"/>
-        </p:xfrm>
-        <a:graphic>
-          <a:graphicData uri="http://schemas.openxmlformats.org/drawingml/2006/table">
-            <a:tbl>
-              <a:tblPr firstRow="1">
-                <a:tableStyleId>{5C22544A-7EE6-4342-B048-85BDC9FD1C3A}</a:tableStyleId>
-              </a:tblPr>
-              <a:tblGrid>
-                <a:gridCol w="4946904"/>
-                <a:gridCol w="1280160"/>
-                <a:gridCol w="1280160"/>
-                <a:gridCol w="1280160"/>
-                <a:gridCol w="1280160"/>
-              </a:tblGrid>
-              <a:tr h="411480">
-                <a:tc>
-                  <a:txBody>
-                    <a:bodyPr/>
-                    <a:lstStyle/>
-                    <a:p>
-                      <a:pPr algn="l">
-                        <a:spcAft>
-                          <a:spcPts val="0"/>
-                        </a:spcAft>
-                      </a:pPr>
-                      <a:r>
-                        <a:rPr sz="1400" b="1" i="0">
-                          <a:solidFill>
-                            <a:srgbClr val="FFFFFF"/>
-                          </a:solidFill>
-                          <a:latin typeface="Candara"/>
-                        </a:rPr>
-                        <a:t>Scenario</a:t>
-                      </a:r>
-                    </a:p>
-                  </a:txBody>
-                  <a:tcPr marL="91440" marR="91440" marT="36576" marB="36576" anchor="ctr">
-                    <a:solidFill>
-                      <a:srgbClr val="AB3D3F"/>
-                    </a:solidFill>
-                  </a:tcPr>
-                </a:tc>
-                <a:tc>
-                  <a:txBody>
-                    <a:bodyPr/>
-                    <a:lstStyle/>
-                    <a:p>
-                      <a:pPr algn="r">
-                        <a:spcAft>
-                          <a:spcPts val="0"/>
-                        </a:spcAft>
-                      </a:pPr>
-                      <a:r>
-                        <a:rPr sz="1400" b="1" i="0">
-                          <a:solidFill>
-                            <a:srgbClr val="FFFFFF"/>
-                          </a:solidFill>
-                          <a:latin typeface="Candara"/>
-                        </a:rPr>
-                        <a:t>Northern</a:t>
-                      </a:r>
-                    </a:p>
-                  </a:txBody>
-                  <a:tcPr marL="91440" marR="91440" marT="36576" marB="36576" anchor="ctr">
-                    <a:solidFill>
-                      <a:srgbClr val="AB3D3F"/>
-                    </a:solidFill>
-                  </a:tcPr>
-                </a:tc>
-                <a:tc>
-                  <a:txBody>
-                    <a:bodyPr/>
-                    <a:lstStyle/>
-                    <a:p>
-                      <a:pPr algn="r">
-                        <a:spcAft>
-                          <a:spcPts val="0"/>
-                        </a:spcAft>
-                      </a:pPr>
-                      <a:r>
-                        <a:rPr sz="1400" b="1" i="0">
-                          <a:solidFill>
-                            <a:srgbClr val="FFFFFF"/>
-                          </a:solidFill>
-                          <a:latin typeface="Candara"/>
-                        </a:rPr>
-                        <a:t>Upper East</a:t>
-                      </a:r>
-                    </a:p>
-                  </a:txBody>
-                  <a:tcPr marL="91440" marR="91440" marT="36576" marB="36576" anchor="ctr">
-                    <a:solidFill>
-                      <a:srgbClr val="AB3D3F"/>
-                    </a:solidFill>
-                  </a:tcPr>
-                </a:tc>
-                <a:tc>
-                  <a:txBody>
-                    <a:bodyPr/>
-                    <a:lstStyle/>
-                    <a:p>
-                      <a:pPr algn="r">
-                        <a:spcAft>
-                          <a:spcPts val="0"/>
-                        </a:spcAft>
-                      </a:pPr>
-                      <a:r>
-                        <a:rPr sz="1400" b="1" i="0">
-                          <a:solidFill>
-                            <a:srgbClr val="FFFFFF"/>
-                          </a:solidFill>
-                          <a:latin typeface="Candara"/>
-                        </a:rPr>
-                        <a:t>Upper West</a:t>
-                      </a:r>
-                    </a:p>
-                  </a:txBody>
-                  <a:tcPr marL="91440" marR="91440" marT="36576" marB="36576" anchor="ctr">
-                    <a:solidFill>
-                      <a:srgbClr val="AB3D3F"/>
-                    </a:solidFill>
-                  </a:tcPr>
-                </a:tc>
-                <a:tc>
-                  <a:txBody>
-                    <a:bodyPr/>
-                    <a:lstStyle/>
-                    <a:p>
-                      <a:pPr algn="r">
-                        <a:spcAft>
-                          <a:spcPts val="0"/>
-                        </a:spcAft>
-                      </a:pPr>
-                      <a:r>
-                        <a:rPr sz="1400" b="1" i="0">
-                          <a:solidFill>
-                            <a:srgbClr val="FFFFFF"/>
-                          </a:solidFill>
-                          <a:latin typeface="Candara"/>
-                        </a:rPr>
-                        <a:t>Nets moved</a:t>
-                      </a:r>
-                    </a:p>
-                  </a:txBody>
-                  <a:tcPr marL="91440" marR="91440" marT="36576" marB="36576" anchor="ctr">
-                    <a:solidFill>
-                      <a:srgbClr val="AB3D3F"/>
-                    </a:solidFill>
-                  </a:tcPr>
-                </a:tc>
-              </a:tr>
-              <a:tr h="502920">
-                <a:tc>
-                  <a:txBody>
-                    <a:bodyPr/>
-                    <a:lstStyle/>
-                    <a:p>
-                      <a:pPr algn="l">
-                        <a:spcAft>
-                          <a:spcPts val="0"/>
-                        </a:spcAft>
-                      </a:pPr>
-                      <a:r>
-                        <a:rPr sz="1300" b="1" i="0">
-                          <a:solidFill>
-                            <a:srgbClr val="262626"/>
-                          </a:solidFill>
-                          <a:latin typeface="Candara"/>
-                        </a:rPr>
-                        <a:t>As proposed</a:t>
-                      </a:r>
-                    </a:p>
-                  </a:txBody>
-                  <a:tcPr marL="91440" marR="91440" marT="36576" marB="36576" anchor="ctr">
-                    <a:solidFill>
-                      <a:srgbClr val="FFFFFF"/>
-                    </a:solidFill>
-                  </a:tcPr>
-                </a:tc>
-                <a:tc>
-                  <a:txBody>
-                    <a:bodyPr/>
-                    <a:lstStyle/>
-                    <a:p>
-                      <a:pPr algn="r">
-                        <a:spcAft>
-                          <a:spcPts val="0"/>
-                        </a:spcAft>
-                      </a:pPr>
-                      <a:r>
-                        <a:rPr sz="1300" b="1" i="0">
-                          <a:solidFill>
-                            <a:srgbClr val="262626"/>
-                          </a:solidFill>
-                          <a:latin typeface="Candara"/>
-                        </a:rPr>
-                        <a:t>24,196</a:t>
-                      </a:r>
-                    </a:p>
-                  </a:txBody>
-                  <a:tcPr marL="91440" marR="91440" marT="36576" marB="36576" anchor="ctr">
-                    <a:solidFill>
-                      <a:srgbClr val="FFFFFF"/>
-                    </a:solidFill>
-                  </a:tcPr>
-                </a:tc>
-                <a:tc>
-                  <a:txBody>
-                    <a:bodyPr/>
-                    <a:lstStyle/>
-                    <a:p>
-                      <a:pPr algn="r">
-                        <a:spcAft>
-                          <a:spcPts val="0"/>
-                        </a:spcAft>
-                      </a:pPr>
-                      <a:r>
-                        <a:rPr sz="1300" b="1" i="0">
-                          <a:solidFill>
-                            <a:srgbClr val="262626"/>
-                          </a:solidFill>
-                          <a:latin typeface="Candara"/>
-                        </a:rPr>
-                        <a:t>18,631</a:t>
-                      </a:r>
-                    </a:p>
-                  </a:txBody>
-                  <a:tcPr marL="91440" marR="91440" marT="36576" marB="36576" anchor="ctr">
-                    <a:solidFill>
-                      <a:srgbClr val="FFFFFF"/>
-                    </a:solidFill>
-                  </a:tcPr>
-                </a:tc>
-                <a:tc>
-                  <a:txBody>
-                    <a:bodyPr/>
-                    <a:lstStyle/>
-                    <a:p>
-                      <a:pPr algn="r">
-                        <a:spcAft>
-                          <a:spcPts val="0"/>
-                        </a:spcAft>
-                      </a:pPr>
-                      <a:r>
-                        <a:rPr sz="1300" b="1" i="0">
-                          <a:solidFill>
-                            <a:srgbClr val="262626"/>
-                          </a:solidFill>
-                          <a:latin typeface="Candara"/>
-                        </a:rPr>
-                        <a:t>7,173</a:t>
-                      </a:r>
-                    </a:p>
-                  </a:txBody>
-                  <a:tcPr marL="91440" marR="91440" marT="36576" marB="36576" anchor="ctr">
-                    <a:solidFill>
-                      <a:srgbClr val="FFFFFF"/>
-                    </a:solidFill>
-                  </a:tcPr>
-                </a:tc>
-                <a:tc>
-                  <a:txBody>
-                    <a:bodyPr/>
-                    <a:lstStyle/>
-                    <a:p>
-                      <a:pPr algn="r">
-                        <a:spcAft>
-                          <a:spcPts val="0"/>
-                        </a:spcAft>
-                      </a:pPr>
-                      <a:r>
-                        <a:rPr sz="1300" b="1" i="0">
-                          <a:solidFill>
-                            <a:srgbClr val="262626"/>
-                          </a:solidFill>
-                          <a:latin typeface="Candara"/>
-                        </a:rPr>
-                        <a:t>baseline</a:t>
-                      </a:r>
-                    </a:p>
-                  </a:txBody>
-                  <a:tcPr marL="91440" marR="91440" marT="36576" marB="36576" anchor="ctr">
-                    <a:solidFill>
-                      <a:srgbClr val="FFFFFF"/>
-                    </a:solidFill>
-                  </a:tcPr>
-                </a:tc>
-              </a:tr>
-              <a:tr h="502920">
-                <a:tc>
-                  <a:txBody>
-                    <a:bodyPr/>
-                    <a:lstStyle/>
-                    <a:p>
-                      <a:pPr algn="l">
-                        <a:spcAft>
-                          <a:spcPts val="0"/>
-                        </a:spcAft>
-                      </a:pPr>
-                      <a:r>
-                        <a:rPr sz="1300" b="1" i="0">
-                          <a:solidFill>
-                            <a:srgbClr val="262626"/>
-                          </a:solidFill>
-                          <a:latin typeface="Candara"/>
-                        </a:rPr>
-                        <a:t>Point estimate instead of the upper bound</a:t>
-                      </a:r>
-                    </a:p>
-                  </a:txBody>
-                  <a:tcPr marL="91440" marR="91440" marT="36576" marB="36576" anchor="ctr">
-                    <a:solidFill>
-                      <a:srgbClr val="F3F3F3"/>
-                    </a:solidFill>
-                  </a:tcPr>
-                </a:tc>
-                <a:tc>
-                  <a:txBody>
-                    <a:bodyPr/>
-                    <a:lstStyle/>
-                    <a:p>
-                      <a:pPr algn="r">
-                        <a:spcAft>
-                          <a:spcPts val="0"/>
-                        </a:spcAft>
-                      </a:pPr>
-                      <a:r>
-                        <a:rPr sz="1300" b="0" i="0">
-                          <a:solidFill>
-                            <a:srgbClr val="262626"/>
-                          </a:solidFill>
-                          <a:latin typeface="Candara"/>
-                        </a:rPr>
-                        <a:t>25,095</a:t>
-                      </a:r>
-                    </a:p>
-                  </a:txBody>
-                  <a:tcPr marL="91440" marR="91440" marT="36576" marB="36576" anchor="ctr">
-                    <a:solidFill>
-                      <a:srgbClr val="F3F3F3"/>
-                    </a:solidFill>
-                  </a:tcPr>
-                </a:tc>
-                <a:tc>
-                  <a:txBody>
-                    <a:bodyPr/>
-                    <a:lstStyle/>
-                    <a:p>
-                      <a:pPr algn="r">
-                        <a:spcAft>
-                          <a:spcPts val="0"/>
-                        </a:spcAft>
-                      </a:pPr>
-                      <a:r>
-                        <a:rPr sz="1300" b="0" i="0">
-                          <a:solidFill>
-                            <a:srgbClr val="262626"/>
-                          </a:solidFill>
-                          <a:latin typeface="Candara"/>
-                        </a:rPr>
-                        <a:t>17,240</a:t>
-                      </a:r>
-                    </a:p>
-                  </a:txBody>
-                  <a:tcPr marL="91440" marR="91440" marT="36576" marB="36576" anchor="ctr">
-                    <a:solidFill>
-                      <a:srgbClr val="F3F3F3"/>
-                    </a:solidFill>
-                  </a:tcPr>
-                </a:tc>
-                <a:tc>
-                  <a:txBody>
-                    <a:bodyPr/>
-                    <a:lstStyle/>
-                    <a:p>
-                      <a:pPr algn="r">
-                        <a:spcAft>
-                          <a:spcPts val="0"/>
-                        </a:spcAft>
-                      </a:pPr>
-                      <a:r>
-                        <a:rPr sz="1300" b="0" i="0">
-                          <a:solidFill>
-                            <a:srgbClr val="262626"/>
-                          </a:solidFill>
-                          <a:latin typeface="Candara"/>
-                        </a:rPr>
-                        <a:t>7,665</a:t>
-                      </a:r>
-                    </a:p>
-                  </a:txBody>
-                  <a:tcPr marL="91440" marR="91440" marT="36576" marB="36576" anchor="ctr">
-                    <a:solidFill>
-                      <a:srgbClr val="F3F3F3"/>
-                    </a:solidFill>
-                  </a:tcPr>
-                </a:tc>
-                <a:tc>
-                  <a:txBody>
-                    <a:bodyPr/>
-                    <a:lstStyle/>
-                    <a:p>
-                      <a:pPr algn="r">
-                        <a:spcAft>
-                          <a:spcPts val="0"/>
-                        </a:spcAft>
-                      </a:pPr>
-                      <a:r>
-                        <a:rPr sz="1300" b="0" i="0">
-                          <a:solidFill>
-                            <a:srgbClr val="262626"/>
-                          </a:solidFill>
-                          <a:latin typeface="Candara"/>
-                        </a:rPr>
-                        <a:t>1,391</a:t>
-                      </a:r>
-                    </a:p>
-                  </a:txBody>
-                  <a:tcPr marL="91440" marR="91440" marT="36576" marB="36576" anchor="ctr">
-                    <a:solidFill>
-                      <a:srgbClr val="F3F3F3"/>
-                    </a:solidFill>
-                  </a:tcPr>
-                </a:tc>
-              </a:tr>
-              <a:tr h="502920">
-                <a:tc>
-                  <a:txBody>
-                    <a:bodyPr/>
-                    <a:lstStyle/>
-                    <a:p>
-                      <a:pPr algn="l">
-                        <a:spcAft>
-                          <a:spcPts val="0"/>
-                        </a:spcAft>
-                      </a:pPr>
-                      <a:r>
-                        <a:rPr sz="1300" b="1" i="0">
-                          <a:solidFill>
-                            <a:srgbClr val="262626"/>
-                          </a:solidFill>
-                          <a:latin typeface="Candara"/>
-                        </a:rPr>
-                        <a:t>Region-effects model (fits better: AIC 1,253.8 vs 1,286.8)</a:t>
-                      </a:r>
-                    </a:p>
-                  </a:txBody>
-                  <a:tcPr marL="91440" marR="91440" marT="36576" marB="36576" anchor="ctr">
-                    <a:solidFill>
-                      <a:srgbClr val="FFFFFF"/>
-                    </a:solidFill>
-                  </a:tcPr>
-                </a:tc>
-                <a:tc>
-                  <a:txBody>
-                    <a:bodyPr/>
-                    <a:lstStyle/>
-                    <a:p>
-                      <a:pPr algn="r">
-                        <a:spcAft>
-                          <a:spcPts val="0"/>
-                        </a:spcAft>
-                      </a:pPr>
-                      <a:r>
-                        <a:rPr sz="1300" b="0" i="0">
-                          <a:solidFill>
-                            <a:srgbClr val="262626"/>
-                          </a:solidFill>
-                          <a:latin typeface="Candara"/>
-                        </a:rPr>
-                        <a:t>18,634</a:t>
-                      </a:r>
-                    </a:p>
-                  </a:txBody>
-                  <a:tcPr marL="91440" marR="91440" marT="36576" marB="36576" anchor="ctr">
-                    <a:solidFill>
-                      <a:srgbClr val="FFFFFF"/>
-                    </a:solidFill>
-                  </a:tcPr>
-                </a:tc>
-                <a:tc>
-                  <a:txBody>
-                    <a:bodyPr/>
-                    <a:lstStyle/>
-                    <a:p>
-                      <a:pPr algn="r">
-                        <a:spcAft>
-                          <a:spcPts val="0"/>
-                        </a:spcAft>
-                      </a:pPr>
-                      <a:r>
-                        <a:rPr sz="1300" b="0" i="0">
-                          <a:solidFill>
-                            <a:srgbClr val="262626"/>
-                          </a:solidFill>
-                          <a:latin typeface="Candara"/>
-                        </a:rPr>
-                        <a:t>16,473</a:t>
-                      </a:r>
-                    </a:p>
-                  </a:txBody>
-                  <a:tcPr marL="91440" marR="91440" marT="36576" marB="36576" anchor="ctr">
-                    <a:solidFill>
-                      <a:srgbClr val="FFFFFF"/>
-                    </a:solidFill>
-                  </a:tcPr>
-                </a:tc>
-                <a:tc>
-                  <a:txBody>
-                    <a:bodyPr/>
-                    <a:lstStyle/>
-                    <a:p>
-                      <a:pPr algn="r">
-                        <a:spcAft>
-                          <a:spcPts val="0"/>
-                        </a:spcAft>
-                      </a:pPr>
-                      <a:r>
-                        <a:rPr sz="1300" b="0" i="0">
-                          <a:solidFill>
-                            <a:srgbClr val="262626"/>
-                          </a:solidFill>
-                          <a:latin typeface="Candara"/>
-                        </a:rPr>
-                        <a:t>14,893</a:t>
-                      </a:r>
-                    </a:p>
-                  </a:txBody>
-                  <a:tcPr marL="91440" marR="91440" marT="36576" marB="36576" anchor="ctr">
-                    <a:solidFill>
-                      <a:srgbClr val="FFFFFF"/>
-                    </a:solidFill>
-                  </a:tcPr>
-                </a:tc>
-                <a:tc>
-                  <a:txBody>
-                    <a:bodyPr/>
-                    <a:lstStyle/>
-                    <a:p>
-                      <a:pPr algn="r">
-                        <a:spcAft>
-                          <a:spcPts val="0"/>
-                        </a:spcAft>
-                      </a:pPr>
-                      <a:r>
-                        <a:rPr sz="1300" b="0" i="0">
-                          <a:solidFill>
-                            <a:srgbClr val="262626"/>
-                          </a:solidFill>
-                          <a:latin typeface="Candara"/>
-                        </a:rPr>
-                        <a:t>7,720</a:t>
-                      </a:r>
-                    </a:p>
-                  </a:txBody>
-                  <a:tcPr marL="91440" marR="91440" marT="36576" marB="36576" anchor="ctr">
-                    <a:solidFill>
-                      <a:srgbClr val="FFFFFF"/>
-                    </a:solidFill>
-                  </a:tcPr>
-                </a:tc>
-              </a:tr>
-              <a:tr h="502920">
-                <a:tc>
-                  <a:txBody>
-                    <a:bodyPr/>
-                    <a:lstStyle/>
-                    <a:p>
-                      <a:pPr algn="l">
-                        <a:spcAft>
-                          <a:spcPts val="0"/>
-                        </a:spcAft>
-                      </a:pPr>
-                      <a:r>
-                        <a:rPr sz="1300" b="1" i="0">
-                          <a:solidFill>
-                            <a:srgbClr val="262626"/>
-                          </a:solidFill>
-                          <a:latin typeface="Candara"/>
-                        </a:rPr>
-                        <a:t>Coverage corrected for the 11 districts now in Savannah or North East</a:t>
-                      </a:r>
-                    </a:p>
-                  </a:txBody>
-                  <a:tcPr marL="91440" marR="91440" marT="36576" marB="36576" anchor="ctr">
-                    <a:solidFill>
-                      <a:srgbClr val="F3F3F3"/>
-                    </a:solidFill>
-                  </a:tcPr>
-                </a:tc>
-                <a:tc>
-                  <a:txBody>
-                    <a:bodyPr/>
-                    <a:lstStyle/>
-                    <a:p>
-                      <a:pPr algn="r">
-                        <a:spcAft>
-                          <a:spcPts val="0"/>
-                        </a:spcAft>
-                      </a:pPr>
-                      <a:r>
-                        <a:rPr sz="1300" b="0" i="0">
-                          <a:solidFill>
-                            <a:srgbClr val="262626"/>
-                          </a:solidFill>
-                          <a:latin typeface="Candara"/>
-                        </a:rPr>
-                        <a:t>27,686</a:t>
-                      </a:r>
-                    </a:p>
-                  </a:txBody>
-                  <a:tcPr marL="91440" marR="91440" marT="36576" marB="36576" anchor="ctr">
-                    <a:solidFill>
-                      <a:srgbClr val="F3F3F3"/>
-                    </a:solidFill>
-                  </a:tcPr>
-                </a:tc>
-                <a:tc>
-                  <a:txBody>
-                    <a:bodyPr/>
-                    <a:lstStyle/>
-                    <a:p>
-                      <a:pPr algn="r">
-                        <a:spcAft>
-                          <a:spcPts val="0"/>
-                        </a:spcAft>
-                      </a:pPr>
-                      <a:r>
-                        <a:rPr sz="1300" b="0" i="0">
-                          <a:solidFill>
-                            <a:srgbClr val="262626"/>
-                          </a:solidFill>
-                          <a:latin typeface="Candara"/>
-                        </a:rPr>
-                        <a:t>14,891</a:t>
-                      </a:r>
-                    </a:p>
-                  </a:txBody>
-                  <a:tcPr marL="91440" marR="91440" marT="36576" marB="36576" anchor="ctr">
-                    <a:solidFill>
-                      <a:srgbClr val="F3F3F3"/>
-                    </a:solidFill>
-                  </a:tcPr>
-                </a:tc>
-                <a:tc>
-                  <a:txBody>
-                    <a:bodyPr/>
-                    <a:lstStyle/>
-                    <a:p>
-                      <a:pPr algn="r">
-                        <a:spcAft>
-                          <a:spcPts val="0"/>
-                        </a:spcAft>
-                      </a:pPr>
-                      <a:r>
-                        <a:rPr sz="1300" b="0" i="0">
-                          <a:solidFill>
-                            <a:srgbClr val="262626"/>
-                          </a:solidFill>
-                          <a:latin typeface="Candara"/>
-                        </a:rPr>
-                        <a:t>7,423</a:t>
-                      </a:r>
-                    </a:p>
-                  </a:txBody>
-                  <a:tcPr marL="91440" marR="91440" marT="36576" marB="36576" anchor="ctr">
-                    <a:solidFill>
-                      <a:srgbClr val="F3F3F3"/>
-                    </a:solidFill>
-                  </a:tcPr>
-                </a:tc>
-                <a:tc>
-                  <a:txBody>
-                    <a:bodyPr/>
-                    <a:lstStyle/>
-                    <a:p>
-                      <a:pPr algn="r">
-                        <a:spcAft>
-                          <a:spcPts val="0"/>
-                        </a:spcAft>
-                      </a:pPr>
-                      <a:r>
-                        <a:rPr sz="1300" b="0" i="0">
-                          <a:solidFill>
-                            <a:srgbClr val="262626"/>
-                          </a:solidFill>
-                          <a:latin typeface="Candara"/>
-                        </a:rPr>
-                        <a:t>3,740</a:t>
-                      </a:r>
-                    </a:p>
-                  </a:txBody>
-                  <a:tcPr marL="91440" marR="91440" marT="36576" marB="36576" anchor="ctr">
-                    <a:solidFill>
-                      <a:srgbClr val="F3F3F3"/>
-                    </a:solidFill>
-                  </a:tcPr>
-                </a:tc>
-              </a:tr>
-              <a:tr h="502920">
-                <a:tc>
-                  <a:txBody>
-                    <a:bodyPr/>
-                    <a:lstStyle/>
-                    <a:p>
-                      <a:pPr algn="l">
-                        <a:spcAft>
-                          <a:spcPts val="0"/>
-                        </a:spcAft>
-                      </a:pPr>
-                      <a:r>
-                        <a:rPr sz="1300" b="1" i="0">
-                          <a:solidFill>
-                            <a:srgbClr val="262626"/>
-                          </a:solidFill>
-                          <a:latin typeface="Candara"/>
-                        </a:rPr>
-                        <a:t>Northern coverage at its lower interval bound (61.4%)</a:t>
-                      </a:r>
-                    </a:p>
-                  </a:txBody>
-                  <a:tcPr marL="91440" marR="91440" marT="36576" marB="36576" anchor="ctr">
-                    <a:solidFill>
-                      <a:srgbClr val="FFFFFF"/>
-                    </a:solidFill>
-                  </a:tcPr>
-                </a:tc>
-                <a:tc>
-                  <a:txBody>
-                    <a:bodyPr/>
-                    <a:lstStyle/>
-                    <a:p>
-                      <a:pPr algn="r">
-                        <a:spcAft>
-                          <a:spcPts val="0"/>
-                        </a:spcAft>
-                      </a:pPr>
-                      <a:r>
-                        <a:rPr sz="1300" b="0" i="0">
-                          <a:solidFill>
-                            <a:srgbClr val="262626"/>
-                          </a:solidFill>
-                          <a:latin typeface="Candara"/>
-                        </a:rPr>
-                        <a:t>22,939</a:t>
-                      </a:r>
-                    </a:p>
-                  </a:txBody>
-                  <a:tcPr marL="91440" marR="91440" marT="36576" marB="36576" anchor="ctr">
-                    <a:solidFill>
-                      <a:srgbClr val="FFFFFF"/>
-                    </a:solidFill>
-                  </a:tcPr>
-                </a:tc>
-                <a:tc>
-                  <a:txBody>
-                    <a:bodyPr/>
-                    <a:lstStyle/>
-                    <a:p>
-                      <a:pPr algn="r">
-                        <a:spcAft>
-                          <a:spcPts val="0"/>
-                        </a:spcAft>
-                      </a:pPr>
-                      <a:r>
-                        <a:rPr sz="1300" b="0" i="0">
-                          <a:solidFill>
-                            <a:srgbClr val="262626"/>
-                          </a:solidFill>
-                          <a:latin typeface="Candara"/>
-                        </a:rPr>
-                        <a:t>18,596</a:t>
-                      </a:r>
-                    </a:p>
-                  </a:txBody>
-                  <a:tcPr marL="91440" marR="91440" marT="36576" marB="36576" anchor="ctr">
-                    <a:solidFill>
-                      <a:srgbClr val="FFFFFF"/>
-                    </a:solidFill>
-                  </a:tcPr>
-                </a:tc>
-                <a:tc>
-                  <a:txBody>
-                    <a:bodyPr/>
-                    <a:lstStyle/>
-                    <a:p>
-                      <a:pPr algn="r">
-                        <a:spcAft>
-                          <a:spcPts val="0"/>
-                        </a:spcAft>
-                      </a:pPr>
-                      <a:r>
-                        <a:rPr sz="1300" b="0" i="0">
-                          <a:solidFill>
-                            <a:srgbClr val="262626"/>
-                          </a:solidFill>
-                          <a:latin typeface="Candara"/>
-                        </a:rPr>
-                        <a:t>8,465</a:t>
-                      </a:r>
-                    </a:p>
-                  </a:txBody>
-                  <a:tcPr marL="91440" marR="91440" marT="36576" marB="36576" anchor="ctr">
-                    <a:solidFill>
-                      <a:srgbClr val="FFFFFF"/>
-                    </a:solidFill>
-                  </a:tcPr>
-                </a:tc>
-                <a:tc>
-                  <a:txBody>
-                    <a:bodyPr/>
-                    <a:lstStyle/>
-                    <a:p>
-                      <a:pPr algn="r">
-                        <a:spcAft>
-                          <a:spcPts val="0"/>
-                        </a:spcAft>
-                      </a:pPr>
-                      <a:r>
-                        <a:rPr sz="1300" b="0" i="0">
-                          <a:solidFill>
-                            <a:srgbClr val="262626"/>
-                          </a:solidFill>
-                          <a:latin typeface="Candara"/>
-                        </a:rPr>
-                        <a:t>1,292</a:t>
-                      </a:r>
-                    </a:p>
-                  </a:txBody>
-                  <a:tcPr marL="91440" marR="91440" marT="36576" marB="36576" anchor="ctr">
-                    <a:solidFill>
-                      <a:srgbClr val="FFFFFF"/>
-                    </a:solidFill>
-                  </a:tcPr>
-                </a:tc>
-              </a:tr>
-              <a:tr h="502920">
-                <a:tc>
-                  <a:txBody>
-                    <a:bodyPr/>
-                    <a:lstStyle/>
-                    <a:p>
-                      <a:pPr algn="l">
-                        <a:spcAft>
-                          <a:spcPts val="0"/>
-                        </a:spcAft>
-                      </a:pPr>
-                      <a:r>
-                        <a:rPr sz="1300" b="1" i="0">
-                          <a:solidFill>
-                            <a:srgbClr val="262626"/>
-                          </a:solidFill>
-                          <a:latin typeface="Candara"/>
-                        </a:rPr>
-                        <a:t>Northern coverage at its upper interval bound (74.0%)</a:t>
-                      </a:r>
-                    </a:p>
-                  </a:txBody>
-                  <a:tcPr marL="91440" marR="91440" marT="36576" marB="36576" anchor="ctr">
-                    <a:solidFill>
-                      <a:srgbClr val="F3F3F3"/>
-                    </a:solidFill>
-                  </a:tcPr>
-                </a:tc>
-                <a:tc>
-                  <a:txBody>
-                    <a:bodyPr/>
-                    <a:lstStyle/>
-                    <a:p>
-                      <a:pPr algn="r">
-                        <a:spcAft>
-                          <a:spcPts val="0"/>
-                        </a:spcAft>
-                      </a:pPr>
-                      <a:r>
-                        <a:rPr sz="1300" b="0" i="0">
-                          <a:solidFill>
-                            <a:srgbClr val="262626"/>
-                          </a:solidFill>
-                          <a:latin typeface="Candara"/>
-                        </a:rPr>
-                        <a:t>29,004</a:t>
-                      </a:r>
-                    </a:p>
-                  </a:txBody>
-                  <a:tcPr marL="91440" marR="91440" marT="36576" marB="36576" anchor="ctr">
-                    <a:solidFill>
-                      <a:srgbClr val="F3F3F3"/>
-                    </a:solidFill>
-                  </a:tcPr>
-                </a:tc>
-                <a:tc>
-                  <a:txBody>
-                    <a:bodyPr/>
-                    <a:lstStyle/>
-                    <a:p>
-                      <a:pPr algn="r">
-                        <a:spcAft>
-                          <a:spcPts val="0"/>
-                        </a:spcAft>
-                      </a:pPr>
-                      <a:r>
-                        <a:rPr sz="1300" b="0" i="0">
-                          <a:solidFill>
-                            <a:srgbClr val="262626"/>
-                          </a:solidFill>
-                          <a:latin typeface="Candara"/>
-                        </a:rPr>
-                        <a:t>11,951</a:t>
-                      </a:r>
-                    </a:p>
-                  </a:txBody>
-                  <a:tcPr marL="91440" marR="91440" marT="36576" marB="36576" anchor="ctr">
-                    <a:solidFill>
-                      <a:srgbClr val="F3F3F3"/>
-                    </a:solidFill>
-                  </a:tcPr>
-                </a:tc>
-                <a:tc>
-                  <a:txBody>
-                    <a:bodyPr/>
-                    <a:lstStyle/>
-                    <a:p>
-                      <a:pPr algn="r">
-                        <a:spcAft>
-                          <a:spcPts val="0"/>
-                        </a:spcAft>
-                      </a:pPr>
-                      <a:r>
-                        <a:rPr sz="1300" b="0" i="0">
-                          <a:solidFill>
-                            <a:srgbClr val="262626"/>
-                          </a:solidFill>
-                          <a:latin typeface="Candara"/>
-                        </a:rPr>
-                        <a:t>9,045</a:t>
-                      </a:r>
-                    </a:p>
-                  </a:txBody>
-                  <a:tcPr marL="91440" marR="91440" marT="36576" marB="36576" anchor="ctr">
-                    <a:solidFill>
-                      <a:srgbClr val="F3F3F3"/>
-                    </a:solidFill>
-                  </a:tcPr>
-                </a:tc>
-                <a:tc>
-                  <a:txBody>
-                    <a:bodyPr/>
-                    <a:lstStyle/>
-                    <a:p>
-                      <a:pPr algn="r">
-                        <a:spcAft>
-                          <a:spcPts val="0"/>
-                        </a:spcAft>
-                      </a:pPr>
-                      <a:r>
-                        <a:rPr sz="1300" b="0" i="0">
-                          <a:solidFill>
-                            <a:srgbClr val="262626"/>
-                          </a:solidFill>
-                          <a:latin typeface="Candara"/>
-                        </a:rPr>
-                        <a:t>6,680</a:t>
-                      </a:r>
-                    </a:p>
-                  </a:txBody>
-                  <a:tcPr marL="91440" marR="91440" marT="36576" marB="36576" anchor="ctr">
-                    <a:solidFill>
-                      <a:srgbClr val="F3F3F3"/>
-                    </a:solidFill>
-                  </a:tcPr>
-                </a:tc>
-              </a:tr>
-            </a:tbl>
-          </a:graphicData>
-        </a:graphic>
-      </p:graphicFrame>
-      <p:sp>
-        <p:nvSpPr>
-          <p:cNvPr id="5" name="TextBox 4"/>
-          <p:cNvSpPr txBox="1"/>
-          <p:nvPr/>
-        </p:nvSpPr>
-        <p:spPr>
-          <a:xfrm>
-            <a:off x="1060704" y="5029200"/>
-            <a:ext cx="10067544" cy="777240"/>
-          </a:xfrm>
-          <a:prstGeom prst="rect">
-            <a:avLst/>
-          </a:prstGeom>
-          <a:noFill/>
-        </p:spPr>
-        <p:txBody>
-          <a:bodyPr wrap="square" anchor="t" lIns="0" rIns="0" tIns="0" bIns="0">
-            <a:spAutoFit/>
-          </a:bodyPr>
-          <a:lstStyle/>
-          <a:p>
-            <a:pPr algn="l">
-              <a:spcAft>
-                <a:spcPts val="600"/>
-              </a:spcAft>
-            </a:pPr>
-            <a:r>
-              <a:rPr sz="1500" b="1" i="0">
-                <a:solidFill>
-                  <a:srgbClr val="AB3D3F"/>
-                </a:solidFill>
-                <a:latin typeface="Candara"/>
-              </a:rPr>
-              <a:t>Takeaway: </a:t>
-            </a:r>
-            <a:r>
-              <a:rPr sz="1500" b="0" i="0">
-                <a:solidFill>
-                  <a:srgbClr val="262626"/>
-                </a:solidFill>
-                <a:latin typeface="Candara"/>
-              </a:rPr>
-              <a:t>within a region, nets follow population in every scenario except the coverage correction. The regional split is the uncertain part, so treat regional totals as a range, not a point.</a:t>
-            </a:r>
-          </a:p>
-        </p:txBody>
-      </p:sp>
-    </p:spTree>
-  </p:cSld>
-  <p:clrMapOvr>
-    <a:masterClrMapping/>
-  </p:clrMapOvr>
-</p:sld>
-</file>
-
-<file path=ppt/slides/slide23.xml><?xml version="1.0" encoding="utf-8"?>
-<p:sld xmlns:a="http://schemas.openxmlformats.org/drawingml/2006/main" xmlns:p="http://schemas.openxmlformats.org/presentationml/2006/main" xmlns:r="http://schemas.openxmlformats.org/officeDocument/2006/relationships">
-  <p:cSld>
-    <p:spTree>
-      <p:nvGrpSpPr>
-        <p:cNvPr id="1" name=""/>
-        <p:cNvGrpSpPr/>
-        <p:nvPr/>
-      </p:nvGrpSpPr>
-      <p:grpSpPr/>
-      <p:sp>
-        <p:nvSpPr>
-          <p:cNvPr id="2" name="Text Placeholder 1"/>
-          <p:cNvSpPr>
-            <a:spLocks noGrp="1"/>
-          </p:cNvSpPr>
-          <p:nvPr>
-            <p:ph type="body" idx="11" sz="quarter"/>
-          </p:nvPr>
-        </p:nvSpPr>
-        <p:spPr>
-          <a:xfrm>
-            <a:off x="571500" y="571500"/>
-            <a:ext cx="11055096" cy="737700"/>
-          </a:xfrm>
-        </p:spPr>
-        <p:txBody>
-          <a:bodyPr/>
-          <a:lstStyle/>
-          <a:p>
-            <a:r>
-              <a:rPr sz="3000"/>
-              <a:t>Equity: who this helps, and who it misses</a:t>
-            </a:r>
-          </a:p>
-        </p:txBody>
-      </p:sp>
-      <p:sp>
-        <p:nvSpPr>
-          <p:cNvPr id="3" name="Rounded Rectangle 2"/>
-          <p:cNvSpPr/>
-          <p:nvPr/>
-        </p:nvSpPr>
-        <p:spPr>
-          <a:xfrm>
-            <a:off x="566928" y="1417320"/>
-            <a:ext cx="5431536" cy="2057400"/>
-          </a:xfrm>
-          <a:prstGeom prst="roundRect">
-            <a:avLst>
-              <a:gd name="adj" fmla="val 5000"/>
-            </a:avLst>
-          </a:prstGeom>
-          <a:solidFill>
-            <a:srgbClr val="F3F3F3"/>
-          </a:solidFill>
-          <a:ln>
-            <a:noFill/>
-          </a:ln>
-          <a:effectLst/>
-        </p:spPr>
-        <p:style>
-          <a:lnRef idx="1">
-            <a:schemeClr val="accent1"/>
-          </a:lnRef>
-          <a:fillRef idx="3">
-            <a:schemeClr val="accent1"/>
-          </a:fillRef>
-          <a:effectRef idx="2">
-            <a:schemeClr val="accent1"/>
-          </a:effectRef>
-          <a:fontRef idx="minor">
-            <a:schemeClr val="lt1"/>
-          </a:fontRef>
-        </p:style>
-        <p:txBody>
-          <a:bodyPr rtlCol="0" anchor="t" wrap="square" lIns="201168" rIns="201168" tIns="160934" bIns="160934"/>
-          <a:lstStyle/>
-          <a:p>
-            <a:pPr algn="l">
-              <a:spcAft>
-                <a:spcPts val="0"/>
-              </a:spcAft>
-            </a:pPr>
-            <a:r>
-              <a:rPr sz="1400" b="1" i="0">
-                <a:solidFill>
-                  <a:srgbClr val="595959"/>
-                </a:solidFill>
-                <a:latin typeface="Candara"/>
-              </a:rPr>
-              <a:t>Outside the map</a:t>
-            </a:r>
-          </a:p>
-          <a:p>
-            <a:pPr algn="l">
-              <a:spcAft>
-                <a:spcPts val="200"/>
-              </a:spcAft>
-            </a:pPr>
-            <a:r>
-              <a:rPr sz="3000" b="1" i="0">
-                <a:solidFill>
-                  <a:srgbClr val="AB3D3F"/>
-                </a:solidFill>
-                <a:latin typeface="Candara"/>
-              </a:rPr>
-              <a:t>207 of 260</a:t>
-            </a:r>
-          </a:p>
-          <a:p>
-            <a:pPr algn="l">
-              <a:spcAft>
-                <a:spcPts val="600"/>
-              </a:spcAft>
-            </a:pPr>
-            <a:r>
-              <a:rPr sz="1300" b="0" i="0">
-                <a:solidFill>
-                  <a:srgbClr val="262626"/>
-                </a:solidFill>
-                <a:latin typeface="Candara"/>
-              </a:rPr>
-              <a:t>of Ghana's districts have no district case data in our package. This allocation says nothing about them and should not be stretched to them.</a:t>
-            </a:r>
-          </a:p>
-        </p:txBody>
-      </p:sp>
-      <p:sp>
-        <p:nvSpPr>
-          <p:cNvPr id="4" name="Rounded Rectangle 3"/>
-          <p:cNvSpPr/>
-          <p:nvPr/>
-        </p:nvSpPr>
-        <p:spPr>
-          <a:xfrm>
-            <a:off x="6190488" y="1417320"/>
-            <a:ext cx="5431536" cy="2057400"/>
-          </a:xfrm>
-          <a:prstGeom prst="roundRect">
-            <a:avLst>
-              <a:gd name="adj" fmla="val 5000"/>
-            </a:avLst>
-          </a:prstGeom>
-          <a:solidFill>
-            <a:srgbClr val="F3F3F3"/>
-          </a:solidFill>
-          <a:ln>
-            <a:noFill/>
-          </a:ln>
-          <a:effectLst/>
-        </p:spPr>
-        <p:style>
-          <a:lnRef idx="1">
-            <a:schemeClr val="accent1"/>
-          </a:lnRef>
-          <a:fillRef idx="3">
-            <a:schemeClr val="accent1"/>
-          </a:fillRef>
-          <a:effectRef idx="2">
-            <a:schemeClr val="accent1"/>
-          </a:effectRef>
-          <a:fontRef idx="minor">
-            <a:schemeClr val="lt1"/>
-          </a:fontRef>
-        </p:style>
-        <p:txBody>
-          <a:bodyPr rtlCol="0" anchor="t" wrap="square" lIns="201168" rIns="201168" tIns="160934" bIns="160934"/>
-          <a:lstStyle/>
-          <a:p>
-            <a:pPr algn="l">
-              <a:spcAft>
-                <a:spcPts val="0"/>
-              </a:spcAft>
-            </a:pPr>
-            <a:r>
-              <a:rPr sz="1400" b="1" i="0">
-                <a:solidFill>
-                  <a:srgbClr val="595959"/>
-                </a:solidFill>
-                <a:latin typeface="Candara"/>
-              </a:rPr>
-              <a:t>Testing access</a:t>
-            </a:r>
-          </a:p>
-          <a:p>
-            <a:pPr algn="l">
-              <a:spcAft>
-                <a:spcPts val="200"/>
-              </a:spcAft>
-            </a:pPr>
-            <a:r>
-              <a:rPr sz="3000" b="1" i="0">
-                <a:solidFill>
-                  <a:srgbClr val="AB3D3F"/>
-                </a:solidFill>
-                <a:latin typeface="Candara"/>
-              </a:rPr>
-              <a:t>65%</a:t>
-            </a:r>
-          </a:p>
-          <a:p>
-            <a:pPr algn="l">
-              <a:spcAft>
-                <a:spcPts val="600"/>
-              </a:spcAft>
-            </a:pPr>
-            <a:r>
-              <a:rPr sz="1300" b="0" i="0">
-                <a:solidFill>
-                  <a:srgbClr val="262626"/>
-                </a:solidFill>
-                <a:latin typeface="Candara"/>
-              </a:rPr>
-              <a:t>median test positivity in Northern Region, the highest of the three, yet it reports the fewest cases per person (0.27 a year, against 0.88 and 0.80). That points to under-testing, which a case-based rule would punish.</a:t>
-            </a:r>
-          </a:p>
-        </p:txBody>
-      </p:sp>
-      <p:sp>
-        <p:nvSpPr>
-          <p:cNvPr id="5" name="Rounded Rectangle 4"/>
-          <p:cNvSpPr/>
-          <p:nvPr/>
-        </p:nvSpPr>
-        <p:spPr>
-          <a:xfrm>
-            <a:off x="566928" y="3611880"/>
-            <a:ext cx="5431536" cy="2057400"/>
-          </a:xfrm>
-          <a:prstGeom prst="roundRect">
-            <a:avLst>
-              <a:gd name="adj" fmla="val 5000"/>
-            </a:avLst>
-          </a:prstGeom>
-          <a:solidFill>
-            <a:srgbClr val="F3F3F3"/>
-          </a:solidFill>
-          <a:ln>
-            <a:noFill/>
-          </a:ln>
-          <a:effectLst/>
-        </p:spPr>
-        <p:style>
-          <a:lnRef idx="1">
-            <a:schemeClr val="accent1"/>
-          </a:lnRef>
-          <a:fillRef idx="3">
-            <a:schemeClr val="accent1"/>
-          </a:fillRef>
-          <a:effectRef idx="2">
-            <a:schemeClr val="accent1"/>
-          </a:effectRef>
-          <a:fontRef idx="minor">
-            <a:schemeClr val="lt1"/>
-          </a:fontRef>
-        </p:style>
-        <p:txBody>
-          <a:bodyPr rtlCol="0" anchor="t" wrap="square" lIns="201168" rIns="201168" tIns="160934" bIns="160934"/>
-          <a:lstStyle/>
-          <a:p>
-            <a:pPr algn="l">
-              <a:spcAft>
-                <a:spcPts val="0"/>
-              </a:spcAft>
-            </a:pPr>
-            <a:r>
-              <a:rPr sz="1400" b="1" i="0">
-                <a:solidFill>
-                  <a:srgbClr val="595959"/>
-                </a:solidFill>
-                <a:latin typeface="Candara"/>
-              </a:rPr>
-              <a:t>Interventions we left out</a:t>
-            </a:r>
-          </a:p>
-          <a:p>
-            <a:pPr algn="l">
-              <a:spcAft>
-                <a:spcPts val="200"/>
-              </a:spcAft>
-            </a:pPr>
-            <a:r>
-              <a:rPr sz="3000" b="1" i="0">
-                <a:solidFill>
-                  <a:srgbClr val="AB3D3F"/>
-                </a:solidFill>
-                <a:latin typeface="Candara"/>
-              </a:rPr>
-              <a:t>32 and 24</a:t>
-            </a:r>
-          </a:p>
-          <a:p>
-            <a:pPr algn="l">
-              <a:spcAft>
-                <a:spcPts val="600"/>
-              </a:spcAft>
-            </a:pPr>
-            <a:r>
-              <a:rPr sz="1300" b="0" i="0">
-                <a:solidFill>
-                  <a:srgbClr val="262626"/>
-                </a:solidFill>
-                <a:latin typeface="Candara"/>
-              </a:rPr>
-              <a:t>of the 50 districts had indoor spraying and seasonal chemoprevention in 2014-17, including every Upper East and Upper West district. Both change burden, and sprayed districts are excluded from national net campaigns.</a:t>
-            </a:r>
-          </a:p>
-        </p:txBody>
-      </p:sp>
-      <p:sp>
-        <p:nvSpPr>
-          <p:cNvPr id="6" name="Rounded Rectangle 5"/>
-          <p:cNvSpPr/>
-          <p:nvPr/>
-        </p:nvSpPr>
-        <p:spPr>
-          <a:xfrm>
-            <a:off x="6190488" y="3611880"/>
-            <a:ext cx="5431536" cy="2057400"/>
-          </a:xfrm>
-          <a:prstGeom prst="roundRect">
-            <a:avLst>
-              <a:gd name="adj" fmla="val 5000"/>
-            </a:avLst>
-          </a:prstGeom>
-          <a:solidFill>
-            <a:srgbClr val="F3F3F3"/>
-          </a:solidFill>
-          <a:ln>
-            <a:noFill/>
-          </a:ln>
-          <a:effectLst/>
-        </p:spPr>
-        <p:style>
-          <a:lnRef idx="1">
-            <a:schemeClr val="accent1"/>
-          </a:lnRef>
-          <a:fillRef idx="3">
-            <a:schemeClr val="accent1"/>
-          </a:fillRef>
-          <a:effectRef idx="2">
-            <a:schemeClr val="accent1"/>
-          </a:effectRef>
-          <a:fontRef idx="minor">
-            <a:schemeClr val="lt1"/>
-          </a:fontRef>
-        </p:style>
-        <p:txBody>
-          <a:bodyPr rtlCol="0" anchor="t" wrap="square" lIns="201168" rIns="201168" tIns="160934" bIns="160934"/>
-          <a:lstStyle/>
-          <a:p>
-            <a:pPr algn="l">
-              <a:spcAft>
-                <a:spcPts val="0"/>
-              </a:spcAft>
-            </a:pPr>
-            <a:r>
-              <a:rPr sz="1400" b="1" i="0">
-                <a:solidFill>
-                  <a:srgbClr val="595959"/>
-                </a:solidFill>
-                <a:latin typeface="Candara"/>
-              </a:rPr>
-              <a:t>Privacy by design</a:t>
-            </a:r>
-          </a:p>
-          <a:p>
-            <a:pPr algn="l">
-              <a:spcAft>
-                <a:spcPts val="200"/>
-              </a:spcAft>
-            </a:pPr>
-            <a:r>
-              <a:rPr sz="3000" b="1" i="0">
-                <a:solidFill>
-                  <a:srgbClr val="AB3D3F"/>
-                </a:solidFill>
-                <a:latin typeface="Candara"/>
-              </a:rPr>
-              <a:t>0</a:t>
-            </a:r>
-          </a:p>
-          <a:p>
-            <a:pPr algn="l">
-              <a:spcAft>
-                <a:spcPts val="600"/>
-              </a:spcAft>
-            </a:pPr>
-            <a:r>
-              <a:rPr sz="1300" b="0" i="0">
-                <a:solidFill>
-                  <a:srgbClr val="262626"/>
-                </a:solidFill>
-                <a:latin typeface="Candara"/>
-              </a:rPr>
-              <a:t>data files or notebook outputs in the project's git history. Licensed DHS household records stay out of git and out of this deck; everything shown is an aggregate.</a:t>
-            </a:r>
-          </a:p>
-        </p:txBody>
-      </p:sp>
-    </p:spTree>
-  </p:cSld>
-  <p:clrMapOvr>
-    <a:masterClrMapping/>
-  </p:clrMapOvr>
-</p:sld>
-</file>
-
-<file path=ppt/slides/slide24.xml><?xml version="1.0" encoding="utf-8"?>
-<p:sld xmlns:a="http://schemas.openxmlformats.org/drawingml/2006/main" xmlns:p="http://schemas.openxmlformats.org/presentationml/2006/main" xmlns:r="http://schemas.openxmlformats.org/officeDocument/2006/relationships">
-  <p:cSld>
-    <p:spTree>
-      <p:nvGrpSpPr>
-        <p:cNvPr id="1" name=""/>
-        <p:cNvGrpSpPr/>
-        <p:nvPr/>
-      </p:nvGrpSpPr>
-      <p:grpSpPr/>
-      <p:sp>
-        <p:nvSpPr>
-          <p:cNvPr id="2" name="Text Placeholder 1"/>
-          <p:cNvSpPr>
-            <a:spLocks noGrp="1"/>
-          </p:cNvSpPr>
-          <p:nvPr>
-            <p:ph type="body" idx="11" sz="quarter"/>
-          </p:nvPr>
-        </p:nvSpPr>
-        <p:spPr>
-          <a:xfrm>
-            <a:off x="571500" y="571500"/>
-            <a:ext cx="11055096" cy="737700"/>
-          </a:xfrm>
-        </p:spPr>
-        <p:txBody>
-          <a:bodyPr/>
-          <a:lstStyle/>
-          <a:p>
-            <a:r>
-              <a:t>Limitations, and what we would do next</a:t>
-            </a:r>
-          </a:p>
-        </p:txBody>
-      </p:sp>
-      <p:sp>
-        <p:nvSpPr>
-          <p:cNvPr id="3" name="Rounded Rectangle 2"/>
-          <p:cNvSpPr/>
-          <p:nvPr/>
-        </p:nvSpPr>
-        <p:spPr>
-          <a:xfrm>
-            <a:off x="566928" y="1463040"/>
-            <a:ext cx="5431536" cy="3749039"/>
-          </a:xfrm>
-          <a:prstGeom prst="roundRect">
-            <a:avLst>
-              <a:gd name="adj" fmla="val 5000"/>
-            </a:avLst>
-          </a:prstGeom>
-          <a:solidFill>
-            <a:srgbClr val="F3F3F3"/>
-          </a:solidFill>
-          <a:ln>
-            <a:noFill/>
-          </a:ln>
-          <a:effectLst/>
-        </p:spPr>
-        <p:style>
-          <a:lnRef idx="1">
-            <a:schemeClr val="accent1"/>
-          </a:lnRef>
-          <a:fillRef idx="3">
-            <a:schemeClr val="accent1"/>
-          </a:fillRef>
-          <a:effectRef idx="2">
-            <a:schemeClr val="accent1"/>
-          </a:effectRef>
-          <a:fontRef idx="minor">
-            <a:schemeClr val="lt1"/>
-          </a:fontRef>
-        </p:style>
-        <p:txBody>
-          <a:bodyPr rtlCol="0" anchor="t" wrap="square" lIns="201168" rIns="201168" tIns="160934" bIns="160934"/>
-          <a:lstStyle/>
-          <a:p>
-            <a:pPr algn="l">
-              <a:spcAft>
-                <a:spcPts val="800"/>
-              </a:spcAft>
-            </a:pPr>
-            <a:r>
-              <a:rPr sz="1800" b="1" i="0">
-                <a:solidFill>
-                  <a:srgbClr val="AB3D3F"/>
-                </a:solidFill>
-                <a:latin typeface="Candara"/>
-              </a:rPr>
-              <a:t>Limitations</a:t>
-            </a:r>
-          </a:p>
-          <a:p>
-            <a:pPr algn="l" marL="219456" indent="-219456">
-              <a:spcAft>
-                <a:spcPts val="800"/>
-              </a:spcAft>
-              <a:buClr>
-                <a:srgbClr val="AB3D3F"/>
-              </a:buClr>
-              <a:buFont typeface="Arial"/>
-              <a:buChar char="•"/>
-            </a:pPr>
-            <a:r>
-              <a:rPr sz="1600" b="0" i="0">
-                <a:solidFill>
-                  <a:srgbClr val="262626"/>
-                </a:solidFill>
-                <a:latin typeface="Candara"/>
-              </a:rPr>
-              <a:t>11 districts coded Northern are now in Savannah (79.1% of households own a net) or North East (62.8%). Correcting this moves 3,740 nets.</a:t>
-            </a:r>
-          </a:p>
-          <a:p>
-            <a:pPr algn="l" marL="219456" indent="-219456">
-              <a:spcAft>
-                <a:spcPts val="800"/>
-              </a:spcAft>
-              <a:buClr>
-                <a:srgbClr val="AB3D3F"/>
-              </a:buClr>
-              <a:buFont typeface="Arial"/>
-              <a:buChar char="•"/>
-            </a:pPr>
-            <a:r>
-              <a:rPr sz="1600" b="0" i="0">
-                <a:solidFill>
-                  <a:srgbClr val="262626"/>
-                </a:solidFill>
-                <a:latin typeface="Candara"/>
-              </a:rPr>
-              <a:t>39 of 50 districts report more than one confirmed case per resident over 2014-17: repeat episodes, care-seeking across district lines, or undercounted populations.</a:t>
-            </a:r>
-          </a:p>
-          <a:p>
-            <a:pPr algn="l" marL="219456" indent="-219456">
-              <a:spcAft>
-                <a:spcPts val="800"/>
-              </a:spcAft>
-              <a:buClr>
-                <a:srgbClr val="AB3D3F"/>
-              </a:buClr>
-              <a:buFont typeface="Arial"/>
-              <a:buChar char="•"/>
-            </a:pPr>
-            <a:r>
-              <a:rPr sz="1600" b="0" i="0">
-                <a:solidFill>
-                  <a:srgbClr val="262626"/>
-                </a:solidFill>
-                <a:latin typeface="Candara"/>
-              </a:rPr>
-              <a:t>Coverage is from 2022 and cases from 2014-17.</a:t>
-            </a:r>
-          </a:p>
-          <a:p>
-            <a:pPr algn="l" marL="219456" indent="-219456">
-              <a:spcAft>
-                <a:spcPts val="600"/>
-              </a:spcAft>
-              <a:buClr>
-                <a:srgbClr val="AB3D3F"/>
-              </a:buClr>
-              <a:buFont typeface="Arial"/>
-              <a:buChar char="•"/>
-            </a:pPr>
-            <a:r>
-              <a:rPr sz="1600" b="0" i="0">
-                <a:solidFill>
-                  <a:srgbClr val="262626"/>
-                </a:solidFill>
-                <a:latin typeface="Candara"/>
-              </a:rPr>
-              <a:t>The survey has no district identifier or parasitaemia data, and published ITN intervals are empty.</a:t>
-            </a:r>
-          </a:p>
-        </p:txBody>
-      </p:sp>
-      <p:sp>
-        <p:nvSpPr>
-          <p:cNvPr id="4" name="Rounded Rectangle 3"/>
-          <p:cNvSpPr/>
-          <p:nvPr/>
-        </p:nvSpPr>
-        <p:spPr>
-          <a:xfrm>
-            <a:off x="6190488" y="1463040"/>
-            <a:ext cx="5431536" cy="3749039"/>
-          </a:xfrm>
-          <a:prstGeom prst="roundRect">
-            <a:avLst>
-              <a:gd name="adj" fmla="val 5000"/>
-            </a:avLst>
-          </a:prstGeom>
-          <a:solidFill>
-            <a:srgbClr val="F3F3F3"/>
-          </a:solidFill>
-          <a:ln>
-            <a:noFill/>
-          </a:ln>
-          <a:effectLst/>
-        </p:spPr>
-        <p:style>
-          <a:lnRef idx="1">
-            <a:schemeClr val="accent1"/>
-          </a:lnRef>
-          <a:fillRef idx="3">
-            <a:schemeClr val="accent1"/>
-          </a:fillRef>
-          <a:effectRef idx="2">
-            <a:schemeClr val="accent1"/>
-          </a:effectRef>
-          <a:fontRef idx="minor">
-            <a:schemeClr val="lt1"/>
-          </a:fontRef>
-        </p:style>
-        <p:txBody>
-          <a:bodyPr rtlCol="0" anchor="t" wrap="square" lIns="201168" rIns="201168" tIns="160934" bIns="160934"/>
-          <a:lstStyle/>
-          <a:p>
-            <a:pPr algn="l">
-              <a:spcAft>
-                <a:spcPts val="800"/>
-              </a:spcAft>
-            </a:pPr>
-            <a:r>
-              <a:rPr sz="1800" b="1" i="0">
-                <a:solidFill>
-                  <a:srgbClr val="AB3D3F"/>
-                </a:solidFill>
-                <a:latin typeface="Candara"/>
-              </a:rPr>
-              <a:t>Before any real distribution</a:t>
-            </a:r>
-          </a:p>
-          <a:p>
-            <a:pPr algn="l" marL="219456" indent="-219456">
-              <a:spcAft>
-                <a:spcPts val="1000"/>
-              </a:spcAft>
-              <a:buClr>
-                <a:srgbClr val="AB3D3F"/>
-              </a:buClr>
-              <a:buFont typeface="Arial"/>
-              <a:buChar char="•"/>
-            </a:pPr>
-            <a:r>
-              <a:rPr sz="1600" b="0" i="0">
-                <a:solidFill>
-                  <a:srgbClr val="262626"/>
-                </a:solidFill>
-                <a:latin typeface="Candara"/>
-              </a:rPr>
-              <a:t>Refit with today's regions and district-level spraying and chemoprevention.</a:t>
-            </a:r>
-          </a:p>
-          <a:p>
-            <a:pPr algn="l" marL="219456" indent="-219456">
-              <a:spcAft>
-                <a:spcPts val="1000"/>
-              </a:spcAft>
-              <a:buClr>
-                <a:srgbClr val="AB3D3F"/>
-              </a:buClr>
-              <a:buFont typeface="Arial"/>
-              <a:buChar char="•"/>
-            </a:pPr>
-            <a:r>
-              <a:rPr sz="1600" b="0" i="0">
-                <a:solidFill>
-                  <a:srgbClr val="262626"/>
-                </a:solidFill>
-                <a:latin typeface="Candara"/>
-              </a:rPr>
-              <a:t>Model risk with region effects, and use coverage only in the gap term.</a:t>
-            </a:r>
-          </a:p>
-          <a:p>
-            <a:pPr algn="l" marL="219456" indent="-219456">
-              <a:spcAft>
-                <a:spcPts val="1000"/>
-              </a:spcAft>
-              <a:buClr>
-                <a:srgbClr val="AB3D3F"/>
-              </a:buClr>
-              <a:buFont typeface="Arial"/>
-              <a:buChar char="•"/>
-            </a:pPr>
-            <a:r>
-              <a:rPr sz="1600" b="0" i="0">
-                <a:solidFill>
-                  <a:srgbClr val="262626"/>
-                </a:solidFill>
-                <a:latin typeface="Candara"/>
-              </a:rPr>
-              <a:t>Validate by holding out whole regions, and report the spread across seeds.</a:t>
-            </a:r>
-          </a:p>
-          <a:p>
-            <a:pPr algn="l" marL="219456" indent="-219456">
-              <a:spcAft>
-                <a:spcPts val="600"/>
-              </a:spcAft>
-              <a:buClr>
-                <a:srgbClr val="AB3D3F"/>
-              </a:buClr>
-              <a:buFont typeface="Arial"/>
-              <a:buChar char="•"/>
-            </a:pPr>
-            <a:r>
-              <a:rPr sz="1600" b="0" i="0">
-                <a:solidFill>
-                  <a:srgbClr val="262626"/>
-                </a:solidFill>
-                <a:latin typeface="Candara"/>
-              </a:rPr>
-              <a:t>Deliver through regional medical stores and CHPS compounds, then survey net use after six months.</a:t>
-            </a:r>
-          </a:p>
-        </p:txBody>
-      </p:sp>
-    </p:spTree>
-  </p:cSld>
-  <p:clrMapOvr>
-    <a:masterClrMapping/>
-  </p:clrMapOvr>
-</p:sld>
-</file>
-
-<file path=ppt/slides/slide25.xml><?xml version="1.0" encoding="utf-8"?>
-<p:sld xmlns:a="http://schemas.openxmlformats.org/drawingml/2006/main" xmlns:p="http://schemas.openxmlformats.org/presentationml/2006/main" xmlns:r="http://schemas.openxmlformats.org/officeDocument/2006/relationships">
-  <p:cSld>
-    <p:spTree>
-      <p:nvGrpSpPr>
-        <p:cNvPr id="1" name=""/>
-        <p:cNvGrpSpPr/>
-        <p:nvPr/>
-      </p:nvGrpSpPr>
-      <p:grpSpPr/>
-      <p:sp>
-        <p:nvSpPr>
-          <p:cNvPr id="2" name="Title 1"/>
-          <p:cNvSpPr>
-            <a:spLocks noGrp="1"/>
-          </p:cNvSpPr>
-          <p:nvPr>
-            <p:ph type="ctrTitle"/>
-          </p:nvPr>
-        </p:nvSpPr>
-        <p:spPr/>
-        <p:txBody>
-          <a:bodyPr/>
-          <a:lstStyle/>
-          <a:p>
-            <a:r>
-              <a:rPr sz="6000"/>
-              <a:t>Thank you. Questions?</a:t>
-            </a:r>
-          </a:p>
-        </p:txBody>
-      </p:sp>
-      <p:sp>
-        <p:nvSpPr>
-          <p:cNvPr id="3" name="TextBox 2"/>
-          <p:cNvSpPr txBox="1"/>
-          <p:nvPr/>
-        </p:nvSpPr>
-        <p:spPr>
-          <a:xfrm>
-            <a:off x="1527048" y="5212080"/>
-            <a:ext cx="9144000" cy="457200"/>
-          </a:xfrm>
-          <a:prstGeom prst="rect">
-            <a:avLst/>
-          </a:prstGeom>
-          <a:noFill/>
-        </p:spPr>
-        <p:txBody>
-          <a:bodyPr wrap="square" anchor="t" lIns="0" rIns="0" tIns="0" bIns="0">
-            <a:spAutoFit/>
-          </a:bodyPr>
-          <a:lstStyle/>
-          <a:p>
-            <a:pPr algn="ctr">
-              <a:spcAft>
-                <a:spcPts val="600"/>
-              </a:spcAft>
-            </a:pPr>
-            <a:r>
-              <a:rPr sz="1600" b="0" i="0">
-                <a:solidFill>
-                  <a:srgbClr val="FEBA5A"/>
-                </a:solidFill>
-                <a:latin typeface="Candara"/>
-              </a:rPr>
-              <a:t>ICS553 Machine Learning Essentials · Group 3 · Ashesi University</a:t>
-            </a:r>
-          </a:p>
-        </p:txBody>
-      </p:sp>
-      <p:sp>
-        <p:nvSpPr>
-          <p:cNvPr id="4" name="TextBox 3"/>
-          <p:cNvSpPr txBox="1"/>
-          <p:nvPr/>
-        </p:nvSpPr>
-        <p:spPr>
-          <a:xfrm>
-            <a:off x="1069848" y="5806440"/>
-            <a:ext cx="10058400" cy="640080"/>
-          </a:xfrm>
-          <a:prstGeom prst="rect">
-            <a:avLst/>
-          </a:prstGeom>
-          <a:noFill/>
-        </p:spPr>
-        <p:txBody>
-          <a:bodyPr wrap="square" anchor="t" lIns="0" rIns="0" tIns="0" bIns="0">
-            <a:spAutoFit/>
-          </a:bodyPr>
-          <a:lstStyle/>
-          <a:p>
-            <a:pPr algn="ctr">
-              <a:spcAft>
-                <a:spcPts val="600"/>
-              </a:spcAft>
-            </a:pPr>
-            <a:r>
-              <a:rPr sz="1200" b="1" i="0">
-                <a:solidFill>
-                  <a:srgbClr val="FEBA5A"/>
-                </a:solidFill>
-                <a:latin typeface="Candara"/>
-              </a:rPr>
-              <a:t>AI declaration: </a:t>
-            </a:r>
-            <a:r>
-              <a:rPr sz="1200" b="0" i="0">
-                <a:solidFill>
-                  <a:srgbClr val="FFFFFF"/>
-                </a:solidFill>
-                <a:latin typeface="Candara"/>
-              </a:rPr>
-              <a:t>we used AI tools to help aggregate our information and to generate this presentation from our aggregated information. How AI was used is logged in the project's WORKLOG.md.</a:t>
             </a:r>
           </a:p>
         </p:txBody>
@@ -11778,6 +12235,15 @@
 </file>
 
 <file path=customXml/item1.xml><?xml version="1.0" encoding="utf-8"?>
+<?mso-contentType ?>
+<FormTemplates xmlns="http://schemas.microsoft.com/sharepoint/v3/contenttype/forms">
+  <Display>DocumentLibraryForm</Display>
+  <Edit>DocumentLibraryForm</Edit>
+  <New>DocumentLibraryForm</New>
+</FormTemplates>
+</file>
+
+<file path=customXml/item2.xml><?xml version="1.0" encoding="utf-8"?>
 <p:properties xmlns:p="http://schemas.microsoft.com/office/2006/metadata/properties" xmlns:xsi="http://www.w3.org/2001/XMLSchema-instance" xmlns:pc="http://schemas.microsoft.com/office/infopath/2007/PartnerControls">
   <documentManagement>
     <lcf76f155ced4ddcb4097134ff3c332f xmlns="b37e7508-98d8-4d44-adcb-ef8e87c43aeb">
@@ -11786,15 +12252,6 @@
     <TaxCatchAll xmlns="029b47ac-dfc3-4a78-a146-9328422ffc22" xsi:nil="true"/>
   </documentManagement>
 </p:properties>
-</file>
-
-<file path=customXml/item2.xml><?xml version="1.0" encoding="utf-8"?>
-<?mso-contentType ?>
-<FormTemplates xmlns="http://schemas.microsoft.com/sharepoint/v3/contenttype/forms">
-  <Display>DocumentLibraryForm</Display>
-  <Edit>DocumentLibraryForm</Edit>
-  <New>DocumentLibraryForm</New>
-</FormTemplates>
 </file>
 
 <file path=customXml/item3.xml><?xml version="1.0" encoding="utf-8"?>
@@ -12047,20 +12504,20 @@
 </file>
 
 <file path=customXml/itemProps1.xml><?xml version="1.0" encoding="utf-8"?>
+<ds:datastoreItem xmlns:ds="http://schemas.openxmlformats.org/officeDocument/2006/customXml" ds:itemID="{62D7E678-0BDD-42C1-AEE2-4DC521AAA8E9}">
+  <ds:schemaRefs>
+    <ds:schemaRef ds:uri="http://schemas.microsoft.com/sharepoint/v3/contenttype/forms"/>
+  </ds:schemaRefs>
+</ds:datastoreItem>
+</file>
+
+<file path=customXml/itemProps2.xml><?xml version="1.0" encoding="utf-8"?>
 <ds:datastoreItem xmlns:ds="http://schemas.openxmlformats.org/officeDocument/2006/customXml" ds:itemID="{CCCB51B8-E36A-48C6-A6A6-3F83B4595FB1}">
   <ds:schemaRefs>
     <ds:schemaRef ds:uri="http://schemas.microsoft.com/office/2006/metadata/properties"/>
     <ds:schemaRef ds:uri="http://schemas.microsoft.com/office/infopath/2007/PartnerControls"/>
     <ds:schemaRef ds:uri="b37e7508-98d8-4d44-adcb-ef8e87c43aeb"/>
     <ds:schemaRef ds:uri="029b47ac-dfc3-4a78-a146-9328422ffc22"/>
-  </ds:schemaRefs>
-</ds:datastoreItem>
-</file>
-
-<file path=customXml/itemProps2.xml><?xml version="1.0" encoding="utf-8"?>
-<ds:datastoreItem xmlns:ds="http://schemas.openxmlformats.org/officeDocument/2006/customXml" ds:itemID="{62D7E678-0BDD-42C1-AEE2-4DC521AAA8E9}">
-  <ds:schemaRefs>
-    <ds:schemaRef ds:uri="http://schemas.microsoft.com/sharepoint/v3/contenttype/forms"/>
   </ds:schemaRefs>
 </ds:datastoreItem>
 </file>

--- a/reports/ITN_Allocation_Ashesi.pptx
+++ b/reports/ITN_Allocation_Ashesi.pptx
@@ -5,25 +5,26 @@
     <p:sldMasterId id="2147483648" r:id="rId4"/>
   </p:sldMasterIdLst>
   <p:notesMasterIdLst>
-    <p:notesMasterId r:id="rId21"/>
+    <p:notesMasterId r:id="rId14"/>
   </p:notesMasterIdLst>
   <p:sldIdLst>
-    <p:sldId id="266" r:id="rId5"/>
-    <p:sldId id="267" r:id="rId6"/>
-    <p:sldId id="268" r:id="rId7"/>
-    <p:sldId id="269" r:id="rId8"/>
-    <p:sldId id="270" r:id="rId9"/>
-    <p:sldId id="271" r:id="rId10"/>
-    <p:sldId id="272" r:id="rId11"/>
-    <p:sldId id="273" r:id="rId12"/>
-    <p:sldId id="274" r:id="rId13"/>
-    <p:sldId id="275" r:id="rId14"/>
-    <p:sldId id="276" r:id="rId15"/>
-    <p:sldId id="277" r:id="rId16"/>
-    <p:sldId id="278" r:id="rId17"/>
-    <p:sldId id="279" r:id="rId18"/>
-    <p:sldId id="280" r:id="rId19"/>
-    <p:sldId id="281" r:id="rId20"/>
+    <p:sldId id="266" r:id="rId19"/>
+    <p:sldId id="267" r:id="rId20"/>
+    <p:sldId id="268" r:id="rId21"/>
+    <p:sldId id="269" r:id="rId22"/>
+    <p:sldId id="270" r:id="rId23"/>
+    <p:sldId id="271" r:id="rId24"/>
+    <p:sldId id="272" r:id="rId25"/>
+    <p:sldId id="273" r:id="rId26"/>
+    <p:sldId id="274" r:id="rId27"/>
+    <p:sldId id="275" r:id="rId28"/>
+    <p:sldId id="276" r:id="rId29"/>
+    <p:sldId id="277" r:id="rId30"/>
+    <p:sldId id="278" r:id="rId31"/>
+    <p:sldId id="279" r:id="rId32"/>
+    <p:sldId id="280" r:id="rId33"/>
+    <p:sldId id="281" r:id="rId34"/>
+    <p:sldId id="282" r:id="rId35"/>
   </p:sldIdLst>
   <p:sldSz cx="12192000" cy="6858000"/>
   <p:notesSz cx="6858000" cy="9144000"/>
@@ -142,19 +143,14 @@
 </file>
 
 <file path=ppt/charts/chart1.xml><?xml version="1.0" encoding="utf-8"?>
-<c:chartSpace xmlns:c="http://schemas.openxmlformats.org/drawingml/2006/chart" xmlns:a="http://schemas.openxmlformats.org/drawingml/2006/main" xmlns:r="http://schemas.openxmlformats.org/officeDocument/2006/relationships" xmlns:c16r2="http://schemas.microsoft.com/office/drawing/2015/06/chart">
+<c:chartSpace xmlns:c="http://schemas.openxmlformats.org/drawingml/2006/chart" xmlns:a="http://schemas.openxmlformats.org/drawingml/2006/main" xmlns:r="http://schemas.openxmlformats.org/officeDocument/2006/relationships">
   <c:date1904 val="0"/>
-  <c:lang val="en-US"/>
-  <c:roundedCorners val="1"/>
-  <c:style val="2"/>
   <c:chart>
     <c:autoTitleDeleted val="1"/>
     <c:plotArea>
-      <c:layout/>
       <c:barChart>
         <c:barDir val="col"/>
         <c:grouping val="clustered"/>
-        <c:varyColors val="1"/>
         <c:ser>
           <c:idx val="0"/>
           <c:order val="0"/>
@@ -173,81 +169,30 @@
           <c:dPt>
             <c:idx val="0"/>
             <c:invertIfNegative val="0"/>
-            <c:bubble3D val="0"/>
             <c:spPr>
               <a:solidFill>
                 <a:srgbClr val="A6A6A6"/>
               </a:solidFill>
             </c:spPr>
-            <c:extLst>
-              <c:ext xmlns:c16="http://schemas.microsoft.com/office/drawing/2014/chart" uri="{C3380CC4-5D6E-409C-BE32-E72D297353CC}">
-                <c16:uniqueId val="{00000001-F607-2C49-86CD-52E683328AB2}"/>
-              </c:ext>
-            </c:extLst>
           </c:dPt>
           <c:dPt>
             <c:idx val="1"/>
             <c:invertIfNegative val="0"/>
-            <c:bubble3D val="0"/>
             <c:spPr>
               <a:solidFill>
                 <a:srgbClr val="A6A6A6"/>
               </a:solidFill>
             </c:spPr>
-            <c:extLst>
-              <c:ext xmlns:c16="http://schemas.microsoft.com/office/drawing/2014/chart" uri="{C3380CC4-5D6E-409C-BE32-E72D297353CC}">
-                <c16:uniqueId val="{00000003-F607-2C49-86CD-52E683328AB2}"/>
-              </c:ext>
-            </c:extLst>
           </c:dPt>
           <c:dPt>
             <c:idx val="2"/>
             <c:invertIfNegative val="0"/>
-            <c:bubble3D val="0"/>
             <c:spPr>
               <a:solidFill>
                 <a:srgbClr val="AB3D3F"/>
               </a:solidFill>
             </c:spPr>
-            <c:extLst>
-              <c:ext xmlns:c16="http://schemas.microsoft.com/office/drawing/2014/chart" uri="{C3380CC4-5D6E-409C-BE32-E72D297353CC}">
-                <c16:uniqueId val="{00000005-F607-2C49-86CD-52E683328AB2}"/>
-              </c:ext>
-            </c:extLst>
           </c:dPt>
-          <c:dLbls>
-            <c:numFmt formatCode="#,##0" sourceLinked="0"/>
-            <c:spPr>
-              <a:noFill/>
-              <a:ln>
-                <a:noFill/>
-              </a:ln>
-              <a:effectLst/>
-            </c:spPr>
-            <c:txPr>
-              <a:bodyPr/>
-              <a:lstStyle/>
-              <a:p>
-                <a:pPr>
-                  <a:defRPr sz="1300" b="1"/>
-                </a:pPr>
-                <a:endParaRPr lang="en-US"/>
-              </a:p>
-            </c:txPr>
-            <c:dLblPos val="outEnd"/>
-            <c:showLegendKey val="0"/>
-            <c:showVal val="1"/>
-            <c:showCatName val="0"/>
-            <c:showSerName val="0"/>
-            <c:showPercent val="0"/>
-            <c:showBubbleSize val="0"/>
-            <c:showLeaderLines val="0"/>
-            <c:extLst>
-              <c:ext xmlns:c15="http://schemas.microsoft.com/office/drawing/2012/chart" uri="{CE6537A1-D6FC-4f65-9D91-7224C49458BB}">
-                <c15:showLeaderLines val="0"/>
-              </c:ext>
-            </c:extLst>
-          </c:dLbls>
           <c:cat>
             <c:strRef>
               <c:f>Sheet1!$A$2:$A$4</c:f>
@@ -283,13 +228,18 @@
               </c:numCache>
             </c:numRef>
           </c:val>
-          <c:extLst>
-            <c:ext xmlns:c16="http://schemas.microsoft.com/office/drawing/2014/chart" uri="{C3380CC4-5D6E-409C-BE32-E72D297353CC}">
-              <c16:uniqueId val="{00000006-F607-2C49-86CD-52E683328AB2}"/>
-            </c:ext>
-          </c:extLst>
         </c:ser>
         <c:dLbls>
+          <c:numFmt formatCode="#,##0" sourceLinked="0"/>
+          <c:txPr>
+            <a:bodyPr/>
+            <a:lstStyle/>
+            <a:p>
+              <a:pPr>
+                <a:defRPr sz="1300" b="1"/>
+              </a:pPr>
+            </a:p>
+          </c:txPr>
           <c:dLblPos val="outEnd"/>
           <c:showLegendKey val="0"/>
           <c:showVal val="1"/>
@@ -297,6 +247,7 @@
           <c:showSerName val="0"/>
           <c:showPercent val="0"/>
           <c:showBubbleSize val="0"/>
+          <c:showLeaderLines val="1"/>
         </c:dLbls>
         <c:gapWidth val="60"/>
         <c:axId val="-2068027336"/>
@@ -309,7 +260,6 @@
         </c:scaling>
         <c:delete val="0"/>
         <c:axPos val="b"/>
-        <c:numFmt formatCode="General" sourceLinked="0"/>
         <c:majorTickMark val="none"/>
         <c:minorTickMark val="none"/>
         <c:tickLblPos val="nextTo"/>
@@ -327,7 +277,6 @@
             <a:pPr>
               <a:defRPr sz="1200"/>
             </a:pPr>
-            <a:endParaRPr lang="en-US"/>
           </a:p>
         </c:txPr>
         <c:crossAx val="-2113994440"/>
@@ -339,9 +288,7 @@
       </c:catAx>
       <c:valAx>
         <c:axId val="-2113994440"/>
-        <c:scaling>
-          <c:orientation val="minMax"/>
-        </c:scaling>
+        <c:scaling/>
         <c:delete val="0"/>
         <c:axPos val="l"/>
         <c:majorGridlines>
@@ -373,17 +320,13 @@
                 </a:solidFill>
               </a:defRPr>
             </a:pPr>
-            <a:endParaRPr lang="en-US"/>
           </a:p>
         </c:txPr>
         <c:crossAx val="-2068027336"/>
         <c:crosses val="autoZero"/>
-        <c:crossBetween val="between"/>
       </c:valAx>
     </c:plotArea>
-    <c:plotVisOnly val="1"/>
     <c:dispBlanksAs val="gap"/>
-    <c:showDLblsOverMax val="1"/>
   </c:chart>
   <c:txPr>
     <a:bodyPr/>
@@ -407,19 +350,14 @@
 </file>
 
 <file path=ppt/charts/chart2.xml><?xml version="1.0" encoding="utf-8"?>
-<c:chartSpace xmlns:c="http://schemas.openxmlformats.org/drawingml/2006/chart" xmlns:a="http://schemas.openxmlformats.org/drawingml/2006/main" xmlns:r="http://schemas.openxmlformats.org/officeDocument/2006/relationships" xmlns:c16r2="http://schemas.microsoft.com/office/drawing/2015/06/chart">
+<c:chartSpace xmlns:c="http://schemas.openxmlformats.org/drawingml/2006/chart" xmlns:a="http://schemas.openxmlformats.org/drawingml/2006/main" xmlns:r="http://schemas.openxmlformats.org/officeDocument/2006/relationships">
   <c:date1904 val="0"/>
-  <c:lang val="en-US"/>
-  <c:roundedCorners val="1"/>
-  <c:style val="2"/>
   <c:chart>
     <c:autoTitleDeleted val="1"/>
     <c:plotArea>
-      <c:layout/>
       <c:barChart>
         <c:barDir val="col"/>
         <c:grouping val="clustered"/>
-        <c:varyColors val="1"/>
         <c:ser>
           <c:idx val="0"/>
           <c:order val="0"/>
@@ -438,81 +376,30 @@
           <c:dPt>
             <c:idx val="0"/>
             <c:invertIfNegative val="0"/>
-            <c:bubble3D val="0"/>
             <c:spPr>
               <a:solidFill>
                 <a:srgbClr val="AB3D3F"/>
               </a:solidFill>
             </c:spPr>
-            <c:extLst>
-              <c:ext xmlns:c16="http://schemas.microsoft.com/office/drawing/2014/chart" uri="{C3380CC4-5D6E-409C-BE32-E72D297353CC}">
-                <c16:uniqueId val="{00000001-550C-A841-8C9E-5B534031EFD3}"/>
-              </c:ext>
-            </c:extLst>
           </c:dPt>
           <c:dPt>
             <c:idx val="1"/>
             <c:invertIfNegative val="0"/>
-            <c:bubble3D val="0"/>
             <c:spPr>
               <a:solidFill>
                 <a:srgbClr val="AB3D3F"/>
               </a:solidFill>
             </c:spPr>
-            <c:extLst>
-              <c:ext xmlns:c16="http://schemas.microsoft.com/office/drawing/2014/chart" uri="{C3380CC4-5D6E-409C-BE32-E72D297353CC}">
-                <c16:uniqueId val="{00000003-550C-A841-8C9E-5B534031EFD3}"/>
-              </c:ext>
-            </c:extLst>
           </c:dPt>
           <c:dPt>
             <c:idx val="2"/>
             <c:invertIfNegative val="0"/>
-            <c:bubble3D val="0"/>
             <c:spPr>
               <a:solidFill>
                 <a:srgbClr val="AB3D3F"/>
               </a:solidFill>
             </c:spPr>
-            <c:extLst>
-              <c:ext xmlns:c16="http://schemas.microsoft.com/office/drawing/2014/chart" uri="{C3380CC4-5D6E-409C-BE32-E72D297353CC}">
-                <c16:uniqueId val="{00000005-550C-A841-8C9E-5B534031EFD3}"/>
-              </c:ext>
-            </c:extLst>
           </c:dPt>
-          <c:dLbls>
-            <c:numFmt formatCode="0.0" sourceLinked="0"/>
-            <c:spPr>
-              <a:noFill/>
-              <a:ln>
-                <a:noFill/>
-              </a:ln>
-              <a:effectLst/>
-            </c:spPr>
-            <c:txPr>
-              <a:bodyPr/>
-              <a:lstStyle/>
-              <a:p>
-                <a:pPr>
-                  <a:defRPr sz="1300" b="1"/>
-                </a:pPr>
-                <a:endParaRPr lang="en-US"/>
-              </a:p>
-            </c:txPr>
-            <c:dLblPos val="outEnd"/>
-            <c:showLegendKey val="0"/>
-            <c:showVal val="1"/>
-            <c:showCatName val="0"/>
-            <c:showSerName val="0"/>
-            <c:showPercent val="0"/>
-            <c:showBubbleSize val="0"/>
-            <c:showLeaderLines val="0"/>
-            <c:extLst>
-              <c:ext xmlns:c15="http://schemas.microsoft.com/office/drawing/2012/chart" uri="{CE6537A1-D6FC-4f65-9D91-7224C49458BB}">
-                <c15:showLeaderLines val="0"/>
-              </c:ext>
-            </c:extLst>
-          </c:dLbls>
           <c:cat>
             <c:strRef>
               <c:f>Sheet1!$A$2:$A$4</c:f>
@@ -548,13 +435,18 @@
               </c:numCache>
             </c:numRef>
           </c:val>
-          <c:extLst>
-            <c:ext xmlns:c16="http://schemas.microsoft.com/office/drawing/2014/chart" uri="{C3380CC4-5D6E-409C-BE32-E72D297353CC}">
-              <c16:uniqueId val="{00000006-550C-A841-8C9E-5B534031EFD3}"/>
-            </c:ext>
-          </c:extLst>
         </c:ser>
         <c:dLbls>
+          <c:numFmt formatCode="0.0" sourceLinked="0"/>
+          <c:txPr>
+            <a:bodyPr/>
+            <a:lstStyle/>
+            <a:p>
+              <a:pPr>
+                <a:defRPr sz="1300" b="1"/>
+              </a:pPr>
+            </a:p>
+          </c:txPr>
           <c:dLblPos val="outEnd"/>
           <c:showLegendKey val="0"/>
           <c:showVal val="1"/>
@@ -562,6 +454,7 @@
           <c:showSerName val="0"/>
           <c:showPercent val="0"/>
           <c:showBubbleSize val="0"/>
+          <c:showLeaderLines val="1"/>
         </c:dLbls>
         <c:gapWidth val="60"/>
         <c:axId val="-2068027336"/>
@@ -574,7 +467,6 @@
         </c:scaling>
         <c:delete val="0"/>
         <c:axPos val="b"/>
-        <c:numFmt formatCode="General" sourceLinked="0"/>
         <c:majorTickMark val="none"/>
         <c:minorTickMark val="none"/>
         <c:tickLblPos val="nextTo"/>
@@ -592,7 +484,6 @@
             <a:pPr>
               <a:defRPr sz="1200"/>
             </a:pPr>
-            <a:endParaRPr lang="en-US"/>
           </a:p>
         </c:txPr>
         <c:crossAx val="-2113994440"/>
@@ -604,9 +495,7 @@
       </c:catAx>
       <c:valAx>
         <c:axId val="-2113994440"/>
-        <c:scaling>
-          <c:orientation val="minMax"/>
-        </c:scaling>
+        <c:scaling/>
         <c:delete val="0"/>
         <c:axPos val="l"/>
         <c:majorGridlines>
@@ -638,17 +527,13 @@
                 </a:solidFill>
               </a:defRPr>
             </a:pPr>
-            <a:endParaRPr lang="en-US"/>
           </a:p>
         </c:txPr>
         <c:crossAx val="-2068027336"/>
         <c:crosses val="autoZero"/>
-        <c:crossBetween val="between"/>
       </c:valAx>
     </c:plotArea>
-    <c:plotVisOnly val="1"/>
     <c:dispBlanksAs val="gap"/>
-    <c:showDLblsOverMax val="1"/>
   </c:chart>
   <c:txPr>
     <a:bodyPr/>
@@ -672,19 +557,14 @@
 </file>
 
 <file path=ppt/charts/chart3.xml><?xml version="1.0" encoding="utf-8"?>
-<c:chartSpace xmlns:c="http://schemas.openxmlformats.org/drawingml/2006/chart" xmlns:a="http://schemas.openxmlformats.org/drawingml/2006/main" xmlns:r="http://schemas.openxmlformats.org/officeDocument/2006/relationships" xmlns:c16r2="http://schemas.microsoft.com/office/drawing/2015/06/chart">
+<c:chartSpace xmlns:c="http://schemas.openxmlformats.org/drawingml/2006/chart" xmlns:a="http://schemas.openxmlformats.org/drawingml/2006/main" xmlns:r="http://schemas.openxmlformats.org/officeDocument/2006/relationships">
   <c:date1904 val="0"/>
-  <c:lang val="en-US"/>
-  <c:roundedCorners val="1"/>
-  <c:style val="2"/>
   <c:chart>
     <c:autoTitleDeleted val="1"/>
     <c:plotArea>
-      <c:layout/>
       <c:barChart>
         <c:barDir val="bar"/>
         <c:grouping val="clustered"/>
-        <c:varyColors val="1"/>
         <c:ser>
           <c:idx val="0"/>
           <c:order val="0"/>
@@ -703,186 +583,93 @@
           <c:dPt>
             <c:idx val="0"/>
             <c:invertIfNegative val="0"/>
-            <c:bubble3D val="0"/>
             <c:spPr>
               <a:solidFill>
                 <a:srgbClr val="A6A6A6"/>
               </a:solidFill>
             </c:spPr>
-            <c:extLst>
-              <c:ext xmlns:c16="http://schemas.microsoft.com/office/drawing/2014/chart" uri="{C3380CC4-5D6E-409C-BE32-E72D297353CC}">
-                <c16:uniqueId val="{00000001-8DFC-5F40-892D-7CF2BF52F2C1}"/>
-              </c:ext>
-            </c:extLst>
           </c:dPt>
           <c:dPt>
             <c:idx val="1"/>
             <c:invertIfNegative val="0"/>
-            <c:bubble3D val="0"/>
             <c:spPr>
               <a:solidFill>
                 <a:srgbClr val="A6A6A6"/>
               </a:solidFill>
             </c:spPr>
-            <c:extLst>
-              <c:ext xmlns:c16="http://schemas.microsoft.com/office/drawing/2014/chart" uri="{C3380CC4-5D6E-409C-BE32-E72D297353CC}">
-                <c16:uniqueId val="{00000003-8DFC-5F40-892D-7CF2BF52F2C1}"/>
-              </c:ext>
-            </c:extLst>
           </c:dPt>
           <c:dPt>
             <c:idx val="2"/>
             <c:invertIfNegative val="0"/>
-            <c:bubble3D val="0"/>
             <c:spPr>
               <a:solidFill>
                 <a:srgbClr val="A6A6A6"/>
               </a:solidFill>
             </c:spPr>
-            <c:extLst>
-              <c:ext xmlns:c16="http://schemas.microsoft.com/office/drawing/2014/chart" uri="{C3380CC4-5D6E-409C-BE32-E72D297353CC}">
-                <c16:uniqueId val="{00000005-8DFC-5F40-892D-7CF2BF52F2C1}"/>
-              </c:ext>
-            </c:extLst>
           </c:dPt>
           <c:dPt>
             <c:idx val="3"/>
             <c:invertIfNegative val="0"/>
-            <c:bubble3D val="0"/>
             <c:spPr>
               <a:solidFill>
                 <a:srgbClr val="A6A6A6"/>
               </a:solidFill>
             </c:spPr>
-            <c:extLst>
-              <c:ext xmlns:c16="http://schemas.microsoft.com/office/drawing/2014/chart" uri="{C3380CC4-5D6E-409C-BE32-E72D297353CC}">
-                <c16:uniqueId val="{00000007-8DFC-5F40-892D-7CF2BF52F2C1}"/>
-              </c:ext>
-            </c:extLst>
           </c:dPt>
           <c:dPt>
             <c:idx val="4"/>
             <c:invertIfNegative val="0"/>
-            <c:bubble3D val="0"/>
             <c:spPr>
               <a:solidFill>
                 <a:srgbClr val="A6A6A6"/>
               </a:solidFill>
             </c:spPr>
-            <c:extLst>
-              <c:ext xmlns:c16="http://schemas.microsoft.com/office/drawing/2014/chart" uri="{C3380CC4-5D6E-409C-BE32-E72D297353CC}">
-                <c16:uniqueId val="{00000009-8DFC-5F40-892D-7CF2BF52F2C1}"/>
-              </c:ext>
-            </c:extLst>
           </c:dPt>
           <c:dPt>
             <c:idx val="5"/>
             <c:invertIfNegative val="0"/>
-            <c:bubble3D val="0"/>
             <c:spPr>
               <a:solidFill>
                 <a:srgbClr val="AB3D3F"/>
               </a:solidFill>
             </c:spPr>
-            <c:extLst>
-              <c:ext xmlns:c16="http://schemas.microsoft.com/office/drawing/2014/chart" uri="{C3380CC4-5D6E-409C-BE32-E72D297353CC}">
-                <c16:uniqueId val="{0000000B-8DFC-5F40-892D-7CF2BF52F2C1}"/>
-              </c:ext>
-            </c:extLst>
           </c:dPt>
           <c:dPt>
             <c:idx val="6"/>
             <c:invertIfNegative val="0"/>
-            <c:bubble3D val="0"/>
             <c:spPr>
               <a:solidFill>
                 <a:srgbClr val="AB3D3F"/>
               </a:solidFill>
             </c:spPr>
-            <c:extLst>
-              <c:ext xmlns:c16="http://schemas.microsoft.com/office/drawing/2014/chart" uri="{C3380CC4-5D6E-409C-BE32-E72D297353CC}">
-                <c16:uniqueId val="{0000000D-8DFC-5F40-892D-7CF2BF52F2C1}"/>
-              </c:ext>
-            </c:extLst>
           </c:dPt>
           <c:dPt>
             <c:idx val="7"/>
             <c:invertIfNegative val="0"/>
-            <c:bubble3D val="0"/>
             <c:spPr>
               <a:solidFill>
                 <a:srgbClr val="AB3D3F"/>
               </a:solidFill>
             </c:spPr>
-            <c:extLst>
-              <c:ext xmlns:c16="http://schemas.microsoft.com/office/drawing/2014/chart" uri="{C3380CC4-5D6E-409C-BE32-E72D297353CC}">
-                <c16:uniqueId val="{0000000F-8DFC-5F40-892D-7CF2BF52F2C1}"/>
-              </c:ext>
-            </c:extLst>
           </c:dPt>
           <c:dPt>
             <c:idx val="8"/>
             <c:invertIfNegative val="0"/>
-            <c:bubble3D val="0"/>
             <c:spPr>
               <a:solidFill>
                 <a:srgbClr val="AB3D3F"/>
               </a:solidFill>
             </c:spPr>
-            <c:extLst>
-              <c:ext xmlns:c16="http://schemas.microsoft.com/office/drawing/2014/chart" uri="{C3380CC4-5D6E-409C-BE32-E72D297353CC}">
-                <c16:uniqueId val="{00000011-8DFC-5F40-892D-7CF2BF52F2C1}"/>
-              </c:ext>
-            </c:extLst>
           </c:dPt>
           <c:dPt>
             <c:idx val="9"/>
             <c:invertIfNegative val="0"/>
-            <c:bubble3D val="0"/>
             <c:spPr>
               <a:solidFill>
                 <a:srgbClr val="AB3D3F"/>
               </a:solidFill>
             </c:spPr>
-            <c:extLst>
-              <c:ext xmlns:c16="http://schemas.microsoft.com/office/drawing/2014/chart" uri="{C3380CC4-5D6E-409C-BE32-E72D297353CC}">
-                <c16:uniqueId val="{00000013-8DFC-5F40-892D-7CF2BF52F2C1}"/>
-              </c:ext>
-            </c:extLst>
           </c:dPt>
-          <c:dLbls>
-            <c:numFmt formatCode="\+#,##0;\-#,##0" sourceLinked="0"/>
-            <c:spPr>
-              <a:noFill/>
-              <a:ln>
-                <a:noFill/>
-              </a:ln>
-              <a:effectLst/>
-            </c:spPr>
-            <c:txPr>
-              <a:bodyPr/>
-              <a:lstStyle/>
-              <a:p>
-                <a:pPr>
-                  <a:defRPr sz="1300" b="1"/>
-                </a:pPr>
-                <a:endParaRPr lang="en-US"/>
-              </a:p>
-            </c:txPr>
-            <c:dLblPos val="outEnd"/>
-            <c:showLegendKey val="0"/>
-            <c:showVal val="1"/>
-            <c:showCatName val="0"/>
-            <c:showSerName val="0"/>
-            <c:showPercent val="0"/>
-            <c:showBubbleSize val="0"/>
-            <c:showLeaderLines val="0"/>
-            <c:extLst>
-              <c:ext xmlns:c15="http://schemas.microsoft.com/office/drawing/2012/chart" uri="{CE6537A1-D6FC-4f65-9D91-7224C49458BB}">
-                <c15:showLeaderLines val="0"/>
-              </c:ext>
-            </c:extLst>
-          </c:dLbls>
           <c:cat>
             <c:strRef>
               <c:f>Sheet1!$A$2:$A$11</c:f>
@@ -960,13 +747,18 @@
               </c:numCache>
             </c:numRef>
           </c:val>
-          <c:extLst>
-            <c:ext xmlns:c16="http://schemas.microsoft.com/office/drawing/2014/chart" uri="{C3380CC4-5D6E-409C-BE32-E72D297353CC}">
-              <c16:uniqueId val="{00000014-8DFC-5F40-892D-7CF2BF52F2C1}"/>
-            </c:ext>
-          </c:extLst>
         </c:ser>
         <c:dLbls>
+          <c:numFmt formatCode="+#,##0;-#,##0" sourceLinked="0"/>
+          <c:txPr>
+            <a:bodyPr/>
+            <a:lstStyle/>
+            <a:p>
+              <a:pPr>
+                <a:defRPr sz="1300" b="1"/>
+              </a:pPr>
+            </a:p>
+          </c:txPr>
           <c:dLblPos val="outEnd"/>
           <c:showLegendKey val="0"/>
           <c:showVal val="1"/>
@@ -974,6 +766,7 @@
           <c:showSerName val="0"/>
           <c:showPercent val="0"/>
           <c:showBubbleSize val="0"/>
+          <c:showLeaderLines val="1"/>
         </c:dLbls>
         <c:gapWidth val="60"/>
         <c:axId val="-2068027336"/>
@@ -986,7 +779,6 @@
         </c:scaling>
         <c:delete val="0"/>
         <c:axPos val="l"/>
-        <c:numFmt formatCode="General" sourceLinked="0"/>
         <c:majorTickMark val="none"/>
         <c:minorTickMark val="none"/>
         <c:tickLblPos val="low"/>
@@ -1004,7 +796,6 @@
             <a:pPr>
               <a:defRPr sz="1200"/>
             </a:pPr>
-            <a:endParaRPr lang="en-US"/>
           </a:p>
         </c:txPr>
         <c:crossAx val="-2113994440"/>
@@ -1016,23 +807,36 @@
       </c:catAx>
       <c:valAx>
         <c:axId val="-2113994440"/>
-        <c:scaling>
-          <c:orientation val="minMax"/>
-        </c:scaling>
-        <c:delete val="1"/>
+        <c:scaling/>
+        <c:delete/>
         <c:axPos val="b"/>
-        <c:numFmt formatCode="\+#,##0;\-#,##0" sourceLinked="0"/>
+        <c:numFmt formatCode="+#,##0;-#,##0" sourceLinked="0"/>
         <c:majorTickMark val="none"/>
         <c:minorTickMark val="none"/>
         <c:tickLblPos val="nextTo"/>
+        <c:spPr>
+          <a:ln>
+            <a:noFill/>
+          </a:ln>
+        </c:spPr>
+        <c:txPr>
+          <a:bodyPr/>
+          <a:lstStyle/>
+          <a:p>
+            <a:pPr>
+              <a:defRPr sz="1100">
+                <a:solidFill>
+                  <a:srgbClr val="595959"/>
+                </a:solidFill>
+              </a:defRPr>
+            </a:pPr>
+          </a:p>
+        </c:txPr>
         <c:crossAx val="-2068027336"/>
         <c:crosses val="autoZero"/>
-        <c:crossBetween val="between"/>
       </c:valAx>
     </c:plotArea>
-    <c:plotVisOnly val="1"/>
     <c:dispBlanksAs val="gap"/>
-    <c:showDLblsOverMax val="1"/>
   </c:chart>
   <c:txPr>
     <a:bodyPr/>
@@ -1137,7 +941,7 @@
           <a:p>
             <a:fld id="{CFDBAACF-1FE1-3041-8D48-9BE4F9D3A142}" type="datetimeFigureOut">
               <a:rPr lang="en-US" smtClean="0"/>
-              <a:t>9/25/26</a:t>
+              <a:t>2/3/26</a:t>
             </a:fld>
             <a:endParaRPr lang="en-US"/>
           </a:p>
@@ -1404,8 +1208,8 @@
 </p:notesMaster>
 </file>
 
-<file path=ppt/notesSlides/notesSlide1.xml><?xml version="1.0" encoding="utf-8"?>
-<p:notes xmlns:a="http://schemas.openxmlformats.org/drawingml/2006/main" xmlns:r="http://schemas.openxmlformats.org/officeDocument/2006/relationships" xmlns:p="http://schemas.openxmlformats.org/presentationml/2006/main">
+<file path=ppt/notesSlides/notesSlide10.xml><?xml version="1.0" encoding="utf-8"?>
+<p:notes xmlns:a="http://schemas.openxmlformats.org/drawingml/2006/main" xmlns:p="http://schemas.openxmlformats.org/presentationml/2006/main" xmlns:r="http://schemas.openxmlformats.org/officeDocument/2006/relationships">
   <p:cSld>
     <p:spTree>
       <p:nvGrpSpPr>
@@ -1425,7 +1229,7 @@
         <p:nvSpPr>
           <p:cNvPr id="2" name="Slide Image Placeholder 1"/>
           <p:cNvSpPr>
-            <a:spLocks noGrp="1" noRot="1" noChangeAspect="1"/>
+            <a:spLocks noGrp="1"/>
           </p:cNvSpPr>
           <p:nvPr>
             <p:ph type="sldImg" idx="2"/>
@@ -1440,7 +1244,7 @@
             <a:spLocks noGrp="1"/>
           </p:cNvSpPr>
           <p:nvPr>
-            <p:ph type="body" sz="quarter" idx="3"/>
+            <p:ph type="body" idx="3" sz="quarter"/>
           </p:nvPr>
         </p:nvSpPr>
         <p:spPr/>
@@ -1449,7 +1253,12 @@
           <a:lstStyle/>
           <a:p>
             <a:r>
-              <a:t>Sources: notebooks/04_allocation.ipynb, cell alloc_cd07 (regional totals), alloc_cd11 (nets per 1,000 people) and alloc_cd13 (7,720 nets moved under the region-effects model).</a:t>
+              <a:t>Symbols: i = district (the unit); mu_i = expected confirmed cases, 2014-17 (the target); w_i = allocation weight (the metric); pop_i = population; c_i = % of homes owning a net in i's region (DHS 2022); U_i = upper 95% confidence bound for mu_i; q_i = exact share; A_i = nets.</a:t>
+            </a:r>
+          </a:p>
+          <a:p>
+            <a:r>
+              <a:t>Sources: notebooks/04_allocation.ipynb cells alloc_cd05 (alpha 0.2677) and alloc_cd11 (beta_1 = +0.0823, p = 1.7e-07; U_i / mu_i = 1.198, 1.342, 1.162; nets per 1,000 people); src/models.py compute_allocation and hamilton. Coverage values: notebooks/02 cell cd06 and scripts/verify_claims.py section D.</a:t>
             </a:r>
           </a:p>
         </p:txBody>
@@ -1461,7 +1270,7 @@
             <a:spLocks noGrp="1"/>
           </p:cNvSpPr>
           <p:nvPr>
-            <p:ph type="sldNum" sz="quarter" idx="5"/>
+            <p:ph type="sldNum" idx="5" sz="quarter"/>
           </p:nvPr>
         </p:nvSpPr>
         <p:spPr/>
@@ -1474,8 +1283,8 @@
 </p:notes>
 </file>
 
-<file path=ppt/notesSlides/notesSlide10.xml><?xml version="1.0" encoding="utf-8"?>
-<p:notes xmlns:a="http://schemas.openxmlformats.org/drawingml/2006/main" xmlns:r="http://schemas.openxmlformats.org/officeDocument/2006/relationships" xmlns:p="http://schemas.openxmlformats.org/presentationml/2006/main">
+<file path=ppt/notesSlides/notesSlide11.xml><?xml version="1.0" encoding="utf-8"?>
+<p:notes xmlns:a="http://schemas.openxmlformats.org/drawingml/2006/main" xmlns:p="http://schemas.openxmlformats.org/presentationml/2006/main" xmlns:r="http://schemas.openxmlformats.org/officeDocument/2006/relationships">
   <p:cSld>
     <p:spTree>
       <p:nvGrpSpPr>
@@ -1495,7 +1304,7 @@
         <p:nvSpPr>
           <p:cNvPr id="2" name="Slide Image Placeholder 1"/>
           <p:cNvSpPr>
-            <a:spLocks noGrp="1" noRot="1" noChangeAspect="1"/>
+            <a:spLocks noGrp="1"/>
           </p:cNvSpPr>
           <p:nvPr>
             <p:ph type="sldImg" idx="2"/>
@@ -1510,7 +1319,7 @@
             <a:spLocks noGrp="1"/>
           </p:cNvSpPr>
           <p:nvPr>
-            <p:ph type="body" sz="quarter" idx="3"/>
+            <p:ph type="body" idx="3" sz="quarter"/>
           </p:nvPr>
         </p:nvSpPr>
         <p:spPr/>
@@ -1519,7 +1328,7 @@
           <a:lstStyle/>
           <a:p>
             <a:r>
-              <a:t>Sources: the 50-district schedule in reports/allocation.md reproduces exactly from notebooks/04_allocation.ipynb (cells alloc_cd07 and alloc_cd09; scripts/verify_claims.py section C checks all 50 rows). Map drawn with src/viz.plot_district_choropleth from the same allocation, zoomed to the north. The three pre-2018 districts later split (Garu-Tempane, Savelugu-Nanton, Bunkpurugu-Yunyoo) show their total on both successor areas.</a:t>
+              <a:t>Sources: cases per person and the upper-to-expected ratios 1.198, 1.342 and 1.162: notebooks/04_allocation.ipynb cell alloc_cd11. Both maps are drawn with src/viz.plot_district_choropleth from models.compute_allocation, zoomed to the north like the allocation map. The two-map layout (burden next to uncertainty) follows the course roadmap.</a:t>
             </a:r>
           </a:p>
         </p:txBody>
@@ -1531,7 +1340,7 @@
             <a:spLocks noGrp="1"/>
           </p:cNvSpPr>
           <p:nvPr>
-            <p:ph type="sldNum" sz="quarter" idx="5"/>
+            <p:ph type="sldNum" idx="5" sz="quarter"/>
           </p:nvPr>
         </p:nvSpPr>
         <p:spPr/>
@@ -1544,8 +1353,8 @@
 </p:notes>
 </file>
 
-<file path=ppt/notesSlides/notesSlide11.xml><?xml version="1.0" encoding="utf-8"?>
-<p:notes xmlns:a="http://schemas.openxmlformats.org/drawingml/2006/main" xmlns:r="http://schemas.openxmlformats.org/officeDocument/2006/relationships" xmlns:p="http://schemas.openxmlformats.org/presentationml/2006/main">
+<file path=ppt/notesSlides/notesSlide12.xml><?xml version="1.0" encoding="utf-8"?>
+<p:notes xmlns:a="http://schemas.openxmlformats.org/drawingml/2006/main" xmlns:p="http://schemas.openxmlformats.org/presentationml/2006/main" xmlns:r="http://schemas.openxmlformats.org/officeDocument/2006/relationships">
   <p:cSld>
     <p:spTree>
       <p:nvGrpSpPr>
@@ -1565,7 +1374,7 @@
         <p:nvSpPr>
           <p:cNvPr id="2" name="Slide Image Placeholder 1"/>
           <p:cNvSpPr>
-            <a:spLocks noGrp="1" noRot="1" noChangeAspect="1"/>
+            <a:spLocks noGrp="1"/>
           </p:cNvSpPr>
           <p:nvPr>
             <p:ph type="sldImg" idx="2"/>
@@ -1580,7 +1389,7 @@
             <a:spLocks noGrp="1"/>
           </p:cNvSpPr>
           <p:nvPr>
-            <p:ph type="body" sz="quarter" idx="3"/>
+            <p:ph type="body" idx="3" sz="quarter"/>
           </p:nvPr>
         </p:nvSpPr>
         <p:spPr/>
@@ -1589,7 +1398,7 @@
           <a:lstStyle/>
           <a:p>
             <a:r>
-              <a:t>Sources: gains and losses: notebooks/04_allocation.ipynb alloc_cd09; cases-per-person ranks: alloc_cd11 (Tamale lowest of 50, Nabdam highest of 50, Bole highest in its region). Ghana's ITN strategy: PMI Ghana Malaria Operational Plan FY2017. Tamale Teaching Hospital as the only tertiary provider for the three northern regions: https://tth.gov.gh/about</a:t>
+              <a:t>Sources: the 50-district schedule in reports/allocation.md reproduces exactly from notebooks/04_allocation.ipynb (cells alloc_cd07 and alloc_cd09; scripts/verify_claims.py section C checks all 50 rows). Map drawn with src/viz.plot_district_choropleth from the same allocation, zoomed to the north. The three pre-2018 districts later split (Garu-Tempane, Savelugu-Nanton, Bunkpurugu-Yunyoo) show their total on both successor areas.</a:t>
             </a:r>
           </a:p>
         </p:txBody>
@@ -1601,7 +1410,7 @@
             <a:spLocks noGrp="1"/>
           </p:cNvSpPr>
           <p:nvPr>
-            <p:ph type="sldNum" sz="quarter" idx="5"/>
+            <p:ph type="sldNum" idx="5" sz="quarter"/>
           </p:nvPr>
         </p:nvSpPr>
         <p:spPr/>
@@ -1614,8 +1423,8 @@
 </p:notes>
 </file>
 
-<file path=ppt/notesSlides/notesSlide12.xml><?xml version="1.0" encoding="utf-8"?>
-<p:notes xmlns:a="http://schemas.openxmlformats.org/drawingml/2006/main" xmlns:r="http://schemas.openxmlformats.org/officeDocument/2006/relationships" xmlns:p="http://schemas.openxmlformats.org/presentationml/2006/main">
+<file path=ppt/notesSlides/notesSlide13.xml><?xml version="1.0" encoding="utf-8"?>
+<p:notes xmlns:a="http://schemas.openxmlformats.org/drawingml/2006/main" xmlns:p="http://schemas.openxmlformats.org/presentationml/2006/main" xmlns:r="http://schemas.openxmlformats.org/officeDocument/2006/relationships">
   <p:cSld>
     <p:spTree>
       <p:nvGrpSpPr>
@@ -1635,7 +1444,7 @@
         <p:nvSpPr>
           <p:cNvPr id="2" name="Slide Image Placeholder 1"/>
           <p:cNvSpPr>
-            <a:spLocks noGrp="1" noRot="1" noChangeAspect="1"/>
+            <a:spLocks noGrp="1"/>
           </p:cNvSpPr>
           <p:nvPr>
             <p:ph type="sldImg" idx="2"/>
@@ -1650,7 +1459,7 @@
             <a:spLocks noGrp="1"/>
           </p:cNvSpPr>
           <p:nvPr>
-            <p:ph type="body" sz="quarter" idx="3"/>
+            <p:ph type="body" idx="3" sz="quarter"/>
           </p:nvPr>
         </p:nvSpPr>
         <p:spPr/>
@@ -1659,7 +1468,7 @@
           <a:lstStyle/>
           <a:p>
             <a:r>
-              <a:t>Sources: notebooks/04_allocation.ipynb cell alloc_cd13, which also prints the coverage it uses (Savannah 79.1%, North East 62.8%; published 79.1% and 62.6%, GDHS 2022 Table 12.1) and the Northern cluster-bootstrap bounds 61.4% and 74.0% (as in notebooks/02 cell cd39).</a:t>
+              <a:t>Sources: gains and losses: notebooks/04_allocation.ipynb alloc_cd09; cases-per-person ranks: alloc_cd11 (Tamale lowest of 50, Nabdam highest of 50, Bole highest in its region). Ghana's ITN strategy: PMI Ghana Malaria Operational Plan FY2017. Tamale Teaching Hospital as the only tertiary provider for the three northern regions: https://tth.gov.gh/about</a:t>
             </a:r>
           </a:p>
         </p:txBody>
@@ -1671,7 +1480,7 @@
             <a:spLocks noGrp="1"/>
           </p:cNvSpPr>
           <p:nvPr>
-            <p:ph type="sldNum" sz="quarter" idx="5"/>
+            <p:ph type="sldNum" idx="5" sz="quarter"/>
           </p:nvPr>
         </p:nvSpPr>
         <p:spPr/>
@@ -1684,8 +1493,8 @@
 </p:notes>
 </file>
 
-<file path=ppt/notesSlides/notesSlide13.xml><?xml version="1.0" encoding="utf-8"?>
-<p:notes xmlns:a="http://schemas.openxmlformats.org/drawingml/2006/main" xmlns:r="http://schemas.openxmlformats.org/officeDocument/2006/relationships" xmlns:p="http://schemas.openxmlformats.org/presentationml/2006/main">
+<file path=ppt/notesSlides/notesSlide14.xml><?xml version="1.0" encoding="utf-8"?>
+<p:notes xmlns:a="http://schemas.openxmlformats.org/drawingml/2006/main" xmlns:p="http://schemas.openxmlformats.org/presentationml/2006/main" xmlns:r="http://schemas.openxmlformats.org/officeDocument/2006/relationships">
   <p:cSld>
     <p:spTree>
       <p:nvGrpSpPr>
@@ -1705,7 +1514,7 @@
         <p:nvSpPr>
           <p:cNvPr id="2" name="Slide Image Placeholder 1"/>
           <p:cNvSpPr>
-            <a:spLocks noGrp="1" noRot="1" noChangeAspect="1"/>
+            <a:spLocks noGrp="1"/>
           </p:cNvSpPr>
           <p:nvPr>
             <p:ph type="sldImg" idx="2"/>
@@ -1720,7 +1529,7 @@
             <a:spLocks noGrp="1"/>
           </p:cNvSpPr>
           <p:nvPr>
-            <p:ph type="body" sz="quarter" idx="3"/>
+            <p:ph type="body" idx="3" sz="quarter"/>
           </p:nvPr>
         </p:nvSpPr>
         <p:spPr/>
@@ -1729,7 +1538,7 @@
           <a:lstStyle/>
           <a:p>
             <a:r>
-              <a:t>Sources: 207 of 260 districts: scripts/verify_claims.py (map join). Test positivity and cases per person by region: scripts/verify_claims.py section E. Spraying and chemoprevention counts: scripts/verify_claims.py section E, from the raw surveillance workbook in the course data package (these columns are not in the curated district file). Campaign rules: PMI Ghana Malaria Operational Plan FY2017. Privacy: git history holds no data files and no notebook outputs (checked 2026-09-22).</a:t>
+              <a:t>Sources: notebooks/04_allocation.ipynb cell alloc_cd13, which also prints the coverage it uses (Savannah 79.1%, North East 62.8%; published 79.1% and 62.6%, GDHS 2022 Table 12.1) and the Northern cluster-bootstrap bounds 61.4% and 74.0% (as in notebooks/02 cell cd39).</a:t>
             </a:r>
           </a:p>
         </p:txBody>
@@ -1741,7 +1550,7 @@
             <a:spLocks noGrp="1"/>
           </p:cNvSpPr>
           <p:nvPr>
-            <p:ph type="sldNum" sz="quarter" idx="5"/>
+            <p:ph type="sldNum" idx="5" sz="quarter"/>
           </p:nvPr>
         </p:nvSpPr>
         <p:spPr/>
@@ -1754,8 +1563,8 @@
 </p:notes>
 </file>
 
-<file path=ppt/notesSlides/notesSlide14.xml><?xml version="1.0" encoding="utf-8"?>
-<p:notes xmlns:a="http://schemas.openxmlformats.org/drawingml/2006/main" xmlns:r="http://schemas.openxmlformats.org/officeDocument/2006/relationships" xmlns:p="http://schemas.openxmlformats.org/presentationml/2006/main">
+<file path=ppt/notesSlides/notesSlide15.xml><?xml version="1.0" encoding="utf-8"?>
+<p:notes xmlns:a="http://schemas.openxmlformats.org/drawingml/2006/main" xmlns:p="http://schemas.openxmlformats.org/presentationml/2006/main" xmlns:r="http://schemas.openxmlformats.org/officeDocument/2006/relationships">
   <p:cSld>
     <p:spTree>
       <p:nvGrpSpPr>
@@ -1775,7 +1584,7 @@
         <p:nvSpPr>
           <p:cNvPr id="2" name="Slide Image Placeholder 1"/>
           <p:cNvSpPr>
-            <a:spLocks noGrp="1" noRot="1" noChangeAspect="1"/>
+            <a:spLocks noGrp="1"/>
           </p:cNvSpPr>
           <p:nvPr>
             <p:ph type="sldImg" idx="2"/>
@@ -1790,7 +1599,7 @@
             <a:spLocks noGrp="1"/>
           </p:cNvSpPr>
           <p:nvPr>
-            <p:ph type="body" sz="quarter" idx="3"/>
+            <p:ph type="body" idx="3" sz="quarter"/>
           </p:nvPr>
         </p:nvSpPr>
         <p:spPr/>
@@ -1799,7 +1608,7 @@
           <a:lstStyle/>
           <a:p>
             <a:r>
-              <a:t>Sources: 11 districts, 3,740 nets, 79.1% and 62.8%: notebooks/04_allocation.ipynb alloc_cd13. 39 of 50 districts: scripts/verify_claims.py section E. Empty ITN intervals: notebooks/02 cell cd37. No district identifier or parasitaemia: notebooks/02 cell cd06.</a:t>
+              <a:t>Sources: 207 of 260 districts: scripts/verify_claims.py (map join). Test positivity and cases per person by region: scripts/verify_claims.py section E. Spraying and chemoprevention counts: scripts/verify_claims.py section E, from the raw surveillance workbook in the course data package (these columns are not in the curated district file). Campaign rules: PMI Ghana Malaria Operational Plan FY2017. Privacy: git history holds no data files and no notebook outputs (checked 2026-09-22).</a:t>
             </a:r>
           </a:p>
         </p:txBody>
@@ -1811,7 +1620,7 @@
             <a:spLocks noGrp="1"/>
           </p:cNvSpPr>
           <p:nvPr>
-            <p:ph type="sldNum" sz="quarter" idx="5"/>
+            <p:ph type="sldNum" idx="5" sz="quarter"/>
           </p:nvPr>
         </p:nvSpPr>
         <p:spPr/>
@@ -1824,8 +1633,8 @@
 </p:notes>
 </file>
 
-<file path=ppt/notesSlides/notesSlide15.xml><?xml version="1.0" encoding="utf-8"?>
-<p:notes xmlns:a="http://schemas.openxmlformats.org/drawingml/2006/main" xmlns:r="http://schemas.openxmlformats.org/officeDocument/2006/relationships" xmlns:p="http://schemas.openxmlformats.org/presentationml/2006/main">
+<file path=ppt/notesSlides/notesSlide16.xml><?xml version="1.0" encoding="utf-8"?>
+<p:notes xmlns:a="http://schemas.openxmlformats.org/drawingml/2006/main" xmlns:p="http://schemas.openxmlformats.org/presentationml/2006/main" xmlns:r="http://schemas.openxmlformats.org/officeDocument/2006/relationships">
   <p:cSld>
     <p:spTree>
       <p:nvGrpSpPr>
@@ -1845,7 +1654,7 @@
         <p:nvSpPr>
           <p:cNvPr id="2" name="Slide Image Placeholder 1"/>
           <p:cNvSpPr>
-            <a:spLocks noGrp="1" noRot="1" noChangeAspect="1"/>
+            <a:spLocks noGrp="1"/>
           </p:cNvSpPr>
           <p:nvPr>
             <p:ph type="sldImg" idx="2"/>
@@ -1860,7 +1669,7 @@
             <a:spLocks noGrp="1"/>
           </p:cNvSpPr>
           <p:nvPr>
-            <p:ph type="body" sz="quarter" idx="3"/>
+            <p:ph type="body" idx="3" sz="quarter"/>
           </p:nvPr>
         </p:nvSpPr>
         <p:spPr/>
@@ -1869,7 +1678,7 @@
           <a:lstStyle/>
           <a:p>
             <a:r>
-              <a:t>The footnote is the group's AI declaration. Each member's own AI-use declaration is part of their individual reflection.</a:t>
+              <a:t>Sources: 11 districts, 3,740 nets, 79.1% and 62.8%: notebooks/04_allocation.ipynb alloc_cd13. 39 of 50 districts: scripts/verify_claims.py section E. Empty ITN intervals: notebooks/02 cell cd37. No district identifier or parasitaemia: notebooks/02 cell cd06.</a:t>
             </a:r>
           </a:p>
         </p:txBody>
@@ -1881,7 +1690,7 @@
             <a:spLocks noGrp="1"/>
           </p:cNvSpPr>
           <p:nvPr>
-            <p:ph type="sldNum" sz="quarter" idx="5"/>
+            <p:ph type="sldNum" idx="5" sz="quarter"/>
           </p:nvPr>
         </p:nvSpPr>
         <p:spPr/>
@@ -1894,8 +1703,8 @@
 </p:notes>
 </file>
 
-<file path=ppt/notesSlides/notesSlide2.xml><?xml version="1.0" encoding="utf-8"?>
-<p:notes xmlns:a="http://schemas.openxmlformats.org/drawingml/2006/main" xmlns:r="http://schemas.openxmlformats.org/officeDocument/2006/relationships" xmlns:p="http://schemas.openxmlformats.org/presentationml/2006/main">
+<file path=ppt/notesSlides/notesSlide17.xml><?xml version="1.0" encoding="utf-8"?>
+<p:notes xmlns:a="http://schemas.openxmlformats.org/drawingml/2006/main" xmlns:p="http://schemas.openxmlformats.org/presentationml/2006/main" xmlns:r="http://schemas.openxmlformats.org/officeDocument/2006/relationships">
   <p:cSld>
     <p:spTree>
       <p:nvGrpSpPr>
@@ -1915,7 +1724,7 @@
         <p:nvSpPr>
           <p:cNvPr id="2" name="Slide Image Placeholder 1"/>
           <p:cNvSpPr>
-            <a:spLocks noGrp="1" noRot="1" noChangeAspect="1"/>
+            <a:spLocks noGrp="1"/>
           </p:cNvSpPr>
           <p:nvPr>
             <p:ph type="sldImg" idx="2"/>
@@ -1930,7 +1739,7 @@
             <a:spLocks noGrp="1"/>
           </p:cNvSpPr>
           <p:nvPr>
-            <p:ph type="body" sz="quarter" idx="3"/>
+            <p:ph type="body" idx="3" sz="quarter"/>
           </p:nvPr>
         </p:nvSpPr>
         <p:spPr/>
@@ -1939,7 +1748,7 @@
           <a:lstStyle/>
           <a:p>
             <a:r>
-              <a:t>Sources: Oppong et al., Malaria Journal, doi:10.1186/s12936-025-05724-9 (https://pmc.ncbi.nlm.nih.gov/articles/PMC12829291/); Ghana DHS 2022 final report FR387, Table 12.15.</a:t>
+              <a:t>Sources: each reference was checked on 25 September 2026 against the source itself: DOIs and journal details, the publishers' own recommended citations, and the passages the deck relies on (reports/claims_table.md, rows E-01 to E-05).</a:t>
             </a:r>
           </a:p>
         </p:txBody>
@@ -1951,7 +1760,7 @@
             <a:spLocks noGrp="1"/>
           </p:cNvSpPr>
           <p:nvPr>
-            <p:ph type="sldNum" sz="quarter" idx="5"/>
+            <p:ph type="sldNum" idx="5" sz="quarter"/>
           </p:nvPr>
         </p:nvSpPr>
         <p:spPr/>
@@ -1964,8 +1773,8 @@
 </p:notes>
 </file>
 
-<file path=ppt/notesSlides/notesSlide3.xml><?xml version="1.0" encoding="utf-8"?>
-<p:notes xmlns:a="http://schemas.openxmlformats.org/drawingml/2006/main" xmlns:r="http://schemas.openxmlformats.org/officeDocument/2006/relationships" xmlns:p="http://schemas.openxmlformats.org/presentationml/2006/main">
+<file path=ppt/notesSlides/notesSlide18.xml><?xml version="1.0" encoding="utf-8"?>
+<p:notes xmlns:a="http://schemas.openxmlformats.org/drawingml/2006/main" xmlns:p="http://schemas.openxmlformats.org/presentationml/2006/main" xmlns:r="http://schemas.openxmlformats.org/officeDocument/2006/relationships">
   <p:cSld>
     <p:spTree>
       <p:nvGrpSpPr>
@@ -1985,7 +1794,7 @@
         <p:nvSpPr>
           <p:cNvPr id="2" name="Slide Image Placeholder 1"/>
           <p:cNvSpPr>
-            <a:spLocks noGrp="1" noRot="1" noChangeAspect="1"/>
+            <a:spLocks noGrp="1"/>
           </p:cNvSpPr>
           <p:nvPr>
             <p:ph type="sldImg" idx="2"/>
@@ -2000,7 +1809,7 @@
             <a:spLocks noGrp="1"/>
           </p:cNvSpPr>
           <p:nvPr>
-            <p:ph type="body" sz="quarter" idx="3"/>
+            <p:ph type="body" idx="3" sz="quarter"/>
           </p:nvPr>
         </p:nvSpPr>
         <p:spPr/>
@@ -2009,7 +1818,7 @@
           <a:lstStyle/>
           <a:p>
             <a:r>
-              <a:t>Sources: 17,933 households and 618 clusters: data dictionary and notebooks/02 cell cd03. 71.0% vs 66.8% (claim C-01): notebooks/01_eda.ipynb cell eda_cd05. 50 districts on 53 polygons, 207 of 260 districts without data: scripts/verify_claims.py (map join, same logic as src/viz.py). Maps: figures/b1_data_availability.png and figures/b1_district_case_rate.png from notebook 01, with their titles trimmed.</a:t>
+              <a:t>The footnote is the group's AI declaration. Each member's own AI-use declaration is part of their individual reflection.</a:t>
             </a:r>
           </a:p>
         </p:txBody>
@@ -2021,7 +1830,7 @@
             <a:spLocks noGrp="1"/>
           </p:cNvSpPr>
           <p:nvPr>
-            <p:ph type="sldNum" sz="quarter" idx="5"/>
+            <p:ph type="sldNum" idx="5" sz="quarter"/>
           </p:nvPr>
         </p:nvSpPr>
         <p:spPr/>
@@ -2034,8 +1843,8 @@
 </p:notes>
 </file>
 
-<file path=ppt/notesSlides/notesSlide4.xml><?xml version="1.0" encoding="utf-8"?>
-<p:notes xmlns:a="http://schemas.openxmlformats.org/drawingml/2006/main" xmlns:r="http://schemas.openxmlformats.org/officeDocument/2006/relationships" xmlns:p="http://schemas.openxmlformats.org/presentationml/2006/main">
+<file path=ppt/notesSlides/notesSlide3.xml><?xml version="1.0" encoding="utf-8"?>
+<p:notes xmlns:a="http://schemas.openxmlformats.org/drawingml/2006/main" xmlns:p="http://schemas.openxmlformats.org/presentationml/2006/main" xmlns:r="http://schemas.openxmlformats.org/officeDocument/2006/relationships">
   <p:cSld>
     <p:spTree>
       <p:nvGrpSpPr>
@@ -2055,7 +1864,7 @@
         <p:nvSpPr>
           <p:cNvPr id="2" name="Slide Image Placeholder 1"/>
           <p:cNvSpPr>
-            <a:spLocks noGrp="1" noRot="1" noChangeAspect="1"/>
+            <a:spLocks noGrp="1"/>
           </p:cNvSpPr>
           <p:nvPr>
             <p:ph type="sldImg" idx="2"/>
@@ -2070,7 +1879,7 @@
             <a:spLocks noGrp="1"/>
           </p:cNvSpPr>
           <p:nvPr>
-            <p:ph type="body" sz="quarter" idx="3"/>
+            <p:ph type="body" idx="3" sz="quarter"/>
           </p:nvPr>
         </p:nvSpPr>
         <p:spPr/>
@@ -2079,7 +1888,7 @@
           <a:lstStyle/>
           <a:p>
             <a:r>
-              <a:t>Sources: notebooks/02_distributions.ipynb cells cd09 (77,183), cd15 (442, 122,882, 278 times), cd18 (0.395), cd25 and cd26 (54,147; alpha 0.2677; AIC gap 2,393,669). Figure: figures/a3_poisson_vs_nb.png, title trimmed.</a:t>
+              <a:t>Sources: notebooks/04_allocation.ipynb, cell alloc_cd07 (regional totals), alloc_cd11 (nets per 1,000 people) and alloc_cd13 (7,720 nets moved under the region-effects model).</a:t>
             </a:r>
           </a:p>
         </p:txBody>
@@ -2091,7 +1900,7 @@
             <a:spLocks noGrp="1"/>
           </p:cNvSpPr>
           <p:nvPr>
-            <p:ph type="sldNum" sz="quarter" idx="5"/>
+            <p:ph type="sldNum" idx="5" sz="quarter"/>
           </p:nvPr>
         </p:nvSpPr>
         <p:spPr/>
@@ -2104,8 +1913,8 @@
 </p:notes>
 </file>
 
-<file path=ppt/notesSlides/notesSlide5.xml><?xml version="1.0" encoding="utf-8"?>
-<p:notes xmlns:a="http://schemas.openxmlformats.org/drawingml/2006/main" xmlns:r="http://schemas.openxmlformats.org/officeDocument/2006/relationships" xmlns:p="http://schemas.openxmlformats.org/presentationml/2006/main">
+<file path=ppt/notesSlides/notesSlide4.xml><?xml version="1.0" encoding="utf-8"?>
+<p:notes xmlns:a="http://schemas.openxmlformats.org/drawingml/2006/main" xmlns:p="http://schemas.openxmlformats.org/presentationml/2006/main" xmlns:r="http://schemas.openxmlformats.org/officeDocument/2006/relationships">
   <p:cSld>
     <p:spTree>
       <p:nvGrpSpPr>
@@ -2125,7 +1934,7 @@
         <p:nvSpPr>
           <p:cNvPr id="2" name="Slide Image Placeholder 1"/>
           <p:cNvSpPr>
-            <a:spLocks noGrp="1" noRot="1" noChangeAspect="1"/>
+            <a:spLocks noGrp="1"/>
           </p:cNvSpPr>
           <p:nvPr>
             <p:ph type="sldImg" idx="2"/>
@@ -2140,7 +1949,7 @@
             <a:spLocks noGrp="1"/>
           </p:cNvSpPr>
           <p:nvPr>
-            <p:ph type="body" sz="quarter" idx="3"/>
+            <p:ph type="body" idx="3" sz="quarter"/>
           </p:nvPr>
         </p:nvSpPr>
         <p:spPr/>
@@ -2149,7 +1958,7 @@
           <a:lstStyle/>
           <a:p>
             <a:r>
-              <a:t>Sources: notebooks/02_distributions.ipynb cells cd31 (582 households, 20 clusters), cd33 and cd34 (15.20 vs 7.17, 2.12 times, design effect 4.50), cd37 (published ITN intervals empty, 0 of 76), cd39 (67.69% vs 67.6%). Seed spread 4.46 to 5.39 and design-based 4.18: scripts/verify_claims.py section A. Rank 10th of 16: scripts/verify_claims.py section D. Figure: figures/a4_bootstrap_ci_comparison.png, title trimmed.</a:t>
+              <a:t>Sources: Oppong et al., Malaria Journal, doi:10.1186/s12936-025-05724-9 (https://pmc.ncbi.nlm.nih.gov/articles/PMC12829291/); Ghana DHS 2022 final report FR387, Table 12.15.</a:t>
             </a:r>
           </a:p>
         </p:txBody>
@@ -2161,7 +1970,7 @@
             <a:spLocks noGrp="1"/>
           </p:cNvSpPr>
           <p:nvPr>
-            <p:ph type="sldNum" sz="quarter" idx="5"/>
+            <p:ph type="sldNum" idx="5" sz="quarter"/>
           </p:nvPr>
         </p:nvSpPr>
         <p:spPr/>
@@ -2174,8 +1983,8 @@
 </p:notes>
 </file>
 
-<file path=ppt/notesSlides/notesSlide6.xml><?xml version="1.0" encoding="utf-8"?>
-<p:notes xmlns:a="http://schemas.openxmlformats.org/drawingml/2006/main" xmlns:r="http://schemas.openxmlformats.org/officeDocument/2006/relationships" xmlns:p="http://schemas.openxmlformats.org/presentationml/2006/main">
+<file path=ppt/notesSlides/notesSlide5.xml><?xml version="1.0" encoding="utf-8"?>
+<p:notes xmlns:a="http://schemas.openxmlformats.org/drawingml/2006/main" xmlns:p="http://schemas.openxmlformats.org/presentationml/2006/main" xmlns:r="http://schemas.openxmlformats.org/officeDocument/2006/relationships">
   <p:cSld>
     <p:spTree>
       <p:nvGrpSpPr>
@@ -2195,7 +2004,7 @@
         <p:nvSpPr>
           <p:cNvPr id="2" name="Slide Image Placeholder 1"/>
           <p:cNvSpPr>
-            <a:spLocks noGrp="1" noRot="1" noChangeAspect="1"/>
+            <a:spLocks noGrp="1"/>
           </p:cNvSpPr>
           <p:nvPr>
             <p:ph type="sldImg" idx="2"/>
@@ -2210,7 +2019,7 @@
             <a:spLocks noGrp="1"/>
           </p:cNvSpPr>
           <p:nvPr>
-            <p:ph type="body" sz="quarter" idx="3"/>
+            <p:ph type="body" idx="3" sz="quarter"/>
           </p:nvPr>
         </p:nvSpPr>
         <p:spPr/>
@@ -2219,7 +2028,7 @@
           <a:lstStyle/>
           <a:p>
             <a:r>
-              <a:t>Sources: notebooks/03_pipeline_leakage.ipynb cells leak_cd04 (87,144 vs 87,356), leak_cd06 (R² 1.0000 vs 0.2618), leak_cd08 (one seed), leak_cd12 (500 seeds) and leak_cd14 (whole region held out); the table itself is leak_cd10.</a:t>
+              <a:t>Sources: 17,933 households and 618 clusters: data dictionary and notebooks/02 cell cd03. 71.0% vs 66.8% (claim C-01): notebooks/01_eda.ipynb cell eda_cd05. 50 districts on 53 polygons, 207 of 260 districts without data: scripts/verify_claims.py (map join, same logic as src/viz.py). Maps: figures/b1_data_availability.png and figures/b1_district_case_rate.png from notebook 01, with their titles trimmed.</a:t>
             </a:r>
           </a:p>
         </p:txBody>
@@ -2231,7 +2040,7 @@
             <a:spLocks noGrp="1"/>
           </p:cNvSpPr>
           <p:nvPr>
-            <p:ph type="sldNum" sz="quarter" idx="5"/>
+            <p:ph type="sldNum" idx="5" sz="quarter"/>
           </p:nvPr>
         </p:nvSpPr>
         <p:spPr/>
@@ -2244,8 +2053,8 @@
 </p:notes>
 </file>
 
-<file path=ppt/notesSlides/notesSlide7.xml><?xml version="1.0" encoding="utf-8"?>
-<p:notes xmlns:a="http://schemas.openxmlformats.org/drawingml/2006/main" xmlns:r="http://schemas.openxmlformats.org/officeDocument/2006/relationships" xmlns:p="http://schemas.openxmlformats.org/presentationml/2006/main">
+<file path=ppt/notesSlides/notesSlide6.xml><?xml version="1.0" encoding="utf-8"?>
+<p:notes xmlns:a="http://schemas.openxmlformats.org/drawingml/2006/main" xmlns:p="http://schemas.openxmlformats.org/presentationml/2006/main" xmlns:r="http://schemas.openxmlformats.org/officeDocument/2006/relationships">
   <p:cSld>
     <p:spTree>
       <p:nvGrpSpPr>
@@ -2265,7 +2074,7 @@
         <p:nvSpPr>
           <p:cNvPr id="2" name="Slide Image Placeholder 1"/>
           <p:cNvSpPr>
-            <a:spLocks noGrp="1" noRot="1" noChangeAspect="1"/>
+            <a:spLocks noGrp="1"/>
           </p:cNvSpPr>
           <p:nvPr>
             <p:ph type="sldImg" idx="2"/>
@@ -2280,7 +2089,7 @@
             <a:spLocks noGrp="1"/>
           </p:cNvSpPr>
           <p:nvPr>
-            <p:ph type="body" sz="quarter" idx="3"/>
+            <p:ph type="body" idx="3" sz="quarter"/>
           </p:nvPr>
         </p:nvSpPr>
         <p:spPr/>
@@ -2289,7 +2098,7 @@
           <a:lstStyle/>
           <a:p>
             <a:r>
-              <a:t>Sources: notebooks/03_pipeline_leakage.ipynb, cells leak_cd12 (500 seeds) and leak_cd14 (whole region held out, via io.split_data(..., hold_out=region)). Literature: Ploton et al. 2020, Nature Communications 11:4540, doi:10.1038/s41467-020-18321-y; Kattenborn et al. 2022, ISPRS Open Journal of Photogrammetry and Remote Sensing, doi:10.1016/j.ophoto.2022.100018 (up to 28% overestimation of F1-score).</a:t>
+              <a:t>Sources: notebooks/02_distributions.ipynb cells cd09 (77,183), cd15 (442, 122,882, 278 times), cd18 (0.395), cd25 and cd26 (54,147; alpha 0.2677; AIC gap 2,393,669). Figure: figures/a3_poisson_vs_nb.png, title trimmed.</a:t>
             </a:r>
           </a:p>
         </p:txBody>
@@ -2301,7 +2110,7 @@
             <a:spLocks noGrp="1"/>
           </p:cNvSpPr>
           <p:nvPr>
-            <p:ph type="sldNum" sz="quarter" idx="5"/>
+            <p:ph type="sldNum" idx="5" sz="quarter"/>
           </p:nvPr>
         </p:nvSpPr>
         <p:spPr/>
@@ -2314,8 +2123,8 @@
 </p:notes>
 </file>
 
-<file path=ppt/notesSlides/notesSlide8.xml><?xml version="1.0" encoding="utf-8"?>
-<p:notes xmlns:a="http://schemas.openxmlformats.org/drawingml/2006/main" xmlns:r="http://schemas.openxmlformats.org/officeDocument/2006/relationships" xmlns:p="http://schemas.openxmlformats.org/presentationml/2006/main">
+<file path=ppt/notesSlides/notesSlide7.xml><?xml version="1.0" encoding="utf-8"?>
+<p:notes xmlns:a="http://schemas.openxmlformats.org/drawingml/2006/main" xmlns:p="http://schemas.openxmlformats.org/presentationml/2006/main" xmlns:r="http://schemas.openxmlformats.org/officeDocument/2006/relationships">
   <p:cSld>
     <p:spTree>
       <p:nvGrpSpPr>
@@ -2335,7 +2144,7 @@
         <p:nvSpPr>
           <p:cNvPr id="2" name="Slide Image Placeholder 1"/>
           <p:cNvSpPr>
-            <a:spLocks noGrp="1" noRot="1" noChangeAspect="1"/>
+            <a:spLocks noGrp="1"/>
           </p:cNvSpPr>
           <p:nvPr>
             <p:ph type="sldImg" idx="2"/>
@@ -2350,7 +2159,7 @@
             <a:spLocks noGrp="1"/>
           </p:cNvSpPr>
           <p:nvPr>
-            <p:ph type="body" sz="quarter" idx="3"/>
+            <p:ph type="body" idx="3" sz="quarter"/>
           </p:nvPr>
         </p:nvSpPr>
         <p:spPr/>
@@ -2359,12 +2168,7 @@
           <a:lstStyle/>
           <a:p>
             <a:r>
-              <a:t>Symbols: i = district (the unit); mu_i = expected confirmed cases, 2014-17 (the target); w_i = allocation weight (the metric); pop_i = population; c_i = % of homes owning a net in i's region (DHS 2022); U_i = upper 95% confidence bound for mu_i; q_i = exact share; A_i = nets.</a:t>
-            </a:r>
-          </a:p>
-          <a:p>
-            <a:r>
-              <a:t>Sources: notebooks/04_allocation.ipynb cells alloc_cd05 (alpha 0.2677) and alloc_cd11 (beta_1 = +0.0823, p = 1.7e-07; U_i / mu_i = 1.198, 1.342, 1.162; nets per 1,000 people); src/models.py compute_allocation and hamilton. Coverage values: notebooks/02 cell cd06 and scripts/verify_claims.py section D.</a:t>
+              <a:t>Sources: notebooks/02_distributions.ipynb cells cd31 (582 households, 20 clusters), cd33 and cd34 (15.20 vs 7.17, 2.12 times, design effect 4.50), cd37 (published ITN intervals empty, 0 of 76), cd39 (67.69% vs 67.6%). Seed spread 4.46 to 5.39 and design-based 4.18: scripts/verify_claims.py section A. Rank 10th of 16: scripts/verify_claims.py section D. Figure: figures/a4_bootstrap_ci_comparison.png, title trimmed.</a:t>
             </a:r>
           </a:p>
         </p:txBody>
@@ -2376,7 +2180,7 @@
             <a:spLocks noGrp="1"/>
           </p:cNvSpPr>
           <p:nvPr>
-            <p:ph type="sldNum" sz="quarter" idx="5"/>
+            <p:ph type="sldNum" idx="5" sz="quarter"/>
           </p:nvPr>
         </p:nvSpPr>
         <p:spPr/>
@@ -2389,8 +2193,8 @@
 </p:notes>
 </file>
 
-<file path=ppt/notesSlides/notesSlide9.xml><?xml version="1.0" encoding="utf-8"?>
-<p:notes xmlns:a="http://schemas.openxmlformats.org/drawingml/2006/main" xmlns:r="http://schemas.openxmlformats.org/officeDocument/2006/relationships" xmlns:p="http://schemas.openxmlformats.org/presentationml/2006/main">
+<file path=ppt/notesSlides/notesSlide8.xml><?xml version="1.0" encoding="utf-8"?>
+<p:notes xmlns:a="http://schemas.openxmlformats.org/drawingml/2006/main" xmlns:p="http://schemas.openxmlformats.org/presentationml/2006/main" xmlns:r="http://schemas.openxmlformats.org/officeDocument/2006/relationships">
   <p:cSld>
     <p:spTree>
       <p:nvGrpSpPr>
@@ -2410,7 +2214,7 @@
         <p:nvSpPr>
           <p:cNvPr id="2" name="Slide Image Placeholder 1"/>
           <p:cNvSpPr>
-            <a:spLocks noGrp="1" noRot="1" noChangeAspect="1"/>
+            <a:spLocks noGrp="1"/>
           </p:cNvSpPr>
           <p:nvPr>
             <p:ph type="sldImg" idx="2"/>
@@ -2425,7 +2229,7 @@
             <a:spLocks noGrp="1"/>
           </p:cNvSpPr>
           <p:nvPr>
-            <p:ph type="body" sz="quarter" idx="3"/>
+            <p:ph type="body" idx="3" sz="quarter"/>
           </p:nvPr>
         </p:nvSpPr>
         <p:spPr/>
@@ -2434,7 +2238,7 @@
           <a:lstStyle/>
           <a:p>
             <a:r>
-              <a:t>Sources: cases per person and the upper-to-expected ratios 1.198, 1.342 and 1.162: notebooks/04_allocation.ipynb cell alloc_cd11. Both maps are drawn with src/viz.plot_district_choropleth from models.compute_allocation, zoomed to the north like the allocation map. The two-map layout (burden next to uncertainty) follows the course roadmap.</a:t>
+              <a:t>Sources: notebooks/03_pipeline_leakage.ipynb cells leak_cd04 (87,144 vs 87,356), leak_cd06 (R² 1.0000 vs 0.2618), leak_cd08 (one seed), leak_cd12 (500 seeds) and leak_cd14 (whole region held out); the table itself is leak_cd10.</a:t>
             </a:r>
           </a:p>
         </p:txBody>
@@ -2446,7 +2250,77 @@
             <a:spLocks noGrp="1"/>
           </p:cNvSpPr>
           <p:nvPr>
-            <p:ph type="sldNum" sz="quarter" idx="5"/>
+            <p:ph type="sldNum" idx="5" sz="quarter"/>
+          </p:nvPr>
+        </p:nvSpPr>
+        <p:spPr/>
+      </p:sp>
+    </p:spTree>
+  </p:cSld>
+  <p:clrMapOvr>
+    <a:masterClrMapping/>
+  </p:clrMapOvr>
+</p:notes>
+</file>
+
+<file path=ppt/notesSlides/notesSlide9.xml><?xml version="1.0" encoding="utf-8"?>
+<p:notes xmlns:a="http://schemas.openxmlformats.org/drawingml/2006/main" xmlns:p="http://schemas.openxmlformats.org/presentationml/2006/main" xmlns:r="http://schemas.openxmlformats.org/officeDocument/2006/relationships">
+  <p:cSld>
+    <p:spTree>
+      <p:nvGrpSpPr>
+        <p:cNvPr id="1" name=""/>
+        <p:cNvGrpSpPr/>
+        <p:nvPr/>
+      </p:nvGrpSpPr>
+      <p:grpSpPr>
+        <a:xfrm>
+          <a:off x="0" y="0"/>
+          <a:ext cx="0" cy="0"/>
+          <a:chOff x="0" y="0"/>
+          <a:chExt cx="0" cy="0"/>
+        </a:xfrm>
+      </p:grpSpPr>
+      <p:sp>
+        <p:nvSpPr>
+          <p:cNvPr id="2" name="Slide Image Placeholder 1"/>
+          <p:cNvSpPr>
+            <a:spLocks noGrp="1"/>
+          </p:cNvSpPr>
+          <p:nvPr>
+            <p:ph type="sldImg" idx="2"/>
+          </p:nvPr>
+        </p:nvSpPr>
+        <p:spPr/>
+      </p:sp>
+      <p:sp>
+        <p:nvSpPr>
+          <p:cNvPr id="3" name="Notes Placeholder 2"/>
+          <p:cNvSpPr>
+            <a:spLocks noGrp="1"/>
+          </p:cNvSpPr>
+          <p:nvPr>
+            <p:ph type="body" idx="3" sz="quarter"/>
+          </p:nvPr>
+        </p:nvSpPr>
+        <p:spPr/>
+        <p:txBody>
+          <a:bodyPr/>
+          <a:lstStyle/>
+          <a:p>
+            <a:r>
+              <a:t>Sources: notebooks/03_pipeline_leakage.ipynb, cells leak_cd12 (500 seeds) and leak_cd14 (whole region held out, via io.split_data(..., hold_out=region)). Literature: Ploton et al. 2020, Nature Communications 11:4540, doi:10.1038/s41467-020-18321-y; Kattenborn et al. 2022, ISPRS Open Journal of Photogrammetry and Remote Sensing, doi:10.1016/j.ophoto.2022.100018 (up to 28% overestimation of F1-score).</a:t>
+            </a:r>
+          </a:p>
+        </p:txBody>
+      </p:sp>
+      <p:sp>
+        <p:nvSpPr>
+          <p:cNvPr id="4" name="Slide Number Placeholder 3"/>
+          <p:cNvSpPr>
+            <a:spLocks noGrp="1"/>
+          </p:cNvSpPr>
+          <p:nvPr>
+            <p:ph type="sldNum" idx="5" sz="quarter"/>
           </p:nvPr>
         </p:nvSpPr>
         <p:spPr/>
@@ -4918,7 +4792,7 @@
           <a:p>
             <a:fld id="{64B04F34-8FD2-3341-B014-12F06072F6DE}" type="datetimeFigureOut">
               <a:rPr lang="en-US" smtClean="0"/>
-              <a:t>9/25/26</a:t>
+              <a:t>2/3/26</a:t>
             </a:fld>
             <a:endParaRPr lang="en-US"/>
           </a:p>
@@ -5321,8 +5195,8 @@
 </p:sldMaster>
 </file>
 
-<file path=ppt/slides/slide1.xml><?xml version="1.0" encoding="utf-8"?>
-<p:sld xmlns:a="http://schemas.openxmlformats.org/drawingml/2006/main" xmlns:r="http://schemas.openxmlformats.org/officeDocument/2006/relationships" xmlns:p="http://schemas.openxmlformats.org/presentationml/2006/main">
+<file path=ppt/slides/slide10.xml><?xml version="1.0" encoding="utf-8"?>
+<p:sld xmlns:a="http://schemas.openxmlformats.org/drawingml/2006/main" xmlns:p="http://schemas.openxmlformats.org/presentationml/2006/main" xmlns:r="http://schemas.openxmlformats.org/officeDocument/2006/relationships">
   <p:cSld>
     <p:spTree>
       <p:nvGrpSpPr>
@@ -5330,14 +5204,7 @@
         <p:cNvGrpSpPr/>
         <p:nvPr/>
       </p:nvGrpSpPr>
-      <p:grpSpPr>
-        <a:xfrm>
-          <a:off x="0" y="0"/>
-          <a:ext cx="0" cy="0"/>
-          <a:chOff x="0" y="0"/>
-          <a:chExt cx="0" cy="0"/>
-        </a:xfrm>
-      </p:grpSpPr>
+      <p:grpSpPr/>
       <p:sp>
         <p:nvSpPr>
           <p:cNvPr id="2" name="Title 1"/>
@@ -5432,8 +5299,8 @@
 </p:sld>
 </file>
 
-<file path=ppt/slides/slide10.xml><?xml version="1.0" encoding="utf-8"?>
-<p:sld xmlns:a="http://schemas.openxmlformats.org/drawingml/2006/main" xmlns:r="http://schemas.openxmlformats.org/officeDocument/2006/relationships" xmlns:p="http://schemas.openxmlformats.org/presentationml/2006/main">
+<file path=ppt/slides/slide11.xml><?xml version="1.0" encoding="utf-8"?>
+<p:sld xmlns:a="http://schemas.openxmlformats.org/drawingml/2006/main" xmlns:p="http://schemas.openxmlformats.org/presentationml/2006/main" xmlns:r="http://schemas.openxmlformats.org/officeDocument/2006/relationships">
   <p:cSld>
     <p:spTree>
       <p:nvGrpSpPr>
@@ -5441,14 +5308,7 @@
         <p:cNvGrpSpPr/>
         <p:nvPr/>
       </p:nvGrpSpPr>
-      <p:grpSpPr>
-        <a:xfrm>
-          <a:off x="0" y="0"/>
-          <a:ext cx="0" cy="0"/>
-          <a:chOff x="0" y="0"/>
-          <a:chExt cx="0" cy="0"/>
-        </a:xfrm>
-      </p:grpSpPr>
+      <p:grpSpPr/>
       <p:sp>
         <p:nvSpPr>
           <p:cNvPr id="2" name="Text Placeholder 1"/>
@@ -5456,7 +5316,7 @@
             <a:spLocks noGrp="1"/>
           </p:cNvSpPr>
           <p:nvPr>
-            <p:ph type="body" sz="quarter" idx="11"/>
+            <p:ph type="body" idx="11" sz="quarter"/>
           </p:nvPr>
         </p:nvSpPr>
         <p:spPr>
@@ -5470,6 +5330,3320 @@
           <a:lstStyle/>
           <a:p>
             <a:r>
+              <a:t>Our recommendation</a:t>
+            </a:r>
+          </a:p>
+        </p:txBody>
+      </p:sp>
+      <p:sp>
+        <p:nvSpPr>
+          <p:cNvPr id="3" name="TextBox 2"/>
+          <p:cNvSpPr txBox="1"/>
+          <p:nvPr/>
+        </p:nvSpPr>
+        <p:spPr>
+          <a:xfrm>
+            <a:off x="566928" y="1463040"/>
+            <a:ext cx="11055096" cy="731520"/>
+          </a:xfrm>
+          <a:prstGeom prst="rect">
+            <a:avLst/>
+          </a:prstGeom>
+          <a:noFill/>
+        </p:spPr>
+        <p:txBody>
+          <a:bodyPr wrap="square" anchor="t" lIns="0" rIns="0" tIns="0" bIns="0">
+            <a:spAutoFit/>
+          </a:bodyPr>
+          <a:lstStyle/>
+          <a:p>
+            <a:pPr algn="l">
+              <a:spcAft>
+                <a:spcPts val="600"/>
+              </a:spcAft>
+            </a:pPr>
+            <a:r>
+              <a:rPr sz="1800" b="0" i="0">
+                <a:solidFill>
+                  <a:srgbClr val="262626"/>
+                </a:solidFill>
+                <a:latin typeface="Candara"/>
+              </a:rPr>
+              <a:t>For a 50,000-net consignment to the three northern regions: </a:t>
+            </a:r>
+            <a:r>
+              <a:rPr sz="1800" b="1" i="0">
+                <a:solidFill>
+                  <a:srgbClr val="262626"/>
+                </a:solidFill>
+                <a:latin typeface="Candara"/>
+              </a:rPr>
+              <a:t>allocate within each region in proportion to population</a:t>
+            </a:r>
+            <a:r>
+              <a:rPr sz="1800" b="0" i="0">
+                <a:solidFill>
+                  <a:srgbClr val="262626"/>
+                </a:solidFill>
+                <a:latin typeface="Candara"/>
+              </a:rPr>
+              <a:t>, with regional totals from our negative binomial model.</a:t>
+            </a:r>
+          </a:p>
+        </p:txBody>
+      </p:sp>
+      <p:sp>
+        <p:nvSpPr>
+          <p:cNvPr id="4" name="Rounded Rectangle 3"/>
+          <p:cNvSpPr/>
+          <p:nvPr/>
+        </p:nvSpPr>
+        <p:spPr>
+          <a:xfrm>
+            <a:off x="566928" y="2423160"/>
+            <a:ext cx="3502152" cy="2057400"/>
+          </a:xfrm>
+          <a:prstGeom prst="roundRect">
+            <a:avLst>
+              <a:gd name="adj" fmla="val 5000"/>
+            </a:avLst>
+          </a:prstGeom>
+          <a:solidFill>
+            <a:srgbClr val="F3F3F3"/>
+          </a:solidFill>
+          <a:ln>
+            <a:noFill/>
+          </a:ln>
+          <a:effectLst/>
+        </p:spPr>
+        <p:style>
+          <a:lnRef idx="1">
+            <a:schemeClr val="accent1"/>
+          </a:lnRef>
+          <a:fillRef idx="3">
+            <a:schemeClr val="accent1"/>
+          </a:fillRef>
+          <a:effectRef idx="2">
+            <a:schemeClr val="accent1"/>
+          </a:effectRef>
+          <a:fontRef idx="minor">
+            <a:schemeClr val="lt1"/>
+          </a:fontRef>
+        </p:style>
+        <p:txBody>
+          <a:bodyPr rtlCol="0" anchor="ctr" wrap="square" lIns="201168" rIns="201168" tIns="160934" bIns="160934"/>
+          <a:lstStyle/>
+          <a:p>
+            <a:pPr algn="l">
+              <a:spcAft>
+                <a:spcPts val="200"/>
+              </a:spcAft>
+            </a:pPr>
+            <a:r>
+              <a:rPr sz="4600" b="1" i="0">
+                <a:solidFill>
+                  <a:srgbClr val="AB3D3F"/>
+                </a:solidFill>
+                <a:latin typeface="Candara"/>
+              </a:rPr>
+              <a:t>24,196</a:t>
+            </a:r>
+          </a:p>
+          <a:p>
+            <a:pPr algn="l">
+              <a:spcAft>
+                <a:spcPts val="400"/>
+              </a:spcAft>
+            </a:pPr>
+            <a:r>
+              <a:rPr sz="1700" b="1" i="0">
+                <a:solidFill>
+                  <a:srgbClr val="262626"/>
+                </a:solidFill>
+                <a:latin typeface="Candara"/>
+              </a:rPr>
+              <a:t>nets for Northern Region</a:t>
+            </a:r>
+          </a:p>
+          <a:p>
+            <a:pPr algn="l">
+              <a:spcAft>
+                <a:spcPts val="600"/>
+              </a:spcAft>
+            </a:pPr>
+            <a:r>
+              <a:rPr sz="1400" b="0" i="0">
+                <a:solidFill>
+                  <a:srgbClr val="595959"/>
+                </a:solidFill>
+                <a:latin typeface="Candara"/>
+              </a:rPr>
+              <a:t>26 districts · 8.5 nets per 1,000 people</a:t>
+            </a:r>
+          </a:p>
+        </p:txBody>
+      </p:sp>
+      <p:sp>
+        <p:nvSpPr>
+          <p:cNvPr id="5" name="Rounded Rectangle 4"/>
+          <p:cNvSpPr/>
+          <p:nvPr/>
+        </p:nvSpPr>
+        <p:spPr>
+          <a:xfrm>
+            <a:off x="4343400" y="2423160"/>
+            <a:ext cx="3502152" cy="2057400"/>
+          </a:xfrm>
+          <a:prstGeom prst="roundRect">
+            <a:avLst>
+              <a:gd name="adj" fmla="val 5000"/>
+            </a:avLst>
+          </a:prstGeom>
+          <a:solidFill>
+            <a:srgbClr val="F3F3F3"/>
+          </a:solidFill>
+          <a:ln>
+            <a:noFill/>
+          </a:ln>
+          <a:effectLst/>
+        </p:spPr>
+        <p:style>
+          <a:lnRef idx="1">
+            <a:schemeClr val="accent1"/>
+          </a:lnRef>
+          <a:fillRef idx="3">
+            <a:schemeClr val="accent1"/>
+          </a:fillRef>
+          <a:effectRef idx="2">
+            <a:schemeClr val="accent1"/>
+          </a:effectRef>
+          <a:fontRef idx="minor">
+            <a:schemeClr val="lt1"/>
+          </a:fontRef>
+        </p:style>
+        <p:txBody>
+          <a:bodyPr rtlCol="0" anchor="ctr" wrap="square" lIns="201168" rIns="201168" tIns="160934" bIns="160934"/>
+          <a:lstStyle/>
+          <a:p>
+            <a:pPr algn="l">
+              <a:spcAft>
+                <a:spcPts val="200"/>
+              </a:spcAft>
+            </a:pPr>
+            <a:r>
+              <a:rPr sz="4600" b="1" i="0">
+                <a:solidFill>
+                  <a:srgbClr val="AB3D3F"/>
+                </a:solidFill>
+                <a:latin typeface="Candara"/>
+              </a:rPr>
+              <a:t>18,631</a:t>
+            </a:r>
+          </a:p>
+          <a:p>
+            <a:pPr algn="l">
+              <a:spcAft>
+                <a:spcPts val="400"/>
+              </a:spcAft>
+            </a:pPr>
+            <a:r>
+              <a:rPr sz="1700" b="1" i="0">
+                <a:solidFill>
+                  <a:srgbClr val="262626"/>
+                </a:solidFill>
+                <a:latin typeface="Candara"/>
+              </a:rPr>
+              <a:t>nets for Upper East</a:t>
+            </a:r>
+          </a:p>
+          <a:p>
+            <a:pPr algn="l">
+              <a:spcAft>
+                <a:spcPts val="600"/>
+              </a:spcAft>
+            </a:pPr>
+            <a:r>
+              <a:rPr sz="1400" b="0" i="0">
+                <a:solidFill>
+                  <a:srgbClr val="595959"/>
+                </a:solidFill>
+                <a:latin typeface="Candara"/>
+              </a:rPr>
+              <a:t>13 districts · 16.0 nets per 1,000 people</a:t>
+            </a:r>
+          </a:p>
+        </p:txBody>
+      </p:sp>
+      <p:sp>
+        <p:nvSpPr>
+          <p:cNvPr id="6" name="Rounded Rectangle 5"/>
+          <p:cNvSpPr/>
+          <p:nvPr/>
+        </p:nvSpPr>
+        <p:spPr>
+          <a:xfrm>
+            <a:off x="8119871" y="2423160"/>
+            <a:ext cx="3502152" cy="2057400"/>
+          </a:xfrm>
+          <a:prstGeom prst="roundRect">
+            <a:avLst>
+              <a:gd name="adj" fmla="val 5000"/>
+            </a:avLst>
+          </a:prstGeom>
+          <a:solidFill>
+            <a:srgbClr val="F3F3F3"/>
+          </a:solidFill>
+          <a:ln>
+            <a:noFill/>
+          </a:ln>
+          <a:effectLst/>
+        </p:spPr>
+        <p:style>
+          <a:lnRef idx="1">
+            <a:schemeClr val="accent1"/>
+          </a:lnRef>
+          <a:fillRef idx="3">
+            <a:schemeClr val="accent1"/>
+          </a:fillRef>
+          <a:effectRef idx="2">
+            <a:schemeClr val="accent1"/>
+          </a:effectRef>
+          <a:fontRef idx="minor">
+            <a:schemeClr val="lt1"/>
+          </a:fontRef>
+        </p:style>
+        <p:txBody>
+          <a:bodyPr rtlCol="0" anchor="ctr" wrap="square" lIns="201168" rIns="201168" tIns="160934" bIns="160934"/>
+          <a:lstStyle/>
+          <a:p>
+            <a:pPr algn="l">
+              <a:spcAft>
+                <a:spcPts val="200"/>
+              </a:spcAft>
+            </a:pPr>
+            <a:r>
+              <a:rPr sz="4600" b="1" i="0">
+                <a:solidFill>
+                  <a:srgbClr val="AB3D3F"/>
+                </a:solidFill>
+                <a:latin typeface="Candara"/>
+              </a:rPr>
+              <a:t>7,173</a:t>
+            </a:r>
+          </a:p>
+          <a:p>
+            <a:pPr algn="l">
+              <a:spcAft>
+                <a:spcPts val="400"/>
+              </a:spcAft>
+            </a:pPr>
+            <a:r>
+              <a:rPr sz="1700" b="1" i="0">
+                <a:solidFill>
+                  <a:srgbClr val="262626"/>
+                </a:solidFill>
+                <a:latin typeface="Candara"/>
+              </a:rPr>
+              <a:t>nets for Upper West</a:t>
+            </a:r>
+          </a:p>
+          <a:p>
+            <a:pPr algn="l">
+              <a:spcAft>
+                <a:spcPts val="600"/>
+              </a:spcAft>
+            </a:pPr>
+            <a:r>
+              <a:rPr sz="1400" b="0" i="0">
+                <a:solidFill>
+                  <a:srgbClr val="595959"/>
+                </a:solidFill>
+                <a:latin typeface="Candara"/>
+              </a:rPr>
+              <a:t>11 districts · 9.2 nets per 1,000 people</a:t>
+            </a:r>
+          </a:p>
+        </p:txBody>
+      </p:sp>
+      <p:sp>
+        <p:nvSpPr>
+          <p:cNvPr id="7" name="TextBox 6"/>
+          <p:cNvSpPr txBox="1"/>
+          <p:nvPr/>
+        </p:nvSpPr>
+        <p:spPr>
+          <a:xfrm>
+            <a:off x="566928" y="4663440"/>
+            <a:ext cx="11055096" cy="1188720"/>
+          </a:xfrm>
+          <a:prstGeom prst="rect">
+            <a:avLst/>
+          </a:prstGeom>
+          <a:noFill/>
+        </p:spPr>
+        <p:txBody>
+          <a:bodyPr wrap="square" anchor="t" lIns="0" rIns="0" tIns="0" bIns="0">
+            <a:spAutoFit/>
+          </a:bodyPr>
+          <a:lstStyle/>
+          <a:p>
+            <a:pPr algn="l">
+              <a:spcAft>
+                <a:spcPts val="600"/>
+              </a:spcAft>
+            </a:pPr>
+            <a:r>
+              <a:rPr sz="1500" b="1" i="0">
+                <a:solidFill>
+                  <a:srgbClr val="AB3D3F"/>
+                </a:solidFill>
+                <a:latin typeface="Candara"/>
+              </a:rPr>
+              <a:t>Why population within a region: </a:t>
+            </a:r>
+            <a:r>
+              <a:rPr sz="1500" b="0" i="0">
+                <a:solidFill>
+                  <a:srgbClr val="262626"/>
+                </a:solidFill>
+                <a:latin typeface="Candara"/>
+              </a:rPr>
+              <a:t>net coverage is measured once per region, so our data cannot tell two districts in the same region apart.</a:t>
+            </a:r>
+          </a:p>
+          <a:p>
+            <a:pPr algn="l">
+              <a:spcAft>
+                <a:spcPts val="600"/>
+              </a:spcAft>
+            </a:pPr>
+            <a:r>
+              <a:rPr sz="1500" b="1" i="0">
+                <a:solidFill>
+                  <a:srgbClr val="AB3D3F"/>
+                </a:solidFill>
+                <a:latin typeface="Candara"/>
+              </a:rPr>
+              <a:t>How sure we are: </a:t>
+            </a:r>
+            <a:r>
+              <a:rPr sz="1500" b="0" i="0">
+                <a:solidFill>
+                  <a:srgbClr val="262626"/>
+                </a:solidFill>
+                <a:latin typeface="Candara"/>
+              </a:rPr>
+              <a:t>the shares within each region are robust. The regional totals are our base case: a better-fitting model moves 7,720 nets between regions (slide 13).</a:t>
+            </a:r>
+          </a:p>
+        </p:txBody>
+      </p:sp>
+    </p:spTree>
+  </p:cSld>
+  <p:clrMapOvr>
+    <a:masterClrMapping/>
+  </p:clrMapOvr>
+</p:sld>
+</file>
+
+<file path=ppt/slides/slide12.xml><?xml version="1.0" encoding="utf-8"?>
+<p:sld xmlns:a="http://schemas.openxmlformats.org/drawingml/2006/main" xmlns:p="http://schemas.openxmlformats.org/presentationml/2006/main" xmlns:r="http://schemas.openxmlformats.org/officeDocument/2006/relationships">
+  <p:cSld>
+    <p:spTree>
+      <p:nvGrpSpPr>
+        <p:cNvPr id="1" name=""/>
+        <p:cNvGrpSpPr/>
+        <p:nvPr/>
+      </p:nvGrpSpPr>
+      <p:grpSpPr/>
+      <p:sp>
+        <p:nvSpPr>
+          <p:cNvPr id="2" name="Text Placeholder 1"/>
+          <p:cNvSpPr>
+            <a:spLocks noGrp="1"/>
+          </p:cNvSpPr>
+          <p:nvPr>
+            <p:ph type="body" idx="11" sz="quarter"/>
+          </p:nvPr>
+        </p:nvSpPr>
+        <p:spPr>
+          <a:xfrm>
+            <a:off x="571500" y="571500"/>
+            <a:ext cx="11055096" cy="737700"/>
+          </a:xfrm>
+        </p:spPr>
+        <p:txBody>
+          <a:bodyPr/>
+          <a:lstStyle/>
+          <a:p>
+            <a:r>
+              <a:t>Averages hide local risk</a:t>
+            </a:r>
+          </a:p>
+        </p:txBody>
+      </p:sp>
+      <p:sp>
+        <p:nvSpPr>
+          <p:cNvPr id="3" name="Rounded Rectangle 2"/>
+          <p:cNvSpPr/>
+          <p:nvPr/>
+        </p:nvSpPr>
+        <p:spPr>
+          <a:xfrm>
+            <a:off x="566928" y="1554480"/>
+            <a:ext cx="5394960" cy="2743200"/>
+          </a:xfrm>
+          <a:prstGeom prst="roundRect">
+            <a:avLst>
+              <a:gd name="adj" fmla="val 5000"/>
+            </a:avLst>
+          </a:prstGeom>
+          <a:solidFill>
+            <a:srgbClr val="F3F3F3"/>
+          </a:solidFill>
+          <a:ln>
+            <a:noFill/>
+          </a:ln>
+          <a:effectLst/>
+        </p:spPr>
+        <p:style>
+          <a:lnRef idx="1">
+            <a:schemeClr val="accent1"/>
+          </a:lnRef>
+          <a:fillRef idx="3">
+            <a:schemeClr val="accent1"/>
+          </a:fillRef>
+          <a:effectRef idx="2">
+            <a:schemeClr val="accent1"/>
+          </a:effectRef>
+          <a:fontRef idx="minor">
+            <a:schemeClr val="lt1"/>
+          </a:fontRef>
+        </p:style>
+        <p:txBody>
+          <a:bodyPr rtlCol="0" anchor="t" wrap="square" lIns="274320" rIns="274320" tIns="219456" bIns="219456"/>
+          <a:lstStyle/>
+          <a:p>
+            <a:pPr algn="l">
+              <a:spcAft>
+                <a:spcPts val="400"/>
+              </a:spcAft>
+            </a:pPr>
+            <a:r>
+              <a:rPr sz="6600" b="1" i="0">
+                <a:solidFill>
+                  <a:srgbClr val="AB3D3F"/>
+                </a:solidFill>
+                <a:latin typeface="Candara"/>
+              </a:rPr>
+              <a:t>2%</a:t>
+            </a:r>
+          </a:p>
+          <a:p>
+            <a:pPr algn="l">
+              <a:spcAft>
+                <a:spcPts val="400"/>
+              </a:spcAft>
+            </a:pPr>
+            <a:r>
+              <a:rPr sz="1800" b="1" i="0">
+                <a:solidFill>
+                  <a:srgbClr val="262626"/>
+                </a:solidFill>
+                <a:latin typeface="Candara"/>
+              </a:rPr>
+              <a:t>Greater Accra malaria prevalence, 2022 DHS</a:t>
+            </a:r>
+          </a:p>
+          <a:p>
+            <a:pPr algn="l">
+              <a:spcAft>
+                <a:spcPts val="600"/>
+              </a:spcAft>
+            </a:pPr>
+            <a:r>
+              <a:rPr sz="1400" b="0" i="0">
+                <a:solidFill>
+                  <a:srgbClr val="595959"/>
+                </a:solidFill>
+                <a:latin typeface="Candara"/>
+              </a:rPr>
+              <a:t>Children 6 to 59 months, microscopy</a:t>
+            </a:r>
+          </a:p>
+        </p:txBody>
+      </p:sp>
+      <p:sp>
+        <p:nvSpPr>
+          <p:cNvPr id="4" name="Rounded Rectangle 3"/>
+          <p:cNvSpPr/>
+          <p:nvPr/>
+        </p:nvSpPr>
+        <p:spPr>
+          <a:xfrm>
+            <a:off x="6227064" y="1554480"/>
+            <a:ext cx="5394960" cy="2743200"/>
+          </a:xfrm>
+          <a:prstGeom prst="roundRect">
+            <a:avLst>
+              <a:gd name="adj" fmla="val 5000"/>
+            </a:avLst>
+          </a:prstGeom>
+          <a:solidFill>
+            <a:srgbClr val="F3F3F3"/>
+          </a:solidFill>
+          <a:ln>
+            <a:noFill/>
+          </a:ln>
+          <a:effectLst/>
+        </p:spPr>
+        <p:style>
+          <a:lnRef idx="1">
+            <a:schemeClr val="accent1"/>
+          </a:lnRef>
+          <a:fillRef idx="3">
+            <a:schemeClr val="accent1"/>
+          </a:fillRef>
+          <a:effectRef idx="2">
+            <a:schemeClr val="accent1"/>
+          </a:effectRef>
+          <a:fontRef idx="minor">
+            <a:schemeClr val="lt1"/>
+          </a:fontRef>
+        </p:style>
+        <p:txBody>
+          <a:bodyPr rtlCol="0" anchor="t" wrap="square" lIns="274320" rIns="274320" tIns="219456" bIns="219456"/>
+          <a:lstStyle/>
+          <a:p>
+            <a:pPr algn="l">
+              <a:spcAft>
+                <a:spcPts val="400"/>
+              </a:spcAft>
+            </a:pPr>
+            <a:r>
+              <a:rPr sz="6600" b="1" i="0">
+                <a:solidFill>
+                  <a:srgbClr val="AB3D3F"/>
+                </a:solidFill>
+                <a:latin typeface="Candara"/>
+              </a:rPr>
+              <a:t>0 to 49%</a:t>
+            </a:r>
+          </a:p>
+          <a:p>
+            <a:pPr algn="l">
+              <a:spcAft>
+                <a:spcPts val="400"/>
+              </a:spcAft>
+            </a:pPr>
+            <a:r>
+              <a:rPr sz="1800" b="1" i="0">
+                <a:solidFill>
+                  <a:srgbClr val="262626"/>
+                </a:solidFill>
+                <a:latin typeface="Candara"/>
+              </a:rPr>
+              <a:t>Predicted prevalence across all 29 Greater Accra districts</a:t>
+            </a:r>
+          </a:p>
+          <a:p>
+            <a:pPr algn="l">
+              <a:spcAft>
+                <a:spcPts val="600"/>
+              </a:spcAft>
+            </a:pPr>
+            <a:r>
+              <a:rPr sz="1400" b="0" i="0">
+                <a:solidFill>
+                  <a:srgbClr val="595959"/>
+                </a:solidFill>
+                <a:latin typeface="Candara"/>
+              </a:rPr>
+              <a:t>2020 household survey and geostatistical model, children 6 months to 10 years, rapid tests</a:t>
+            </a:r>
+          </a:p>
+        </p:txBody>
+      </p:sp>
+      <p:sp>
+        <p:nvSpPr>
+          <p:cNvPr id="5" name="TextBox 4"/>
+          <p:cNvSpPr txBox="1"/>
+          <p:nvPr/>
+        </p:nvSpPr>
+        <p:spPr>
+          <a:xfrm>
+            <a:off x="566928" y="4709160"/>
+            <a:ext cx="11055096" cy="1005840"/>
+          </a:xfrm>
+          <a:prstGeom prst="rect">
+            <a:avLst/>
+          </a:prstGeom>
+          <a:noFill/>
+        </p:spPr>
+        <p:txBody>
+          <a:bodyPr wrap="square" anchor="t" lIns="0" rIns="0" tIns="0" bIns="0">
+            <a:spAutoFit/>
+          </a:bodyPr>
+          <a:lstStyle/>
+          <a:p>
+            <a:pPr algn="l">
+              <a:spcAft>
+                <a:spcPts val="600"/>
+              </a:spcAft>
+            </a:pPr>
+            <a:r>
+              <a:rPr sz="1600" b="0" i="0">
+                <a:solidFill>
+                  <a:srgbClr val="262626"/>
+                </a:solidFill>
+                <a:latin typeface="Candara"/>
+              </a:rPr>
+              <a:t>Different ages and tests, so this is not like for like. The point is the spread: one regional figure can hide districts at very high risk. That is why we wanted district-level targeting; the next slide shows how far our data allow it.</a:t>
+            </a:r>
+          </a:p>
+        </p:txBody>
+      </p:sp>
+    </p:spTree>
+  </p:cSld>
+  <p:clrMapOvr>
+    <a:masterClrMapping/>
+  </p:clrMapOvr>
+</p:sld>
+</file>
+
+<file path=ppt/slides/slide13.xml><?xml version="1.0" encoding="utf-8"?>
+<p:sld xmlns:a="http://schemas.openxmlformats.org/drawingml/2006/main" xmlns:p="http://schemas.openxmlformats.org/presentationml/2006/main" xmlns:r="http://schemas.openxmlformats.org/officeDocument/2006/relationships">
+  <p:cSld>
+    <p:spTree>
+      <p:nvGrpSpPr>
+        <p:cNvPr id="1" name=""/>
+        <p:cNvGrpSpPr/>
+        <p:nvPr/>
+      </p:nvGrpSpPr>
+      <p:grpSpPr/>
+      <p:sp>
+        <p:nvSpPr>
+          <p:cNvPr id="2" name="Text Placeholder 1"/>
+          <p:cNvSpPr>
+            <a:spLocks noGrp="1"/>
+          </p:cNvSpPr>
+          <p:nvPr>
+            <p:ph type="body" idx="11" sz="quarter"/>
+          </p:nvPr>
+        </p:nvSpPr>
+        <p:spPr>
+          <a:xfrm>
+            <a:off x="571500" y="571500"/>
+            <a:ext cx="11055096" cy="737700"/>
+          </a:xfrm>
+        </p:spPr>
+        <p:txBody>
+          <a:bodyPr/>
+          <a:lstStyle/>
+          <a:p>
+            <a:r>
+              <a:t>Our data, and where it is thin</a:t>
+            </a:r>
+          </a:p>
+        </p:txBody>
+      </p:sp>
+      <p:pic>
+        <p:nvPicPr>
+          <p:cNvPr id="3" name="Picture 2" descr="b1_data_availability.png"/>
+          <p:cNvPicPr>
+            <a:picLocks noChangeAspect="1"/>
+          </p:cNvPicPr>
+          <p:nvPr/>
+        </p:nvPicPr>
+        <p:blipFill>
+          <a:blip r:embed="rId2"/>
+          <a:stretch>
+            <a:fillRect/>
+          </a:stretch>
+        </p:blipFill>
+        <p:spPr>
+          <a:xfrm>
+            <a:off x="736279" y="1417320"/>
+            <a:ext cx="2907416" cy="3611880"/>
+          </a:xfrm>
+          <a:prstGeom prst="rect">
+            <a:avLst/>
+          </a:prstGeom>
+        </p:spPr>
+      </p:pic>
+      <p:pic>
+        <p:nvPicPr>
+          <p:cNvPr id="4" name="Picture 3" descr="b1_district_case_rate.png"/>
+          <p:cNvPicPr>
+            <a:picLocks noChangeAspect="1"/>
+          </p:cNvPicPr>
+          <p:nvPr/>
+        </p:nvPicPr>
+        <p:blipFill>
+          <a:blip r:embed="rId3"/>
+          <a:stretch>
+            <a:fillRect/>
+          </a:stretch>
+        </p:blipFill>
+        <p:spPr>
+          <a:xfrm>
+            <a:off x="4341671" y="1417320"/>
+            <a:ext cx="2646072" cy="3611880"/>
+          </a:xfrm>
+          <a:prstGeom prst="rect">
+            <a:avLst/>
+          </a:prstGeom>
+        </p:spPr>
+      </p:pic>
+      <p:sp>
+        <p:nvSpPr>
+          <p:cNvPr id="5" name="TextBox 4"/>
+          <p:cNvSpPr txBox="1"/>
+          <p:nvPr/>
+        </p:nvSpPr>
+        <p:spPr>
+          <a:xfrm>
+            <a:off x="566928" y="5120640"/>
+            <a:ext cx="3246120" cy="731520"/>
+          </a:xfrm>
+          <a:prstGeom prst="rect">
+            <a:avLst/>
+          </a:prstGeom>
+          <a:noFill/>
+        </p:spPr>
+        <p:txBody>
+          <a:bodyPr wrap="square" anchor="t" lIns="0" rIns="0" tIns="0" bIns="0">
+            <a:spAutoFit/>
+          </a:bodyPr>
+          <a:lstStyle/>
+          <a:p>
+            <a:pPr algn="l">
+              <a:spcAft>
+                <a:spcPts val="600"/>
+              </a:spcAft>
+            </a:pPr>
+            <a:r>
+              <a:rPr sz="1200" b="1" i="0">
+                <a:solidFill>
+                  <a:srgbClr val="262626"/>
+                </a:solidFill>
+                <a:latin typeface="Candara"/>
+              </a:rPr>
+              <a:t>Household survey, DHS 2022. </a:t>
+            </a:r>
+            <a:r>
+              <a:rPr sz="1200" b="0" i="0">
+                <a:solidFill>
+                  <a:srgbClr val="262626"/>
+                </a:solidFill>
+                <a:latin typeface="Candara"/>
+              </a:rPr>
+              <a:t>17,933 households in 618 clusters, all 16 regions; no district identifier.</a:t>
+            </a:r>
+          </a:p>
+        </p:txBody>
+      </p:sp>
+      <p:sp>
+        <p:nvSpPr>
+          <p:cNvPr id="6" name="TextBox 5"/>
+          <p:cNvSpPr txBox="1"/>
+          <p:nvPr/>
+        </p:nvSpPr>
+        <p:spPr>
+          <a:xfrm>
+            <a:off x="4041648" y="5120640"/>
+            <a:ext cx="3246120" cy="731520"/>
+          </a:xfrm>
+          <a:prstGeom prst="rect">
+            <a:avLst/>
+          </a:prstGeom>
+          <a:noFill/>
+        </p:spPr>
+        <p:txBody>
+          <a:bodyPr wrap="square" anchor="t" lIns="0" rIns="0" tIns="0" bIns="0">
+            <a:spAutoFit/>
+          </a:bodyPr>
+          <a:lstStyle/>
+          <a:p>
+            <a:pPr algn="l">
+              <a:spcAft>
+                <a:spcPts val="600"/>
+              </a:spcAft>
+            </a:pPr>
+            <a:r>
+              <a:rPr sz="1200" b="1" i="0">
+                <a:solidFill>
+                  <a:srgbClr val="262626"/>
+                </a:solidFill>
+                <a:latin typeface="Candara"/>
+              </a:rPr>
+              <a:t>Routine surveillance, 2014-17. </a:t>
+            </a:r>
+            <a:r>
+              <a:rPr sz="1200" b="0" i="0">
+                <a:solidFill>
+                  <a:srgbClr val="262626"/>
+                </a:solidFill>
+                <a:latin typeface="Candara"/>
+              </a:rPr>
+              <a:t>Cases for 50 northern districts only; 207 of today's 260 districts have none in our data.</a:t>
+            </a:r>
+          </a:p>
+        </p:txBody>
+      </p:sp>
+      <p:sp>
+        <p:nvSpPr>
+          <p:cNvPr id="7" name="Rounded Rectangle 6"/>
+          <p:cNvSpPr/>
+          <p:nvPr/>
+        </p:nvSpPr>
+        <p:spPr>
+          <a:xfrm>
+            <a:off x="7635240" y="1417320"/>
+            <a:ext cx="3986784" cy="4343400"/>
+          </a:xfrm>
+          <a:prstGeom prst="roundRect">
+            <a:avLst>
+              <a:gd name="adj" fmla="val 5000"/>
+            </a:avLst>
+          </a:prstGeom>
+          <a:solidFill>
+            <a:srgbClr val="F3F3F3"/>
+          </a:solidFill>
+          <a:ln>
+            <a:noFill/>
+          </a:ln>
+          <a:effectLst/>
+        </p:spPr>
+        <p:style>
+          <a:lnRef idx="1">
+            <a:schemeClr val="accent1"/>
+          </a:lnRef>
+          <a:fillRef idx="3">
+            <a:schemeClr val="accent1"/>
+          </a:fillRef>
+          <a:effectRef idx="2">
+            <a:schemeClr val="accent1"/>
+          </a:effectRef>
+          <a:fontRef idx="minor">
+            <a:schemeClr val="lt1"/>
+          </a:fontRef>
+        </p:style>
+        <p:txBody>
+          <a:bodyPr rtlCol="0" anchor="t" wrap="square" lIns="201168" rIns="201168" tIns="160934" bIns="160934"/>
+          <a:lstStyle/>
+          <a:p>
+            <a:pPr algn="l">
+              <a:spcAft>
+                <a:spcPts val="800"/>
+              </a:spcAft>
+            </a:pPr>
+            <a:r>
+              <a:rPr sz="1800" b="1" i="0">
+                <a:solidFill>
+                  <a:srgbClr val="AB3D3F"/>
+                </a:solidFill>
+                <a:latin typeface="Candara"/>
+              </a:rPr>
+              <a:t>What this means</a:t>
+            </a:r>
+          </a:p>
+          <a:p>
+            <a:pPr algn="l" marL="219456" indent="-219456">
+              <a:spcAft>
+                <a:spcPts val="800"/>
+              </a:spcAft>
+              <a:buClr>
+                <a:srgbClr val="AB3D3F"/>
+              </a:buClr>
+              <a:buFont typeface="Arial"/>
+              <a:buChar char="•"/>
+            </a:pPr>
+            <a:r>
+              <a:rPr sz="1500" b="1" i="0">
+                <a:solidFill>
+                  <a:srgbClr val="262626"/>
+                </a:solidFill>
+                <a:latin typeface="Candara"/>
+              </a:rPr>
+              <a:t>Weights matter. </a:t>
+            </a:r>
+            <a:r>
+              <a:rPr sz="1500" b="0" i="0">
+                <a:solidFill>
+                  <a:srgbClr val="262626"/>
+                </a:solidFill>
+                <a:latin typeface="Candara"/>
+              </a:rPr>
+              <a:t>Unweighted, 71.0% of households own a net; weighted, 66.8%.</a:t>
+            </a:r>
+          </a:p>
+          <a:p>
+            <a:pPr algn="l" marL="219456" indent="-219456">
+              <a:spcAft>
+                <a:spcPts val="800"/>
+              </a:spcAft>
+              <a:buClr>
+                <a:srgbClr val="AB3D3F"/>
+              </a:buClr>
+              <a:buFont typeface="Arial"/>
+              <a:buChar char="•"/>
+            </a:pPr>
+            <a:r>
+              <a:rPr sz="1500" b="1" i="0">
+                <a:solidFill>
+                  <a:srgbClr val="262626"/>
+                </a:solidFill>
+                <a:latin typeface="Candara"/>
+              </a:rPr>
+              <a:t>Different years. </a:t>
+            </a:r>
+            <a:r>
+              <a:rPr sz="1500" b="0" i="0">
+                <a:solidFill>
+                  <a:srgbClr val="262626"/>
+                </a:solidFill>
+                <a:latin typeface="Candara"/>
+              </a:rPr>
+              <a:t>Net coverage is from 2022; cases are from 2014-17.</a:t>
+            </a:r>
+          </a:p>
+          <a:p>
+            <a:pPr algn="l" marL="219456" indent="-219456">
+              <a:spcAft>
+                <a:spcPts val="800"/>
+              </a:spcAft>
+              <a:buClr>
+                <a:srgbClr val="AB3D3F"/>
+              </a:buClr>
+              <a:buFont typeface="Arial"/>
+              <a:buChar char="•"/>
+            </a:pPr>
+            <a:r>
+              <a:rPr sz="1500" b="1" i="0">
+                <a:solidFill>
+                  <a:srgbClr val="262626"/>
+                </a:solidFill>
+                <a:latin typeface="Candara"/>
+              </a:rPr>
+              <a:t>Coarse coverage. </a:t>
+            </a:r>
+            <a:r>
+              <a:rPr sz="1500" b="0" i="0">
+                <a:solidFill>
+                  <a:srgbClr val="262626"/>
+                </a:solidFill>
+                <a:latin typeface="Candara"/>
+              </a:rPr>
+              <a:t>Coverage is known only by region: three values for 50 districts.</a:t>
+            </a:r>
+          </a:p>
+          <a:p>
+            <a:pPr algn="l" marL="219456" indent="-219456">
+              <a:spcAft>
+                <a:spcPts val="1200"/>
+              </a:spcAft>
+              <a:buClr>
+                <a:srgbClr val="AB3D3F"/>
+              </a:buClr>
+              <a:buFont typeface="Arial"/>
+              <a:buChar char="•"/>
+            </a:pPr>
+            <a:r>
+              <a:rPr sz="1500" b="1" i="0">
+                <a:solidFill>
+                  <a:srgbClr val="262626"/>
+                </a:solidFill>
+                <a:latin typeface="Candara"/>
+              </a:rPr>
+              <a:t>No district survey data. </a:t>
+            </a:r>
+            <a:r>
+              <a:rPr sz="1500" b="0" i="0">
+                <a:solidFill>
+                  <a:srgbClr val="262626"/>
+                </a:solidFill>
+                <a:latin typeface="Candara"/>
+              </a:rPr>
+              <a:t>The survey can rank regions, not districts.</a:t>
+            </a:r>
+          </a:p>
+          <a:p>
+            <a:pPr algn="l">
+              <a:spcAft>
+                <a:spcPts val="600"/>
+              </a:spcAft>
+            </a:pPr>
+            <a:r>
+              <a:rPr sz="1500" b="1" i="0">
+                <a:solidFill>
+                  <a:srgbClr val="AB3D3F"/>
+                </a:solidFill>
+                <a:latin typeface="Candara"/>
+              </a:rPr>
+              <a:t>So: </a:t>
+            </a:r>
+            <a:r>
+              <a:rPr sz="1500" b="0" i="0">
+                <a:solidFill>
+                  <a:srgbClr val="262626"/>
+                </a:solidFill>
+                <a:latin typeface="Candara"/>
+              </a:rPr>
+              <a:t>our rule, expected cases × the share of households without a net, can separate regions but not districts within a region.</a:t>
+            </a:r>
+          </a:p>
+        </p:txBody>
+      </p:sp>
+    </p:spTree>
+  </p:cSld>
+  <p:clrMapOvr>
+    <a:masterClrMapping/>
+  </p:clrMapOvr>
+</p:sld>
+</file>
+
+<file path=ppt/slides/slide14.xml><?xml version="1.0" encoding="utf-8"?>
+<p:sld xmlns:a="http://schemas.openxmlformats.org/drawingml/2006/main" xmlns:p="http://schemas.openxmlformats.org/presentationml/2006/main" xmlns:r="http://schemas.openxmlformats.org/officeDocument/2006/relationships">
+  <p:cSld>
+    <p:spTree>
+      <p:nvGrpSpPr>
+        <p:cNvPr id="1" name=""/>
+        <p:cNvGrpSpPr/>
+        <p:nvPr/>
+      </p:nvGrpSpPr>
+      <p:grpSpPr/>
+      <p:sp>
+        <p:nvSpPr>
+          <p:cNvPr id="2" name="Text Placeholder 1"/>
+          <p:cNvSpPr>
+            <a:spLocks noGrp="1"/>
+          </p:cNvSpPr>
+          <p:nvPr>
+            <p:ph type="body" idx="11" sz="quarter"/>
+          </p:nvPr>
+        </p:nvSpPr>
+        <p:spPr>
+          <a:xfrm>
+            <a:off x="571500" y="571500"/>
+            <a:ext cx="11055096" cy="737700"/>
+          </a:xfrm>
+        </p:spPr>
+        <p:txBody>
+          <a:bodyPr/>
+          <a:lstStyle/>
+          <a:p>
+            <a:r>
+              <a:rPr sz="3000"/>
+              <a:t>Case counts vary far more than Poisson allows</a:t>
+            </a:r>
+          </a:p>
+        </p:txBody>
+      </p:sp>
+      <p:sp>
+        <p:nvSpPr>
+          <p:cNvPr id="3" name="TextBox 2"/>
+          <p:cNvSpPr txBox="1"/>
+          <p:nvPr/>
+        </p:nvSpPr>
+        <p:spPr>
+          <a:xfrm>
+            <a:off x="566928" y="1463040"/>
+            <a:ext cx="4754880" cy="960120"/>
+          </a:xfrm>
+          <a:prstGeom prst="rect">
+            <a:avLst/>
+          </a:prstGeom>
+          <a:noFill/>
+        </p:spPr>
+        <p:txBody>
+          <a:bodyPr wrap="square" anchor="t" lIns="0" rIns="0" tIns="0" bIns="0">
+            <a:spAutoFit/>
+          </a:bodyPr>
+          <a:lstStyle/>
+          <a:p>
+            <a:pPr algn="l">
+              <a:spcAft>
+                <a:spcPts val="0"/>
+              </a:spcAft>
+            </a:pPr>
+            <a:r>
+              <a:rPr sz="3000" b="1" i="0">
+                <a:solidFill>
+                  <a:srgbClr val="AB3D3F"/>
+                </a:solidFill>
+                <a:latin typeface="Candara"/>
+              </a:rPr>
+              <a:t>77,183</a:t>
+            </a:r>
+          </a:p>
+          <a:p>
+            <a:pPr algn="l">
+              <a:spcAft>
+                <a:spcPts val="600"/>
+              </a:spcAft>
+            </a:pPr>
+            <a:r>
+              <a:rPr sz="1300" b="0" i="0">
+                <a:solidFill>
+                  <a:srgbClr val="262626"/>
+                </a:solidFill>
+                <a:latin typeface="Candara"/>
+              </a:rPr>
+              <a:t>variance-to-mean ratio of district case counts; a Poisson model requires 1</a:t>
+            </a:r>
+          </a:p>
+        </p:txBody>
+      </p:sp>
+      <p:sp>
+        <p:nvSpPr>
+          <p:cNvPr id="4" name="TextBox 3"/>
+          <p:cNvSpPr txBox="1"/>
+          <p:nvPr/>
+        </p:nvSpPr>
+        <p:spPr>
+          <a:xfrm>
+            <a:off x="566928" y="2487168"/>
+            <a:ext cx="4754880" cy="960120"/>
+          </a:xfrm>
+          <a:prstGeom prst="rect">
+            <a:avLst/>
+          </a:prstGeom>
+          <a:noFill/>
+        </p:spPr>
+        <p:txBody>
+          <a:bodyPr wrap="square" anchor="t" lIns="0" rIns="0" tIns="0" bIns="0">
+            <a:spAutoFit/>
+          </a:bodyPr>
+          <a:lstStyle/>
+          <a:p>
+            <a:pPr algn="l">
+              <a:spcAft>
+                <a:spcPts val="0"/>
+              </a:spcAft>
+            </a:pPr>
+            <a:r>
+              <a:rPr sz="3000" b="1" i="0">
+                <a:solidFill>
+                  <a:srgbClr val="AB3D3F"/>
+                </a:solidFill>
+                <a:latin typeface="Candara"/>
+              </a:rPr>
+              <a:t>442 vs 122,882</a:t>
+            </a:r>
+          </a:p>
+          <a:p>
+            <a:pPr algn="l">
+              <a:spcAft>
+                <a:spcPts val="600"/>
+              </a:spcAft>
+            </a:pPr>
+            <a:r>
+              <a:rPr sz="1300" b="0" i="0">
+                <a:solidFill>
+                  <a:srgbClr val="262626"/>
+                </a:solidFill>
+                <a:latin typeface="Candara"/>
+              </a:rPr>
+              <a:t>spread a Poisson implies (standard deviation) against what we observe: 278 times too narrow</a:t>
+            </a:r>
+          </a:p>
+        </p:txBody>
+      </p:sp>
+      <p:sp>
+        <p:nvSpPr>
+          <p:cNvPr id="5" name="TextBox 4"/>
+          <p:cNvSpPr txBox="1"/>
+          <p:nvPr/>
+        </p:nvSpPr>
+        <p:spPr>
+          <a:xfrm>
+            <a:off x="566928" y="3511296"/>
+            <a:ext cx="4754880" cy="960120"/>
+          </a:xfrm>
+          <a:prstGeom prst="rect">
+            <a:avLst/>
+          </a:prstGeom>
+          <a:noFill/>
+        </p:spPr>
+        <p:txBody>
+          <a:bodyPr wrap="square" anchor="t" lIns="0" rIns="0" tIns="0" bIns="0">
+            <a:spAutoFit/>
+          </a:bodyPr>
+          <a:lstStyle/>
+          <a:p>
+            <a:pPr algn="l">
+              <a:spcAft>
+                <a:spcPts val="0"/>
+              </a:spcAft>
+            </a:pPr>
+            <a:r>
+              <a:rPr sz="3000" b="1" i="0">
+                <a:solidFill>
+                  <a:srgbClr val="AB3D3F"/>
+                </a:solidFill>
+                <a:latin typeface="Candara"/>
+              </a:rPr>
+              <a:t>54,147</a:t>
+            </a:r>
+          </a:p>
+          <a:p>
+            <a:pPr algn="l">
+              <a:spcAft>
+                <a:spcPts val="600"/>
+              </a:spcAft>
+            </a:pPr>
+            <a:r>
+              <a:rPr sz="1300" b="0" i="0">
+                <a:solidFill>
+                  <a:srgbClr val="262626"/>
+                </a:solidFill>
+                <a:latin typeface="Candara"/>
+              </a:rPr>
+              <a:t>dispersion left after adjusting for population (Pearson chi-square per degree of freedom)</a:t>
+            </a:r>
+          </a:p>
+        </p:txBody>
+      </p:sp>
+      <p:sp>
+        <p:nvSpPr>
+          <p:cNvPr id="6" name="Rounded Rectangle 5"/>
+          <p:cNvSpPr/>
+          <p:nvPr/>
+        </p:nvSpPr>
+        <p:spPr>
+          <a:xfrm>
+            <a:off x="566928" y="4617720"/>
+            <a:ext cx="4754880" cy="1097280"/>
+          </a:xfrm>
+          <a:prstGeom prst="roundRect">
+            <a:avLst>
+              <a:gd name="adj" fmla="val 5000"/>
+            </a:avLst>
+          </a:prstGeom>
+          <a:solidFill>
+            <a:srgbClr val="F3F3F3"/>
+          </a:solidFill>
+          <a:ln>
+            <a:noFill/>
+          </a:ln>
+          <a:effectLst/>
+        </p:spPr>
+        <p:style>
+          <a:lnRef idx="1">
+            <a:schemeClr val="accent1"/>
+          </a:lnRef>
+          <a:fillRef idx="3">
+            <a:schemeClr val="accent1"/>
+          </a:fillRef>
+          <a:effectRef idx="2">
+            <a:schemeClr val="accent1"/>
+          </a:effectRef>
+          <a:fontRef idx="minor">
+            <a:schemeClr val="lt1"/>
+          </a:fontRef>
+        </p:style>
+        <p:txBody>
+          <a:bodyPr rtlCol="0" anchor="ctr" wrap="square" lIns="201168" rIns="201168" tIns="160934" bIns="160934"/>
+          <a:lstStyle/>
+          <a:p>
+            <a:pPr algn="l">
+              <a:spcAft>
+                <a:spcPts val="600"/>
+              </a:spcAft>
+            </a:pPr>
+            <a:r>
+              <a:rPr sz="1400" b="1" i="0">
+                <a:solidFill>
+                  <a:srgbClr val="AB3D3F"/>
+                </a:solidFill>
+                <a:latin typeface="Candara"/>
+              </a:rPr>
+              <a:t>Working model: negative binomial. </a:t>
+            </a:r>
+            <a:r>
+              <a:rPr sz="1400" b="0" i="0">
+                <a:solidFill>
+                  <a:srgbClr val="262626"/>
+                </a:solidFill>
+                <a:latin typeface="Candara"/>
+              </a:rPr>
+              <a:t>Dispersion α = 0.268 with a population offset; it beats Poisson by 2.39 million AIC points.</a:t>
+            </a:r>
+          </a:p>
+        </p:txBody>
+      </p:sp>
+      <p:pic>
+        <p:nvPicPr>
+          <p:cNvPr id="7" name="Picture 6" descr="a3_poisson_vs_nb.png"/>
+          <p:cNvPicPr>
+            <a:picLocks noChangeAspect="1"/>
+          </p:cNvPicPr>
+          <p:nvPr/>
+        </p:nvPicPr>
+        <p:blipFill>
+          <a:blip r:embed="rId2"/>
+          <a:stretch>
+            <a:fillRect/>
+          </a:stretch>
+        </p:blipFill>
+        <p:spPr>
+          <a:xfrm>
+            <a:off x="5669280" y="1575586"/>
+            <a:ext cx="5943600" cy="3478227"/>
+          </a:xfrm>
+          <a:prstGeom prst="rect">
+            <a:avLst/>
+          </a:prstGeom>
+        </p:spPr>
+      </p:pic>
+      <p:sp>
+        <p:nvSpPr>
+          <p:cNvPr id="8" name="TextBox 7"/>
+          <p:cNvSpPr txBox="1"/>
+          <p:nvPr/>
+        </p:nvSpPr>
+        <p:spPr>
+          <a:xfrm>
+            <a:off x="5669280" y="5303520"/>
+            <a:ext cx="5943600" cy="457200"/>
+          </a:xfrm>
+          <a:prstGeom prst="rect">
+            <a:avLst/>
+          </a:prstGeom>
+          <a:noFill/>
+        </p:spPr>
+        <p:txBody>
+          <a:bodyPr wrap="square" anchor="t" lIns="0" rIns="0" tIns="0" bIns="0">
+            <a:spAutoFit/>
+          </a:bodyPr>
+          <a:lstStyle/>
+          <a:p>
+            <a:pPr algn="l">
+              <a:spcAft>
+                <a:spcPts val="600"/>
+              </a:spcAft>
+            </a:pPr>
+            <a:r>
+              <a:rPr sz="1100" b="0" i="0">
+                <a:solidFill>
+                  <a:srgbClr val="595959"/>
+                </a:solidFill>
+                <a:latin typeface="Candara"/>
+              </a:rPr>
+              <a:t>50 districts, 2014-17. Curves fitted without covariates, so the negative binomial here uses α = 0.395.</a:t>
+            </a:r>
+          </a:p>
+        </p:txBody>
+      </p:sp>
+    </p:spTree>
+  </p:cSld>
+  <p:clrMapOvr>
+    <a:masterClrMapping/>
+  </p:clrMapOvr>
+</p:sld>
+</file>
+
+<file path=ppt/slides/slide15.xml><?xml version="1.0" encoding="utf-8"?>
+<p:sld xmlns:a="http://schemas.openxmlformats.org/drawingml/2006/main" xmlns:p="http://schemas.openxmlformats.org/presentationml/2006/main" xmlns:r="http://schemas.openxmlformats.org/officeDocument/2006/relationships">
+  <p:cSld>
+    <p:spTree>
+      <p:nvGrpSpPr>
+        <p:cNvPr id="1" name=""/>
+        <p:cNvGrpSpPr/>
+        <p:nvPr/>
+      </p:nvGrpSpPr>
+      <p:grpSpPr/>
+      <p:sp>
+        <p:nvSpPr>
+          <p:cNvPr id="2" name="Text Placeholder 1"/>
+          <p:cNvSpPr>
+            <a:spLocks noGrp="1"/>
+          </p:cNvSpPr>
+          <p:nvPr>
+            <p:ph type="body" idx="11" sz="quarter"/>
+          </p:nvPr>
+        </p:nvSpPr>
+        <p:spPr>
+          <a:xfrm>
+            <a:off x="571500" y="571500"/>
+            <a:ext cx="11055096" cy="737700"/>
+          </a:xfrm>
+        </p:spPr>
+        <p:txBody>
+          <a:bodyPr/>
+          <a:lstStyle/>
+          <a:p>
+            <a:r>
+              <a:t>Survey intervals must respect clustering</a:t>
+            </a:r>
+          </a:p>
+        </p:txBody>
+      </p:sp>
+      <p:sp>
+        <p:nvSpPr>
+          <p:cNvPr id="3" name="TextBox 2"/>
+          <p:cNvSpPr txBox="1"/>
+          <p:nvPr/>
+        </p:nvSpPr>
+        <p:spPr>
+          <a:xfrm>
+            <a:off x="566928" y="1463040"/>
+            <a:ext cx="5120640" cy="4343400"/>
+          </a:xfrm>
+          <a:prstGeom prst="rect">
+            <a:avLst/>
+          </a:prstGeom>
+          <a:noFill/>
+        </p:spPr>
+        <p:txBody>
+          <a:bodyPr wrap="square" anchor="t" lIns="0" rIns="0" tIns="0" bIns="0">
+            <a:spAutoFit/>
+          </a:bodyPr>
+          <a:lstStyle/>
+          <a:p>
+            <a:pPr algn="l">
+              <a:spcAft>
+                <a:spcPts val="1200"/>
+              </a:spcAft>
+            </a:pPr>
+            <a:r>
+              <a:rPr sz="1400" b="0" i="0">
+                <a:solidFill>
+                  <a:srgbClr val="262626"/>
+                </a:solidFill>
+                <a:latin typeface="Candara"/>
+              </a:rPr>
+              <a:t>Households in one cluster share a village, water sources and the last net campaign, so they are not independent.</a:t>
+            </a:r>
+          </a:p>
+          <a:p>
+            <a:pPr algn="l">
+              <a:spcAft>
+                <a:spcPts val="200"/>
+              </a:spcAft>
+            </a:pPr>
+            <a:r>
+              <a:rPr sz="2200" b="1" i="0">
+                <a:solidFill>
+                  <a:srgbClr val="AB3D3F"/>
+                </a:solidFill>
+                <a:latin typeface="Candara"/>
+              </a:rPr>
+              <a:t>15.2 vs 7.2 points</a:t>
+            </a:r>
+          </a:p>
+          <a:p>
+            <a:pPr algn="l">
+              <a:spcAft>
+                <a:spcPts val="1200"/>
+              </a:spcAft>
+            </a:pPr>
+            <a:r>
+              <a:rPr sz="1400" b="0" i="0">
+                <a:solidFill>
+                  <a:srgbClr val="262626"/>
+                </a:solidFill>
+                <a:latin typeface="Candara"/>
+              </a:rPr>
+              <a:t>Width of the 95% interval for rural Northern net ownership (76.0%): cluster bootstrap against a naive household bootstrap. The honest interval is 2.1 times wider.</a:t>
+            </a:r>
+          </a:p>
+          <a:p>
+            <a:pPr algn="l">
+              <a:spcAft>
+                <a:spcPts val="200"/>
+              </a:spcAft>
+            </a:pPr>
+            <a:r>
+              <a:rPr sz="2200" b="1" i="0">
+                <a:solidFill>
+                  <a:srgbClr val="AB3D3F"/>
+                </a:solidFill>
+                <a:latin typeface="Candara"/>
+              </a:rPr>
+              <a:t>Design effect about 4.5</a:t>
+            </a:r>
+          </a:p>
+          <a:p>
+            <a:pPr algn="l">
+              <a:spcAft>
+                <a:spcPts val="1200"/>
+              </a:spcAft>
+            </a:pPr>
+            <a:r>
+              <a:rPr sz="1400" b="0" i="0">
+                <a:solidFill>
+                  <a:srgbClr val="262626"/>
+                </a:solidFill>
+                <a:latin typeface="Candara"/>
+              </a:rPr>
+              <a:t>The survey holds the information of a simple random sample about a quarter its size (4.5 to 5.4 across seeds; 4.2 by a design-based formula).</a:t>
+            </a:r>
+          </a:p>
+          <a:p>
+            <a:pPr algn="l">
+              <a:spcAft>
+                <a:spcPts val="200"/>
+              </a:spcAft>
+            </a:pPr>
+            <a:r>
+              <a:rPr sz="2200" b="1" i="0">
+                <a:solidFill>
+                  <a:srgbClr val="AB3D3F"/>
+                </a:solidFill>
+                <a:latin typeface="Candara"/>
+              </a:rPr>
+              <a:t>0.09 points</a:t>
+            </a:r>
+          </a:p>
+          <a:p>
+            <a:pPr algn="l">
+              <a:spcAft>
+                <a:spcPts val="600"/>
+              </a:spcAft>
+            </a:pPr>
+            <a:r>
+              <a:rPr sz="1400" b="0" i="0">
+                <a:solidFill>
+                  <a:srgbClr val="262626"/>
+                </a:solidFill>
+                <a:latin typeface="Candara"/>
+              </a:rPr>
+              <a:t>Our weighted estimate for Northern Region against the published DHS figure (67.69% vs 67.60%). This checks our weighting, not our interval: the published ITN intervals are empty.</a:t>
+            </a:r>
+          </a:p>
+        </p:txBody>
+      </p:sp>
+      <p:pic>
+        <p:nvPicPr>
+          <p:cNvPr id="4" name="Picture 3" descr="a4_bootstrap_ci_comparison.png"/>
+          <p:cNvPicPr>
+            <a:picLocks noChangeAspect="1"/>
+          </p:cNvPicPr>
+          <p:nvPr/>
+        </p:nvPicPr>
+        <p:blipFill>
+          <a:blip r:embed="rId2"/>
+          <a:stretch>
+            <a:fillRect/>
+          </a:stretch>
+        </p:blipFill>
+        <p:spPr>
+          <a:xfrm>
+            <a:off x="5943600" y="1952582"/>
+            <a:ext cx="5669280" cy="2404194"/>
+          </a:xfrm>
+          <a:prstGeom prst="rect">
+            <a:avLst/>
+          </a:prstGeom>
+        </p:spPr>
+      </p:pic>
+      <p:sp>
+        <p:nvSpPr>
+          <p:cNvPr id="5" name="TextBox 4"/>
+          <p:cNvSpPr txBox="1"/>
+          <p:nvPr/>
+        </p:nvSpPr>
+        <p:spPr>
+          <a:xfrm>
+            <a:off x="5943600" y="4754880"/>
+            <a:ext cx="5669280" cy="914400"/>
+          </a:xfrm>
+          <a:prstGeom prst="rect">
+            <a:avLst/>
+          </a:prstGeom>
+          <a:noFill/>
+        </p:spPr>
+        <p:txBody>
+          <a:bodyPr wrap="square" anchor="t" lIns="0" rIns="0" tIns="0" bIns="0">
+            <a:spAutoFit/>
+          </a:bodyPr>
+          <a:lstStyle/>
+          <a:p>
+            <a:pPr algn="l">
+              <a:spcAft>
+                <a:spcPts val="600"/>
+              </a:spcAft>
+            </a:pPr>
+            <a:r>
+              <a:rPr sz="1100" b="0" i="0">
+                <a:solidFill>
+                  <a:srgbClr val="595959"/>
+                </a:solidFill>
+                <a:latin typeface="Candara"/>
+              </a:rPr>
+              <a:t>Rural Northern Region: 582 households in 20 clusters, 2,000 replicates, seed 42. Chosen for its link to our districts; it ranks 10th of 16 regions by rural clusters, so it is not the most under-sampled.</a:t>
+            </a:r>
+          </a:p>
+        </p:txBody>
+      </p:sp>
+    </p:spTree>
+  </p:cSld>
+  <p:clrMapOvr>
+    <a:masterClrMapping/>
+  </p:clrMapOvr>
+</p:sld>
+</file>
+
+<file path=ppt/slides/slide16.xml><?xml version="1.0" encoding="utf-8"?>
+<p:sld xmlns:a="http://schemas.openxmlformats.org/drawingml/2006/main" xmlns:p="http://schemas.openxmlformats.org/presentationml/2006/main" xmlns:r="http://schemas.openxmlformats.org/officeDocument/2006/relationships">
+  <p:cSld>
+    <p:spTree>
+      <p:nvGrpSpPr>
+        <p:cNvPr id="1" name=""/>
+        <p:cNvGrpSpPr/>
+        <p:nvPr/>
+      </p:nvGrpSpPr>
+      <p:grpSpPr/>
+      <p:sp>
+        <p:nvSpPr>
+          <p:cNvPr id="3" name="Text Placeholder 2"/>
+          <p:cNvSpPr>
+            <a:spLocks noGrp="1"/>
+          </p:cNvSpPr>
+          <p:nvPr>
+            <p:ph type="body" idx="11" sz="quarter"/>
+          </p:nvPr>
+        </p:nvSpPr>
+        <p:spPr>
+          <a:xfrm>
+            <a:off x="1061243" y="571500"/>
+            <a:ext cx="10067544" cy="737700"/>
+          </a:xfrm>
+        </p:spPr>
+        <p:txBody>
+          <a:bodyPr/>
+          <a:lstStyle/>
+          <a:p>
+            <a:r>
+              <a:rPr sz="3000"/>
+              <a:t>Leakage audit: what held up, and what did not</a:t>
+            </a:r>
+          </a:p>
+        </p:txBody>
+      </p:sp>
+      <p:graphicFrame>
+        <p:nvGraphicFramePr>
+          <p:cNvPr id="4" name="Table 3"/>
+          <p:cNvGraphicFramePr>
+            <a:graphicFrameLocks noGrp="1"/>
+          </p:cNvGraphicFramePr>
+          <p:nvPr/>
+        </p:nvGraphicFramePr>
+        <p:xfrm>
+          <a:off x="1060704" y="1463040"/>
+          <a:ext cx="10067544" cy="3794760"/>
+        </p:xfrm>
+        <a:graphic>
+          <a:graphicData uri="http://schemas.openxmlformats.org/drawingml/2006/table">
+            <a:tbl>
+              <a:tblPr firstRow="1">
+                <a:tableStyleId>{5C22544A-7EE6-4342-B048-85BDC9FD1C3A}</a:tableStyleId>
+              </a:tblPr>
+              <a:tblGrid>
+                <a:gridCol w="1600200"/>
+                <a:gridCol w="2606040"/>
+                <a:gridCol w="2606040"/>
+                <a:gridCol w="3255264"/>
+              </a:tblGrid>
+              <a:tr h="411480">
+                <a:tc>
+                  <a:txBody>
+                    <a:bodyPr/>
+                    <a:lstStyle/>
+                    <a:p>
+                      <a:pPr algn="l">
+                        <a:spcAft>
+                          <a:spcPts val="0"/>
+                        </a:spcAft>
+                      </a:pPr>
+                      <a:r>
+                        <a:rPr sz="1300" b="1" i="0">
+                          <a:solidFill>
+                            <a:srgbClr val="FFFFFF"/>
+                          </a:solidFill>
+                          <a:latin typeface="Candara"/>
+                        </a:rPr>
+                        <a:t>Leak</a:t>
+                      </a:r>
+                    </a:p>
+                  </a:txBody>
+                  <a:tcPr marL="91440" marR="91440" marT="36576" marB="36576" anchor="ctr">
+                    <a:solidFill>
+                      <a:srgbClr val="AB3D3F"/>
+                    </a:solidFill>
+                  </a:tcPr>
+                </a:tc>
+                <a:tc>
+                  <a:txBody>
+                    <a:bodyPr/>
+                    <a:lstStyle/>
+                    <a:p>
+                      <a:pPr algn="l">
+                        <a:spcAft>
+                          <a:spcPts val="0"/>
+                        </a:spcAft>
+                      </a:pPr>
+                      <a:r>
+                        <a:rPr sz="1300" b="1" i="0">
+                          <a:solidFill>
+                            <a:srgbClr val="FFFFFF"/>
+                          </a:solidFill>
+                          <a:latin typeface="Candara"/>
+                        </a:rPr>
+                        <a:t>Broken version</a:t>
+                      </a:r>
+                    </a:p>
+                  </a:txBody>
+                  <a:tcPr marL="91440" marR="91440" marT="36576" marB="36576" anchor="ctr">
+                    <a:solidFill>
+                      <a:srgbClr val="AB3D3F"/>
+                    </a:solidFill>
+                  </a:tcPr>
+                </a:tc>
+                <a:tc>
+                  <a:txBody>
+                    <a:bodyPr/>
+                    <a:lstStyle/>
+                    <a:p>
+                      <a:pPr algn="l">
+                        <a:spcAft>
+                          <a:spcPts val="0"/>
+                        </a:spcAft>
+                      </a:pPr>
+                      <a:r>
+                        <a:rPr sz="1300" b="1" i="0">
+                          <a:solidFill>
+                            <a:srgbClr val="FFFFFF"/>
+                          </a:solidFill>
+                          <a:latin typeface="Candara"/>
+                        </a:rPr>
+                        <a:t>Disciplined version</a:t>
+                      </a:r>
+                    </a:p>
+                  </a:txBody>
+                  <a:tcPr marL="91440" marR="91440" marT="36576" marB="36576" anchor="ctr">
+                    <a:solidFill>
+                      <a:srgbClr val="AB3D3F"/>
+                    </a:solidFill>
+                  </a:tcPr>
+                </a:tc>
+                <a:tc>
+                  <a:txBody>
+                    <a:bodyPr/>
+                    <a:lstStyle/>
+                    <a:p>
+                      <a:pPr algn="l">
+                        <a:spcAft>
+                          <a:spcPts val="0"/>
+                        </a:spcAft>
+                      </a:pPr>
+                      <a:r>
+                        <a:rPr sz="1300" b="1" i="0">
+                          <a:solidFill>
+                            <a:srgbClr val="FFFFFF"/>
+                          </a:solidFill>
+                          <a:latin typeface="Candara"/>
+                        </a:rPr>
+                        <a:t>What we found</a:t>
+                      </a:r>
+                    </a:p>
+                  </a:txBody>
+                  <a:tcPr marL="91440" marR="91440" marT="36576" marB="36576" anchor="ctr">
+                    <a:solidFill>
+                      <a:srgbClr val="AB3D3F"/>
+                    </a:solidFill>
+                  </a:tcPr>
+                </a:tc>
+              </a:tr>
+              <a:tr h="914400">
+                <a:tc>
+                  <a:txBody>
+                    <a:bodyPr/>
+                    <a:lstStyle/>
+                    <a:p>
+                      <a:pPr algn="l">
+                        <a:spcAft>
+                          <a:spcPts val="0"/>
+                        </a:spcAft>
+                      </a:pPr>
+                      <a:r>
+                        <a:rPr sz="1200" b="1" i="0">
+                          <a:solidFill>
+                            <a:srgbClr val="262626"/>
+                          </a:solidFill>
+                          <a:latin typeface="Candara"/>
+                        </a:rPr>
+                        <a:t>Preprocessing</a:t>
+                      </a:r>
+                    </a:p>
+                  </a:txBody>
+                  <a:tcPr marL="91440" marR="91440" marT="36576" marB="36576" anchor="ctr">
+                    <a:solidFill>
+                      <a:srgbClr val="FFFFFF"/>
+                    </a:solidFill>
+                  </a:tcPr>
+                </a:tc>
+                <a:tc>
+                  <a:txBody>
+                    <a:bodyPr/>
+                    <a:lstStyle/>
+                    <a:p>
+                      <a:pPr algn="l">
+                        <a:spcAft>
+                          <a:spcPts val="0"/>
+                        </a:spcAft>
+                      </a:pPr>
+                      <a:r>
+                        <a:rPr sz="1200" b="0" i="0">
+                          <a:solidFill>
+                            <a:srgbClr val="262626"/>
+                          </a:solidFill>
+                          <a:latin typeface="Candara"/>
+                        </a:rPr>
+                        <a:t>Scaler fitted on all 50 districts before splitting</a:t>
+                      </a:r>
+                    </a:p>
+                  </a:txBody>
+                  <a:tcPr marL="91440" marR="91440" marT="36576" marB="36576" anchor="ctr">
+                    <a:solidFill>
+                      <a:srgbClr val="FFFFFF"/>
+                    </a:solidFill>
+                  </a:tcPr>
+                </a:tc>
+                <a:tc>
+                  <a:txBody>
+                    <a:bodyPr/>
+                    <a:lstStyle/>
+                    <a:p>
+                      <a:pPr algn="l">
+                        <a:spcAft>
+                          <a:spcPts val="0"/>
+                        </a:spcAft>
+                      </a:pPr>
+                      <a:r>
+                        <a:rPr sz="1200" b="0" i="0">
+                          <a:solidFill>
+                            <a:srgbClr val="262626"/>
+                          </a:solidFill>
+                          <a:latin typeface="Candara"/>
+                        </a:rPr>
+                        <a:t>Scaler fitted inside a Pipeline, on training districts only</a:t>
+                      </a:r>
+                    </a:p>
+                  </a:txBody>
+                  <a:tcPr marL="91440" marR="91440" marT="36576" marB="36576" anchor="ctr">
+                    <a:solidFill>
+                      <a:srgbClr val="FFFFFF"/>
+                    </a:solidFill>
+                  </a:tcPr>
+                </a:tc>
+                <a:tc>
+                  <a:txBody>
+                    <a:bodyPr/>
+                    <a:lstStyle/>
+                    <a:p>
+                      <a:pPr algn="l">
+                        <a:spcAft>
+                          <a:spcPts val="0"/>
+                        </a:spcAft>
+                      </a:pPr>
+                      <a:r>
+                        <a:rPr sz="1200" b="0" i="0">
+                          <a:solidFill>
+                            <a:srgbClr val="262626"/>
+                          </a:solidFill>
+                          <a:latin typeface="Candara"/>
+                        </a:rPr>
+                        <a:t>Real mechanism, negligible here: 212 cases at seed 42, 44 on average over 500 seeds</a:t>
+                      </a:r>
+                    </a:p>
+                  </a:txBody>
+                  <a:tcPr marL="91440" marR="91440" marT="36576" marB="36576" anchor="ctr">
+                    <a:solidFill>
+                      <a:srgbClr val="FFFFFF"/>
+                    </a:solidFill>
+                  </a:tcPr>
+                </a:tc>
+              </a:tr>
+              <a:tr h="777240">
+                <a:tc>
+                  <a:txBody>
+                    <a:bodyPr/>
+                    <a:lstStyle/>
+                    <a:p>
+                      <a:pPr algn="l">
+                        <a:spcAft>
+                          <a:spcPts val="0"/>
+                        </a:spcAft>
+                      </a:pPr>
+                      <a:r>
+                        <a:rPr sz="1200" b="1" i="0">
+                          <a:solidFill>
+                            <a:srgbClr val="262626"/>
+                          </a:solidFill>
+                          <a:latin typeface="Candara"/>
+                        </a:rPr>
+                        <a:t>Target encoding</a:t>
+                      </a:r>
+                    </a:p>
+                  </a:txBody>
+                  <a:tcPr marL="91440" marR="91440" marT="36576" marB="36576" anchor="ctr">
+                    <a:solidFill>
+                      <a:srgbClr val="F3F3F3"/>
+                    </a:solidFill>
+                  </a:tcPr>
+                </a:tc>
+                <a:tc>
+                  <a:txBody>
+                    <a:bodyPr/>
+                    <a:lstStyle/>
+                    <a:p>
+                      <a:pPr algn="l">
+                        <a:spcAft>
+                          <a:spcPts val="0"/>
+                        </a:spcAft>
+                      </a:pPr>
+                      <a:r>
+                        <a:rPr sz="1200" b="0" i="0">
+                          <a:solidFill>
+                            <a:srgbClr val="262626"/>
+                          </a:solidFill>
+                          <a:latin typeface="Candara"/>
+                        </a:rPr>
+                        <a:t>Each district encoded with its own case count</a:t>
+                      </a:r>
+                    </a:p>
+                  </a:txBody>
+                  <a:tcPr marL="91440" marR="91440" marT="36576" marB="36576" anchor="ctr">
+                    <a:solidFill>
+                      <a:srgbClr val="F3F3F3"/>
+                    </a:solidFill>
+                  </a:tcPr>
+                </a:tc>
+                <a:tc>
+                  <a:txBody>
+                    <a:bodyPr/>
+                    <a:lstStyle/>
+                    <a:p>
+                      <a:pPr algn="l">
+                        <a:spcAft>
+                          <a:spcPts val="0"/>
+                        </a:spcAft>
+                      </a:pPr>
+                      <a:r>
+                        <a:rPr sz="1200" b="0" i="0">
+                          <a:solidFill>
+                            <a:srgbClr val="262626"/>
+                          </a:solidFill>
+                          <a:latin typeface="Candara"/>
+                        </a:rPr>
+                        <a:t>Only features that do not use the outcome</a:t>
+                      </a:r>
+                    </a:p>
+                  </a:txBody>
+                  <a:tcPr marL="91440" marR="91440" marT="36576" marB="36576" anchor="ctr">
+                    <a:solidFill>
+                      <a:srgbClr val="F3F3F3"/>
+                    </a:solidFill>
+                  </a:tcPr>
+                </a:tc>
+                <a:tc>
+                  <a:txBody>
+                    <a:bodyPr/>
+                    <a:lstStyle/>
+                    <a:p>
+                      <a:pPr algn="l">
+                        <a:spcAft>
+                          <a:spcPts val="0"/>
+                        </a:spcAft>
+                      </a:pPr>
+                      <a:r>
+                        <a:rPr sz="1200" b="0" i="0">
+                          <a:solidFill>
+                            <a:srgbClr val="262626"/>
+                          </a:solidFill>
+                          <a:latin typeface="Candara"/>
+                        </a:rPr>
+                        <a:t>Test R² of 1.00 against 0.26: the feature is the answer</a:t>
+                      </a:r>
+                    </a:p>
+                  </a:txBody>
+                  <a:tcPr marL="91440" marR="91440" marT="36576" marB="36576" anchor="ctr">
+                    <a:solidFill>
+                      <a:srgbClr val="F3F3F3"/>
+                    </a:solidFill>
+                  </a:tcPr>
+                </a:tc>
+              </a:tr>
+              <a:tr h="914400">
+                <a:tc>
+                  <a:txBody>
+                    <a:bodyPr/>
+                    <a:lstStyle/>
+                    <a:p>
+                      <a:pPr algn="l">
+                        <a:spcAft>
+                          <a:spcPts val="0"/>
+                        </a:spcAft>
+                      </a:pPr>
+                      <a:r>
+                        <a:rPr sz="1200" b="1" i="0">
+                          <a:solidFill>
+                            <a:srgbClr val="262626"/>
+                          </a:solidFill>
+                          <a:latin typeface="Candara"/>
+                        </a:rPr>
+                        <a:t>Spatial</a:t>
+                      </a:r>
+                    </a:p>
+                  </a:txBody>
+                  <a:tcPr marL="91440" marR="91440" marT="36576" marB="36576" anchor="ctr">
+                    <a:solidFill>
+                      <a:srgbClr val="FFFFFF"/>
+                    </a:solidFill>
+                  </a:tcPr>
+                </a:tc>
+                <a:tc>
+                  <a:txBody>
+                    <a:bodyPr/>
+                    <a:lstStyle/>
+                    <a:p>
+                      <a:pPr algn="l">
+                        <a:spcAft>
+                          <a:spcPts val="0"/>
+                        </a:spcAft>
+                      </a:pPr>
+                      <a:r>
+                        <a:rPr sz="1200" b="0" i="0">
+                          <a:solidFill>
+                            <a:srgbClr val="262626"/>
+                          </a:solidFill>
+                          <a:latin typeface="Candara"/>
+                        </a:rPr>
+                        <a:t>Random split, or random split stratified by region</a:t>
+                      </a:r>
+                    </a:p>
+                  </a:txBody>
+                  <a:tcPr marL="91440" marR="91440" marT="36576" marB="36576" anchor="ctr">
+                    <a:solidFill>
+                      <a:srgbClr val="FFFFFF"/>
+                    </a:solidFill>
+                  </a:tcPr>
+                </a:tc>
+                <a:tc>
+                  <a:txBody>
+                    <a:bodyPr/>
+                    <a:lstStyle/>
+                    <a:p>
+                      <a:pPr algn="l">
+                        <a:spcAft>
+                          <a:spcPts val="0"/>
+                        </a:spcAft>
+                      </a:pPr>
+                      <a:r>
+                        <a:rPr sz="1200" b="0" i="0">
+                          <a:solidFill>
+                            <a:srgbClr val="262626"/>
+                          </a:solidFill>
+                          <a:latin typeface="Candara"/>
+                        </a:rPr>
+                        <a:t>Whole region held out</a:t>
+                      </a:r>
+                    </a:p>
+                  </a:txBody>
+                  <a:tcPr marL="91440" marR="91440" marT="36576" marB="36576" anchor="ctr">
+                    <a:solidFill>
+                      <a:srgbClr val="FFFFFF"/>
+                    </a:solidFill>
+                  </a:tcPr>
+                </a:tc>
+                <a:tc>
+                  <a:txBody>
+                    <a:bodyPr/>
+                    <a:lstStyle/>
+                    <a:p>
+                      <a:pPr algn="l">
+                        <a:spcAft>
+                          <a:spcPts val="0"/>
+                        </a:spcAft>
+                      </a:pPr>
+                      <a:r>
+                        <a:rPr sz="1200" b="0" i="0">
+                          <a:solidFill>
+                            <a:srgbClr val="262626"/>
+                          </a:solidFill>
+                          <a:latin typeface="Candara"/>
+                        </a:rPr>
+                        <a:t>Random and stratified splits agree (about 90,000); a held-out region gives 365,128</a:t>
+                      </a:r>
+                    </a:p>
+                  </a:txBody>
+                  <a:tcPr marL="91440" marR="91440" marT="36576" marB="36576" anchor="ctr">
+                    <a:solidFill>
+                      <a:srgbClr val="FFFFFF"/>
+                    </a:solidFill>
+                  </a:tcPr>
+                </a:tc>
+              </a:tr>
+              <a:tr h="777240">
+                <a:tc>
+                  <a:txBody>
+                    <a:bodyPr/>
+                    <a:lstStyle/>
+                    <a:p>
+                      <a:pPr algn="l">
+                        <a:spcAft>
+                          <a:spcPts val="0"/>
+                        </a:spcAft>
+                      </a:pPr>
+                      <a:r>
+                        <a:rPr sz="1200" b="1" i="0">
+                          <a:solidFill>
+                            <a:srgbClr val="262626"/>
+                          </a:solidFill>
+                          <a:latin typeface="Candara"/>
+                        </a:rPr>
+                        <a:t>Temporal</a:t>
+                      </a:r>
+                    </a:p>
+                  </a:txBody>
+                  <a:tcPr marL="91440" marR="91440" marT="36576" marB="36576" anchor="ctr">
+                    <a:solidFill>
+                      <a:srgbClr val="F3F3F3"/>
+                    </a:solidFill>
+                  </a:tcPr>
+                </a:tc>
+                <a:tc>
+                  <a:txBody>
+                    <a:bodyPr/>
+                    <a:lstStyle/>
+                    <a:p>
+                      <a:pPr algn="l">
+                        <a:spcAft>
+                          <a:spcPts val="0"/>
+                        </a:spcAft>
+                      </a:pPr>
+                      <a:r>
+                        <a:rPr sz="1200" b="0" i="0">
+                          <a:solidFill>
+                            <a:srgbClr val="262626"/>
+                          </a:solidFill>
+                          <a:latin typeface="Candara"/>
+                        </a:rPr>
+                        <a:t>2022 coverage used to explain 2014-17 cases</a:t>
+                      </a:r>
+                    </a:p>
+                  </a:txBody>
+                  <a:tcPr marL="91440" marR="91440" marT="36576" marB="36576" anchor="ctr">
+                    <a:solidFill>
+                      <a:srgbClr val="F3F3F3"/>
+                    </a:solidFill>
+                  </a:tcPr>
+                </a:tc>
+                <a:tc>
+                  <a:txBody>
+                    <a:bodyPr/>
+                    <a:lstStyle/>
+                    <a:p>
+                      <a:pPr algn="l">
+                        <a:spcAft>
+                          <a:spcPts val="0"/>
+                        </a:spcAft>
+                      </a:pPr>
+                      <a:r>
+                        <a:rPr sz="1200" b="0" i="0">
+                          <a:solidFill>
+                            <a:srgbClr val="262626"/>
+                          </a:solidFill>
+                          <a:latin typeface="Candara"/>
+                        </a:rPr>
+                        <a:t>Documented; not read causally</a:t>
+                      </a:r>
+                    </a:p>
+                  </a:txBody>
+                  <a:tcPr marL="91440" marR="91440" marT="36576" marB="36576" anchor="ctr">
+                    <a:solidFill>
+                      <a:srgbClr val="F3F3F3"/>
+                    </a:solidFill>
+                  </a:tcPr>
+                </a:tc>
+                <a:tc>
+                  <a:txBody>
+                    <a:bodyPr/>
+                    <a:lstStyle/>
+                    <a:p>
+                      <a:pPr algn="l">
+                        <a:spcAft>
+                          <a:spcPts val="0"/>
+                        </a:spcAft>
+                      </a:pPr>
+                      <a:r>
+                        <a:rPr sz="1200" b="0" i="0">
+                          <a:solidFill>
+                            <a:srgbClr val="262626"/>
+                          </a:solidFill>
+                          <a:latin typeface="Candara"/>
+                        </a:rPr>
+                        <a:t>The coverage coefficient reflects region, not the effect of nets</a:t>
+                      </a:r>
+                    </a:p>
+                  </a:txBody>
+                  <a:tcPr marL="91440" marR="91440" marT="36576" marB="36576" anchor="ctr">
+                    <a:solidFill>
+                      <a:srgbClr val="F3F3F3"/>
+                    </a:solidFill>
+                  </a:tcPr>
+                </a:tc>
+              </a:tr>
+            </a:tbl>
+          </a:graphicData>
+        </a:graphic>
+      </p:graphicFrame>
+    </p:spTree>
+  </p:cSld>
+  <p:clrMapOvr>
+    <a:masterClrMapping/>
+  </p:clrMapOvr>
+</p:sld>
+</file>
+
+<file path=ppt/slides/slide17.xml><?xml version="1.0" encoding="utf-8"?>
+<p:sld xmlns:a="http://schemas.openxmlformats.org/drawingml/2006/main" xmlns:p="http://schemas.openxmlformats.org/presentationml/2006/main" xmlns:r="http://schemas.openxmlformats.org/officeDocument/2006/relationships">
+  <p:cSld>
+    <p:spTree>
+      <p:nvGrpSpPr>
+        <p:cNvPr id="1" name=""/>
+        <p:cNvGrpSpPr/>
+        <p:nvPr/>
+      </p:nvGrpSpPr>
+      <p:grpSpPr/>
+      <p:sp>
+        <p:nvSpPr>
+          <p:cNvPr id="2" name="Text Placeholder 1"/>
+          <p:cNvSpPr>
+            <a:spLocks noGrp="1"/>
+          </p:cNvSpPr>
+          <p:nvPr>
+            <p:ph type="body" idx="11" sz="quarter"/>
+          </p:nvPr>
+        </p:nvSpPr>
+        <p:spPr>
+          <a:xfrm>
+            <a:off x="571500" y="571500"/>
+            <a:ext cx="11055096" cy="737700"/>
+          </a:xfrm>
+        </p:spPr>
+        <p:txBody>
+          <a:bodyPr/>
+          <a:lstStyle/>
+          <a:p>
+            <a:r>
+              <a:t>Only a held-out region tests new geography</a:t>
+            </a:r>
+          </a:p>
+        </p:txBody>
+      </p:sp>
+      <p:sp>
+        <p:nvSpPr>
+          <p:cNvPr id="3" name="TextBox 2"/>
+          <p:cNvSpPr txBox="1"/>
+          <p:nvPr/>
+        </p:nvSpPr>
+        <p:spPr>
+          <a:xfrm>
+            <a:off x="566928" y="1554480"/>
+            <a:ext cx="4754880" cy="4114800"/>
+          </a:xfrm>
+          <a:prstGeom prst="rect">
+            <a:avLst/>
+          </a:prstGeom>
+          <a:noFill/>
+        </p:spPr>
+        <p:txBody>
+          <a:bodyPr wrap="square" anchor="t" lIns="0" rIns="0" tIns="0" bIns="0">
+            <a:spAutoFit/>
+          </a:bodyPr>
+          <a:lstStyle/>
+          <a:p>
+            <a:pPr algn="l" marL="219456" indent="-219456">
+              <a:spcAft>
+                <a:spcPts val="1200"/>
+              </a:spcAft>
+              <a:buClr>
+                <a:srgbClr val="AB3D3F"/>
+              </a:buClr>
+              <a:buFont typeface="Arial"/>
+              <a:buChar char="•"/>
+            </a:pPr>
+            <a:r>
+              <a:rPr sz="1600" b="0" i="0">
+                <a:solidFill>
+                  <a:srgbClr val="262626"/>
+                </a:solidFill>
+                <a:latin typeface="Candara"/>
+              </a:rPr>
+              <a:t>A split stratified by region still puts each test district's neighbors in the training set.</a:t>
+            </a:r>
+          </a:p>
+          <a:p>
+            <a:pPr algn="l" marL="219456" indent="-219456">
+              <a:spcAft>
+                <a:spcPts val="1200"/>
+              </a:spcAft>
+              <a:buClr>
+                <a:srgbClr val="AB3D3F"/>
+              </a:buClr>
+              <a:buFont typeface="Arial"/>
+              <a:buChar char="•"/>
+            </a:pPr>
+            <a:r>
+              <a:rPr sz="1600" b="0" i="0">
+                <a:solidFill>
+                  <a:srgbClr val="262626"/>
+                </a:solidFill>
+                <a:latin typeface="Candara"/>
+              </a:rPr>
+              <a:t>Across 500 random seeds, random and region-stratified splits give the same test error.</a:t>
+            </a:r>
+          </a:p>
+          <a:p>
+            <a:pPr algn="l" marL="219456" indent="-219456">
+              <a:spcAft>
+                <a:spcPts val="1200"/>
+              </a:spcAft>
+              <a:buClr>
+                <a:srgbClr val="AB3D3F"/>
+              </a:buClr>
+              <a:buFont typeface="Arial"/>
+              <a:buChar char="•"/>
+            </a:pPr>
+            <a:r>
+              <a:rPr sz="1600" b="0" i="0">
+                <a:solidFill>
+                  <a:srgbClr val="262626"/>
+                </a:solidFill>
+                <a:latin typeface="Candara"/>
+              </a:rPr>
+              <a:t>Train on two regions, predict the third, and the error is four times larger.</a:t>
+            </a:r>
+          </a:p>
+          <a:p>
+            <a:pPr algn="l" marL="219456" indent="-219456">
+              <a:spcAft>
+                <a:spcPts val="600"/>
+              </a:spcAft>
+              <a:buClr>
+                <a:srgbClr val="AB3D3F"/>
+              </a:buClr>
+              <a:buFont typeface="Arial"/>
+              <a:buChar char="•"/>
+            </a:pPr>
+            <a:r>
+              <a:rPr sz="1600" b="0" i="0">
+                <a:solidFill>
+                  <a:srgbClr val="262626"/>
+                </a:solidFill>
+                <a:latin typeface="Candara"/>
+              </a:rPr>
+              <a:t>So, the model cannot yet rank districts in a region it has not seen, such as the 207 districts outside our data.</a:t>
+            </a:r>
+          </a:p>
+        </p:txBody>
+      </p:sp>
+      <p:graphicFrame>
+        <p:nvGraphicFramePr>
+          <p:cNvPr id="4" name="Chart 3"/>
+          <p:cNvGraphicFramePr>
+            <a:graphicFrameLocks noGrp="1"/>
+          </p:cNvGraphicFramePr>
+          <p:nvPr/>
+        </p:nvGraphicFramePr>
+        <p:xfrm>
+          <a:off x="5577840" y="1371600"/>
+          <a:ext cx="6035040" cy="3886200"/>
+        </p:xfrm>
+        <a:graphic>
+          <a:graphicData uri="http://schemas.openxmlformats.org/drawingml/2006/chart">
+            <c:chart xmlns:c="http://schemas.openxmlformats.org/drawingml/2006/chart" r:id="rId2"/>
+          </a:graphicData>
+        </a:graphic>
+      </p:graphicFrame>
+      <p:sp>
+        <p:nvSpPr>
+          <p:cNvPr id="5" name="TextBox 4"/>
+          <p:cNvSpPr txBox="1"/>
+          <p:nvPr/>
+        </p:nvSpPr>
+        <p:spPr>
+          <a:xfrm>
+            <a:off x="5577840" y="5303520"/>
+            <a:ext cx="6035040" cy="502920"/>
+          </a:xfrm>
+          <a:prstGeom prst="rect">
+            <a:avLst/>
+          </a:prstGeom>
+          <a:noFill/>
+        </p:spPr>
+        <p:txBody>
+          <a:bodyPr wrap="square" anchor="t" lIns="0" rIns="0" tIns="0" bIns="0">
+            <a:spAutoFit/>
+          </a:bodyPr>
+          <a:lstStyle/>
+          <a:p>
+            <a:pPr algn="l">
+              <a:spcAft>
+                <a:spcPts val="600"/>
+              </a:spcAft>
+            </a:pPr>
+            <a:r>
+              <a:rPr sz="1100" b="0" i="0">
+                <a:solidFill>
+                  <a:srgbClr val="595959"/>
+                </a:solidFill>
+                <a:latin typeface="Candara"/>
+              </a:rPr>
+              <a:t>Test RMSE in confirmed cases, Ridge model from notebook 03. Random splits: median of 500 seeds. Held out: Northern 272,529, Upper East 589,777, Upper West 139,143.</a:t>
+            </a:r>
+          </a:p>
+        </p:txBody>
+      </p:sp>
+    </p:spTree>
+  </p:cSld>
+  <p:clrMapOvr>
+    <a:masterClrMapping/>
+  </p:clrMapOvr>
+</p:sld>
+</file>
+
+<file path=ppt/slides/slide18.xml><?xml version="1.0" encoding="utf-8"?>
+<p:sld xmlns:a="http://schemas.openxmlformats.org/drawingml/2006/main" xmlns:p="http://schemas.openxmlformats.org/presentationml/2006/main" xmlns:r="http://schemas.openxmlformats.org/officeDocument/2006/relationships">
+  <p:cSld>
+    <p:spTree>
+      <p:nvGrpSpPr>
+        <p:cNvPr id="1" name=""/>
+        <p:cNvGrpSpPr/>
+        <p:nvPr/>
+      </p:nvGrpSpPr>
+      <p:grpSpPr/>
+      <p:sp>
+        <p:nvSpPr>
+          <p:cNvPr id="2" name="Text Placeholder 1"/>
+          <p:cNvSpPr>
+            <a:spLocks noGrp="1"/>
+          </p:cNvSpPr>
+          <p:nvPr>
+            <p:ph type="body" idx="11" sz="quarter"/>
+          </p:nvPr>
+        </p:nvSpPr>
+        <p:spPr>
+          <a:xfrm>
+            <a:off x="571500" y="571500"/>
+            <a:ext cx="11055096" cy="737700"/>
+          </a:xfrm>
+        </p:spPr>
+        <p:txBody>
+          <a:bodyPr/>
+          <a:lstStyle/>
+          <a:p>
+            <a:r>
+              <a:t>What our rule does with our data</a:t>
+            </a:r>
+          </a:p>
+        </p:txBody>
+      </p:sp>
+      <p:sp>
+        <p:nvSpPr>
+          <p:cNvPr id="3" name="TextBox 2"/>
+          <p:cNvSpPr txBox="1"/>
+          <p:nvPr/>
+        </p:nvSpPr>
+        <p:spPr>
+          <a:xfrm>
+            <a:off x="566928" y="1325880"/>
+            <a:ext cx="6263640" cy="4572000"/>
+          </a:xfrm>
+          <a:prstGeom prst="rect">
+            <a:avLst/>
+          </a:prstGeom>
+          <a:noFill/>
+        </p:spPr>
+        <p:txBody>
+          <a:bodyPr wrap="square" anchor="t" lIns="0" rIns="0" tIns="0" bIns="0">
+            <a:spAutoFit/>
+          </a:bodyPr>
+          <a:lstStyle/>
+          <a:p>
+            <a:pPr algn="l">
+              <a:spcAft>
+                <a:spcPts val="400"/>
+              </a:spcAft>
+            </a:pPr>
+            <a:r>
+              <a:rPr sz="1700" b="1" i="0">
+                <a:solidFill>
+                  <a:srgbClr val="AB3D3F"/>
+                </a:solidFill>
+                <a:latin typeface="Candara"/>
+              </a:rPr>
+              <a:t>The rule, for each district i</a:t>
+            </a:r>
+          </a:p>
+          <a:p>
+            <a:pPr algn="l">
+              <a:spcAft>
+                <a:spcPts val="200"/>
+              </a:spcAft>
+            </a:pPr>
+            <a:r>
+              <a:rPr sz="1800" b="0" i="0">
+                <a:solidFill>
+                  <a:srgbClr val="262626"/>
+                </a:solidFill>
+                <a:latin typeface="Cambria Math"/>
+              </a:rPr>
+              <a:t>log μ</a:t>
+            </a:r>
+            <a:r>
+              <a:rPr baseline="-25000" sz="1800" b="0" i="0">
+                <a:solidFill>
+                  <a:srgbClr val="262626"/>
+                </a:solidFill>
+                <a:latin typeface="Cambria Math"/>
+              </a:rPr>
+              <a:t>i</a:t>
+            </a:r>
+            <a:r>
+              <a:rPr sz="1800" b="0" i="0">
+                <a:solidFill>
+                  <a:srgbClr val="262626"/>
+                </a:solidFill>
+                <a:latin typeface="Cambria Math"/>
+              </a:rPr>
+              <a:t> = log pop</a:t>
+            </a:r>
+            <a:r>
+              <a:rPr baseline="-25000" sz="1800" b="0" i="0">
+                <a:solidFill>
+                  <a:srgbClr val="262626"/>
+                </a:solidFill>
+                <a:latin typeface="Cambria Math"/>
+              </a:rPr>
+              <a:t>i</a:t>
+            </a:r>
+            <a:r>
+              <a:rPr sz="1800" b="0" i="0">
+                <a:solidFill>
+                  <a:srgbClr val="262626"/>
+                </a:solidFill>
+                <a:latin typeface="Cambria Math"/>
+              </a:rPr>
+              <a:t> + β</a:t>
+            </a:r>
+            <a:r>
+              <a:rPr baseline="-25000" sz="1800" b="0" i="0">
+                <a:solidFill>
+                  <a:srgbClr val="262626"/>
+                </a:solidFill>
+                <a:latin typeface="Cambria Math"/>
+              </a:rPr>
+              <a:t>0</a:t>
+            </a:r>
+            <a:r>
+              <a:rPr sz="1800" b="0" i="0">
+                <a:solidFill>
+                  <a:srgbClr val="262626"/>
+                </a:solidFill>
+                <a:latin typeface="Cambria Math"/>
+              </a:rPr>
+              <a:t> + β</a:t>
+            </a:r>
+            <a:r>
+              <a:rPr baseline="-25000" sz="1800" b="0" i="0">
+                <a:solidFill>
+                  <a:srgbClr val="262626"/>
+                </a:solidFill>
+                <a:latin typeface="Cambria Math"/>
+              </a:rPr>
+              <a:t>1</a:t>
+            </a:r>
+            <a:r>
+              <a:rPr sz="1800" b="0" i="0">
+                <a:solidFill>
+                  <a:srgbClr val="262626"/>
+                </a:solidFill>
+                <a:latin typeface="Cambria Math"/>
+              </a:rPr>
+              <a:t> c</a:t>
+            </a:r>
+            <a:r>
+              <a:rPr baseline="-25000" sz="1800" b="0" i="0">
+                <a:solidFill>
+                  <a:srgbClr val="262626"/>
+                </a:solidFill>
+                <a:latin typeface="Cambria Math"/>
+              </a:rPr>
+              <a:t>i</a:t>
+            </a:r>
+          </a:p>
+          <a:p>
+            <a:pPr algn="l">
+              <a:spcAft>
+                <a:spcPts val="200"/>
+              </a:spcAft>
+            </a:pPr>
+            <a:r>
+              <a:rPr sz="1800" b="0" i="0">
+                <a:solidFill>
+                  <a:srgbClr val="262626"/>
+                </a:solidFill>
+                <a:latin typeface="Cambria Math"/>
+              </a:rPr>
+              <a:t>w</a:t>
+            </a:r>
+            <a:r>
+              <a:rPr baseline="-25000" sz="1800" b="0" i="0">
+                <a:solidFill>
+                  <a:srgbClr val="262626"/>
+                </a:solidFill>
+                <a:latin typeface="Cambria Math"/>
+              </a:rPr>
+              <a:t>i</a:t>
+            </a:r>
+            <a:r>
+              <a:rPr sz="1800" b="0" i="0">
+                <a:solidFill>
+                  <a:srgbClr val="262626"/>
+                </a:solidFill>
+                <a:latin typeface="Cambria Math"/>
+              </a:rPr>
+              <a:t> = U</a:t>
+            </a:r>
+            <a:r>
+              <a:rPr baseline="-25000" sz="1800" b="0" i="0">
+                <a:solidFill>
+                  <a:srgbClr val="262626"/>
+                </a:solidFill>
+                <a:latin typeface="Cambria Math"/>
+              </a:rPr>
+              <a:t>i</a:t>
+            </a:r>
+            <a:r>
+              <a:rPr sz="1800" b="0" i="0">
+                <a:solidFill>
+                  <a:srgbClr val="262626"/>
+                </a:solidFill>
+                <a:latin typeface="Cambria Math"/>
+              </a:rPr>
+              <a:t> × (1 − c</a:t>
+            </a:r>
+            <a:r>
+              <a:rPr baseline="-25000" sz="1800" b="0" i="0">
+                <a:solidFill>
+                  <a:srgbClr val="262626"/>
+                </a:solidFill>
+                <a:latin typeface="Cambria Math"/>
+              </a:rPr>
+              <a:t>i</a:t>
+            </a:r>
+            <a:r>
+              <a:rPr sz="1800" b="0" i="0">
+                <a:solidFill>
+                  <a:srgbClr val="262626"/>
+                </a:solidFill>
+                <a:latin typeface="Cambria Math"/>
+              </a:rPr>
+              <a:t> / 100)</a:t>
+            </a:r>
+          </a:p>
+          <a:p>
+            <a:pPr algn="l">
+              <a:spcAft>
+                <a:spcPts val="600"/>
+              </a:spcAft>
+            </a:pPr>
+            <a:r>
+              <a:rPr sz="1500" b="0" i="0">
+                <a:solidFill>
+                  <a:srgbClr val="262626"/>
+                </a:solidFill>
+                <a:latin typeface="Cambria Math"/>
+              </a:rPr>
+              <a:t>q</a:t>
+            </a:r>
+            <a:r>
+              <a:rPr baseline="-25000" sz="1500" b="0" i="0">
+                <a:solidFill>
+                  <a:srgbClr val="262626"/>
+                </a:solidFill>
+                <a:latin typeface="Cambria Math"/>
+              </a:rPr>
+              <a:t>i</a:t>
+            </a:r>
+            <a:r>
+              <a:rPr sz="1500" b="0" i="0">
+                <a:solidFill>
+                  <a:srgbClr val="262626"/>
+                </a:solidFill>
+                <a:latin typeface="Cambria Math"/>
+              </a:rPr>
+              <a:t> = 50,000 × w</a:t>
+            </a:r>
+            <a:r>
+              <a:rPr baseline="-25000" sz="1500" b="0" i="0">
+                <a:solidFill>
+                  <a:srgbClr val="262626"/>
+                </a:solidFill>
+                <a:latin typeface="Cambria Math"/>
+              </a:rPr>
+              <a:t>i</a:t>
+            </a:r>
+            <a:r>
+              <a:rPr sz="1500" b="0" i="0">
+                <a:solidFill>
+                  <a:srgbClr val="262626"/>
+                </a:solidFill>
+                <a:latin typeface="Cambria Math"/>
+              </a:rPr>
+              <a:t> / Σ</a:t>
+            </a:r>
+            <a:r>
+              <a:rPr baseline="-25000" sz="1500" b="0" i="0">
+                <a:solidFill>
+                  <a:srgbClr val="262626"/>
+                </a:solidFill>
+                <a:latin typeface="Cambria Math"/>
+              </a:rPr>
+              <a:t>j</a:t>
+            </a:r>
+            <a:r>
+              <a:rPr sz="1500" b="0" i="0">
+                <a:solidFill>
+                  <a:srgbClr val="262626"/>
+                </a:solidFill>
+                <a:latin typeface="Cambria Math"/>
+              </a:rPr>
+              <a:t> w</a:t>
+            </a:r>
+            <a:r>
+              <a:rPr baseline="-25000" sz="1500" b="0" i="0">
+                <a:solidFill>
+                  <a:srgbClr val="262626"/>
+                </a:solidFill>
+                <a:latin typeface="Cambria Math"/>
+              </a:rPr>
+              <a:t>j</a:t>
+            </a:r>
+            <a:r>
+              <a:rPr sz="1500" b="0" i="0">
+                <a:solidFill>
+                  <a:srgbClr val="262626"/>
+                </a:solidFill>
+                <a:latin typeface="Cambria Math"/>
+              </a:rPr>
+              <a:t>,   A</a:t>
+            </a:r>
+            <a:r>
+              <a:rPr baseline="-25000" sz="1500" b="0" i="0">
+                <a:solidFill>
+                  <a:srgbClr val="262626"/>
+                </a:solidFill>
+                <a:latin typeface="Cambria Math"/>
+              </a:rPr>
+              <a:t>i</a:t>
+            </a:r>
+            <a:r>
+              <a:rPr sz="1500" b="0" i="0">
+                <a:solidFill>
+                  <a:srgbClr val="262626"/>
+                </a:solidFill>
+                <a:latin typeface="Cambria Math"/>
+              </a:rPr>
+              <a:t> = ⌊q</a:t>
+            </a:r>
+            <a:r>
+              <a:rPr baseline="-25000" sz="1500" b="0" i="0">
+                <a:solidFill>
+                  <a:srgbClr val="262626"/>
+                </a:solidFill>
+                <a:latin typeface="Cambria Math"/>
+              </a:rPr>
+              <a:t>i</a:t>
+            </a:r>
+            <a:r>
+              <a:rPr sz="1500" b="0" i="0">
+                <a:solidFill>
+                  <a:srgbClr val="262626"/>
+                </a:solidFill>
+                <a:latin typeface="Cambria Math"/>
+              </a:rPr>
+              <a:t>⌋ or ⌊q</a:t>
+            </a:r>
+            <a:r>
+              <a:rPr baseline="-25000" sz="1500" b="0" i="0">
+                <a:solidFill>
+                  <a:srgbClr val="262626"/>
+                </a:solidFill>
+                <a:latin typeface="Cambria Math"/>
+              </a:rPr>
+              <a:t>i</a:t>
+            </a:r>
+            <a:r>
+              <a:rPr sz="1500" b="0" i="0">
+                <a:solidFill>
+                  <a:srgbClr val="262626"/>
+                </a:solidFill>
+                <a:latin typeface="Cambria Math"/>
+              </a:rPr>
+              <a:t>⌋ + 1,   Σ</a:t>
+            </a:r>
+            <a:r>
+              <a:rPr baseline="-25000" sz="1500" b="0" i="0">
+                <a:solidFill>
+                  <a:srgbClr val="262626"/>
+                </a:solidFill>
+                <a:latin typeface="Cambria Math"/>
+              </a:rPr>
+              <a:t>i</a:t>
+            </a:r>
+            <a:r>
+              <a:rPr sz="1500" b="0" i="0">
+                <a:solidFill>
+                  <a:srgbClr val="262626"/>
+                </a:solidFill>
+                <a:latin typeface="Cambria Math"/>
+              </a:rPr>
+              <a:t> A</a:t>
+            </a:r>
+            <a:r>
+              <a:rPr baseline="-25000" sz="1500" b="0" i="0">
+                <a:solidFill>
+                  <a:srgbClr val="262626"/>
+                </a:solidFill>
+                <a:latin typeface="Cambria Math"/>
+              </a:rPr>
+              <a:t>i</a:t>
+            </a:r>
+            <a:r>
+              <a:rPr sz="1500" b="0" i="0">
+                <a:solidFill>
+                  <a:srgbClr val="262626"/>
+                </a:solidFill>
+                <a:latin typeface="Cambria Math"/>
+              </a:rPr>
+              <a:t> = 50,000</a:t>
+            </a:r>
+          </a:p>
+          <a:p>
+            <a:pPr algn="l">
+              <a:spcAft>
+                <a:spcPts val="1000"/>
+              </a:spcAft>
+            </a:pPr>
+            <a:r>
+              <a:rPr sz="1150" b="0" i="0">
+                <a:solidFill>
+                  <a:srgbClr val="595959"/>
+                </a:solidFill>
+                <a:latin typeface="Candara"/>
+              </a:rPr>
+              <a:t>Unit: district i. Target: μ</a:t>
+            </a:r>
+            <a:r>
+              <a:rPr baseline="-25000" sz="1150" b="0" i="0">
+                <a:solidFill>
+                  <a:srgbClr val="595959"/>
+                </a:solidFill>
+                <a:latin typeface="Candara"/>
+              </a:rPr>
+              <a:t>i</a:t>
+            </a:r>
+            <a:r>
+              <a:rPr sz="1150" b="0" i="0">
+                <a:solidFill>
+                  <a:srgbClr val="595959"/>
+                </a:solidFill>
+                <a:latin typeface="Candara"/>
+              </a:rPr>
+              <a:t>, expected confirmed cases 2014-17, from a negative binomial (variance μ</a:t>
+            </a:r>
+            <a:r>
+              <a:rPr baseline="-25000" sz="1150" b="0" i="0">
+                <a:solidFill>
+                  <a:srgbClr val="595959"/>
+                </a:solidFill>
+                <a:latin typeface="Candara"/>
+              </a:rPr>
+              <a:t>i</a:t>
+            </a:r>
+            <a:r>
+              <a:rPr sz="1150" b="0" i="0">
+                <a:solidFill>
+                  <a:srgbClr val="595959"/>
+                </a:solidFill>
+                <a:latin typeface="Candara"/>
+              </a:rPr>
+              <a:t> + αμ</a:t>
+            </a:r>
+            <a:r>
+              <a:rPr baseline="-25000" sz="1150" b="0" i="0">
+                <a:solidFill>
+                  <a:srgbClr val="595959"/>
+                </a:solidFill>
+                <a:latin typeface="Candara"/>
+              </a:rPr>
+              <a:t>i</a:t>
+            </a:r>
+            <a:r>
+              <a:rPr sz="1150" b="0" i="0">
+                <a:solidFill>
+                  <a:srgbClr val="595959"/>
+                </a:solidFill>
+                <a:latin typeface="Candara"/>
+              </a:rPr>
+              <a:t>², α = 0.268). Metric: the weight w</a:t>
+            </a:r>
+            <a:r>
+              <a:rPr baseline="-25000" sz="1150" b="0" i="0">
+                <a:solidFill>
+                  <a:srgbClr val="595959"/>
+                </a:solidFill>
+                <a:latin typeface="Candara"/>
+              </a:rPr>
+              <a:t>i</a:t>
+            </a:r>
+            <a:r>
+              <a:rPr sz="1150" b="0" i="0">
+                <a:solidFill>
+                  <a:srgbClr val="595959"/>
+                </a:solidFill>
+                <a:latin typeface="Candara"/>
+              </a:rPr>
+              <a:t>. U</a:t>
+            </a:r>
+            <a:r>
+              <a:rPr baseline="-25000" sz="1150" b="0" i="0">
+                <a:solidFill>
+                  <a:srgbClr val="595959"/>
+                </a:solidFill>
+                <a:latin typeface="Candara"/>
+              </a:rPr>
+              <a:t>i</a:t>
+            </a:r>
+            <a:r>
+              <a:rPr sz="1150" b="0" i="0">
+                <a:solidFill>
+                  <a:srgbClr val="595959"/>
+                </a:solidFill>
+                <a:latin typeface="Candara"/>
+              </a:rPr>
+              <a:t>: upper 95% confidence bound for μ</a:t>
+            </a:r>
+            <a:r>
+              <a:rPr baseline="-25000" sz="1150" b="0" i="0">
+                <a:solidFill>
+                  <a:srgbClr val="595959"/>
+                </a:solidFill>
+                <a:latin typeface="Candara"/>
+              </a:rPr>
+              <a:t>i</a:t>
+            </a:r>
+            <a:r>
+              <a:rPr sz="1150" b="0" i="0">
+                <a:solidFill>
+                  <a:srgbClr val="595959"/>
+                </a:solidFill>
+                <a:latin typeface="Candara"/>
+              </a:rPr>
+              <a:t>. c</a:t>
+            </a:r>
+            <a:r>
+              <a:rPr baseline="-25000" sz="1150" b="0" i="0">
+                <a:solidFill>
+                  <a:srgbClr val="595959"/>
+                </a:solidFill>
+                <a:latin typeface="Candara"/>
+              </a:rPr>
+              <a:t>i</a:t>
+            </a:r>
+            <a:r>
+              <a:rPr sz="1150" b="0" i="0">
+                <a:solidFill>
+                  <a:srgbClr val="595959"/>
+                </a:solidFill>
+                <a:latin typeface="Candara"/>
+              </a:rPr>
+              <a:t>: % of homes with a net in i's region. A</a:t>
+            </a:r>
+            <a:r>
+              <a:rPr baseline="-25000" sz="1150" b="0" i="0">
+                <a:solidFill>
+                  <a:srgbClr val="595959"/>
+                </a:solidFill>
+                <a:latin typeface="Candara"/>
+              </a:rPr>
+              <a:t>i</a:t>
+            </a:r>
+            <a:r>
+              <a:rPr sz="1150" b="0" i="0">
+                <a:solidFill>
+                  <a:srgbClr val="595959"/>
+                </a:solidFill>
+                <a:latin typeface="Candara"/>
+              </a:rPr>
+              <a:t>: nets, by Hamilton's largest-remainder method.</a:t>
+            </a:r>
+          </a:p>
+          <a:p>
+            <a:pPr algn="l">
+              <a:spcAft>
+                <a:spcPts val="400"/>
+              </a:spcAft>
+            </a:pPr>
+            <a:r>
+              <a:rPr sz="1700" b="1" i="0">
+                <a:solidFill>
+                  <a:srgbClr val="AB3D3F"/>
+                </a:solidFill>
+                <a:latin typeface="Candara"/>
+              </a:rPr>
+              <a:t>What it does with our data</a:t>
+            </a:r>
+          </a:p>
+          <a:p>
+            <a:pPr algn="l" marL="219456" indent="-219456">
+              <a:spcAft>
+                <a:spcPts val="600"/>
+              </a:spcAft>
+              <a:buClr>
+                <a:srgbClr val="AB3D3F"/>
+              </a:buClr>
+              <a:buFont typeface="Arial"/>
+              <a:buChar char="•"/>
+            </a:pPr>
+            <a:r>
+              <a:rPr sz="1300" b="0" i="0">
+                <a:solidFill>
+                  <a:srgbClr val="262626"/>
+                </a:solidFill>
+                <a:latin typeface="Candara"/>
+              </a:rPr>
+              <a:t>c</a:t>
+            </a:r>
+            <a:r>
+              <a:rPr baseline="-25000" sz="1300" b="0" i="0">
+                <a:solidFill>
+                  <a:srgbClr val="262626"/>
+                </a:solidFill>
+                <a:latin typeface="Candara"/>
+              </a:rPr>
+              <a:t>i</a:t>
+            </a:r>
+            <a:r>
+              <a:rPr sz="1300" b="0" i="0">
+                <a:solidFill>
+                  <a:srgbClr val="262626"/>
+                </a:solidFill>
+                <a:latin typeface="Candara"/>
+              </a:rPr>
+              <a:t> takes one value per region, so inside a region nets follow population: 8.5, 16.0 and 9.2 per 1,000 people.</a:t>
+            </a:r>
+          </a:p>
+          <a:p>
+            <a:pPr algn="l" marL="219456" indent="-219456">
+              <a:spcAft>
+                <a:spcPts val="600"/>
+              </a:spcAft>
+              <a:buClr>
+                <a:srgbClr val="AB3D3F"/>
+              </a:buClr>
+              <a:buFont typeface="Arial"/>
+              <a:buChar char="•"/>
+            </a:pPr>
+            <a:r>
+              <a:rPr sz="1300" b="0" i="0">
+                <a:solidFill>
+                  <a:srgbClr val="262626"/>
+                </a:solidFill>
+                <a:latin typeface="Candara"/>
+              </a:rPr>
+              <a:t>U</a:t>
+            </a:r>
+            <a:r>
+              <a:rPr baseline="-25000" sz="1300" b="0" i="0">
+                <a:solidFill>
+                  <a:srgbClr val="262626"/>
+                </a:solidFill>
+                <a:latin typeface="Candara"/>
+              </a:rPr>
+              <a:t>i</a:t>
+            </a:r>
+            <a:r>
+              <a:rPr sz="1300" b="0" i="0">
+                <a:solidFill>
+                  <a:srgbClr val="262626"/>
+                </a:solidFill>
+                <a:latin typeface="Candara"/>
+              </a:rPr>
+              <a:t> = μ</a:t>
+            </a:r>
+            <a:r>
+              <a:rPr baseline="-25000" sz="1300" b="0" i="0">
+                <a:solidFill>
+                  <a:srgbClr val="262626"/>
+                </a:solidFill>
+                <a:latin typeface="Candara"/>
+              </a:rPr>
+              <a:t>i</a:t>
+            </a:r>
+            <a:r>
+              <a:rPr sz="1300" b="0" i="0">
+                <a:solidFill>
+                  <a:srgbClr val="262626"/>
+                </a:solidFill>
+                <a:latin typeface="Candara"/>
+              </a:rPr>
+              <a:t> × 1.20, 1.34 or 1.16: one multiplier per region, from a confidence interval for the mean.</a:t>
+            </a:r>
+          </a:p>
+          <a:p>
+            <a:pPr algn="l" marL="219456" indent="-219456">
+              <a:spcAft>
+                <a:spcPts val="600"/>
+              </a:spcAft>
+              <a:buClr>
+                <a:srgbClr val="AB3D3F"/>
+              </a:buClr>
+              <a:buFont typeface="Arial"/>
+              <a:buChar char="•"/>
+            </a:pPr>
+            <a:r>
+              <a:rPr sz="1300" b="0" i="0">
+                <a:solidFill>
+                  <a:srgbClr val="262626"/>
+                </a:solidFill>
+                <a:latin typeface="Candara"/>
+              </a:rPr>
+              <a:t>β</a:t>
+            </a:r>
+            <a:r>
+              <a:rPr baseline="-25000" sz="1300" b="0" i="0">
+                <a:solidFill>
+                  <a:srgbClr val="262626"/>
+                </a:solidFill>
+                <a:latin typeface="Candara"/>
+              </a:rPr>
+              <a:t>1</a:t>
+            </a:r>
+            <a:r>
+              <a:rPr sz="1300" b="0" i="0">
+                <a:solidFill>
+                  <a:srgbClr val="262626"/>
+                </a:solidFill>
+                <a:latin typeface="Candara"/>
+              </a:rPr>
+              <a:t> = +0.082 per point: more nets went with more malaria, so the split between regions is uncertain.</a:t>
+            </a:r>
+          </a:p>
+        </p:txBody>
+      </p:sp>
+      <p:graphicFrame>
+        <p:nvGraphicFramePr>
+          <p:cNvPr id="4" name="Chart 3"/>
+          <p:cNvGraphicFramePr>
+            <a:graphicFrameLocks noGrp="1"/>
+          </p:cNvGraphicFramePr>
+          <p:nvPr/>
+        </p:nvGraphicFramePr>
+        <p:xfrm>
+          <a:off x="7040880" y="1417320"/>
+          <a:ext cx="4572000" cy="3840480"/>
+        </p:xfrm>
+        <a:graphic>
+          <a:graphicData uri="http://schemas.openxmlformats.org/drawingml/2006/chart">
+            <c:chart xmlns:c="http://schemas.openxmlformats.org/drawingml/2006/chart" r:id="rId2"/>
+          </a:graphicData>
+        </a:graphic>
+      </p:graphicFrame>
+      <p:sp>
+        <p:nvSpPr>
+          <p:cNvPr id="5" name="TextBox 4"/>
+          <p:cNvSpPr txBox="1"/>
+          <p:nvPr/>
+        </p:nvSpPr>
+        <p:spPr>
+          <a:xfrm>
+            <a:off x="7040880" y="5303520"/>
+            <a:ext cx="4572000" cy="548640"/>
+          </a:xfrm>
+          <a:prstGeom prst="rect">
+            <a:avLst/>
+          </a:prstGeom>
+          <a:noFill/>
+        </p:spPr>
+        <p:txBody>
+          <a:bodyPr wrap="square" anchor="t" lIns="0" rIns="0" tIns="0" bIns="0">
+            <a:spAutoFit/>
+          </a:bodyPr>
+          <a:lstStyle/>
+          <a:p>
+            <a:pPr algn="l">
+              <a:spcAft>
+                <a:spcPts val="600"/>
+              </a:spcAft>
+            </a:pPr>
+            <a:r>
+              <a:rPr sz="1100" b="0" i="0">
+                <a:solidFill>
+                  <a:srgbClr val="595959"/>
+                </a:solidFill>
+                <a:latin typeface="Candara"/>
+              </a:rPr>
+              <a:t>Nets per 1,000 people by region, with the share of households owning a net (DHS 2022). Upper East has the highest coverage and the most nets per person: the coefficient reflects region, not the effect of nets, so the regional split is uncertain (slide 13).</a:t>
+            </a:r>
+          </a:p>
+        </p:txBody>
+      </p:sp>
+    </p:spTree>
+  </p:cSld>
+  <p:clrMapOvr>
+    <a:masterClrMapping/>
+  </p:clrMapOvr>
+</p:sld>
+</file>
+
+<file path=ppt/slides/slide19.xml><?xml version="1.0" encoding="utf-8"?>
+<p:sld xmlns:a="http://schemas.openxmlformats.org/drawingml/2006/main" xmlns:p="http://schemas.openxmlformats.org/presentationml/2006/main" xmlns:r="http://schemas.openxmlformats.org/officeDocument/2006/relationships">
+  <p:cSld>
+    <p:spTree>
+      <p:nvGrpSpPr>
+        <p:cNvPr id="1" name=""/>
+        <p:cNvGrpSpPr/>
+        <p:nvPr/>
+      </p:nvGrpSpPr>
+      <p:grpSpPr/>
+      <p:sp>
+        <p:nvSpPr>
+          <p:cNvPr id="2" name="Text Placeholder 1"/>
+          <p:cNvSpPr>
+            <a:spLocks noGrp="1"/>
+          </p:cNvSpPr>
+          <p:nvPr>
+            <p:ph type="body" idx="11" sz="quarter"/>
+          </p:nvPr>
+        </p:nvSpPr>
+        <p:spPr>
+          <a:xfrm>
+            <a:off x="571500" y="571500"/>
+            <a:ext cx="11055096" cy="737700"/>
+          </a:xfrm>
+        </p:spPr>
+        <p:txBody>
+          <a:bodyPr/>
+          <a:lstStyle/>
+          <a:p>
+            <a:r>
               <a:rPr sz="3000"/>
               <a:t>Where the need looks highest, and how sure we are</a:t>
             </a:r>
@@ -5485,7 +8659,7 @@
           <p:nvPr/>
         </p:nvPicPr>
         <p:blipFill>
-          <a:blip r:embed="rId3"/>
+          <a:blip r:embed="rId2"/>
           <a:stretch>
             <a:fillRect/>
           </a:stretch>
@@ -5517,7 +8691,7 @@
           <a:noFill/>
         </p:spPr>
         <p:txBody>
-          <a:bodyPr wrap="square" lIns="0" tIns="0" rIns="0" bIns="0" anchor="t">
+          <a:bodyPr wrap="square" anchor="t" lIns="0" rIns="0" tIns="0" bIns="0">
             <a:spAutoFit/>
           </a:bodyPr>
           <a:lstStyle/>
@@ -5557,7 +8731,7 @@
           <p:nvPr/>
         </p:nvPicPr>
         <p:blipFill>
-          <a:blip r:embed="rId4"/>
+          <a:blip r:embed="rId3"/>
           <a:stretch>
             <a:fillRect/>
           </a:stretch>
@@ -5589,7 +8763,7 @@
           <a:noFill/>
         </p:spPr>
         <p:txBody>
-          <a:bodyPr wrap="square" lIns="0" tIns="0" rIns="0" bIns="0" anchor="t">
+          <a:bodyPr wrap="square" anchor="t" lIns="0" rIns="0" tIns="0" bIns="0">
             <a:spAutoFit/>
           </a:bodyPr>
           <a:lstStyle/>
@@ -5637,7 +8811,7 @@
           <a:noFill/>
         </p:spPr>
         <p:txBody>
-          <a:bodyPr wrap="square" lIns="0" tIns="0" rIns="0" bIns="0" anchor="t">
+          <a:bodyPr wrap="square" anchor="t" lIns="0" rIns="0" tIns="0" bIns="0">
             <a:spAutoFit/>
           </a:bodyPr>
           <a:lstStyle/>
@@ -5676,8 +8850,8 @@
 </p:sld>
 </file>
 
-<file path=ppt/slides/slide11.xml><?xml version="1.0" encoding="utf-8"?>
-<p:sld xmlns:a="http://schemas.openxmlformats.org/drawingml/2006/main" xmlns:r="http://schemas.openxmlformats.org/officeDocument/2006/relationships" xmlns:p="http://schemas.openxmlformats.org/presentationml/2006/main">
+<file path=ppt/slides/slide20.xml><?xml version="1.0" encoding="utf-8"?>
+<p:sld xmlns:a="http://schemas.openxmlformats.org/drawingml/2006/main" xmlns:p="http://schemas.openxmlformats.org/presentationml/2006/main" xmlns:r="http://schemas.openxmlformats.org/officeDocument/2006/relationships">
   <p:cSld>
     <p:spTree>
       <p:nvGrpSpPr>
@@ -5685,14 +8859,7 @@
         <p:cNvGrpSpPr/>
         <p:nvPr/>
       </p:nvGrpSpPr>
-      <p:grpSpPr>
-        <a:xfrm>
-          <a:off x="0" y="0"/>
-          <a:ext cx="0" cy="0"/>
-          <a:chOff x="0" y="0"/>
-          <a:chExt cx="0" cy="0"/>
-        </a:xfrm>
-      </p:grpSpPr>
+      <p:grpSpPr/>
       <p:sp>
         <p:nvSpPr>
           <p:cNvPr id="3" name="Text Placeholder 2"/>
@@ -5700,7 +8867,7 @@
             <a:spLocks noGrp="1"/>
           </p:cNvSpPr>
           <p:nvPr>
-            <p:ph type="body" sz="quarter" idx="10"/>
+            <p:ph type="body" idx="10" sz="quarter"/>
           </p:nvPr>
         </p:nvSpPr>
         <p:spPr/>
@@ -5812,7 +8979,7 @@
             <a:spLocks noGrp="1"/>
           </p:cNvSpPr>
           <p:nvPr>
-            <p:ph type="body" sz="quarter" idx="11"/>
+            <p:ph type="body" idx="11" sz="quarter"/>
           </p:nvPr>
         </p:nvSpPr>
         <p:spPr>
@@ -5871,11 +9038,10 @@
           </a:fontRef>
         </p:style>
         <p:txBody>
-          <a:bodyPr wrap="square" lIns="201168" tIns="160934" rIns="201168" bIns="160934" rtlCol="0" anchor="t"/>
+          <a:bodyPr rtlCol="0" anchor="t" wrap="square" lIns="201168" rIns="201168" tIns="160934" bIns="160934"/>
           <a:lstStyle/>
           <a:p>
             <a:pPr algn="ctr"/>
-            <a:endParaRPr/>
           </a:p>
         </p:txBody>
       </p:sp>
@@ -5888,7 +9054,7 @@
           <p:nvPr/>
         </p:nvPicPr>
         <p:blipFill>
-          <a:blip r:embed="rId3"/>
+          <a:blip r:embed="rId2"/>
           <a:stretch>
             <a:fillRect/>
           </a:stretch>
@@ -5911,8 +9077,8 @@
 </p:sld>
 </file>
 
-<file path=ppt/slides/slide12.xml><?xml version="1.0" encoding="utf-8"?>
-<p:sld xmlns:a="http://schemas.openxmlformats.org/drawingml/2006/main" xmlns:r="http://schemas.openxmlformats.org/officeDocument/2006/relationships" xmlns:p="http://schemas.openxmlformats.org/presentationml/2006/main">
+<file path=ppt/slides/slide21.xml><?xml version="1.0" encoding="utf-8"?>
+<p:sld xmlns:a="http://schemas.openxmlformats.org/drawingml/2006/main" xmlns:p="http://schemas.openxmlformats.org/presentationml/2006/main" xmlns:r="http://schemas.openxmlformats.org/officeDocument/2006/relationships">
   <p:cSld>
     <p:spTree>
       <p:nvGrpSpPr>
@@ -5920,14 +9086,7 @@
         <p:cNvGrpSpPr/>
         <p:nvPr/>
       </p:nvGrpSpPr>
-      <p:grpSpPr>
-        <a:xfrm>
-          <a:off x="0" y="0"/>
-          <a:ext cx="0" cy="0"/>
-          <a:chOff x="0" y="0"/>
-          <a:chExt cx="0" cy="0"/>
-        </a:xfrm>
-      </p:grpSpPr>
+      <p:grpSpPr/>
       <p:sp>
         <p:nvSpPr>
           <p:cNvPr id="2" name="Text Placeholder 1"/>
@@ -5935,7 +9094,7 @@
             <a:spLocks noGrp="1"/>
           </p:cNvSpPr>
           <p:nvPr>
-            <p:ph type="body" sz="quarter" idx="11"/>
+            <p:ph type="body" idx="11" sz="quarter"/>
           </p:nvPr>
         </p:nvSpPr>
         <p:spPr>
@@ -5971,12 +9130,12 @@
           <a:noFill/>
         </p:spPr>
         <p:txBody>
-          <a:bodyPr wrap="square" lIns="0" tIns="0" rIns="0" bIns="0" anchor="t">
+          <a:bodyPr wrap="square" anchor="t" lIns="0" rIns="0" tIns="0" bIns="0">
             <a:spAutoFit/>
           </a:bodyPr>
           <a:lstStyle/>
           <a:p>
-            <a:pPr marL="219456" indent="-219456" algn="l">
+            <a:pPr algn="l" marL="219456" indent="-219456">
               <a:spcAft>
                 <a:spcPts val="900"/>
               </a:spcAft>
@@ -5997,7 +9156,7 @@
             </a:r>
           </a:p>
           <a:p>
-            <a:pPr marL="219456" indent="-219456" algn="l">
+            <a:pPr algn="l" marL="219456" indent="-219456">
               <a:spcAft>
                 <a:spcPts val="900"/>
               </a:spcAft>
@@ -6018,7 +9177,7 @@
             </a:r>
           </a:p>
           <a:p>
-            <a:pPr marL="219456" indent="-219456" algn="l">
+            <a:pPr algn="l" marL="219456" indent="-219456">
               <a:spcAft>
                 <a:spcPts val="900"/>
               </a:spcAft>
@@ -6039,7 +9198,7 @@
             </a:r>
           </a:p>
           <a:p>
-            <a:pPr marL="219456" indent="-219456" algn="l">
+            <a:pPr algn="l" marL="219456" indent="-219456">
               <a:spcAft>
                 <a:spcPts val="900"/>
               </a:spcAft>
@@ -6060,7 +9219,7 @@
             </a:r>
           </a:p>
           <a:p>
-            <a:pPr marL="219456" indent="-219456" algn="l">
+            <a:pPr algn="l" marL="219456" indent="-219456">
               <a:spcAft>
                 <a:spcPts val="600"/>
               </a:spcAft>
@@ -6096,7 +9255,7 @@
         </p:xfrm>
         <a:graphic>
           <a:graphicData uri="http://schemas.openxmlformats.org/drawingml/2006/chart">
-            <c:chart xmlns:c="http://schemas.openxmlformats.org/drawingml/2006/chart" xmlns:r="http://schemas.openxmlformats.org/officeDocument/2006/relationships" r:id="rId3"/>
+            <c:chart xmlns:c="http://schemas.openxmlformats.org/drawingml/2006/chart" r:id="rId2"/>
           </a:graphicData>
         </a:graphic>
       </p:graphicFrame>
@@ -6117,7 +9276,7 @@
           <a:noFill/>
         </p:spPr>
         <p:txBody>
-          <a:bodyPr wrap="square" lIns="0" tIns="0" rIns="0" bIns="0" anchor="t">
+          <a:bodyPr wrap="square" anchor="t" lIns="0" rIns="0" tIns="0" bIns="0">
             <a:spAutoFit/>
           </a:bodyPr>
           <a:lstStyle/>
@@ -6147,8 +9306,8 @@
 </p:sld>
 </file>
 
-<file path=ppt/slides/slide13.xml><?xml version="1.0" encoding="utf-8"?>
-<p:sld xmlns:a="http://schemas.openxmlformats.org/drawingml/2006/main" xmlns:r="http://schemas.openxmlformats.org/officeDocument/2006/relationships" xmlns:p="http://schemas.openxmlformats.org/presentationml/2006/main">
+<file path=ppt/slides/slide22.xml><?xml version="1.0" encoding="utf-8"?>
+<p:sld xmlns:a="http://schemas.openxmlformats.org/drawingml/2006/main" xmlns:p="http://schemas.openxmlformats.org/presentationml/2006/main" xmlns:r="http://schemas.openxmlformats.org/officeDocument/2006/relationships">
   <p:cSld>
     <p:spTree>
       <p:nvGrpSpPr>
@@ -6156,14 +9315,7 @@
         <p:cNvGrpSpPr/>
         <p:nvPr/>
       </p:nvGrpSpPr>
-      <p:grpSpPr>
-        <a:xfrm>
-          <a:off x="0" y="0"/>
-          <a:ext cx="0" cy="0"/>
-          <a:chOff x="0" y="0"/>
-          <a:chExt cx="0" cy="0"/>
-        </a:xfrm>
-      </p:grpSpPr>
+      <p:grpSpPr/>
       <p:sp>
         <p:nvSpPr>
           <p:cNvPr id="3" name="Text Placeholder 2"/>
@@ -6171,7 +9323,7 @@
             <a:spLocks noGrp="1"/>
           </p:cNvSpPr>
           <p:nvPr>
-            <p:ph type="body" sz="quarter" idx="11"/>
+            <p:ph type="body" idx="11" sz="quarter"/>
           </p:nvPr>
         </p:nvSpPr>
         <p:spPr>
@@ -6209,41 +9361,11 @@
                 <a:tableStyleId>{5C22544A-7EE6-4342-B048-85BDC9FD1C3A}</a:tableStyleId>
               </a:tblPr>
               <a:tblGrid>
-                <a:gridCol w="4946904">
-                  <a:extLst>
-                    <a:ext uri="{9D8B030D-6E8A-4147-A177-3AD203B41FA5}">
-                      <a16:colId xmlns:a16="http://schemas.microsoft.com/office/drawing/2014/main" val="20000"/>
-                    </a:ext>
-                  </a:extLst>
-                </a:gridCol>
-                <a:gridCol w="1280160">
-                  <a:extLst>
-                    <a:ext uri="{9D8B030D-6E8A-4147-A177-3AD203B41FA5}">
-                      <a16:colId xmlns:a16="http://schemas.microsoft.com/office/drawing/2014/main" val="20001"/>
-                    </a:ext>
-                  </a:extLst>
-                </a:gridCol>
-                <a:gridCol w="1280160">
-                  <a:extLst>
-                    <a:ext uri="{9D8B030D-6E8A-4147-A177-3AD203B41FA5}">
-                      <a16:colId xmlns:a16="http://schemas.microsoft.com/office/drawing/2014/main" val="20002"/>
-                    </a:ext>
-                  </a:extLst>
-                </a:gridCol>
-                <a:gridCol w="1280160">
-                  <a:extLst>
-                    <a:ext uri="{9D8B030D-6E8A-4147-A177-3AD203B41FA5}">
-                      <a16:colId xmlns:a16="http://schemas.microsoft.com/office/drawing/2014/main" val="20003"/>
-                    </a:ext>
-                  </a:extLst>
-                </a:gridCol>
-                <a:gridCol w="1280160">
-                  <a:extLst>
-                    <a:ext uri="{9D8B030D-6E8A-4147-A177-3AD203B41FA5}">
-                      <a16:colId xmlns:a16="http://schemas.microsoft.com/office/drawing/2014/main" val="20004"/>
-                    </a:ext>
-                  </a:extLst>
-                </a:gridCol>
+                <a:gridCol w="4946904"/>
+                <a:gridCol w="1280160"/>
+                <a:gridCol w="1280160"/>
+                <a:gridCol w="1280160"/>
+                <a:gridCol w="1280160"/>
               </a:tblGrid>
               <a:tr h="411480">
                 <a:tc>
@@ -6267,7 +9389,7 @@
                       </a:r>
                     </a:p>
                   </a:txBody>
-                  <a:tcPr marT="36576" marB="36576" anchor="ctr">
+                  <a:tcPr marL="91440" marR="91440" marT="36576" marB="36576" anchor="ctr">
                     <a:solidFill>
                       <a:srgbClr val="AB3D3F"/>
                     </a:solidFill>
@@ -6294,7 +9416,7 @@
                       </a:r>
                     </a:p>
                   </a:txBody>
-                  <a:tcPr marT="36576" marB="36576" anchor="ctr">
+                  <a:tcPr marL="91440" marR="91440" marT="36576" marB="36576" anchor="ctr">
                     <a:solidFill>
                       <a:srgbClr val="AB3D3F"/>
                     </a:solidFill>
@@ -6321,7 +9443,7 @@
                       </a:r>
                     </a:p>
                   </a:txBody>
-                  <a:tcPr marT="36576" marB="36576" anchor="ctr">
+                  <a:tcPr marL="91440" marR="91440" marT="36576" marB="36576" anchor="ctr">
                     <a:solidFill>
                       <a:srgbClr val="AB3D3F"/>
                     </a:solidFill>
@@ -6348,7 +9470,7 @@
                       </a:r>
                     </a:p>
                   </a:txBody>
-                  <a:tcPr marT="36576" marB="36576" anchor="ctr">
+                  <a:tcPr marL="91440" marR="91440" marT="36576" marB="36576" anchor="ctr">
                     <a:solidFill>
                       <a:srgbClr val="AB3D3F"/>
                     </a:solidFill>
@@ -6375,17 +9497,12 @@
                       </a:r>
                     </a:p>
                   </a:txBody>
-                  <a:tcPr marT="36576" marB="36576" anchor="ctr">
+                  <a:tcPr marL="91440" marR="91440" marT="36576" marB="36576" anchor="ctr">
                     <a:solidFill>
                       <a:srgbClr val="AB3D3F"/>
                     </a:solidFill>
                   </a:tcPr>
                 </a:tc>
-                <a:extLst>
-                  <a:ext uri="{0D108BD9-81ED-4DB2-BD59-A6C34878D82A}">
-                    <a16:rowId xmlns:a16="http://schemas.microsoft.com/office/drawing/2014/main" val="10000"/>
-                  </a:ext>
-                </a:extLst>
               </a:tr>
               <a:tr h="502920">
                 <a:tc>
@@ -6409,7 +9526,7 @@
                       </a:r>
                     </a:p>
                   </a:txBody>
-                  <a:tcPr marT="36576" marB="36576" anchor="ctr">
+                  <a:tcPr marL="91440" marR="91440" marT="36576" marB="36576" anchor="ctr">
                     <a:solidFill>
                       <a:srgbClr val="FFFFFF"/>
                     </a:solidFill>
@@ -6436,7 +9553,7 @@
                       </a:r>
                     </a:p>
                   </a:txBody>
-                  <a:tcPr marT="36576" marB="36576" anchor="ctr">
+                  <a:tcPr marL="91440" marR="91440" marT="36576" marB="36576" anchor="ctr">
                     <a:solidFill>
                       <a:srgbClr val="FFFFFF"/>
                     </a:solidFill>
@@ -6463,7 +9580,7 @@
                       </a:r>
                     </a:p>
                   </a:txBody>
-                  <a:tcPr marT="36576" marB="36576" anchor="ctr">
+                  <a:tcPr marL="91440" marR="91440" marT="36576" marB="36576" anchor="ctr">
                     <a:solidFill>
                       <a:srgbClr val="FFFFFF"/>
                     </a:solidFill>
@@ -6490,7 +9607,7 @@
                       </a:r>
                     </a:p>
                   </a:txBody>
-                  <a:tcPr marT="36576" marB="36576" anchor="ctr">
+                  <a:tcPr marL="91440" marR="91440" marT="36576" marB="36576" anchor="ctr">
                     <a:solidFill>
                       <a:srgbClr val="FFFFFF"/>
                     </a:solidFill>
@@ -6517,17 +9634,12 @@
                       </a:r>
                     </a:p>
                   </a:txBody>
-                  <a:tcPr marT="36576" marB="36576" anchor="ctr">
+                  <a:tcPr marL="91440" marR="91440" marT="36576" marB="36576" anchor="ctr">
                     <a:solidFill>
                       <a:srgbClr val="FFFFFF"/>
                     </a:solidFill>
                   </a:tcPr>
                 </a:tc>
-                <a:extLst>
-                  <a:ext uri="{0D108BD9-81ED-4DB2-BD59-A6C34878D82A}">
-                    <a16:rowId xmlns:a16="http://schemas.microsoft.com/office/drawing/2014/main" val="10001"/>
-                  </a:ext>
-                </a:extLst>
               </a:tr>
               <a:tr h="502920">
                 <a:tc>
@@ -6551,7 +9663,7 @@
                       </a:r>
                     </a:p>
                   </a:txBody>
-                  <a:tcPr marT="36576" marB="36576" anchor="ctr">
+                  <a:tcPr marL="91440" marR="91440" marT="36576" marB="36576" anchor="ctr">
                     <a:solidFill>
                       <a:srgbClr val="F3F3F3"/>
                     </a:solidFill>
@@ -6578,7 +9690,7 @@
                       </a:r>
                     </a:p>
                   </a:txBody>
-                  <a:tcPr marT="36576" marB="36576" anchor="ctr">
+                  <a:tcPr marL="91440" marR="91440" marT="36576" marB="36576" anchor="ctr">
                     <a:solidFill>
                       <a:srgbClr val="F3F3F3"/>
                     </a:solidFill>
@@ -6605,7 +9717,7 @@
                       </a:r>
                     </a:p>
                   </a:txBody>
-                  <a:tcPr marT="36576" marB="36576" anchor="ctr">
+                  <a:tcPr marL="91440" marR="91440" marT="36576" marB="36576" anchor="ctr">
                     <a:solidFill>
                       <a:srgbClr val="F3F3F3"/>
                     </a:solidFill>
@@ -6632,7 +9744,7 @@
                       </a:r>
                     </a:p>
                   </a:txBody>
-                  <a:tcPr marT="36576" marB="36576" anchor="ctr">
+                  <a:tcPr marL="91440" marR="91440" marT="36576" marB="36576" anchor="ctr">
                     <a:solidFill>
                       <a:srgbClr val="F3F3F3"/>
                     </a:solidFill>
@@ -6659,17 +9771,12 @@
                       </a:r>
                     </a:p>
                   </a:txBody>
-                  <a:tcPr marT="36576" marB="36576" anchor="ctr">
+                  <a:tcPr marL="91440" marR="91440" marT="36576" marB="36576" anchor="ctr">
                     <a:solidFill>
                       <a:srgbClr val="F3F3F3"/>
                     </a:solidFill>
                   </a:tcPr>
                 </a:tc>
-                <a:extLst>
-                  <a:ext uri="{0D108BD9-81ED-4DB2-BD59-A6C34878D82A}">
-                    <a16:rowId xmlns:a16="http://schemas.microsoft.com/office/drawing/2014/main" val="10002"/>
-                  </a:ext>
-                </a:extLst>
               </a:tr>
               <a:tr h="502920">
                 <a:tc>
@@ -6693,7 +9800,7 @@
                       </a:r>
                     </a:p>
                   </a:txBody>
-                  <a:tcPr marT="36576" marB="36576" anchor="ctr">
+                  <a:tcPr marL="91440" marR="91440" marT="36576" marB="36576" anchor="ctr">
                     <a:solidFill>
                       <a:srgbClr val="FFFFFF"/>
                     </a:solidFill>
@@ -6720,7 +9827,7 @@
                       </a:r>
                     </a:p>
                   </a:txBody>
-                  <a:tcPr marT="36576" marB="36576" anchor="ctr">
+                  <a:tcPr marL="91440" marR="91440" marT="36576" marB="36576" anchor="ctr">
                     <a:solidFill>
                       <a:srgbClr val="FFFFFF"/>
                     </a:solidFill>
@@ -6747,7 +9854,7 @@
                       </a:r>
                     </a:p>
                   </a:txBody>
-                  <a:tcPr marT="36576" marB="36576" anchor="ctr">
+                  <a:tcPr marL="91440" marR="91440" marT="36576" marB="36576" anchor="ctr">
                     <a:solidFill>
                       <a:srgbClr val="FFFFFF"/>
                     </a:solidFill>
@@ -6774,7 +9881,7 @@
                       </a:r>
                     </a:p>
                   </a:txBody>
-                  <a:tcPr marT="36576" marB="36576" anchor="ctr">
+                  <a:tcPr marL="91440" marR="91440" marT="36576" marB="36576" anchor="ctr">
                     <a:solidFill>
                       <a:srgbClr val="FFFFFF"/>
                     </a:solidFill>
@@ -6801,17 +9908,12 @@
                       </a:r>
                     </a:p>
                   </a:txBody>
-                  <a:tcPr marT="36576" marB="36576" anchor="ctr">
+                  <a:tcPr marL="91440" marR="91440" marT="36576" marB="36576" anchor="ctr">
                     <a:solidFill>
                       <a:srgbClr val="FFFFFF"/>
                     </a:solidFill>
                   </a:tcPr>
                 </a:tc>
-                <a:extLst>
-                  <a:ext uri="{0D108BD9-81ED-4DB2-BD59-A6C34878D82A}">
-                    <a16:rowId xmlns:a16="http://schemas.microsoft.com/office/drawing/2014/main" val="10003"/>
-                  </a:ext>
-                </a:extLst>
               </a:tr>
               <a:tr h="502920">
                 <a:tc>
@@ -6835,7 +9937,7 @@
                       </a:r>
                     </a:p>
                   </a:txBody>
-                  <a:tcPr marT="36576" marB="36576" anchor="ctr">
+                  <a:tcPr marL="91440" marR="91440" marT="36576" marB="36576" anchor="ctr">
                     <a:solidFill>
                       <a:srgbClr val="F3F3F3"/>
                     </a:solidFill>
@@ -6862,7 +9964,7 @@
                       </a:r>
                     </a:p>
                   </a:txBody>
-                  <a:tcPr marT="36576" marB="36576" anchor="ctr">
+                  <a:tcPr marL="91440" marR="91440" marT="36576" marB="36576" anchor="ctr">
                     <a:solidFill>
                       <a:srgbClr val="F3F3F3"/>
                     </a:solidFill>
@@ -6889,7 +9991,7 @@
                       </a:r>
                     </a:p>
                   </a:txBody>
-                  <a:tcPr marT="36576" marB="36576" anchor="ctr">
+                  <a:tcPr marL="91440" marR="91440" marT="36576" marB="36576" anchor="ctr">
                     <a:solidFill>
                       <a:srgbClr val="F3F3F3"/>
                     </a:solidFill>
@@ -6916,7 +10018,7 @@
                       </a:r>
                     </a:p>
                   </a:txBody>
-                  <a:tcPr marT="36576" marB="36576" anchor="ctr">
+                  <a:tcPr marL="91440" marR="91440" marT="36576" marB="36576" anchor="ctr">
                     <a:solidFill>
                       <a:srgbClr val="F3F3F3"/>
                     </a:solidFill>
@@ -6943,17 +10045,12 @@
                       </a:r>
                     </a:p>
                   </a:txBody>
-                  <a:tcPr marT="36576" marB="36576" anchor="ctr">
+                  <a:tcPr marL="91440" marR="91440" marT="36576" marB="36576" anchor="ctr">
                     <a:solidFill>
                       <a:srgbClr val="F3F3F3"/>
                     </a:solidFill>
                   </a:tcPr>
                 </a:tc>
-                <a:extLst>
-                  <a:ext uri="{0D108BD9-81ED-4DB2-BD59-A6C34878D82A}">
-                    <a16:rowId xmlns:a16="http://schemas.microsoft.com/office/drawing/2014/main" val="10004"/>
-                  </a:ext>
-                </a:extLst>
               </a:tr>
               <a:tr h="502920">
                 <a:tc>
@@ -6977,7 +10074,7 @@
                       </a:r>
                     </a:p>
                   </a:txBody>
-                  <a:tcPr marT="36576" marB="36576" anchor="ctr">
+                  <a:tcPr marL="91440" marR="91440" marT="36576" marB="36576" anchor="ctr">
                     <a:solidFill>
                       <a:srgbClr val="FFFFFF"/>
                     </a:solidFill>
@@ -7004,7 +10101,7 @@
                       </a:r>
                     </a:p>
                   </a:txBody>
-                  <a:tcPr marT="36576" marB="36576" anchor="ctr">
+                  <a:tcPr marL="91440" marR="91440" marT="36576" marB="36576" anchor="ctr">
                     <a:solidFill>
                       <a:srgbClr val="FFFFFF"/>
                     </a:solidFill>
@@ -7031,7 +10128,7 @@
                       </a:r>
                     </a:p>
                   </a:txBody>
-                  <a:tcPr marT="36576" marB="36576" anchor="ctr">
+                  <a:tcPr marL="91440" marR="91440" marT="36576" marB="36576" anchor="ctr">
                     <a:solidFill>
                       <a:srgbClr val="FFFFFF"/>
                     </a:solidFill>
@@ -7058,7 +10155,7 @@
                       </a:r>
                     </a:p>
                   </a:txBody>
-                  <a:tcPr marT="36576" marB="36576" anchor="ctr">
+                  <a:tcPr marL="91440" marR="91440" marT="36576" marB="36576" anchor="ctr">
                     <a:solidFill>
                       <a:srgbClr val="FFFFFF"/>
                     </a:solidFill>
@@ -7085,17 +10182,12 @@
                       </a:r>
                     </a:p>
                   </a:txBody>
-                  <a:tcPr marT="36576" marB="36576" anchor="ctr">
+                  <a:tcPr marL="91440" marR="91440" marT="36576" marB="36576" anchor="ctr">
                     <a:solidFill>
                       <a:srgbClr val="FFFFFF"/>
                     </a:solidFill>
                   </a:tcPr>
                 </a:tc>
-                <a:extLst>
-                  <a:ext uri="{0D108BD9-81ED-4DB2-BD59-A6C34878D82A}">
-                    <a16:rowId xmlns:a16="http://schemas.microsoft.com/office/drawing/2014/main" val="10005"/>
-                  </a:ext>
-                </a:extLst>
               </a:tr>
               <a:tr h="502920">
                 <a:tc>
@@ -7119,7 +10211,7 @@
                       </a:r>
                     </a:p>
                   </a:txBody>
-                  <a:tcPr marT="36576" marB="36576" anchor="ctr">
+                  <a:tcPr marL="91440" marR="91440" marT="36576" marB="36576" anchor="ctr">
                     <a:solidFill>
                       <a:srgbClr val="F3F3F3"/>
                     </a:solidFill>
@@ -7146,7 +10238,7 @@
                       </a:r>
                     </a:p>
                   </a:txBody>
-                  <a:tcPr marT="36576" marB="36576" anchor="ctr">
+                  <a:tcPr marL="91440" marR="91440" marT="36576" marB="36576" anchor="ctr">
                     <a:solidFill>
                       <a:srgbClr val="F3F3F3"/>
                     </a:solidFill>
@@ -7173,7 +10265,7 @@
                       </a:r>
                     </a:p>
                   </a:txBody>
-                  <a:tcPr marT="36576" marB="36576" anchor="ctr">
+                  <a:tcPr marL="91440" marR="91440" marT="36576" marB="36576" anchor="ctr">
                     <a:solidFill>
                       <a:srgbClr val="F3F3F3"/>
                     </a:solidFill>
@@ -7200,7 +10292,7 @@
                       </a:r>
                     </a:p>
                   </a:txBody>
-                  <a:tcPr marT="36576" marB="36576" anchor="ctr">
+                  <a:tcPr marL="91440" marR="91440" marT="36576" marB="36576" anchor="ctr">
                     <a:solidFill>
                       <a:srgbClr val="F3F3F3"/>
                     </a:solidFill>
@@ -7227,17 +10319,12 @@
                       </a:r>
                     </a:p>
                   </a:txBody>
-                  <a:tcPr marT="36576" marB="36576" anchor="ctr">
+                  <a:tcPr marL="91440" marR="91440" marT="36576" marB="36576" anchor="ctr">
                     <a:solidFill>
                       <a:srgbClr val="F3F3F3"/>
                     </a:solidFill>
                   </a:tcPr>
                 </a:tc>
-                <a:extLst>
-                  <a:ext uri="{0D108BD9-81ED-4DB2-BD59-A6C34878D82A}">
-                    <a16:rowId xmlns:a16="http://schemas.microsoft.com/office/drawing/2014/main" val="10006"/>
-                  </a:ext>
-                </a:extLst>
               </a:tr>
             </a:tbl>
           </a:graphicData>
@@ -7260,7 +10347,7 @@
           <a:noFill/>
         </p:spPr>
         <p:txBody>
-          <a:bodyPr wrap="square" lIns="0" tIns="0" rIns="0" bIns="0" anchor="t">
+          <a:bodyPr wrap="square" anchor="t" lIns="0" rIns="0" tIns="0" bIns="0">
             <a:spAutoFit/>
           </a:bodyPr>
           <a:lstStyle/>
@@ -7299,8 +10386,8 @@
 </p:sld>
 </file>
 
-<file path=ppt/slides/slide14.xml><?xml version="1.0" encoding="utf-8"?>
-<p:sld xmlns:a="http://schemas.openxmlformats.org/drawingml/2006/main" xmlns:r="http://schemas.openxmlformats.org/officeDocument/2006/relationships" xmlns:p="http://schemas.openxmlformats.org/presentationml/2006/main">
+<file path=ppt/slides/slide23.xml><?xml version="1.0" encoding="utf-8"?>
+<p:sld xmlns:a="http://schemas.openxmlformats.org/drawingml/2006/main" xmlns:p="http://schemas.openxmlformats.org/presentationml/2006/main" xmlns:r="http://schemas.openxmlformats.org/officeDocument/2006/relationships">
   <p:cSld>
     <p:spTree>
       <p:nvGrpSpPr>
@@ -7308,14 +10395,7 @@
         <p:cNvGrpSpPr/>
         <p:nvPr/>
       </p:nvGrpSpPr>
-      <p:grpSpPr>
-        <a:xfrm>
-          <a:off x="0" y="0"/>
-          <a:ext cx="0" cy="0"/>
-          <a:chOff x="0" y="0"/>
-          <a:chExt cx="0" cy="0"/>
-        </a:xfrm>
-      </p:grpSpPr>
+      <p:grpSpPr/>
       <p:sp>
         <p:nvSpPr>
           <p:cNvPr id="2" name="Text Placeholder 1"/>
@@ -7323,7 +10403,7 @@
             <a:spLocks noGrp="1"/>
           </p:cNvSpPr>
           <p:nvPr>
-            <p:ph type="body" sz="quarter" idx="11"/>
+            <p:ph type="body" idx="11" sz="quarter"/>
           </p:nvPr>
         </p:nvSpPr>
         <p:spPr>
@@ -7382,7 +10462,7 @@
           </a:fontRef>
         </p:style>
         <p:txBody>
-          <a:bodyPr wrap="square" lIns="201168" tIns="160934" rIns="201168" bIns="160934" rtlCol="0" anchor="t"/>
+          <a:bodyPr rtlCol="0" anchor="t" wrap="square" lIns="201168" rIns="201168" tIns="160934" bIns="160934"/>
           <a:lstStyle/>
           <a:p>
             <a:pPr algn="l">
@@ -7473,7 +10553,7 @@
           </a:fontRef>
         </p:style>
         <p:txBody>
-          <a:bodyPr wrap="square" lIns="201168" tIns="160934" rIns="201168" bIns="160934" rtlCol="0" anchor="t"/>
+          <a:bodyPr rtlCol="0" anchor="t" wrap="square" lIns="201168" rIns="201168" tIns="160934" bIns="160934"/>
           <a:lstStyle/>
           <a:p>
             <a:pPr algn="l">
@@ -7564,7 +10644,7 @@
           </a:fontRef>
         </p:style>
         <p:txBody>
-          <a:bodyPr wrap="square" lIns="201168" tIns="160934" rIns="201168" bIns="160934" rtlCol="0" anchor="t"/>
+          <a:bodyPr rtlCol="0" anchor="t" wrap="square" lIns="201168" rIns="201168" tIns="160934" bIns="160934"/>
           <a:lstStyle/>
           <a:p>
             <a:pPr algn="l">
@@ -7655,7 +10735,7 @@
           </a:fontRef>
         </p:style>
         <p:txBody>
-          <a:bodyPr wrap="square" lIns="201168" tIns="160934" rIns="201168" bIns="160934" rtlCol="0" anchor="t"/>
+          <a:bodyPr rtlCol="0" anchor="t" wrap="square" lIns="201168" rIns="201168" tIns="160934" bIns="160934"/>
           <a:lstStyle/>
           <a:p>
             <a:pPr algn="l">
@@ -7715,8 +10795,8 @@
 </p:sld>
 </file>
 
-<file path=ppt/slides/slide15.xml><?xml version="1.0" encoding="utf-8"?>
-<p:sld xmlns:a="http://schemas.openxmlformats.org/drawingml/2006/main" xmlns:r="http://schemas.openxmlformats.org/officeDocument/2006/relationships" xmlns:p="http://schemas.openxmlformats.org/presentationml/2006/main">
+<file path=ppt/slides/slide24.xml><?xml version="1.0" encoding="utf-8"?>
+<p:sld xmlns:a="http://schemas.openxmlformats.org/drawingml/2006/main" xmlns:p="http://schemas.openxmlformats.org/presentationml/2006/main" xmlns:r="http://schemas.openxmlformats.org/officeDocument/2006/relationships">
   <p:cSld>
     <p:spTree>
       <p:nvGrpSpPr>
@@ -7724,14 +10804,7 @@
         <p:cNvGrpSpPr/>
         <p:nvPr/>
       </p:nvGrpSpPr>
-      <p:grpSpPr>
-        <a:xfrm>
-          <a:off x="0" y="0"/>
-          <a:ext cx="0" cy="0"/>
-          <a:chOff x="0" y="0"/>
-          <a:chExt cx="0" cy="0"/>
-        </a:xfrm>
-      </p:grpSpPr>
+      <p:grpSpPr/>
       <p:sp>
         <p:nvSpPr>
           <p:cNvPr id="2" name="Text Placeholder 1"/>
@@ -7739,7 +10812,7 @@
             <a:spLocks noGrp="1"/>
           </p:cNvSpPr>
           <p:nvPr>
-            <p:ph type="body" sz="quarter" idx="11"/>
+            <p:ph type="body" idx="11" sz="quarter"/>
           </p:nvPr>
         </p:nvSpPr>
         <p:spPr>
@@ -7797,7 +10870,7 @@
           </a:fontRef>
         </p:style>
         <p:txBody>
-          <a:bodyPr wrap="square" lIns="201168" tIns="160934" rIns="201168" bIns="160934" rtlCol="0" anchor="t"/>
+          <a:bodyPr rtlCol="0" anchor="t" wrap="square" lIns="201168" rIns="201168" tIns="160934" bIns="160934"/>
           <a:lstStyle/>
           <a:p>
             <a:pPr algn="l">
@@ -7816,7 +10889,7 @@
             </a:r>
           </a:p>
           <a:p>
-            <a:pPr marL="219456" indent="-219456" algn="l">
+            <a:pPr algn="l" marL="219456" indent="-219456">
               <a:spcAft>
                 <a:spcPts val="800"/>
               </a:spcAft>
@@ -7837,7 +10910,7 @@
             </a:r>
           </a:p>
           <a:p>
-            <a:pPr marL="219456" indent="-219456" algn="l">
+            <a:pPr algn="l" marL="219456" indent="-219456">
               <a:spcAft>
                 <a:spcPts val="800"/>
               </a:spcAft>
@@ -7858,7 +10931,7 @@
             </a:r>
           </a:p>
           <a:p>
-            <a:pPr marL="219456" indent="-219456" algn="l">
+            <a:pPr algn="l" marL="219456" indent="-219456">
               <a:spcAft>
                 <a:spcPts val="800"/>
               </a:spcAft>
@@ -7879,7 +10952,7 @@
             </a:r>
           </a:p>
           <a:p>
-            <a:pPr marL="219456" indent="-219456" algn="l">
+            <a:pPr algn="l" marL="219456" indent="-219456">
               <a:spcAft>
                 <a:spcPts val="600"/>
               </a:spcAft>
@@ -7940,7 +11013,7 @@
           </a:fontRef>
         </p:style>
         <p:txBody>
-          <a:bodyPr wrap="square" lIns="201168" tIns="160934" rIns="201168" bIns="160934" rtlCol="0" anchor="t"/>
+          <a:bodyPr rtlCol="0" anchor="t" wrap="square" lIns="201168" rIns="201168" tIns="160934" bIns="160934"/>
           <a:lstStyle/>
           <a:p>
             <a:pPr algn="l">
@@ -7959,7 +11032,7 @@
             </a:r>
           </a:p>
           <a:p>
-            <a:pPr marL="219456" indent="-219456" algn="l">
+            <a:pPr algn="l" marL="219456" indent="-219456">
               <a:spcAft>
                 <a:spcPts val="1000"/>
               </a:spcAft>
@@ -7980,7 +11053,7 @@
             </a:r>
           </a:p>
           <a:p>
-            <a:pPr marL="219456" indent="-219456" algn="l">
+            <a:pPr algn="l" marL="219456" indent="-219456">
               <a:spcAft>
                 <a:spcPts val="1000"/>
               </a:spcAft>
@@ -8001,7 +11074,7 @@
             </a:r>
           </a:p>
           <a:p>
-            <a:pPr marL="219456" indent="-219456" algn="l">
+            <a:pPr algn="l" marL="219456" indent="-219456">
               <a:spcAft>
                 <a:spcPts val="1000"/>
               </a:spcAft>
@@ -8022,7 +11095,7 @@
             </a:r>
           </a:p>
           <a:p>
-            <a:pPr marL="219456" indent="-219456" algn="l">
+            <a:pPr algn="l" marL="219456" indent="-219456">
               <a:spcAft>
                 <a:spcPts val="600"/>
               </a:spcAft>
@@ -8052,8 +11125,8 @@
 </p:sld>
 </file>
 
-<file path=ppt/slides/slide16.xml><?xml version="1.0" encoding="utf-8"?>
-<p:sld xmlns:a="http://schemas.openxmlformats.org/drawingml/2006/main" xmlns:r="http://schemas.openxmlformats.org/officeDocument/2006/relationships" xmlns:p="http://schemas.openxmlformats.org/presentationml/2006/main">
+<file path=ppt/slides/slide25.xml><?xml version="1.0" encoding="utf-8"?>
+<p:sld xmlns:a="http://schemas.openxmlformats.org/drawingml/2006/main" xmlns:p="http://schemas.openxmlformats.org/presentationml/2006/main" xmlns:r="http://schemas.openxmlformats.org/officeDocument/2006/relationships">
   <p:cSld>
     <p:spTree>
       <p:nvGrpSpPr>
@@ -8061,14 +11134,337 @@
         <p:cNvGrpSpPr/>
         <p:nvPr/>
       </p:nvGrpSpPr>
-      <p:grpSpPr>
-        <a:xfrm>
-          <a:off x="0" y="0"/>
-          <a:ext cx="0" cy="0"/>
-          <a:chOff x="0" y="0"/>
-          <a:chExt cx="0" cy="0"/>
-        </a:xfrm>
-      </p:grpSpPr>
+      <p:grpSpPr/>
+      <p:sp>
+        <p:nvSpPr>
+          <p:cNvPr id="2" name="Text Placeholder 1"/>
+          <p:cNvSpPr>
+            <a:spLocks noGrp="1"/>
+          </p:cNvSpPr>
+          <p:nvPr>
+            <p:ph type="body" idx="11" sz="quarter"/>
+          </p:nvPr>
+        </p:nvSpPr>
+        <p:spPr>
+          <a:xfrm>
+            <a:off x="571500" y="571500"/>
+            <a:ext cx="11055096" cy="737700"/>
+          </a:xfrm>
+        </p:spPr>
+        <p:txBody>
+          <a:bodyPr/>
+          <a:lstStyle/>
+          <a:p>
+            <a:r>
+              <a:t>References</a:t>
+            </a:r>
+          </a:p>
+        </p:txBody>
+      </p:sp>
+      <p:sp>
+        <p:nvSpPr>
+          <p:cNvPr id="3" name="TextBox 2"/>
+          <p:cNvSpPr txBox="1"/>
+          <p:nvPr/>
+        </p:nvSpPr>
+        <p:spPr>
+          <a:xfrm>
+            <a:off x="566928" y="1371600"/>
+            <a:ext cx="5440680" cy="4480560"/>
+          </a:xfrm>
+          <a:prstGeom prst="rect">
+            <a:avLst/>
+          </a:prstGeom>
+          <a:noFill/>
+        </p:spPr>
+        <p:txBody>
+          <a:bodyPr wrap="square" anchor="t" lIns="0" rIns="0" tIns="0" bIns="0">
+            <a:spAutoFit/>
+          </a:bodyPr>
+          <a:lstStyle/>
+          <a:p>
+            <a:pPr algn="l">
+              <a:spcAft>
+                <a:spcPts val="600"/>
+              </a:spcAft>
+            </a:pPr>
+            <a:r>
+              <a:rPr sz="1500" b="1" i="0">
+                <a:solidFill>
+                  <a:srgbClr val="AB3D3F"/>
+                </a:solidFill>
+                <a:latin typeface="Candara"/>
+              </a:rPr>
+              <a:t>Published sources</a:t>
+            </a:r>
+          </a:p>
+          <a:p>
+            <a:pPr algn="l">
+              <a:spcAft>
+                <a:spcPts val="500"/>
+              </a:spcAft>
+            </a:pPr>
+            <a:r>
+              <a:rPr sz="1050" b="0" i="0">
+                <a:solidFill>
+                  <a:srgbClr val="262626"/>
+                </a:solidFill>
+                <a:latin typeface="Candara"/>
+              </a:rPr>
+              <a:t>[1] Oppong SK, Dosoo DK, Peprah NY, et al. Fine-scale spatial mapping of urban malaria prevalence for microstratification in an urban area of Ghana. Malaria Journal 25:50 (published 18 December 2025). doi:10.1186/s12936-025-05724-9. Slide 3.</a:t>
+            </a:r>
+          </a:p>
+          <a:p>
+            <a:pPr algn="l">
+              <a:spcAft>
+                <a:spcPts val="500"/>
+              </a:spcAft>
+            </a:pPr>
+            <a:r>
+              <a:rPr sz="1050" b="0" i="0">
+                <a:solidFill>
+                  <a:srgbClr val="262626"/>
+                </a:solidFill>
+                <a:latin typeface="Candara"/>
+              </a:rPr>
+              <a:t>[2] Ghana Statistical Service (GSS) and ICF. Ghana Demographic and Health Survey 2022. Accra, Ghana, and Rockville, Maryland, USA: GSS and ICF; 2024. Slides 3, 6 and 13.</a:t>
+            </a:r>
+          </a:p>
+          <a:p>
+            <a:pPr algn="l">
+              <a:spcAft>
+                <a:spcPts val="500"/>
+              </a:spcAft>
+            </a:pPr>
+            <a:r>
+              <a:rPr sz="1050" b="0" i="0">
+                <a:solidFill>
+                  <a:srgbClr val="262626"/>
+                </a:solidFill>
+                <a:latin typeface="Candara"/>
+              </a:rPr>
+              <a:t>[3] U.S. President's Malaria Initiative. Ghana Malaria Operational Plan FY 2017. Published 25 October 2016. Slides 12 and 14.</a:t>
+            </a:r>
+          </a:p>
+          <a:p>
+            <a:pPr algn="l">
+              <a:spcAft>
+                <a:spcPts val="500"/>
+              </a:spcAft>
+            </a:pPr>
+            <a:r>
+              <a:rPr sz="1050" b="0" i="0">
+                <a:solidFill>
+                  <a:srgbClr val="262626"/>
+                </a:solidFill>
+                <a:latin typeface="Candara"/>
+              </a:rPr>
+              <a:t>[4] Ghana Statistical Service, Health Research Unit (Ministry of Health) and ORC Macro. Ghana Service Provision Assessment Survey 2002. Calverton, Maryland; 2003. Slide 12.</a:t>
+            </a:r>
+          </a:p>
+          <a:p>
+            <a:pPr algn="l">
+              <a:spcAft>
+                <a:spcPts val="500"/>
+              </a:spcAft>
+            </a:pPr>
+            <a:r>
+              <a:rPr sz="1050" b="0" i="0">
+                <a:solidFill>
+                  <a:srgbClr val="262626"/>
+                </a:solidFill>
+                <a:latin typeface="Candara"/>
+              </a:rPr>
+              <a:t>[5] Tamale Teaching Hospital. About the hospital. tth.gov.gh/about (accessed 24 September 2026). Slide 12.</a:t>
+            </a:r>
+          </a:p>
+          <a:p>
+            <a:pPr algn="l">
+              <a:spcAft>
+                <a:spcPts val="500"/>
+              </a:spcAft>
+            </a:pPr>
+            <a:r>
+              <a:rPr sz="1050" b="0" i="0">
+                <a:solidFill>
+                  <a:srgbClr val="262626"/>
+                </a:solidFill>
+                <a:latin typeface="Candara"/>
+              </a:rPr>
+              <a:t>[6] Ploton P, Mortier F, Réjou-Méchain M, et al. Spatial validation reveals poor predictive performance of large-scale ecological mapping models. Nature Communications 11:4540 (2020). doi:10.1038/s41467-020-18321-y. Slide 8.</a:t>
+            </a:r>
+          </a:p>
+          <a:p>
+            <a:pPr algn="l">
+              <a:spcAft>
+                <a:spcPts val="500"/>
+              </a:spcAft>
+            </a:pPr>
+            <a:r>
+              <a:rPr sz="1050" b="0" i="0">
+                <a:solidFill>
+                  <a:srgbClr val="262626"/>
+                </a:solidFill>
+                <a:latin typeface="Candara"/>
+              </a:rPr>
+              <a:t>[7] Kattenborn T, Schiefer F, Frey J, et al. Spatially autocorrelated training and validation samples inflate performance assessment of convolutional neural networks. ISPRS Open Journal of Photogrammetry and Remote Sensing 5:100018 (2022). doi:10.1016/j.ophoto.2022.100018. Slide 8.</a:t>
+            </a:r>
+          </a:p>
+        </p:txBody>
+      </p:sp>
+      <p:sp>
+        <p:nvSpPr>
+          <p:cNvPr id="4" name="TextBox 3"/>
+          <p:cNvSpPr txBox="1"/>
+          <p:nvPr/>
+        </p:nvSpPr>
+        <p:spPr>
+          <a:xfrm>
+            <a:off x="6190488" y="1371600"/>
+            <a:ext cx="5440680" cy="4480560"/>
+          </a:xfrm>
+          <a:prstGeom prst="rect">
+            <a:avLst/>
+          </a:prstGeom>
+          <a:noFill/>
+        </p:spPr>
+        <p:txBody>
+          <a:bodyPr wrap="square" anchor="t" lIns="0" rIns="0" tIns="0" bIns="0">
+            <a:spAutoFit/>
+          </a:bodyPr>
+          <a:lstStyle/>
+          <a:p>
+            <a:pPr algn="l">
+              <a:spcAft>
+                <a:spcPts val="600"/>
+              </a:spcAft>
+            </a:pPr>
+            <a:r>
+              <a:rPr sz="1500" b="1" i="0">
+                <a:solidFill>
+                  <a:srgbClr val="AB3D3F"/>
+                </a:solidFill>
+                <a:latin typeface="Candara"/>
+              </a:rPr>
+              <a:t>Data, software and code</a:t>
+            </a:r>
+          </a:p>
+          <a:p>
+            <a:pPr algn="l">
+              <a:spcAft>
+                <a:spcPts val="500"/>
+              </a:spcAft>
+            </a:pPr>
+            <a:r>
+              <a:rPr sz="1050" b="0" i="0">
+                <a:solidFill>
+                  <a:srgbClr val="262626"/>
+                </a:solidFill>
+                <a:latin typeface="Candara"/>
+              </a:rPr>
+              <a:t>[8] Ghana 2022 DHS household data: a de-identified extract of the household recode, used under the course's DHS data-use authorization, with the DHS subnational indicators for Ghana.</a:t>
+            </a:r>
+          </a:p>
+          <a:p>
+            <a:pPr algn="l">
+              <a:spcAft>
+                <a:spcPts val="500"/>
+              </a:spcAft>
+            </a:pPr>
+            <a:r>
+              <a:rPr sz="1050" b="0" i="0">
+                <a:solidFill>
+                  <a:srgbClr val="262626"/>
+                </a:solidFill>
+                <a:latin typeface="Candara"/>
+              </a:rPr>
+              <a:t>[9] Ghana Health Service routine malaria surveillance for 50 northern districts, 2014-17, from the ICS553 course data package.</a:t>
+            </a:r>
+          </a:p>
+          <a:p>
+            <a:pPr algn="l">
+              <a:spcAft>
+                <a:spcPts val="500"/>
+              </a:spcAft>
+            </a:pPr>
+            <a:r>
+              <a:rPr sz="1050" b="0" i="0">
+                <a:solidFill>
+                  <a:srgbClr val="262626"/>
+                </a:solidFill>
+                <a:latin typeface="Candara"/>
+              </a:rPr>
+              <a:t>[10] OCHA. Ghana subnational administrative boundaries (COD-AB), via the Humanitarian Data Exchange. Maps on slides 4, 10 and 11.</a:t>
+            </a:r>
+          </a:p>
+          <a:p>
+            <a:pPr algn="l">
+              <a:spcAft>
+                <a:spcPts val="500"/>
+              </a:spcAft>
+            </a:pPr>
+            <a:r>
+              <a:rPr sz="1050" b="0" i="0">
+                <a:solidFill>
+                  <a:srgbClr val="262626"/>
+                </a:solidFill>
+                <a:latin typeface="Candara"/>
+              </a:rPr>
+              <a:t>[11] Pedregosa F, et al. Scikit-learn: Machine Learning in Python. Journal of Machine Learning Research 12:2825-2830 (2011).</a:t>
+            </a:r>
+          </a:p>
+          <a:p>
+            <a:pPr algn="l">
+              <a:spcAft>
+                <a:spcPts val="500"/>
+              </a:spcAft>
+            </a:pPr>
+            <a:r>
+              <a:rPr sz="1050" b="0" i="0">
+                <a:solidFill>
+                  <a:srgbClr val="262626"/>
+                </a:solidFill>
+                <a:latin typeface="Candara"/>
+              </a:rPr>
+              <a:t>[12] Seabold S, Perktold J. statsmodels: Econometric and statistical modeling with Python. Proceedings of the 9th Python in Science Conference (2010).</a:t>
+            </a:r>
+          </a:p>
+          <a:p>
+            <a:pPr algn="l">
+              <a:spcAft>
+                <a:spcPts val="500"/>
+              </a:spcAft>
+            </a:pPr>
+            <a:r>
+              <a:rPr sz="1050" b="0" i="0">
+                <a:solidFill>
+                  <a:srgbClr val="262626"/>
+                </a:solidFill>
+                <a:latin typeface="Candara"/>
+              </a:rPr>
+              <a:t>[13] Group 3. Project repository, with the notebook cell behind every number (reports/claims_table.md) and the datasheet (reports/datasheet.md): github.com/ASU-MICS-2028/mle-group-3-prosit-1</a:t>
+            </a:r>
+          </a:p>
+        </p:txBody>
+      </p:sp>
+    </p:spTree>
+  </p:cSld>
+  <p:clrMapOvr>
+    <a:masterClrMapping/>
+  </p:clrMapOvr>
+</p:sld>
+</file>
+
+<file path=ppt/slides/slide26.xml><?xml version="1.0" encoding="utf-8"?>
+<p:sld xmlns:a="http://schemas.openxmlformats.org/drawingml/2006/main" xmlns:p="http://schemas.openxmlformats.org/presentationml/2006/main" xmlns:r="http://schemas.openxmlformats.org/officeDocument/2006/relationships">
+  <p:cSld>
+    <p:spTree>
+      <p:nvGrpSpPr>
+        <p:cNvPr id="1" name=""/>
+        <p:cNvGrpSpPr/>
+        <p:nvPr/>
+      </p:nvGrpSpPr>
+      <p:grpSpPr/>
       <p:sp>
         <p:nvSpPr>
           <p:cNvPr id="2" name="Title 1"/>
@@ -8108,7 +11504,7 @@
           <a:noFill/>
         </p:spPr>
         <p:txBody>
-          <a:bodyPr wrap="square" lIns="0" tIns="0" rIns="0" bIns="0" anchor="t">
+          <a:bodyPr wrap="square" anchor="t" lIns="0" rIns="0" tIns="0" bIns="0">
             <a:spAutoFit/>
           </a:bodyPr>
           <a:lstStyle/>
@@ -8139,7 +11535,7 @@
         <p:spPr>
           <a:xfrm>
             <a:off x="1069848" y="5806440"/>
-            <a:ext cx="10058400" cy="184666"/>
+            <a:ext cx="10058400" cy="640080"/>
           </a:xfrm>
           <a:prstGeom prst="rect">
             <a:avLst/>
@@ -8147,7 +11543,7 @@
           <a:noFill/>
         </p:spPr>
         <p:txBody>
-          <a:bodyPr wrap="square" lIns="0" tIns="0" rIns="0" bIns="0" anchor="t">
+          <a:bodyPr wrap="square" anchor="t" lIns="0" rIns="0" tIns="0" bIns="0">
             <a:spAutoFit/>
           </a:bodyPr>
           <a:lstStyle/>
@@ -8158,7 +11554,7 @@
               </a:spcAft>
             </a:pPr>
             <a:r>
-              <a:rPr sz="1200" b="1" i="0" dirty="0">
+              <a:rPr sz="1200" b="1" i="0">
                 <a:solidFill>
                   <a:srgbClr val="FEBA5A"/>
                 </a:solidFill>
@@ -8167,3465 +11563,13 @@
               <a:t>AI declaration: </a:t>
             </a:r>
             <a:r>
-              <a:rPr sz="1200" b="0" i="0" dirty="0">
+              <a:rPr sz="1200" b="0" i="0">
                 <a:solidFill>
                   <a:srgbClr val="FFFFFF"/>
                 </a:solidFill>
                 <a:latin typeface="Candara"/>
               </a:rPr>
-              <a:t>we used AI tools to help aggregate our information and to generate this presentation from our aggregated </a:t>
-            </a:r>
-            <a:r>
-              <a:rPr sz="1200" b="0" i="0">
-                <a:solidFill>
-                  <a:srgbClr val="FFFFFF"/>
-                </a:solidFill>
-                <a:latin typeface="Candara"/>
-              </a:rPr>
-              <a:t>information.</a:t>
-            </a:r>
-            <a:endParaRPr sz="1200" b="0" i="0" dirty="0">
-              <a:solidFill>
-                <a:srgbClr val="FFFFFF"/>
-              </a:solidFill>
-              <a:latin typeface="Candara"/>
-            </a:endParaRPr>
-          </a:p>
-        </p:txBody>
-      </p:sp>
-    </p:spTree>
-  </p:cSld>
-  <p:clrMapOvr>
-    <a:masterClrMapping/>
-  </p:clrMapOvr>
-</p:sld>
-</file>
-
-<file path=ppt/slides/slide2.xml><?xml version="1.0" encoding="utf-8"?>
-<p:sld xmlns:a="http://schemas.openxmlformats.org/drawingml/2006/main" xmlns:r="http://schemas.openxmlformats.org/officeDocument/2006/relationships" xmlns:p="http://schemas.openxmlformats.org/presentationml/2006/main">
-  <p:cSld>
-    <p:spTree>
-      <p:nvGrpSpPr>
-        <p:cNvPr id="1" name=""/>
-        <p:cNvGrpSpPr/>
-        <p:nvPr/>
-      </p:nvGrpSpPr>
-      <p:grpSpPr>
-        <a:xfrm>
-          <a:off x="0" y="0"/>
-          <a:ext cx="0" cy="0"/>
-          <a:chOff x="0" y="0"/>
-          <a:chExt cx="0" cy="0"/>
-        </a:xfrm>
-      </p:grpSpPr>
-      <p:sp>
-        <p:nvSpPr>
-          <p:cNvPr id="2" name="Text Placeholder 1"/>
-          <p:cNvSpPr>
-            <a:spLocks noGrp="1"/>
-          </p:cNvSpPr>
-          <p:nvPr>
-            <p:ph type="body" sz="quarter" idx="11"/>
-          </p:nvPr>
-        </p:nvSpPr>
-        <p:spPr>
-          <a:xfrm>
-            <a:off x="571500" y="571500"/>
-            <a:ext cx="11055096" cy="737700"/>
-          </a:xfrm>
-        </p:spPr>
-        <p:txBody>
-          <a:bodyPr/>
-          <a:lstStyle/>
-          <a:p>
-            <a:r>
-              <a:t>Our recommendation</a:t>
-            </a:r>
-          </a:p>
-        </p:txBody>
-      </p:sp>
-      <p:sp>
-        <p:nvSpPr>
-          <p:cNvPr id="3" name="TextBox 2"/>
-          <p:cNvSpPr txBox="1"/>
-          <p:nvPr/>
-        </p:nvSpPr>
-        <p:spPr>
-          <a:xfrm>
-            <a:off x="566928" y="1463040"/>
-            <a:ext cx="11055096" cy="731520"/>
-          </a:xfrm>
-          <a:prstGeom prst="rect">
-            <a:avLst/>
-          </a:prstGeom>
-          <a:noFill/>
-        </p:spPr>
-        <p:txBody>
-          <a:bodyPr wrap="square" lIns="0" tIns="0" rIns="0" bIns="0" anchor="t">
-            <a:spAutoFit/>
-          </a:bodyPr>
-          <a:lstStyle/>
-          <a:p>
-            <a:pPr algn="l">
-              <a:spcAft>
-                <a:spcPts val="600"/>
-              </a:spcAft>
-            </a:pPr>
-            <a:r>
-              <a:rPr sz="1800" b="0" i="0">
-                <a:solidFill>
-                  <a:srgbClr val="262626"/>
-                </a:solidFill>
-                <a:latin typeface="Candara"/>
-              </a:rPr>
-              <a:t>For a 50,000-net consignment to the three northern regions: </a:t>
-            </a:r>
-            <a:r>
-              <a:rPr sz="1800" b="1" i="0">
-                <a:solidFill>
-                  <a:srgbClr val="262626"/>
-                </a:solidFill>
-                <a:latin typeface="Candara"/>
-              </a:rPr>
-              <a:t>allocate within each region in proportion to population</a:t>
-            </a:r>
-            <a:r>
-              <a:rPr sz="1800" b="0" i="0">
-                <a:solidFill>
-                  <a:srgbClr val="262626"/>
-                </a:solidFill>
-                <a:latin typeface="Candara"/>
-              </a:rPr>
-              <a:t>, with regional totals from our negative binomial model.</a:t>
-            </a:r>
-          </a:p>
-        </p:txBody>
-      </p:sp>
-      <p:sp>
-        <p:nvSpPr>
-          <p:cNvPr id="4" name="Rounded Rectangle 3"/>
-          <p:cNvSpPr/>
-          <p:nvPr/>
-        </p:nvSpPr>
-        <p:spPr>
-          <a:xfrm>
-            <a:off x="566928" y="2423160"/>
-            <a:ext cx="3502152" cy="2057400"/>
-          </a:xfrm>
-          <a:prstGeom prst="roundRect">
-            <a:avLst>
-              <a:gd name="adj" fmla="val 5000"/>
-            </a:avLst>
-          </a:prstGeom>
-          <a:solidFill>
-            <a:srgbClr val="F3F3F3"/>
-          </a:solidFill>
-          <a:ln>
-            <a:noFill/>
-          </a:ln>
-          <a:effectLst/>
-        </p:spPr>
-        <p:style>
-          <a:lnRef idx="1">
-            <a:schemeClr val="accent1"/>
-          </a:lnRef>
-          <a:fillRef idx="3">
-            <a:schemeClr val="accent1"/>
-          </a:fillRef>
-          <a:effectRef idx="2">
-            <a:schemeClr val="accent1"/>
-          </a:effectRef>
-          <a:fontRef idx="minor">
-            <a:schemeClr val="lt1"/>
-          </a:fontRef>
-        </p:style>
-        <p:txBody>
-          <a:bodyPr wrap="square" lIns="201168" tIns="160934" rIns="201168" bIns="160934" rtlCol="0" anchor="ctr"/>
-          <a:lstStyle/>
-          <a:p>
-            <a:pPr algn="l">
-              <a:spcAft>
-                <a:spcPts val="200"/>
-              </a:spcAft>
-            </a:pPr>
-            <a:r>
-              <a:rPr sz="4600" b="1" i="0">
-                <a:solidFill>
-                  <a:srgbClr val="AB3D3F"/>
-                </a:solidFill>
-                <a:latin typeface="Candara"/>
-              </a:rPr>
-              <a:t>24,196</a:t>
-            </a:r>
-          </a:p>
-          <a:p>
-            <a:pPr algn="l">
-              <a:spcAft>
-                <a:spcPts val="400"/>
-              </a:spcAft>
-            </a:pPr>
-            <a:r>
-              <a:rPr sz="1700" b="1" i="0">
-                <a:solidFill>
-                  <a:srgbClr val="262626"/>
-                </a:solidFill>
-                <a:latin typeface="Candara"/>
-              </a:rPr>
-              <a:t>nets for Northern Region</a:t>
-            </a:r>
-          </a:p>
-          <a:p>
-            <a:pPr algn="l">
-              <a:spcAft>
-                <a:spcPts val="600"/>
-              </a:spcAft>
-            </a:pPr>
-            <a:r>
-              <a:rPr sz="1400" b="0" i="0">
-                <a:solidFill>
-                  <a:srgbClr val="595959"/>
-                </a:solidFill>
-                <a:latin typeface="Candara"/>
-              </a:rPr>
-              <a:t>26 districts · 8.5 nets per 1,000 people</a:t>
-            </a:r>
-          </a:p>
-        </p:txBody>
-      </p:sp>
-      <p:sp>
-        <p:nvSpPr>
-          <p:cNvPr id="5" name="Rounded Rectangle 4"/>
-          <p:cNvSpPr/>
-          <p:nvPr/>
-        </p:nvSpPr>
-        <p:spPr>
-          <a:xfrm>
-            <a:off x="4343400" y="2423160"/>
-            <a:ext cx="3502152" cy="2057400"/>
-          </a:xfrm>
-          <a:prstGeom prst="roundRect">
-            <a:avLst>
-              <a:gd name="adj" fmla="val 5000"/>
-            </a:avLst>
-          </a:prstGeom>
-          <a:solidFill>
-            <a:srgbClr val="F3F3F3"/>
-          </a:solidFill>
-          <a:ln>
-            <a:noFill/>
-          </a:ln>
-          <a:effectLst/>
-        </p:spPr>
-        <p:style>
-          <a:lnRef idx="1">
-            <a:schemeClr val="accent1"/>
-          </a:lnRef>
-          <a:fillRef idx="3">
-            <a:schemeClr val="accent1"/>
-          </a:fillRef>
-          <a:effectRef idx="2">
-            <a:schemeClr val="accent1"/>
-          </a:effectRef>
-          <a:fontRef idx="minor">
-            <a:schemeClr val="lt1"/>
-          </a:fontRef>
-        </p:style>
-        <p:txBody>
-          <a:bodyPr wrap="square" lIns="201168" tIns="160934" rIns="201168" bIns="160934" rtlCol="0" anchor="ctr"/>
-          <a:lstStyle/>
-          <a:p>
-            <a:pPr algn="l">
-              <a:spcAft>
-                <a:spcPts val="200"/>
-              </a:spcAft>
-            </a:pPr>
-            <a:r>
-              <a:rPr sz="4600" b="1" i="0">
-                <a:solidFill>
-                  <a:srgbClr val="AB3D3F"/>
-                </a:solidFill>
-                <a:latin typeface="Candara"/>
-              </a:rPr>
-              <a:t>18,631</a:t>
-            </a:r>
-          </a:p>
-          <a:p>
-            <a:pPr algn="l">
-              <a:spcAft>
-                <a:spcPts val="400"/>
-              </a:spcAft>
-            </a:pPr>
-            <a:r>
-              <a:rPr sz="1700" b="1" i="0">
-                <a:solidFill>
-                  <a:srgbClr val="262626"/>
-                </a:solidFill>
-                <a:latin typeface="Candara"/>
-              </a:rPr>
-              <a:t>nets for Upper East</a:t>
-            </a:r>
-          </a:p>
-          <a:p>
-            <a:pPr algn="l">
-              <a:spcAft>
-                <a:spcPts val="600"/>
-              </a:spcAft>
-            </a:pPr>
-            <a:r>
-              <a:rPr sz="1400" b="0" i="0">
-                <a:solidFill>
-                  <a:srgbClr val="595959"/>
-                </a:solidFill>
-                <a:latin typeface="Candara"/>
-              </a:rPr>
-              <a:t>13 districts · 16.0 nets per 1,000 people</a:t>
-            </a:r>
-          </a:p>
-        </p:txBody>
-      </p:sp>
-      <p:sp>
-        <p:nvSpPr>
-          <p:cNvPr id="6" name="Rounded Rectangle 5"/>
-          <p:cNvSpPr/>
-          <p:nvPr/>
-        </p:nvSpPr>
-        <p:spPr>
-          <a:xfrm>
-            <a:off x="8119871" y="2423160"/>
-            <a:ext cx="3502152" cy="2057400"/>
-          </a:xfrm>
-          <a:prstGeom prst="roundRect">
-            <a:avLst>
-              <a:gd name="adj" fmla="val 5000"/>
-            </a:avLst>
-          </a:prstGeom>
-          <a:solidFill>
-            <a:srgbClr val="F3F3F3"/>
-          </a:solidFill>
-          <a:ln>
-            <a:noFill/>
-          </a:ln>
-          <a:effectLst/>
-        </p:spPr>
-        <p:style>
-          <a:lnRef idx="1">
-            <a:schemeClr val="accent1"/>
-          </a:lnRef>
-          <a:fillRef idx="3">
-            <a:schemeClr val="accent1"/>
-          </a:fillRef>
-          <a:effectRef idx="2">
-            <a:schemeClr val="accent1"/>
-          </a:effectRef>
-          <a:fontRef idx="minor">
-            <a:schemeClr val="lt1"/>
-          </a:fontRef>
-        </p:style>
-        <p:txBody>
-          <a:bodyPr wrap="square" lIns="201168" tIns="160934" rIns="201168" bIns="160934" rtlCol="0" anchor="ctr"/>
-          <a:lstStyle/>
-          <a:p>
-            <a:pPr algn="l">
-              <a:spcAft>
-                <a:spcPts val="200"/>
-              </a:spcAft>
-            </a:pPr>
-            <a:r>
-              <a:rPr sz="4600" b="1" i="0">
-                <a:solidFill>
-                  <a:srgbClr val="AB3D3F"/>
-                </a:solidFill>
-                <a:latin typeface="Candara"/>
-              </a:rPr>
-              <a:t>7,173</a:t>
-            </a:r>
-          </a:p>
-          <a:p>
-            <a:pPr algn="l">
-              <a:spcAft>
-                <a:spcPts val="400"/>
-              </a:spcAft>
-            </a:pPr>
-            <a:r>
-              <a:rPr sz="1700" b="1" i="0">
-                <a:solidFill>
-                  <a:srgbClr val="262626"/>
-                </a:solidFill>
-                <a:latin typeface="Candara"/>
-              </a:rPr>
-              <a:t>nets for Upper West</a:t>
-            </a:r>
-          </a:p>
-          <a:p>
-            <a:pPr algn="l">
-              <a:spcAft>
-                <a:spcPts val="600"/>
-              </a:spcAft>
-            </a:pPr>
-            <a:r>
-              <a:rPr sz="1400" b="0" i="0">
-                <a:solidFill>
-                  <a:srgbClr val="595959"/>
-                </a:solidFill>
-                <a:latin typeface="Candara"/>
-              </a:rPr>
-              <a:t>11 districts · 9.2 nets per 1,000 people</a:t>
-            </a:r>
-          </a:p>
-        </p:txBody>
-      </p:sp>
-      <p:sp>
-        <p:nvSpPr>
-          <p:cNvPr id="7" name="TextBox 6"/>
-          <p:cNvSpPr txBox="1"/>
-          <p:nvPr/>
-        </p:nvSpPr>
-        <p:spPr>
-          <a:xfrm>
-            <a:off x="566928" y="4663440"/>
-            <a:ext cx="11055096" cy="1188720"/>
-          </a:xfrm>
-          <a:prstGeom prst="rect">
-            <a:avLst/>
-          </a:prstGeom>
-          <a:noFill/>
-        </p:spPr>
-        <p:txBody>
-          <a:bodyPr wrap="square" lIns="0" tIns="0" rIns="0" bIns="0" anchor="t">
-            <a:spAutoFit/>
-          </a:bodyPr>
-          <a:lstStyle/>
-          <a:p>
-            <a:pPr algn="l">
-              <a:spcAft>
-                <a:spcPts val="600"/>
-              </a:spcAft>
-            </a:pPr>
-            <a:r>
-              <a:rPr sz="1500" b="1" i="0">
-                <a:solidFill>
-                  <a:srgbClr val="AB3D3F"/>
-                </a:solidFill>
-                <a:latin typeface="Candara"/>
-              </a:rPr>
-              <a:t>Why population within a region: </a:t>
-            </a:r>
-            <a:r>
-              <a:rPr sz="1500" b="0" i="0">
-                <a:solidFill>
-                  <a:srgbClr val="262626"/>
-                </a:solidFill>
-                <a:latin typeface="Candara"/>
-              </a:rPr>
-              <a:t>net coverage is measured once per region, so our data cannot tell two districts in the same region apart.</a:t>
-            </a:r>
-          </a:p>
-          <a:p>
-            <a:pPr algn="l">
-              <a:spcAft>
-                <a:spcPts val="600"/>
-              </a:spcAft>
-            </a:pPr>
-            <a:r>
-              <a:rPr sz="1500" b="1" i="0">
-                <a:solidFill>
-                  <a:srgbClr val="AB3D3F"/>
-                </a:solidFill>
-                <a:latin typeface="Candara"/>
-              </a:rPr>
-              <a:t>How sure we are: </a:t>
-            </a:r>
-            <a:r>
-              <a:rPr sz="1500" b="0" i="0">
-                <a:solidFill>
-                  <a:srgbClr val="262626"/>
-                </a:solidFill>
-                <a:latin typeface="Candara"/>
-              </a:rPr>
-              <a:t>the shares within each region are robust. The regional totals are our base case: a better-fitting model moves 7,720 nets between regions (slide 13).</a:t>
-            </a:r>
-          </a:p>
-        </p:txBody>
-      </p:sp>
-    </p:spTree>
-  </p:cSld>
-  <p:clrMapOvr>
-    <a:masterClrMapping/>
-  </p:clrMapOvr>
-</p:sld>
-</file>
-
-<file path=ppt/slides/slide3.xml><?xml version="1.0" encoding="utf-8"?>
-<p:sld xmlns:a="http://schemas.openxmlformats.org/drawingml/2006/main" xmlns:r="http://schemas.openxmlformats.org/officeDocument/2006/relationships" xmlns:p="http://schemas.openxmlformats.org/presentationml/2006/main">
-  <p:cSld>
-    <p:spTree>
-      <p:nvGrpSpPr>
-        <p:cNvPr id="1" name=""/>
-        <p:cNvGrpSpPr/>
-        <p:nvPr/>
-      </p:nvGrpSpPr>
-      <p:grpSpPr>
-        <a:xfrm>
-          <a:off x="0" y="0"/>
-          <a:ext cx="0" cy="0"/>
-          <a:chOff x="0" y="0"/>
-          <a:chExt cx="0" cy="0"/>
-        </a:xfrm>
-      </p:grpSpPr>
-      <p:sp>
-        <p:nvSpPr>
-          <p:cNvPr id="2" name="Text Placeholder 1"/>
-          <p:cNvSpPr>
-            <a:spLocks noGrp="1"/>
-          </p:cNvSpPr>
-          <p:nvPr>
-            <p:ph type="body" sz="quarter" idx="11"/>
-          </p:nvPr>
-        </p:nvSpPr>
-        <p:spPr>
-          <a:xfrm>
-            <a:off x="571500" y="571500"/>
-            <a:ext cx="11055096" cy="737700"/>
-          </a:xfrm>
-        </p:spPr>
-        <p:txBody>
-          <a:bodyPr/>
-          <a:lstStyle/>
-          <a:p>
-            <a:r>
-              <a:t>Averages hide local risk</a:t>
-            </a:r>
-          </a:p>
-        </p:txBody>
-      </p:sp>
-      <p:sp>
-        <p:nvSpPr>
-          <p:cNvPr id="3" name="Rounded Rectangle 2"/>
-          <p:cNvSpPr/>
-          <p:nvPr/>
-        </p:nvSpPr>
-        <p:spPr>
-          <a:xfrm>
-            <a:off x="566928" y="1554480"/>
-            <a:ext cx="5394960" cy="2743200"/>
-          </a:xfrm>
-          <a:prstGeom prst="roundRect">
-            <a:avLst>
-              <a:gd name="adj" fmla="val 5000"/>
-            </a:avLst>
-          </a:prstGeom>
-          <a:solidFill>
-            <a:srgbClr val="F3F3F3"/>
-          </a:solidFill>
-          <a:ln>
-            <a:noFill/>
-          </a:ln>
-          <a:effectLst/>
-        </p:spPr>
-        <p:style>
-          <a:lnRef idx="1">
-            <a:schemeClr val="accent1"/>
-          </a:lnRef>
-          <a:fillRef idx="3">
-            <a:schemeClr val="accent1"/>
-          </a:fillRef>
-          <a:effectRef idx="2">
-            <a:schemeClr val="accent1"/>
-          </a:effectRef>
-          <a:fontRef idx="minor">
-            <a:schemeClr val="lt1"/>
-          </a:fontRef>
-        </p:style>
-        <p:txBody>
-          <a:bodyPr wrap="square" lIns="274320" tIns="219456" rIns="274320" bIns="219456" rtlCol="0" anchor="t"/>
-          <a:lstStyle/>
-          <a:p>
-            <a:pPr algn="l">
-              <a:spcAft>
-                <a:spcPts val="400"/>
-              </a:spcAft>
-            </a:pPr>
-            <a:r>
-              <a:rPr sz="6600" b="1" i="0">
-                <a:solidFill>
-                  <a:srgbClr val="AB3D3F"/>
-                </a:solidFill>
-                <a:latin typeface="Candara"/>
-              </a:rPr>
-              <a:t>2%</a:t>
-            </a:r>
-          </a:p>
-          <a:p>
-            <a:pPr algn="l">
-              <a:spcAft>
-                <a:spcPts val="400"/>
-              </a:spcAft>
-            </a:pPr>
-            <a:r>
-              <a:rPr sz="1800" b="1" i="0">
-                <a:solidFill>
-                  <a:srgbClr val="262626"/>
-                </a:solidFill>
-                <a:latin typeface="Candara"/>
-              </a:rPr>
-              <a:t>Greater Accra malaria prevalence, 2022 DHS</a:t>
-            </a:r>
-          </a:p>
-          <a:p>
-            <a:pPr algn="l">
-              <a:spcAft>
-                <a:spcPts val="600"/>
-              </a:spcAft>
-            </a:pPr>
-            <a:r>
-              <a:rPr sz="1400" b="0" i="0">
-                <a:solidFill>
-                  <a:srgbClr val="595959"/>
-                </a:solidFill>
-                <a:latin typeface="Candara"/>
-              </a:rPr>
-              <a:t>Children 6 to 59 months, microscopy</a:t>
-            </a:r>
-          </a:p>
-        </p:txBody>
-      </p:sp>
-      <p:sp>
-        <p:nvSpPr>
-          <p:cNvPr id="4" name="Rounded Rectangle 3"/>
-          <p:cNvSpPr/>
-          <p:nvPr/>
-        </p:nvSpPr>
-        <p:spPr>
-          <a:xfrm>
-            <a:off x="6227064" y="1554480"/>
-            <a:ext cx="5394960" cy="2743200"/>
-          </a:xfrm>
-          <a:prstGeom prst="roundRect">
-            <a:avLst>
-              <a:gd name="adj" fmla="val 5000"/>
-            </a:avLst>
-          </a:prstGeom>
-          <a:solidFill>
-            <a:srgbClr val="F3F3F3"/>
-          </a:solidFill>
-          <a:ln>
-            <a:noFill/>
-          </a:ln>
-          <a:effectLst/>
-        </p:spPr>
-        <p:style>
-          <a:lnRef idx="1">
-            <a:schemeClr val="accent1"/>
-          </a:lnRef>
-          <a:fillRef idx="3">
-            <a:schemeClr val="accent1"/>
-          </a:fillRef>
-          <a:effectRef idx="2">
-            <a:schemeClr val="accent1"/>
-          </a:effectRef>
-          <a:fontRef idx="minor">
-            <a:schemeClr val="lt1"/>
-          </a:fontRef>
-        </p:style>
-        <p:txBody>
-          <a:bodyPr wrap="square" lIns="274320" tIns="219456" rIns="274320" bIns="219456" rtlCol="0" anchor="t"/>
-          <a:lstStyle/>
-          <a:p>
-            <a:pPr algn="l">
-              <a:spcAft>
-                <a:spcPts val="400"/>
-              </a:spcAft>
-            </a:pPr>
-            <a:r>
-              <a:rPr sz="6600" b="1" i="0">
-                <a:solidFill>
-                  <a:srgbClr val="AB3D3F"/>
-                </a:solidFill>
-                <a:latin typeface="Candara"/>
-              </a:rPr>
-              <a:t>0 to 49%</a:t>
-            </a:r>
-          </a:p>
-          <a:p>
-            <a:pPr algn="l">
-              <a:spcAft>
-                <a:spcPts val="400"/>
-              </a:spcAft>
-            </a:pPr>
-            <a:r>
-              <a:rPr sz="1800" b="1" i="0">
-                <a:solidFill>
-                  <a:srgbClr val="262626"/>
-                </a:solidFill>
-                <a:latin typeface="Candara"/>
-              </a:rPr>
-              <a:t>Predicted prevalence across all 29 Greater Accra districts</a:t>
-            </a:r>
-          </a:p>
-          <a:p>
-            <a:pPr algn="l">
-              <a:spcAft>
-                <a:spcPts val="600"/>
-              </a:spcAft>
-            </a:pPr>
-            <a:r>
-              <a:rPr sz="1400" b="0" i="0">
-                <a:solidFill>
-                  <a:srgbClr val="595959"/>
-                </a:solidFill>
-                <a:latin typeface="Candara"/>
-              </a:rPr>
-              <a:t>2020 household survey and geostatistical model, children 6 months to 10 years, rapid tests</a:t>
-            </a:r>
-          </a:p>
-        </p:txBody>
-      </p:sp>
-      <p:sp>
-        <p:nvSpPr>
-          <p:cNvPr id="5" name="TextBox 4"/>
-          <p:cNvSpPr txBox="1"/>
-          <p:nvPr/>
-        </p:nvSpPr>
-        <p:spPr>
-          <a:xfrm>
-            <a:off x="566928" y="4709160"/>
-            <a:ext cx="11055096" cy="1005840"/>
-          </a:xfrm>
-          <a:prstGeom prst="rect">
-            <a:avLst/>
-          </a:prstGeom>
-          <a:noFill/>
-        </p:spPr>
-        <p:txBody>
-          <a:bodyPr wrap="square" lIns="0" tIns="0" rIns="0" bIns="0" anchor="t">
-            <a:spAutoFit/>
-          </a:bodyPr>
-          <a:lstStyle/>
-          <a:p>
-            <a:pPr algn="l">
-              <a:spcAft>
-                <a:spcPts val="600"/>
-              </a:spcAft>
-            </a:pPr>
-            <a:r>
-              <a:rPr sz="1600" b="0" i="0">
-                <a:solidFill>
-                  <a:srgbClr val="262626"/>
-                </a:solidFill>
-                <a:latin typeface="Candara"/>
-              </a:rPr>
-              <a:t>Different ages and tests, so this is not like for like. The point is the spread: one regional figure can hide districts at very high risk. That is why we wanted district-level targeting; the next slide shows how far our data allow it.</a:t>
-            </a:r>
-          </a:p>
-        </p:txBody>
-      </p:sp>
-    </p:spTree>
-  </p:cSld>
-  <p:clrMapOvr>
-    <a:masterClrMapping/>
-  </p:clrMapOvr>
-</p:sld>
-</file>
-
-<file path=ppt/slides/slide4.xml><?xml version="1.0" encoding="utf-8"?>
-<p:sld xmlns:a="http://schemas.openxmlformats.org/drawingml/2006/main" xmlns:r="http://schemas.openxmlformats.org/officeDocument/2006/relationships" xmlns:p="http://schemas.openxmlformats.org/presentationml/2006/main">
-  <p:cSld>
-    <p:spTree>
-      <p:nvGrpSpPr>
-        <p:cNvPr id="1" name=""/>
-        <p:cNvGrpSpPr/>
-        <p:nvPr/>
-      </p:nvGrpSpPr>
-      <p:grpSpPr>
-        <a:xfrm>
-          <a:off x="0" y="0"/>
-          <a:ext cx="0" cy="0"/>
-          <a:chOff x="0" y="0"/>
-          <a:chExt cx="0" cy="0"/>
-        </a:xfrm>
-      </p:grpSpPr>
-      <p:sp>
-        <p:nvSpPr>
-          <p:cNvPr id="2" name="Text Placeholder 1"/>
-          <p:cNvSpPr>
-            <a:spLocks noGrp="1"/>
-          </p:cNvSpPr>
-          <p:nvPr>
-            <p:ph type="body" sz="quarter" idx="11"/>
-          </p:nvPr>
-        </p:nvSpPr>
-        <p:spPr>
-          <a:xfrm>
-            <a:off x="571500" y="571500"/>
-            <a:ext cx="11055096" cy="737700"/>
-          </a:xfrm>
-        </p:spPr>
-        <p:txBody>
-          <a:bodyPr/>
-          <a:lstStyle/>
-          <a:p>
-            <a:r>
-              <a:t>Our data, and where it is thin</a:t>
-            </a:r>
-          </a:p>
-        </p:txBody>
-      </p:sp>
-      <p:pic>
-        <p:nvPicPr>
-          <p:cNvPr id="3" name="Picture 2" descr="b1_data_availability.png"/>
-          <p:cNvPicPr>
-            <a:picLocks noChangeAspect="1"/>
-          </p:cNvPicPr>
-          <p:nvPr/>
-        </p:nvPicPr>
-        <p:blipFill>
-          <a:blip r:embed="rId3"/>
-          <a:stretch>
-            <a:fillRect/>
-          </a:stretch>
-        </p:blipFill>
-        <p:spPr>
-          <a:xfrm>
-            <a:off x="736279" y="1417320"/>
-            <a:ext cx="2907416" cy="3611880"/>
-          </a:xfrm>
-          <a:prstGeom prst="rect">
-            <a:avLst/>
-          </a:prstGeom>
-        </p:spPr>
-      </p:pic>
-      <p:pic>
-        <p:nvPicPr>
-          <p:cNvPr id="4" name="Picture 3" descr="b1_district_case_rate.png"/>
-          <p:cNvPicPr>
-            <a:picLocks noChangeAspect="1"/>
-          </p:cNvPicPr>
-          <p:nvPr/>
-        </p:nvPicPr>
-        <p:blipFill>
-          <a:blip r:embed="rId4"/>
-          <a:stretch>
-            <a:fillRect/>
-          </a:stretch>
-        </p:blipFill>
-        <p:spPr>
-          <a:xfrm>
-            <a:off x="4341671" y="1417320"/>
-            <a:ext cx="2646072" cy="3611880"/>
-          </a:xfrm>
-          <a:prstGeom prst="rect">
-            <a:avLst/>
-          </a:prstGeom>
-        </p:spPr>
-      </p:pic>
-      <p:sp>
-        <p:nvSpPr>
-          <p:cNvPr id="5" name="TextBox 4"/>
-          <p:cNvSpPr txBox="1"/>
-          <p:nvPr/>
-        </p:nvSpPr>
-        <p:spPr>
-          <a:xfrm>
-            <a:off x="566928" y="5120640"/>
-            <a:ext cx="3246120" cy="731520"/>
-          </a:xfrm>
-          <a:prstGeom prst="rect">
-            <a:avLst/>
-          </a:prstGeom>
-          <a:noFill/>
-        </p:spPr>
-        <p:txBody>
-          <a:bodyPr wrap="square" lIns="0" tIns="0" rIns="0" bIns="0" anchor="t">
-            <a:spAutoFit/>
-          </a:bodyPr>
-          <a:lstStyle/>
-          <a:p>
-            <a:pPr algn="l">
-              <a:spcAft>
-                <a:spcPts val="600"/>
-              </a:spcAft>
-            </a:pPr>
-            <a:r>
-              <a:rPr sz="1200" b="1" i="0">
-                <a:solidFill>
-                  <a:srgbClr val="262626"/>
-                </a:solidFill>
-                <a:latin typeface="Candara"/>
-              </a:rPr>
-              <a:t>Household survey, DHS 2022. </a:t>
-            </a:r>
-            <a:r>
-              <a:rPr sz="1200" b="0" i="0">
-                <a:solidFill>
-                  <a:srgbClr val="262626"/>
-                </a:solidFill>
-                <a:latin typeface="Candara"/>
-              </a:rPr>
-              <a:t>17,933 households in 618 clusters, all 16 regions; no district identifier.</a:t>
-            </a:r>
-          </a:p>
-        </p:txBody>
-      </p:sp>
-      <p:sp>
-        <p:nvSpPr>
-          <p:cNvPr id="6" name="TextBox 5"/>
-          <p:cNvSpPr txBox="1"/>
-          <p:nvPr/>
-        </p:nvSpPr>
-        <p:spPr>
-          <a:xfrm>
-            <a:off x="4041648" y="5120640"/>
-            <a:ext cx="3246120" cy="731520"/>
-          </a:xfrm>
-          <a:prstGeom prst="rect">
-            <a:avLst/>
-          </a:prstGeom>
-          <a:noFill/>
-        </p:spPr>
-        <p:txBody>
-          <a:bodyPr wrap="square" lIns="0" tIns="0" rIns="0" bIns="0" anchor="t">
-            <a:spAutoFit/>
-          </a:bodyPr>
-          <a:lstStyle/>
-          <a:p>
-            <a:pPr algn="l">
-              <a:spcAft>
-                <a:spcPts val="600"/>
-              </a:spcAft>
-            </a:pPr>
-            <a:r>
-              <a:rPr sz="1200" b="1" i="0">
-                <a:solidFill>
-                  <a:srgbClr val="262626"/>
-                </a:solidFill>
-                <a:latin typeface="Candara"/>
-              </a:rPr>
-              <a:t>Routine surveillance, 2014-17. </a:t>
-            </a:r>
-            <a:r>
-              <a:rPr sz="1200" b="0" i="0">
-                <a:solidFill>
-                  <a:srgbClr val="262626"/>
-                </a:solidFill>
-                <a:latin typeface="Candara"/>
-              </a:rPr>
-              <a:t>Cases for 50 northern districts only; 207 of today's 260 districts have none in our data.</a:t>
-            </a:r>
-          </a:p>
-        </p:txBody>
-      </p:sp>
-      <p:sp>
-        <p:nvSpPr>
-          <p:cNvPr id="7" name="Rounded Rectangle 6"/>
-          <p:cNvSpPr/>
-          <p:nvPr/>
-        </p:nvSpPr>
-        <p:spPr>
-          <a:xfrm>
-            <a:off x="7635240" y="1417320"/>
-            <a:ext cx="3986784" cy="4343400"/>
-          </a:xfrm>
-          <a:prstGeom prst="roundRect">
-            <a:avLst>
-              <a:gd name="adj" fmla="val 5000"/>
-            </a:avLst>
-          </a:prstGeom>
-          <a:solidFill>
-            <a:srgbClr val="F3F3F3"/>
-          </a:solidFill>
-          <a:ln>
-            <a:noFill/>
-          </a:ln>
-          <a:effectLst/>
-        </p:spPr>
-        <p:style>
-          <a:lnRef idx="1">
-            <a:schemeClr val="accent1"/>
-          </a:lnRef>
-          <a:fillRef idx="3">
-            <a:schemeClr val="accent1"/>
-          </a:fillRef>
-          <a:effectRef idx="2">
-            <a:schemeClr val="accent1"/>
-          </a:effectRef>
-          <a:fontRef idx="minor">
-            <a:schemeClr val="lt1"/>
-          </a:fontRef>
-        </p:style>
-        <p:txBody>
-          <a:bodyPr wrap="square" lIns="201168" tIns="160934" rIns="201168" bIns="160934" rtlCol="0" anchor="t"/>
-          <a:lstStyle/>
-          <a:p>
-            <a:pPr algn="l">
-              <a:spcAft>
-                <a:spcPts val="800"/>
-              </a:spcAft>
-            </a:pPr>
-            <a:r>
-              <a:rPr sz="1800" b="1" i="0">
-                <a:solidFill>
-                  <a:srgbClr val="AB3D3F"/>
-                </a:solidFill>
-                <a:latin typeface="Candara"/>
-              </a:rPr>
-              <a:t>What this means</a:t>
-            </a:r>
-          </a:p>
-          <a:p>
-            <a:pPr marL="219456" indent="-219456" algn="l">
-              <a:spcAft>
-                <a:spcPts val="800"/>
-              </a:spcAft>
-              <a:buClr>
-                <a:srgbClr val="AB3D3F"/>
-              </a:buClr>
-              <a:buFont typeface="Arial"/>
-              <a:buChar char="•"/>
-            </a:pPr>
-            <a:r>
-              <a:rPr sz="1500" b="1" i="0">
-                <a:solidFill>
-                  <a:srgbClr val="262626"/>
-                </a:solidFill>
-                <a:latin typeface="Candara"/>
-              </a:rPr>
-              <a:t>Weights matter. </a:t>
-            </a:r>
-            <a:r>
-              <a:rPr sz="1500" b="0" i="0">
-                <a:solidFill>
-                  <a:srgbClr val="262626"/>
-                </a:solidFill>
-                <a:latin typeface="Candara"/>
-              </a:rPr>
-              <a:t>Unweighted, 71.0% of households own a net; weighted, 66.8%.</a:t>
-            </a:r>
-          </a:p>
-          <a:p>
-            <a:pPr marL="219456" indent="-219456" algn="l">
-              <a:spcAft>
-                <a:spcPts val="800"/>
-              </a:spcAft>
-              <a:buClr>
-                <a:srgbClr val="AB3D3F"/>
-              </a:buClr>
-              <a:buFont typeface="Arial"/>
-              <a:buChar char="•"/>
-            </a:pPr>
-            <a:r>
-              <a:rPr sz="1500" b="1" i="0">
-                <a:solidFill>
-                  <a:srgbClr val="262626"/>
-                </a:solidFill>
-                <a:latin typeface="Candara"/>
-              </a:rPr>
-              <a:t>Different years. </a:t>
-            </a:r>
-            <a:r>
-              <a:rPr sz="1500" b="0" i="0">
-                <a:solidFill>
-                  <a:srgbClr val="262626"/>
-                </a:solidFill>
-                <a:latin typeface="Candara"/>
-              </a:rPr>
-              <a:t>Net coverage is from 2022; cases are from 2014-17.</a:t>
-            </a:r>
-          </a:p>
-          <a:p>
-            <a:pPr marL="219456" indent="-219456" algn="l">
-              <a:spcAft>
-                <a:spcPts val="800"/>
-              </a:spcAft>
-              <a:buClr>
-                <a:srgbClr val="AB3D3F"/>
-              </a:buClr>
-              <a:buFont typeface="Arial"/>
-              <a:buChar char="•"/>
-            </a:pPr>
-            <a:r>
-              <a:rPr sz="1500" b="1" i="0">
-                <a:solidFill>
-                  <a:srgbClr val="262626"/>
-                </a:solidFill>
-                <a:latin typeface="Candara"/>
-              </a:rPr>
-              <a:t>Coarse coverage. </a:t>
-            </a:r>
-            <a:r>
-              <a:rPr sz="1500" b="0" i="0">
-                <a:solidFill>
-                  <a:srgbClr val="262626"/>
-                </a:solidFill>
-                <a:latin typeface="Candara"/>
-              </a:rPr>
-              <a:t>Coverage is known only by region: three values for 50 districts.</a:t>
-            </a:r>
-          </a:p>
-          <a:p>
-            <a:pPr marL="219456" indent="-219456" algn="l">
-              <a:spcAft>
-                <a:spcPts val="1200"/>
-              </a:spcAft>
-              <a:buClr>
-                <a:srgbClr val="AB3D3F"/>
-              </a:buClr>
-              <a:buFont typeface="Arial"/>
-              <a:buChar char="•"/>
-            </a:pPr>
-            <a:r>
-              <a:rPr sz="1500" b="1" i="0">
-                <a:solidFill>
-                  <a:srgbClr val="262626"/>
-                </a:solidFill>
-                <a:latin typeface="Candara"/>
-              </a:rPr>
-              <a:t>No district survey data. </a:t>
-            </a:r>
-            <a:r>
-              <a:rPr sz="1500" b="0" i="0">
-                <a:solidFill>
-                  <a:srgbClr val="262626"/>
-                </a:solidFill>
-                <a:latin typeface="Candara"/>
-              </a:rPr>
-              <a:t>The survey can rank regions, not districts.</a:t>
-            </a:r>
-          </a:p>
-          <a:p>
-            <a:pPr algn="l">
-              <a:spcAft>
-                <a:spcPts val="600"/>
-              </a:spcAft>
-            </a:pPr>
-            <a:r>
-              <a:rPr sz="1500" b="1" i="0">
-                <a:solidFill>
-                  <a:srgbClr val="AB3D3F"/>
-                </a:solidFill>
-                <a:latin typeface="Candara"/>
-              </a:rPr>
-              <a:t>So: </a:t>
-            </a:r>
-            <a:r>
-              <a:rPr sz="1500" b="0" i="0">
-                <a:solidFill>
-                  <a:srgbClr val="262626"/>
-                </a:solidFill>
-                <a:latin typeface="Candara"/>
-              </a:rPr>
-              <a:t>our rule, expected cases × the share of households without a net, can separate regions but not districts within a region.</a:t>
-            </a:r>
-          </a:p>
-        </p:txBody>
-      </p:sp>
-    </p:spTree>
-  </p:cSld>
-  <p:clrMapOvr>
-    <a:masterClrMapping/>
-  </p:clrMapOvr>
-</p:sld>
-</file>
-
-<file path=ppt/slides/slide5.xml><?xml version="1.0" encoding="utf-8"?>
-<p:sld xmlns:a="http://schemas.openxmlformats.org/drawingml/2006/main" xmlns:r="http://schemas.openxmlformats.org/officeDocument/2006/relationships" xmlns:p="http://schemas.openxmlformats.org/presentationml/2006/main">
-  <p:cSld>
-    <p:spTree>
-      <p:nvGrpSpPr>
-        <p:cNvPr id="1" name=""/>
-        <p:cNvGrpSpPr/>
-        <p:nvPr/>
-      </p:nvGrpSpPr>
-      <p:grpSpPr>
-        <a:xfrm>
-          <a:off x="0" y="0"/>
-          <a:ext cx="0" cy="0"/>
-          <a:chOff x="0" y="0"/>
-          <a:chExt cx="0" cy="0"/>
-        </a:xfrm>
-      </p:grpSpPr>
-      <p:sp>
-        <p:nvSpPr>
-          <p:cNvPr id="2" name="Text Placeholder 1"/>
-          <p:cNvSpPr>
-            <a:spLocks noGrp="1"/>
-          </p:cNvSpPr>
-          <p:nvPr>
-            <p:ph type="body" sz="quarter" idx="11"/>
-          </p:nvPr>
-        </p:nvSpPr>
-        <p:spPr>
-          <a:xfrm>
-            <a:off x="571500" y="571500"/>
-            <a:ext cx="11055096" cy="737700"/>
-          </a:xfrm>
-        </p:spPr>
-        <p:txBody>
-          <a:bodyPr/>
-          <a:lstStyle/>
-          <a:p>
-            <a:r>
-              <a:rPr sz="3000"/>
-              <a:t>Case counts vary far more than Poisson allows</a:t>
-            </a:r>
-          </a:p>
-        </p:txBody>
-      </p:sp>
-      <p:sp>
-        <p:nvSpPr>
-          <p:cNvPr id="3" name="TextBox 2"/>
-          <p:cNvSpPr txBox="1"/>
-          <p:nvPr/>
-        </p:nvSpPr>
-        <p:spPr>
-          <a:xfrm>
-            <a:off x="566928" y="1463040"/>
-            <a:ext cx="4754880" cy="960120"/>
-          </a:xfrm>
-          <a:prstGeom prst="rect">
-            <a:avLst/>
-          </a:prstGeom>
-          <a:noFill/>
-        </p:spPr>
-        <p:txBody>
-          <a:bodyPr wrap="square" lIns="0" tIns="0" rIns="0" bIns="0" anchor="t">
-            <a:spAutoFit/>
-          </a:bodyPr>
-          <a:lstStyle/>
-          <a:p>
-            <a:pPr algn="l">
-              <a:spcAft>
-                <a:spcPts val="0"/>
-              </a:spcAft>
-            </a:pPr>
-            <a:r>
-              <a:rPr sz="3000" b="1" i="0">
-                <a:solidFill>
-                  <a:srgbClr val="AB3D3F"/>
-                </a:solidFill>
-                <a:latin typeface="Candara"/>
-              </a:rPr>
-              <a:t>77,183</a:t>
-            </a:r>
-          </a:p>
-          <a:p>
-            <a:pPr algn="l">
-              <a:spcAft>
-                <a:spcPts val="600"/>
-              </a:spcAft>
-            </a:pPr>
-            <a:r>
-              <a:rPr sz="1300" b="0" i="0">
-                <a:solidFill>
-                  <a:srgbClr val="262626"/>
-                </a:solidFill>
-                <a:latin typeface="Candara"/>
-              </a:rPr>
-              <a:t>variance-to-mean ratio of district case counts; a Poisson model requires 1</a:t>
-            </a:r>
-          </a:p>
-        </p:txBody>
-      </p:sp>
-      <p:sp>
-        <p:nvSpPr>
-          <p:cNvPr id="4" name="TextBox 3"/>
-          <p:cNvSpPr txBox="1"/>
-          <p:nvPr/>
-        </p:nvSpPr>
-        <p:spPr>
-          <a:xfrm>
-            <a:off x="566928" y="2487168"/>
-            <a:ext cx="4754880" cy="960120"/>
-          </a:xfrm>
-          <a:prstGeom prst="rect">
-            <a:avLst/>
-          </a:prstGeom>
-          <a:noFill/>
-        </p:spPr>
-        <p:txBody>
-          <a:bodyPr wrap="square" lIns="0" tIns="0" rIns="0" bIns="0" anchor="t">
-            <a:spAutoFit/>
-          </a:bodyPr>
-          <a:lstStyle/>
-          <a:p>
-            <a:pPr algn="l">
-              <a:spcAft>
-                <a:spcPts val="0"/>
-              </a:spcAft>
-            </a:pPr>
-            <a:r>
-              <a:rPr sz="3000" b="1" i="0">
-                <a:solidFill>
-                  <a:srgbClr val="AB3D3F"/>
-                </a:solidFill>
-                <a:latin typeface="Candara"/>
-              </a:rPr>
-              <a:t>442 vs 122,882</a:t>
-            </a:r>
-          </a:p>
-          <a:p>
-            <a:pPr algn="l">
-              <a:spcAft>
-                <a:spcPts val="600"/>
-              </a:spcAft>
-            </a:pPr>
-            <a:r>
-              <a:rPr sz="1300" b="0" i="0">
-                <a:solidFill>
-                  <a:srgbClr val="262626"/>
-                </a:solidFill>
-                <a:latin typeface="Candara"/>
-              </a:rPr>
-              <a:t>spread a Poisson implies (standard deviation) against what we observe: 278 times too narrow</a:t>
-            </a:r>
-          </a:p>
-        </p:txBody>
-      </p:sp>
-      <p:sp>
-        <p:nvSpPr>
-          <p:cNvPr id="5" name="TextBox 4"/>
-          <p:cNvSpPr txBox="1"/>
-          <p:nvPr/>
-        </p:nvSpPr>
-        <p:spPr>
-          <a:xfrm>
-            <a:off x="566928" y="3511296"/>
-            <a:ext cx="4754880" cy="960120"/>
-          </a:xfrm>
-          <a:prstGeom prst="rect">
-            <a:avLst/>
-          </a:prstGeom>
-          <a:noFill/>
-        </p:spPr>
-        <p:txBody>
-          <a:bodyPr wrap="square" lIns="0" tIns="0" rIns="0" bIns="0" anchor="t">
-            <a:spAutoFit/>
-          </a:bodyPr>
-          <a:lstStyle/>
-          <a:p>
-            <a:pPr algn="l">
-              <a:spcAft>
-                <a:spcPts val="0"/>
-              </a:spcAft>
-            </a:pPr>
-            <a:r>
-              <a:rPr sz="3000" b="1" i="0">
-                <a:solidFill>
-                  <a:srgbClr val="AB3D3F"/>
-                </a:solidFill>
-                <a:latin typeface="Candara"/>
-              </a:rPr>
-              <a:t>54,147</a:t>
-            </a:r>
-          </a:p>
-          <a:p>
-            <a:pPr algn="l">
-              <a:spcAft>
-                <a:spcPts val="600"/>
-              </a:spcAft>
-            </a:pPr>
-            <a:r>
-              <a:rPr sz="1300" b="0" i="0">
-                <a:solidFill>
-                  <a:srgbClr val="262626"/>
-                </a:solidFill>
-                <a:latin typeface="Candara"/>
-              </a:rPr>
-              <a:t>dispersion left after adjusting for population (Pearson chi-square per degree of freedom)</a:t>
-            </a:r>
-          </a:p>
-        </p:txBody>
-      </p:sp>
-      <p:sp>
-        <p:nvSpPr>
-          <p:cNvPr id="6" name="Rounded Rectangle 5"/>
-          <p:cNvSpPr/>
-          <p:nvPr/>
-        </p:nvSpPr>
-        <p:spPr>
-          <a:xfrm>
-            <a:off x="566928" y="4617720"/>
-            <a:ext cx="4754880" cy="1097280"/>
-          </a:xfrm>
-          <a:prstGeom prst="roundRect">
-            <a:avLst>
-              <a:gd name="adj" fmla="val 5000"/>
-            </a:avLst>
-          </a:prstGeom>
-          <a:solidFill>
-            <a:srgbClr val="F3F3F3"/>
-          </a:solidFill>
-          <a:ln>
-            <a:noFill/>
-          </a:ln>
-          <a:effectLst/>
-        </p:spPr>
-        <p:style>
-          <a:lnRef idx="1">
-            <a:schemeClr val="accent1"/>
-          </a:lnRef>
-          <a:fillRef idx="3">
-            <a:schemeClr val="accent1"/>
-          </a:fillRef>
-          <a:effectRef idx="2">
-            <a:schemeClr val="accent1"/>
-          </a:effectRef>
-          <a:fontRef idx="minor">
-            <a:schemeClr val="lt1"/>
-          </a:fontRef>
-        </p:style>
-        <p:txBody>
-          <a:bodyPr wrap="square" lIns="201168" tIns="160934" rIns="201168" bIns="160934" rtlCol="0" anchor="ctr"/>
-          <a:lstStyle/>
-          <a:p>
-            <a:pPr algn="l">
-              <a:spcAft>
-                <a:spcPts val="600"/>
-              </a:spcAft>
-            </a:pPr>
-            <a:r>
-              <a:rPr sz="1400" b="1" i="0">
-                <a:solidFill>
-                  <a:srgbClr val="AB3D3F"/>
-                </a:solidFill>
-                <a:latin typeface="Candara"/>
-              </a:rPr>
-              <a:t>Working model: negative binomial. </a:t>
-            </a:r>
-            <a:r>
-              <a:rPr sz="1400" b="0" i="0">
-                <a:solidFill>
-                  <a:srgbClr val="262626"/>
-                </a:solidFill>
-                <a:latin typeface="Candara"/>
-              </a:rPr>
-              <a:t>Dispersion α = 0.268 with a population offset; it beats Poisson by 2.39 million AIC points.</a:t>
-            </a:r>
-          </a:p>
-        </p:txBody>
-      </p:sp>
-      <p:pic>
-        <p:nvPicPr>
-          <p:cNvPr id="7" name="Picture 6" descr="a3_poisson_vs_nb.png"/>
-          <p:cNvPicPr>
-            <a:picLocks noChangeAspect="1"/>
-          </p:cNvPicPr>
-          <p:nvPr/>
-        </p:nvPicPr>
-        <p:blipFill>
-          <a:blip r:embed="rId3"/>
-          <a:stretch>
-            <a:fillRect/>
-          </a:stretch>
-        </p:blipFill>
-        <p:spPr>
-          <a:xfrm>
-            <a:off x="5669280" y="1575586"/>
-            <a:ext cx="5943600" cy="3478227"/>
-          </a:xfrm>
-          <a:prstGeom prst="rect">
-            <a:avLst/>
-          </a:prstGeom>
-        </p:spPr>
-      </p:pic>
-      <p:sp>
-        <p:nvSpPr>
-          <p:cNvPr id="8" name="TextBox 7"/>
-          <p:cNvSpPr txBox="1"/>
-          <p:nvPr/>
-        </p:nvSpPr>
-        <p:spPr>
-          <a:xfrm>
-            <a:off x="5669280" y="5303520"/>
-            <a:ext cx="5943600" cy="457200"/>
-          </a:xfrm>
-          <a:prstGeom prst="rect">
-            <a:avLst/>
-          </a:prstGeom>
-          <a:noFill/>
-        </p:spPr>
-        <p:txBody>
-          <a:bodyPr wrap="square" lIns="0" tIns="0" rIns="0" bIns="0" anchor="t">
-            <a:spAutoFit/>
-          </a:bodyPr>
-          <a:lstStyle/>
-          <a:p>
-            <a:pPr algn="l">
-              <a:spcAft>
-                <a:spcPts val="600"/>
-              </a:spcAft>
-            </a:pPr>
-            <a:r>
-              <a:rPr sz="1100" b="0" i="0">
-                <a:solidFill>
-                  <a:srgbClr val="595959"/>
-                </a:solidFill>
-                <a:latin typeface="Candara"/>
-              </a:rPr>
-              <a:t>50 districts, 2014-17. Curves fitted without covariates, so the negative binomial here uses α = 0.395.</a:t>
-            </a:r>
-          </a:p>
-        </p:txBody>
-      </p:sp>
-    </p:spTree>
-  </p:cSld>
-  <p:clrMapOvr>
-    <a:masterClrMapping/>
-  </p:clrMapOvr>
-</p:sld>
-</file>
-
-<file path=ppt/slides/slide6.xml><?xml version="1.0" encoding="utf-8"?>
-<p:sld xmlns:a="http://schemas.openxmlformats.org/drawingml/2006/main" xmlns:r="http://schemas.openxmlformats.org/officeDocument/2006/relationships" xmlns:p="http://schemas.openxmlformats.org/presentationml/2006/main">
-  <p:cSld>
-    <p:spTree>
-      <p:nvGrpSpPr>
-        <p:cNvPr id="1" name=""/>
-        <p:cNvGrpSpPr/>
-        <p:nvPr/>
-      </p:nvGrpSpPr>
-      <p:grpSpPr>
-        <a:xfrm>
-          <a:off x="0" y="0"/>
-          <a:ext cx="0" cy="0"/>
-          <a:chOff x="0" y="0"/>
-          <a:chExt cx="0" cy="0"/>
-        </a:xfrm>
-      </p:grpSpPr>
-      <p:sp>
-        <p:nvSpPr>
-          <p:cNvPr id="2" name="Text Placeholder 1"/>
-          <p:cNvSpPr>
-            <a:spLocks noGrp="1"/>
-          </p:cNvSpPr>
-          <p:nvPr>
-            <p:ph type="body" sz="quarter" idx="11"/>
-          </p:nvPr>
-        </p:nvSpPr>
-        <p:spPr>
-          <a:xfrm>
-            <a:off x="571500" y="571500"/>
-            <a:ext cx="11055096" cy="737700"/>
-          </a:xfrm>
-        </p:spPr>
-        <p:txBody>
-          <a:bodyPr/>
-          <a:lstStyle/>
-          <a:p>
-            <a:r>
-              <a:t>Survey intervals must respect clustering</a:t>
-            </a:r>
-          </a:p>
-        </p:txBody>
-      </p:sp>
-      <p:sp>
-        <p:nvSpPr>
-          <p:cNvPr id="3" name="TextBox 2"/>
-          <p:cNvSpPr txBox="1"/>
-          <p:nvPr/>
-        </p:nvSpPr>
-        <p:spPr>
-          <a:xfrm>
-            <a:off x="566928" y="1463040"/>
-            <a:ext cx="5120640" cy="4343400"/>
-          </a:xfrm>
-          <a:prstGeom prst="rect">
-            <a:avLst/>
-          </a:prstGeom>
-          <a:noFill/>
-        </p:spPr>
-        <p:txBody>
-          <a:bodyPr wrap="square" lIns="0" tIns="0" rIns="0" bIns="0" anchor="t">
-            <a:spAutoFit/>
-          </a:bodyPr>
-          <a:lstStyle/>
-          <a:p>
-            <a:pPr algn="l">
-              <a:spcAft>
-                <a:spcPts val="1200"/>
-              </a:spcAft>
-            </a:pPr>
-            <a:r>
-              <a:rPr sz="1400" b="0" i="0">
-                <a:solidFill>
-                  <a:srgbClr val="262626"/>
-                </a:solidFill>
-                <a:latin typeface="Candara"/>
-              </a:rPr>
-              <a:t>Households in one cluster share a village, water sources and the last net campaign, so they are not independent.</a:t>
-            </a:r>
-          </a:p>
-          <a:p>
-            <a:pPr algn="l">
-              <a:spcAft>
-                <a:spcPts val="200"/>
-              </a:spcAft>
-            </a:pPr>
-            <a:r>
-              <a:rPr sz="2200" b="1" i="0">
-                <a:solidFill>
-                  <a:srgbClr val="AB3D3F"/>
-                </a:solidFill>
-                <a:latin typeface="Candara"/>
-              </a:rPr>
-              <a:t>15.2 vs 7.2 points</a:t>
-            </a:r>
-          </a:p>
-          <a:p>
-            <a:pPr algn="l">
-              <a:spcAft>
-                <a:spcPts val="1200"/>
-              </a:spcAft>
-            </a:pPr>
-            <a:r>
-              <a:rPr sz="1400" b="0" i="0">
-                <a:solidFill>
-                  <a:srgbClr val="262626"/>
-                </a:solidFill>
-                <a:latin typeface="Candara"/>
-              </a:rPr>
-              <a:t>Width of the 95% interval for rural Northern net ownership (76.0%): cluster bootstrap against a naive household bootstrap. The honest interval is 2.1 times wider.</a:t>
-            </a:r>
-          </a:p>
-          <a:p>
-            <a:pPr algn="l">
-              <a:spcAft>
-                <a:spcPts val="200"/>
-              </a:spcAft>
-            </a:pPr>
-            <a:r>
-              <a:rPr sz="2200" b="1" i="0">
-                <a:solidFill>
-                  <a:srgbClr val="AB3D3F"/>
-                </a:solidFill>
-                <a:latin typeface="Candara"/>
-              </a:rPr>
-              <a:t>Design effect about 4.5</a:t>
-            </a:r>
-          </a:p>
-          <a:p>
-            <a:pPr algn="l">
-              <a:spcAft>
-                <a:spcPts val="1200"/>
-              </a:spcAft>
-            </a:pPr>
-            <a:r>
-              <a:rPr sz="1400" b="0" i="0">
-                <a:solidFill>
-                  <a:srgbClr val="262626"/>
-                </a:solidFill>
-                <a:latin typeface="Candara"/>
-              </a:rPr>
-              <a:t>The survey holds the information of a simple random sample about a quarter its size (4.5 to 5.4 across seeds; 4.2 by a design-based formula).</a:t>
-            </a:r>
-          </a:p>
-          <a:p>
-            <a:pPr algn="l">
-              <a:spcAft>
-                <a:spcPts val="200"/>
-              </a:spcAft>
-            </a:pPr>
-            <a:r>
-              <a:rPr sz="2200" b="1" i="0">
-                <a:solidFill>
-                  <a:srgbClr val="AB3D3F"/>
-                </a:solidFill>
-                <a:latin typeface="Candara"/>
-              </a:rPr>
-              <a:t>0.09 points</a:t>
-            </a:r>
-          </a:p>
-          <a:p>
-            <a:pPr algn="l">
-              <a:spcAft>
-                <a:spcPts val="600"/>
-              </a:spcAft>
-            </a:pPr>
-            <a:r>
-              <a:rPr sz="1400" b="0" i="0">
-                <a:solidFill>
-                  <a:srgbClr val="262626"/>
-                </a:solidFill>
-                <a:latin typeface="Candara"/>
-              </a:rPr>
-              <a:t>Our weighted estimate for Northern Region against the published DHS figure (67.69% vs 67.60%). This checks our weighting, not our interval: the published ITN intervals are empty.</a:t>
-            </a:r>
-          </a:p>
-        </p:txBody>
-      </p:sp>
-      <p:pic>
-        <p:nvPicPr>
-          <p:cNvPr id="4" name="Picture 3" descr="a4_bootstrap_ci_comparison.png"/>
-          <p:cNvPicPr>
-            <a:picLocks noChangeAspect="1"/>
-          </p:cNvPicPr>
-          <p:nvPr/>
-        </p:nvPicPr>
-        <p:blipFill>
-          <a:blip r:embed="rId3"/>
-          <a:stretch>
-            <a:fillRect/>
-          </a:stretch>
-        </p:blipFill>
-        <p:spPr>
-          <a:xfrm>
-            <a:off x="5943600" y="1952582"/>
-            <a:ext cx="5669280" cy="2404194"/>
-          </a:xfrm>
-          <a:prstGeom prst="rect">
-            <a:avLst/>
-          </a:prstGeom>
-        </p:spPr>
-      </p:pic>
-      <p:sp>
-        <p:nvSpPr>
-          <p:cNvPr id="5" name="TextBox 4"/>
-          <p:cNvSpPr txBox="1"/>
-          <p:nvPr/>
-        </p:nvSpPr>
-        <p:spPr>
-          <a:xfrm>
-            <a:off x="5943600" y="4754880"/>
-            <a:ext cx="5669280" cy="914400"/>
-          </a:xfrm>
-          <a:prstGeom prst="rect">
-            <a:avLst/>
-          </a:prstGeom>
-          <a:noFill/>
-        </p:spPr>
-        <p:txBody>
-          <a:bodyPr wrap="square" lIns="0" tIns="0" rIns="0" bIns="0" anchor="t">
-            <a:spAutoFit/>
-          </a:bodyPr>
-          <a:lstStyle/>
-          <a:p>
-            <a:pPr algn="l">
-              <a:spcAft>
-                <a:spcPts val="600"/>
-              </a:spcAft>
-            </a:pPr>
-            <a:r>
-              <a:rPr sz="1100" b="0" i="0">
-                <a:solidFill>
-                  <a:srgbClr val="595959"/>
-                </a:solidFill>
-                <a:latin typeface="Candara"/>
-              </a:rPr>
-              <a:t>Rural Northern Region: 582 households in 20 clusters, 2,000 replicates, seed 42. Chosen for its link to our districts; it ranks 10th of 16 regions by rural clusters, so it is not the most under-sampled.</a:t>
-            </a:r>
-          </a:p>
-        </p:txBody>
-      </p:sp>
-    </p:spTree>
-  </p:cSld>
-  <p:clrMapOvr>
-    <a:masterClrMapping/>
-  </p:clrMapOvr>
-</p:sld>
-</file>
-
-<file path=ppt/slides/slide7.xml><?xml version="1.0" encoding="utf-8"?>
-<p:sld xmlns:a="http://schemas.openxmlformats.org/drawingml/2006/main" xmlns:r="http://schemas.openxmlformats.org/officeDocument/2006/relationships" xmlns:p="http://schemas.openxmlformats.org/presentationml/2006/main">
-  <p:cSld>
-    <p:spTree>
-      <p:nvGrpSpPr>
-        <p:cNvPr id="1" name=""/>
-        <p:cNvGrpSpPr/>
-        <p:nvPr/>
-      </p:nvGrpSpPr>
-      <p:grpSpPr>
-        <a:xfrm>
-          <a:off x="0" y="0"/>
-          <a:ext cx="0" cy="0"/>
-          <a:chOff x="0" y="0"/>
-          <a:chExt cx="0" cy="0"/>
-        </a:xfrm>
-      </p:grpSpPr>
-      <p:sp>
-        <p:nvSpPr>
-          <p:cNvPr id="3" name="Text Placeholder 2"/>
-          <p:cNvSpPr>
-            <a:spLocks noGrp="1"/>
-          </p:cNvSpPr>
-          <p:nvPr>
-            <p:ph type="body" sz="quarter" idx="11"/>
-          </p:nvPr>
-        </p:nvSpPr>
-        <p:spPr>
-          <a:xfrm>
-            <a:off x="1061243" y="571500"/>
-            <a:ext cx="10067544" cy="737700"/>
-          </a:xfrm>
-        </p:spPr>
-        <p:txBody>
-          <a:bodyPr/>
-          <a:lstStyle/>
-          <a:p>
-            <a:r>
-              <a:rPr sz="3000"/>
-              <a:t>Leakage audit: what held up, and what did not</a:t>
-            </a:r>
-          </a:p>
-        </p:txBody>
-      </p:sp>
-      <p:graphicFrame>
-        <p:nvGraphicFramePr>
-          <p:cNvPr id="4" name="Table 3"/>
-          <p:cNvGraphicFramePr>
-            <a:graphicFrameLocks noGrp="1"/>
-          </p:cNvGraphicFramePr>
-          <p:nvPr/>
-        </p:nvGraphicFramePr>
-        <p:xfrm>
-          <a:off x="1060704" y="1463040"/>
-          <a:ext cx="10067544" cy="3794760"/>
-        </p:xfrm>
-        <a:graphic>
-          <a:graphicData uri="http://schemas.openxmlformats.org/drawingml/2006/table">
-            <a:tbl>
-              <a:tblPr firstRow="1">
-                <a:tableStyleId>{5C22544A-7EE6-4342-B048-85BDC9FD1C3A}</a:tableStyleId>
-              </a:tblPr>
-              <a:tblGrid>
-                <a:gridCol w="1600200">
-                  <a:extLst>
-                    <a:ext uri="{9D8B030D-6E8A-4147-A177-3AD203B41FA5}">
-                      <a16:colId xmlns:a16="http://schemas.microsoft.com/office/drawing/2014/main" val="20000"/>
-                    </a:ext>
-                  </a:extLst>
-                </a:gridCol>
-                <a:gridCol w="2606040">
-                  <a:extLst>
-                    <a:ext uri="{9D8B030D-6E8A-4147-A177-3AD203B41FA5}">
-                      <a16:colId xmlns:a16="http://schemas.microsoft.com/office/drawing/2014/main" val="20001"/>
-                    </a:ext>
-                  </a:extLst>
-                </a:gridCol>
-                <a:gridCol w="2606040">
-                  <a:extLst>
-                    <a:ext uri="{9D8B030D-6E8A-4147-A177-3AD203B41FA5}">
-                      <a16:colId xmlns:a16="http://schemas.microsoft.com/office/drawing/2014/main" val="20002"/>
-                    </a:ext>
-                  </a:extLst>
-                </a:gridCol>
-                <a:gridCol w="3255264">
-                  <a:extLst>
-                    <a:ext uri="{9D8B030D-6E8A-4147-A177-3AD203B41FA5}">
-                      <a16:colId xmlns:a16="http://schemas.microsoft.com/office/drawing/2014/main" val="20003"/>
-                    </a:ext>
-                  </a:extLst>
-                </a:gridCol>
-              </a:tblGrid>
-              <a:tr h="411480">
-                <a:tc>
-                  <a:txBody>
-                    <a:bodyPr/>
-                    <a:lstStyle/>
-                    <a:p>
-                      <a:pPr algn="l">
-                        <a:spcAft>
-                          <a:spcPts val="0"/>
-                        </a:spcAft>
-                      </a:pPr>
-                      <a:r>
-                        <a:rPr sz="1300" b="1" i="0">
-                          <a:solidFill>
-                            <a:srgbClr val="FFFFFF"/>
-                          </a:solidFill>
-                          <a:latin typeface="Candara"/>
-                        </a:rPr>
-                        <a:t>Leak</a:t>
-                      </a:r>
-                    </a:p>
-                  </a:txBody>
-                  <a:tcPr marT="36576" marB="36576" anchor="ctr">
-                    <a:solidFill>
-                      <a:srgbClr val="AB3D3F"/>
-                    </a:solidFill>
-                  </a:tcPr>
-                </a:tc>
-                <a:tc>
-                  <a:txBody>
-                    <a:bodyPr/>
-                    <a:lstStyle/>
-                    <a:p>
-                      <a:pPr algn="l">
-                        <a:spcAft>
-                          <a:spcPts val="0"/>
-                        </a:spcAft>
-                      </a:pPr>
-                      <a:r>
-                        <a:rPr sz="1300" b="1" i="0">
-                          <a:solidFill>
-                            <a:srgbClr val="FFFFFF"/>
-                          </a:solidFill>
-                          <a:latin typeface="Candara"/>
-                        </a:rPr>
-                        <a:t>Broken version</a:t>
-                      </a:r>
-                    </a:p>
-                  </a:txBody>
-                  <a:tcPr marT="36576" marB="36576" anchor="ctr">
-                    <a:solidFill>
-                      <a:srgbClr val="AB3D3F"/>
-                    </a:solidFill>
-                  </a:tcPr>
-                </a:tc>
-                <a:tc>
-                  <a:txBody>
-                    <a:bodyPr/>
-                    <a:lstStyle/>
-                    <a:p>
-                      <a:pPr algn="l">
-                        <a:spcAft>
-                          <a:spcPts val="0"/>
-                        </a:spcAft>
-                      </a:pPr>
-                      <a:r>
-                        <a:rPr sz="1300" b="1" i="0">
-                          <a:solidFill>
-                            <a:srgbClr val="FFFFFF"/>
-                          </a:solidFill>
-                          <a:latin typeface="Candara"/>
-                        </a:rPr>
-                        <a:t>Disciplined version</a:t>
-                      </a:r>
-                    </a:p>
-                  </a:txBody>
-                  <a:tcPr marT="36576" marB="36576" anchor="ctr">
-                    <a:solidFill>
-                      <a:srgbClr val="AB3D3F"/>
-                    </a:solidFill>
-                  </a:tcPr>
-                </a:tc>
-                <a:tc>
-                  <a:txBody>
-                    <a:bodyPr/>
-                    <a:lstStyle/>
-                    <a:p>
-                      <a:pPr algn="l">
-                        <a:spcAft>
-                          <a:spcPts val="0"/>
-                        </a:spcAft>
-                      </a:pPr>
-                      <a:r>
-                        <a:rPr sz="1300" b="1" i="0">
-                          <a:solidFill>
-                            <a:srgbClr val="FFFFFF"/>
-                          </a:solidFill>
-                          <a:latin typeface="Candara"/>
-                        </a:rPr>
-                        <a:t>What we found</a:t>
-                      </a:r>
-                    </a:p>
-                  </a:txBody>
-                  <a:tcPr marT="36576" marB="36576" anchor="ctr">
-                    <a:solidFill>
-                      <a:srgbClr val="AB3D3F"/>
-                    </a:solidFill>
-                  </a:tcPr>
-                </a:tc>
-                <a:extLst>
-                  <a:ext uri="{0D108BD9-81ED-4DB2-BD59-A6C34878D82A}">
-                    <a16:rowId xmlns:a16="http://schemas.microsoft.com/office/drawing/2014/main" val="10000"/>
-                  </a:ext>
-                </a:extLst>
-              </a:tr>
-              <a:tr h="914400">
-                <a:tc>
-                  <a:txBody>
-                    <a:bodyPr/>
-                    <a:lstStyle/>
-                    <a:p>
-                      <a:pPr algn="l">
-                        <a:spcAft>
-                          <a:spcPts val="0"/>
-                        </a:spcAft>
-                      </a:pPr>
-                      <a:r>
-                        <a:rPr sz="1200" b="1" i="0">
-                          <a:solidFill>
-                            <a:srgbClr val="262626"/>
-                          </a:solidFill>
-                          <a:latin typeface="Candara"/>
-                        </a:rPr>
-                        <a:t>Preprocessing</a:t>
-                      </a:r>
-                    </a:p>
-                  </a:txBody>
-                  <a:tcPr marT="36576" marB="36576" anchor="ctr">
-                    <a:solidFill>
-                      <a:srgbClr val="FFFFFF"/>
-                    </a:solidFill>
-                  </a:tcPr>
-                </a:tc>
-                <a:tc>
-                  <a:txBody>
-                    <a:bodyPr/>
-                    <a:lstStyle/>
-                    <a:p>
-                      <a:pPr algn="l">
-                        <a:spcAft>
-                          <a:spcPts val="0"/>
-                        </a:spcAft>
-                      </a:pPr>
-                      <a:r>
-                        <a:rPr sz="1200" b="0" i="0">
-                          <a:solidFill>
-                            <a:srgbClr val="262626"/>
-                          </a:solidFill>
-                          <a:latin typeface="Candara"/>
-                        </a:rPr>
-                        <a:t>Scaler fitted on all 50 districts before splitting</a:t>
-                      </a:r>
-                    </a:p>
-                  </a:txBody>
-                  <a:tcPr marT="36576" marB="36576" anchor="ctr">
-                    <a:solidFill>
-                      <a:srgbClr val="FFFFFF"/>
-                    </a:solidFill>
-                  </a:tcPr>
-                </a:tc>
-                <a:tc>
-                  <a:txBody>
-                    <a:bodyPr/>
-                    <a:lstStyle/>
-                    <a:p>
-                      <a:pPr algn="l">
-                        <a:spcAft>
-                          <a:spcPts val="0"/>
-                        </a:spcAft>
-                      </a:pPr>
-                      <a:r>
-                        <a:rPr sz="1200" b="0" i="0">
-                          <a:solidFill>
-                            <a:srgbClr val="262626"/>
-                          </a:solidFill>
-                          <a:latin typeface="Candara"/>
-                        </a:rPr>
-                        <a:t>Scaler fitted inside a Pipeline, on training districts only</a:t>
-                      </a:r>
-                    </a:p>
-                  </a:txBody>
-                  <a:tcPr marT="36576" marB="36576" anchor="ctr">
-                    <a:solidFill>
-                      <a:srgbClr val="FFFFFF"/>
-                    </a:solidFill>
-                  </a:tcPr>
-                </a:tc>
-                <a:tc>
-                  <a:txBody>
-                    <a:bodyPr/>
-                    <a:lstStyle/>
-                    <a:p>
-                      <a:pPr algn="l">
-                        <a:spcAft>
-                          <a:spcPts val="0"/>
-                        </a:spcAft>
-                      </a:pPr>
-                      <a:r>
-                        <a:rPr sz="1200" b="0" i="0">
-                          <a:solidFill>
-                            <a:srgbClr val="262626"/>
-                          </a:solidFill>
-                          <a:latin typeface="Candara"/>
-                        </a:rPr>
-                        <a:t>Real mechanism, negligible here: 212 cases at seed 42, 44 on average over 500 seeds</a:t>
-                      </a:r>
-                    </a:p>
-                  </a:txBody>
-                  <a:tcPr marT="36576" marB="36576" anchor="ctr">
-                    <a:solidFill>
-                      <a:srgbClr val="FFFFFF"/>
-                    </a:solidFill>
-                  </a:tcPr>
-                </a:tc>
-                <a:extLst>
-                  <a:ext uri="{0D108BD9-81ED-4DB2-BD59-A6C34878D82A}">
-                    <a16:rowId xmlns:a16="http://schemas.microsoft.com/office/drawing/2014/main" val="10001"/>
-                  </a:ext>
-                </a:extLst>
-              </a:tr>
-              <a:tr h="777240">
-                <a:tc>
-                  <a:txBody>
-                    <a:bodyPr/>
-                    <a:lstStyle/>
-                    <a:p>
-                      <a:pPr algn="l">
-                        <a:spcAft>
-                          <a:spcPts val="0"/>
-                        </a:spcAft>
-                      </a:pPr>
-                      <a:r>
-                        <a:rPr sz="1200" b="1" i="0">
-                          <a:solidFill>
-                            <a:srgbClr val="262626"/>
-                          </a:solidFill>
-                          <a:latin typeface="Candara"/>
-                        </a:rPr>
-                        <a:t>Target encoding</a:t>
-                      </a:r>
-                    </a:p>
-                  </a:txBody>
-                  <a:tcPr marT="36576" marB="36576" anchor="ctr">
-                    <a:solidFill>
-                      <a:srgbClr val="F3F3F3"/>
-                    </a:solidFill>
-                  </a:tcPr>
-                </a:tc>
-                <a:tc>
-                  <a:txBody>
-                    <a:bodyPr/>
-                    <a:lstStyle/>
-                    <a:p>
-                      <a:pPr algn="l">
-                        <a:spcAft>
-                          <a:spcPts val="0"/>
-                        </a:spcAft>
-                      </a:pPr>
-                      <a:r>
-                        <a:rPr sz="1200" b="0" i="0">
-                          <a:solidFill>
-                            <a:srgbClr val="262626"/>
-                          </a:solidFill>
-                          <a:latin typeface="Candara"/>
-                        </a:rPr>
-                        <a:t>Each district encoded with its own case count</a:t>
-                      </a:r>
-                    </a:p>
-                  </a:txBody>
-                  <a:tcPr marT="36576" marB="36576" anchor="ctr">
-                    <a:solidFill>
-                      <a:srgbClr val="F3F3F3"/>
-                    </a:solidFill>
-                  </a:tcPr>
-                </a:tc>
-                <a:tc>
-                  <a:txBody>
-                    <a:bodyPr/>
-                    <a:lstStyle/>
-                    <a:p>
-                      <a:pPr algn="l">
-                        <a:spcAft>
-                          <a:spcPts val="0"/>
-                        </a:spcAft>
-                      </a:pPr>
-                      <a:r>
-                        <a:rPr sz="1200" b="0" i="0">
-                          <a:solidFill>
-                            <a:srgbClr val="262626"/>
-                          </a:solidFill>
-                          <a:latin typeface="Candara"/>
-                        </a:rPr>
-                        <a:t>Only features that do not use the outcome</a:t>
-                      </a:r>
-                    </a:p>
-                  </a:txBody>
-                  <a:tcPr marT="36576" marB="36576" anchor="ctr">
-                    <a:solidFill>
-                      <a:srgbClr val="F3F3F3"/>
-                    </a:solidFill>
-                  </a:tcPr>
-                </a:tc>
-                <a:tc>
-                  <a:txBody>
-                    <a:bodyPr/>
-                    <a:lstStyle/>
-                    <a:p>
-                      <a:pPr algn="l">
-                        <a:spcAft>
-                          <a:spcPts val="0"/>
-                        </a:spcAft>
-                      </a:pPr>
-                      <a:r>
-                        <a:rPr sz="1200" b="0" i="0">
-                          <a:solidFill>
-                            <a:srgbClr val="262626"/>
-                          </a:solidFill>
-                          <a:latin typeface="Candara"/>
-                        </a:rPr>
-                        <a:t>Test R² of 1.00 against 0.26: the feature is the answer</a:t>
-                      </a:r>
-                    </a:p>
-                  </a:txBody>
-                  <a:tcPr marT="36576" marB="36576" anchor="ctr">
-                    <a:solidFill>
-                      <a:srgbClr val="F3F3F3"/>
-                    </a:solidFill>
-                  </a:tcPr>
-                </a:tc>
-                <a:extLst>
-                  <a:ext uri="{0D108BD9-81ED-4DB2-BD59-A6C34878D82A}">
-                    <a16:rowId xmlns:a16="http://schemas.microsoft.com/office/drawing/2014/main" val="10002"/>
-                  </a:ext>
-                </a:extLst>
-              </a:tr>
-              <a:tr h="914400">
-                <a:tc>
-                  <a:txBody>
-                    <a:bodyPr/>
-                    <a:lstStyle/>
-                    <a:p>
-                      <a:pPr algn="l">
-                        <a:spcAft>
-                          <a:spcPts val="0"/>
-                        </a:spcAft>
-                      </a:pPr>
-                      <a:r>
-                        <a:rPr sz="1200" b="1" i="0">
-                          <a:solidFill>
-                            <a:srgbClr val="262626"/>
-                          </a:solidFill>
-                          <a:latin typeface="Candara"/>
-                        </a:rPr>
-                        <a:t>Spatial</a:t>
-                      </a:r>
-                    </a:p>
-                  </a:txBody>
-                  <a:tcPr marT="36576" marB="36576" anchor="ctr">
-                    <a:solidFill>
-                      <a:srgbClr val="FFFFFF"/>
-                    </a:solidFill>
-                  </a:tcPr>
-                </a:tc>
-                <a:tc>
-                  <a:txBody>
-                    <a:bodyPr/>
-                    <a:lstStyle/>
-                    <a:p>
-                      <a:pPr algn="l">
-                        <a:spcAft>
-                          <a:spcPts val="0"/>
-                        </a:spcAft>
-                      </a:pPr>
-                      <a:r>
-                        <a:rPr sz="1200" b="0" i="0">
-                          <a:solidFill>
-                            <a:srgbClr val="262626"/>
-                          </a:solidFill>
-                          <a:latin typeface="Candara"/>
-                        </a:rPr>
-                        <a:t>Random split, or random split stratified by region</a:t>
-                      </a:r>
-                    </a:p>
-                  </a:txBody>
-                  <a:tcPr marT="36576" marB="36576" anchor="ctr">
-                    <a:solidFill>
-                      <a:srgbClr val="FFFFFF"/>
-                    </a:solidFill>
-                  </a:tcPr>
-                </a:tc>
-                <a:tc>
-                  <a:txBody>
-                    <a:bodyPr/>
-                    <a:lstStyle/>
-                    <a:p>
-                      <a:pPr algn="l">
-                        <a:spcAft>
-                          <a:spcPts val="0"/>
-                        </a:spcAft>
-                      </a:pPr>
-                      <a:r>
-                        <a:rPr sz="1200" b="0" i="0">
-                          <a:solidFill>
-                            <a:srgbClr val="262626"/>
-                          </a:solidFill>
-                          <a:latin typeface="Candara"/>
-                        </a:rPr>
-                        <a:t>Whole region held out</a:t>
-                      </a:r>
-                    </a:p>
-                  </a:txBody>
-                  <a:tcPr marT="36576" marB="36576" anchor="ctr">
-                    <a:solidFill>
-                      <a:srgbClr val="FFFFFF"/>
-                    </a:solidFill>
-                  </a:tcPr>
-                </a:tc>
-                <a:tc>
-                  <a:txBody>
-                    <a:bodyPr/>
-                    <a:lstStyle/>
-                    <a:p>
-                      <a:pPr algn="l">
-                        <a:spcAft>
-                          <a:spcPts val="0"/>
-                        </a:spcAft>
-                      </a:pPr>
-                      <a:r>
-                        <a:rPr sz="1200" b="0" i="0">
-                          <a:solidFill>
-                            <a:srgbClr val="262626"/>
-                          </a:solidFill>
-                          <a:latin typeface="Candara"/>
-                        </a:rPr>
-                        <a:t>Random and stratified splits agree (about 90,000); a held-out region gives 365,128</a:t>
-                      </a:r>
-                    </a:p>
-                  </a:txBody>
-                  <a:tcPr marT="36576" marB="36576" anchor="ctr">
-                    <a:solidFill>
-                      <a:srgbClr val="FFFFFF"/>
-                    </a:solidFill>
-                  </a:tcPr>
-                </a:tc>
-                <a:extLst>
-                  <a:ext uri="{0D108BD9-81ED-4DB2-BD59-A6C34878D82A}">
-                    <a16:rowId xmlns:a16="http://schemas.microsoft.com/office/drawing/2014/main" val="10003"/>
-                  </a:ext>
-                </a:extLst>
-              </a:tr>
-              <a:tr h="777240">
-                <a:tc>
-                  <a:txBody>
-                    <a:bodyPr/>
-                    <a:lstStyle/>
-                    <a:p>
-                      <a:pPr algn="l">
-                        <a:spcAft>
-                          <a:spcPts val="0"/>
-                        </a:spcAft>
-                      </a:pPr>
-                      <a:r>
-                        <a:rPr sz="1200" b="1" i="0">
-                          <a:solidFill>
-                            <a:srgbClr val="262626"/>
-                          </a:solidFill>
-                          <a:latin typeface="Candara"/>
-                        </a:rPr>
-                        <a:t>Temporal</a:t>
-                      </a:r>
-                    </a:p>
-                  </a:txBody>
-                  <a:tcPr marT="36576" marB="36576" anchor="ctr">
-                    <a:solidFill>
-                      <a:srgbClr val="F3F3F3"/>
-                    </a:solidFill>
-                  </a:tcPr>
-                </a:tc>
-                <a:tc>
-                  <a:txBody>
-                    <a:bodyPr/>
-                    <a:lstStyle/>
-                    <a:p>
-                      <a:pPr algn="l">
-                        <a:spcAft>
-                          <a:spcPts val="0"/>
-                        </a:spcAft>
-                      </a:pPr>
-                      <a:r>
-                        <a:rPr sz="1200" b="0" i="0">
-                          <a:solidFill>
-                            <a:srgbClr val="262626"/>
-                          </a:solidFill>
-                          <a:latin typeface="Candara"/>
-                        </a:rPr>
-                        <a:t>2022 coverage used to explain 2014-17 cases</a:t>
-                      </a:r>
-                    </a:p>
-                  </a:txBody>
-                  <a:tcPr marT="36576" marB="36576" anchor="ctr">
-                    <a:solidFill>
-                      <a:srgbClr val="F3F3F3"/>
-                    </a:solidFill>
-                  </a:tcPr>
-                </a:tc>
-                <a:tc>
-                  <a:txBody>
-                    <a:bodyPr/>
-                    <a:lstStyle/>
-                    <a:p>
-                      <a:pPr algn="l">
-                        <a:spcAft>
-                          <a:spcPts val="0"/>
-                        </a:spcAft>
-                      </a:pPr>
-                      <a:r>
-                        <a:rPr sz="1200" b="0" i="0">
-                          <a:solidFill>
-                            <a:srgbClr val="262626"/>
-                          </a:solidFill>
-                          <a:latin typeface="Candara"/>
-                        </a:rPr>
-                        <a:t>Documented; not read causally</a:t>
-                      </a:r>
-                    </a:p>
-                  </a:txBody>
-                  <a:tcPr marT="36576" marB="36576" anchor="ctr">
-                    <a:solidFill>
-                      <a:srgbClr val="F3F3F3"/>
-                    </a:solidFill>
-                  </a:tcPr>
-                </a:tc>
-                <a:tc>
-                  <a:txBody>
-                    <a:bodyPr/>
-                    <a:lstStyle/>
-                    <a:p>
-                      <a:pPr algn="l">
-                        <a:spcAft>
-                          <a:spcPts val="0"/>
-                        </a:spcAft>
-                      </a:pPr>
-                      <a:r>
-                        <a:rPr sz="1200" b="0" i="0">
-                          <a:solidFill>
-                            <a:srgbClr val="262626"/>
-                          </a:solidFill>
-                          <a:latin typeface="Candara"/>
-                        </a:rPr>
-                        <a:t>The coverage coefficient reflects region, not the effect of nets</a:t>
-                      </a:r>
-                    </a:p>
-                  </a:txBody>
-                  <a:tcPr marT="36576" marB="36576" anchor="ctr">
-                    <a:solidFill>
-                      <a:srgbClr val="F3F3F3"/>
-                    </a:solidFill>
-                  </a:tcPr>
-                </a:tc>
-                <a:extLst>
-                  <a:ext uri="{0D108BD9-81ED-4DB2-BD59-A6C34878D82A}">
-                    <a16:rowId xmlns:a16="http://schemas.microsoft.com/office/drawing/2014/main" val="10004"/>
-                  </a:ext>
-                </a:extLst>
-              </a:tr>
-            </a:tbl>
-          </a:graphicData>
-        </a:graphic>
-      </p:graphicFrame>
-    </p:spTree>
-  </p:cSld>
-  <p:clrMapOvr>
-    <a:masterClrMapping/>
-  </p:clrMapOvr>
-</p:sld>
-</file>
-
-<file path=ppt/slides/slide8.xml><?xml version="1.0" encoding="utf-8"?>
-<p:sld xmlns:a="http://schemas.openxmlformats.org/drawingml/2006/main" xmlns:r="http://schemas.openxmlformats.org/officeDocument/2006/relationships" xmlns:p="http://schemas.openxmlformats.org/presentationml/2006/main">
-  <p:cSld>
-    <p:spTree>
-      <p:nvGrpSpPr>
-        <p:cNvPr id="1" name=""/>
-        <p:cNvGrpSpPr/>
-        <p:nvPr/>
-      </p:nvGrpSpPr>
-      <p:grpSpPr>
-        <a:xfrm>
-          <a:off x="0" y="0"/>
-          <a:ext cx="0" cy="0"/>
-          <a:chOff x="0" y="0"/>
-          <a:chExt cx="0" cy="0"/>
-        </a:xfrm>
-      </p:grpSpPr>
-      <p:sp>
-        <p:nvSpPr>
-          <p:cNvPr id="2" name="Text Placeholder 1"/>
-          <p:cNvSpPr>
-            <a:spLocks noGrp="1"/>
-          </p:cNvSpPr>
-          <p:nvPr>
-            <p:ph type="body" sz="quarter" idx="11"/>
-          </p:nvPr>
-        </p:nvSpPr>
-        <p:spPr>
-          <a:xfrm>
-            <a:off x="571500" y="571500"/>
-            <a:ext cx="11055096" cy="737700"/>
-          </a:xfrm>
-        </p:spPr>
-        <p:txBody>
-          <a:bodyPr/>
-          <a:lstStyle/>
-          <a:p>
-            <a:r>
-              <a:t>Only a held-out region tests new geography</a:t>
-            </a:r>
-          </a:p>
-        </p:txBody>
-      </p:sp>
-      <p:sp>
-        <p:nvSpPr>
-          <p:cNvPr id="3" name="TextBox 2"/>
-          <p:cNvSpPr txBox="1"/>
-          <p:nvPr/>
-        </p:nvSpPr>
-        <p:spPr>
-          <a:xfrm>
-            <a:off x="566928" y="1554480"/>
-            <a:ext cx="4754880" cy="2677656"/>
-          </a:xfrm>
-          <a:prstGeom prst="rect">
-            <a:avLst/>
-          </a:prstGeom>
-          <a:noFill/>
-        </p:spPr>
-        <p:txBody>
-          <a:bodyPr wrap="square" lIns="0" tIns="0" rIns="0" bIns="0" anchor="t">
-            <a:spAutoFit/>
-          </a:bodyPr>
-          <a:lstStyle/>
-          <a:p>
-            <a:pPr marL="219456" indent="-219456" algn="l">
-              <a:spcAft>
-                <a:spcPts val="1200"/>
-              </a:spcAft>
-              <a:buClr>
-                <a:srgbClr val="AB3D3F"/>
-              </a:buClr>
-              <a:buFont typeface="Arial"/>
-              <a:buChar char="•"/>
-            </a:pPr>
-            <a:r>
-              <a:rPr sz="1600" b="0" i="0" dirty="0">
-                <a:solidFill>
-                  <a:srgbClr val="262626"/>
-                </a:solidFill>
-                <a:latin typeface="Candara"/>
-              </a:rPr>
-              <a:t>A split stratified by region still puts each test district's neighbors in the training set.</a:t>
-            </a:r>
-          </a:p>
-          <a:p>
-            <a:pPr marL="219456" indent="-219456" algn="l">
-              <a:spcAft>
-                <a:spcPts val="1200"/>
-              </a:spcAft>
-              <a:buClr>
-                <a:srgbClr val="AB3D3F"/>
-              </a:buClr>
-              <a:buFont typeface="Arial"/>
-              <a:buChar char="•"/>
-            </a:pPr>
-            <a:r>
-              <a:rPr sz="1600" b="0" i="0" dirty="0">
-                <a:solidFill>
-                  <a:srgbClr val="262626"/>
-                </a:solidFill>
-                <a:latin typeface="Candara"/>
-              </a:rPr>
-              <a:t>Across 500 random seeds, random and region-stratified splits give the same test error.</a:t>
-            </a:r>
-          </a:p>
-          <a:p>
-            <a:pPr marL="219456" indent="-219456" algn="l">
-              <a:spcAft>
-                <a:spcPts val="1200"/>
-              </a:spcAft>
-              <a:buClr>
-                <a:srgbClr val="AB3D3F"/>
-              </a:buClr>
-              <a:buFont typeface="Arial"/>
-              <a:buChar char="•"/>
-            </a:pPr>
-            <a:r>
-              <a:rPr sz="1600" b="0" i="0" dirty="0">
-                <a:solidFill>
-                  <a:srgbClr val="262626"/>
-                </a:solidFill>
-                <a:latin typeface="Candara"/>
-              </a:rPr>
-              <a:t>Train on two regions, predict the third, and the error is four times larger.</a:t>
-            </a:r>
-          </a:p>
-          <a:p>
-            <a:pPr marL="219456" indent="-219456" algn="l">
-              <a:spcAft>
-                <a:spcPts val="600"/>
-              </a:spcAft>
-              <a:buClr>
-                <a:srgbClr val="AB3D3F"/>
-              </a:buClr>
-              <a:buFont typeface="Arial"/>
-              <a:buChar char="•"/>
-            </a:pPr>
-            <a:r>
-              <a:rPr sz="1600" b="0" i="0" dirty="0">
-                <a:solidFill>
-                  <a:srgbClr val="262626"/>
-                </a:solidFill>
-                <a:latin typeface="Candara"/>
-              </a:rPr>
-              <a:t>So</a:t>
-            </a:r>
-            <a:r>
-              <a:rPr lang="en-US" sz="1600" b="0" i="0" dirty="0">
-                <a:solidFill>
-                  <a:srgbClr val="262626"/>
-                </a:solidFill>
-                <a:latin typeface="Candara"/>
-              </a:rPr>
-              <a:t>,</a:t>
-            </a:r>
-            <a:r>
-              <a:rPr sz="1600" b="0" i="0" dirty="0">
-                <a:solidFill>
-                  <a:srgbClr val="262626"/>
-                </a:solidFill>
-                <a:latin typeface="Candara"/>
-              </a:rPr>
-              <a:t> the model cannot yet rank districts in a region it has not seen, such as the 207 districts outside our data.</a:t>
-            </a:r>
-          </a:p>
-        </p:txBody>
-      </p:sp>
-      <p:graphicFrame>
-        <p:nvGraphicFramePr>
-          <p:cNvPr id="4" name="Chart 3"/>
-          <p:cNvGraphicFramePr>
-            <a:graphicFrameLocks noGrp="1"/>
-          </p:cNvGraphicFramePr>
-          <p:nvPr/>
-        </p:nvGraphicFramePr>
-        <p:xfrm>
-          <a:off x="5577840" y="1371600"/>
-          <a:ext cx="6035040" cy="3886200"/>
-        </p:xfrm>
-        <a:graphic>
-          <a:graphicData uri="http://schemas.openxmlformats.org/drawingml/2006/chart">
-            <c:chart xmlns:c="http://schemas.openxmlformats.org/drawingml/2006/chart" xmlns:r="http://schemas.openxmlformats.org/officeDocument/2006/relationships" r:id="rId3"/>
-          </a:graphicData>
-        </a:graphic>
-      </p:graphicFrame>
-      <p:sp>
-        <p:nvSpPr>
-          <p:cNvPr id="5" name="TextBox 4"/>
-          <p:cNvSpPr txBox="1"/>
-          <p:nvPr/>
-        </p:nvSpPr>
-        <p:spPr>
-          <a:xfrm>
-            <a:off x="5577840" y="5303520"/>
-            <a:ext cx="6035040" cy="502920"/>
-          </a:xfrm>
-          <a:prstGeom prst="rect">
-            <a:avLst/>
-          </a:prstGeom>
-          <a:noFill/>
-        </p:spPr>
-        <p:txBody>
-          <a:bodyPr wrap="square" lIns="0" tIns="0" rIns="0" bIns="0" anchor="t">
-            <a:spAutoFit/>
-          </a:bodyPr>
-          <a:lstStyle/>
-          <a:p>
-            <a:pPr algn="l">
-              <a:spcAft>
-                <a:spcPts val="600"/>
-              </a:spcAft>
-            </a:pPr>
-            <a:r>
-              <a:rPr sz="1100" b="0" i="0">
-                <a:solidFill>
-                  <a:srgbClr val="595959"/>
-                </a:solidFill>
-                <a:latin typeface="Candara"/>
-              </a:rPr>
-              <a:t>Test RMSE in confirmed cases, Ridge model from notebook 03. Random splits: median of 500 seeds. Held out: Northern 272,529, Upper East 589,777, Upper West 139,143.</a:t>
-            </a:r>
-          </a:p>
-        </p:txBody>
-      </p:sp>
-    </p:spTree>
-  </p:cSld>
-  <p:clrMapOvr>
-    <a:masterClrMapping/>
-  </p:clrMapOvr>
-</p:sld>
-</file>
-
-<file path=ppt/slides/slide9.xml><?xml version="1.0" encoding="utf-8"?>
-<p:sld xmlns:a="http://schemas.openxmlformats.org/drawingml/2006/main" xmlns:r="http://schemas.openxmlformats.org/officeDocument/2006/relationships" xmlns:p="http://schemas.openxmlformats.org/presentationml/2006/main">
-  <p:cSld>
-    <p:spTree>
-      <p:nvGrpSpPr>
-        <p:cNvPr id="1" name=""/>
-        <p:cNvGrpSpPr/>
-        <p:nvPr/>
-      </p:nvGrpSpPr>
-      <p:grpSpPr>
-        <a:xfrm>
-          <a:off x="0" y="0"/>
-          <a:ext cx="0" cy="0"/>
-          <a:chOff x="0" y="0"/>
-          <a:chExt cx="0" cy="0"/>
-        </a:xfrm>
-      </p:grpSpPr>
-      <p:sp>
-        <p:nvSpPr>
-          <p:cNvPr id="2" name="Text Placeholder 1"/>
-          <p:cNvSpPr>
-            <a:spLocks noGrp="1"/>
-          </p:cNvSpPr>
-          <p:nvPr>
-            <p:ph type="body" sz="quarter" idx="11"/>
-          </p:nvPr>
-        </p:nvSpPr>
-        <p:spPr>
-          <a:xfrm>
-            <a:off x="571500" y="571500"/>
-            <a:ext cx="11055096" cy="737700"/>
-          </a:xfrm>
-        </p:spPr>
-        <p:txBody>
-          <a:bodyPr/>
-          <a:lstStyle/>
-          <a:p>
-            <a:r>
-              <a:t>What our rule does with our data</a:t>
-            </a:r>
-          </a:p>
-        </p:txBody>
-      </p:sp>
-      <p:sp>
-        <p:nvSpPr>
-          <p:cNvPr id="3" name="TextBox 2"/>
-          <p:cNvSpPr txBox="1"/>
-          <p:nvPr/>
-        </p:nvSpPr>
-        <p:spPr>
-          <a:xfrm>
-            <a:off x="566928" y="1325880"/>
-            <a:ext cx="6263640" cy="4572000"/>
-          </a:xfrm>
-          <a:prstGeom prst="rect">
-            <a:avLst/>
-          </a:prstGeom>
-          <a:noFill/>
-        </p:spPr>
-        <p:txBody>
-          <a:bodyPr wrap="square" lIns="0" tIns="0" rIns="0" bIns="0" anchor="t">
-            <a:spAutoFit/>
-          </a:bodyPr>
-          <a:lstStyle/>
-          <a:p>
-            <a:pPr algn="l">
-              <a:spcAft>
-                <a:spcPts val="400"/>
-              </a:spcAft>
-            </a:pPr>
-            <a:r>
-              <a:rPr sz="1700" b="1" i="0">
-                <a:solidFill>
-                  <a:srgbClr val="AB3D3F"/>
-                </a:solidFill>
-                <a:latin typeface="Candara"/>
-              </a:rPr>
-              <a:t>The rule, for each district i</a:t>
-            </a:r>
-          </a:p>
-          <a:p>
-            <a:pPr algn="l">
-              <a:spcAft>
-                <a:spcPts val="200"/>
-              </a:spcAft>
-            </a:pPr>
-            <a:r>
-              <a:rPr sz="1800" b="0" i="0">
-                <a:solidFill>
-                  <a:srgbClr val="262626"/>
-                </a:solidFill>
-                <a:latin typeface="Cambria Math"/>
-              </a:rPr>
-              <a:t>log μ</a:t>
-            </a:r>
-            <a:r>
-              <a:rPr sz="1800" b="0" i="0" baseline="-25000">
-                <a:solidFill>
-                  <a:srgbClr val="262626"/>
-                </a:solidFill>
-                <a:latin typeface="Cambria Math"/>
-              </a:rPr>
-              <a:t>i</a:t>
-            </a:r>
-            <a:r>
-              <a:rPr sz="1800" b="0" i="0">
-                <a:solidFill>
-                  <a:srgbClr val="262626"/>
-                </a:solidFill>
-                <a:latin typeface="Cambria Math"/>
-              </a:rPr>
-              <a:t> = log pop</a:t>
-            </a:r>
-            <a:r>
-              <a:rPr sz="1800" b="0" i="0" baseline="-25000">
-                <a:solidFill>
-                  <a:srgbClr val="262626"/>
-                </a:solidFill>
-                <a:latin typeface="Cambria Math"/>
-              </a:rPr>
-              <a:t>i</a:t>
-            </a:r>
-            <a:r>
-              <a:rPr sz="1800" b="0" i="0">
-                <a:solidFill>
-                  <a:srgbClr val="262626"/>
-                </a:solidFill>
-                <a:latin typeface="Cambria Math"/>
-              </a:rPr>
-              <a:t> + β</a:t>
-            </a:r>
-            <a:r>
-              <a:rPr sz="1800" b="0" i="0" baseline="-25000">
-                <a:solidFill>
-                  <a:srgbClr val="262626"/>
-                </a:solidFill>
-                <a:latin typeface="Cambria Math"/>
-              </a:rPr>
-              <a:t>0</a:t>
-            </a:r>
-            <a:r>
-              <a:rPr sz="1800" b="0" i="0">
-                <a:solidFill>
-                  <a:srgbClr val="262626"/>
-                </a:solidFill>
-                <a:latin typeface="Cambria Math"/>
-              </a:rPr>
-              <a:t> + β</a:t>
-            </a:r>
-            <a:r>
-              <a:rPr sz="1800" b="0" i="0" baseline="-25000">
-                <a:solidFill>
-                  <a:srgbClr val="262626"/>
-                </a:solidFill>
-                <a:latin typeface="Cambria Math"/>
-              </a:rPr>
-              <a:t>1</a:t>
-            </a:r>
-            <a:r>
-              <a:rPr sz="1800" b="0" i="0">
-                <a:solidFill>
-                  <a:srgbClr val="262626"/>
-                </a:solidFill>
-                <a:latin typeface="Cambria Math"/>
-              </a:rPr>
-              <a:t> c</a:t>
-            </a:r>
-            <a:r>
-              <a:rPr sz="1800" b="0" i="0" baseline="-25000">
-                <a:solidFill>
-                  <a:srgbClr val="262626"/>
-                </a:solidFill>
-                <a:latin typeface="Cambria Math"/>
-              </a:rPr>
-              <a:t>i</a:t>
-            </a:r>
-          </a:p>
-          <a:p>
-            <a:pPr algn="l">
-              <a:spcAft>
-                <a:spcPts val="200"/>
-              </a:spcAft>
-            </a:pPr>
-            <a:r>
-              <a:rPr sz="1800" b="0" i="0">
-                <a:solidFill>
-                  <a:srgbClr val="262626"/>
-                </a:solidFill>
-                <a:latin typeface="Cambria Math"/>
-              </a:rPr>
-              <a:t>w</a:t>
-            </a:r>
-            <a:r>
-              <a:rPr sz="1800" b="0" i="0" baseline="-25000">
-                <a:solidFill>
-                  <a:srgbClr val="262626"/>
-                </a:solidFill>
-                <a:latin typeface="Cambria Math"/>
-              </a:rPr>
-              <a:t>i</a:t>
-            </a:r>
-            <a:r>
-              <a:rPr sz="1800" b="0" i="0">
-                <a:solidFill>
-                  <a:srgbClr val="262626"/>
-                </a:solidFill>
-                <a:latin typeface="Cambria Math"/>
-              </a:rPr>
-              <a:t> = U</a:t>
-            </a:r>
-            <a:r>
-              <a:rPr sz="1800" b="0" i="0" baseline="-25000">
-                <a:solidFill>
-                  <a:srgbClr val="262626"/>
-                </a:solidFill>
-                <a:latin typeface="Cambria Math"/>
-              </a:rPr>
-              <a:t>i</a:t>
-            </a:r>
-            <a:r>
-              <a:rPr sz="1800" b="0" i="0">
-                <a:solidFill>
-                  <a:srgbClr val="262626"/>
-                </a:solidFill>
-                <a:latin typeface="Cambria Math"/>
-              </a:rPr>
-              <a:t> × (1 − c</a:t>
-            </a:r>
-            <a:r>
-              <a:rPr sz="1800" b="0" i="0" baseline="-25000">
-                <a:solidFill>
-                  <a:srgbClr val="262626"/>
-                </a:solidFill>
-                <a:latin typeface="Cambria Math"/>
-              </a:rPr>
-              <a:t>i</a:t>
-            </a:r>
-            <a:r>
-              <a:rPr sz="1800" b="0" i="0">
-                <a:solidFill>
-                  <a:srgbClr val="262626"/>
-                </a:solidFill>
-                <a:latin typeface="Cambria Math"/>
-              </a:rPr>
-              <a:t> / 100)</a:t>
-            </a:r>
-          </a:p>
-          <a:p>
-            <a:pPr algn="l">
-              <a:spcAft>
-                <a:spcPts val="600"/>
-              </a:spcAft>
-            </a:pPr>
-            <a:r>
-              <a:rPr sz="1500" b="0" i="0">
-                <a:solidFill>
-                  <a:srgbClr val="262626"/>
-                </a:solidFill>
-                <a:latin typeface="Cambria Math"/>
-              </a:rPr>
-              <a:t>q</a:t>
-            </a:r>
-            <a:r>
-              <a:rPr sz="1500" b="0" i="0" baseline="-25000">
-                <a:solidFill>
-                  <a:srgbClr val="262626"/>
-                </a:solidFill>
-                <a:latin typeface="Cambria Math"/>
-              </a:rPr>
-              <a:t>i</a:t>
-            </a:r>
-            <a:r>
-              <a:rPr sz="1500" b="0" i="0">
-                <a:solidFill>
-                  <a:srgbClr val="262626"/>
-                </a:solidFill>
-                <a:latin typeface="Cambria Math"/>
-              </a:rPr>
-              <a:t> = 50,000 × w</a:t>
-            </a:r>
-            <a:r>
-              <a:rPr sz="1500" b="0" i="0" baseline="-25000">
-                <a:solidFill>
-                  <a:srgbClr val="262626"/>
-                </a:solidFill>
-                <a:latin typeface="Cambria Math"/>
-              </a:rPr>
-              <a:t>i</a:t>
-            </a:r>
-            <a:r>
-              <a:rPr sz="1500" b="0" i="0">
-                <a:solidFill>
-                  <a:srgbClr val="262626"/>
-                </a:solidFill>
-                <a:latin typeface="Cambria Math"/>
-              </a:rPr>
-              <a:t> / Σ</a:t>
-            </a:r>
-            <a:r>
-              <a:rPr sz="1500" b="0" i="0" baseline="-25000">
-                <a:solidFill>
-                  <a:srgbClr val="262626"/>
-                </a:solidFill>
-                <a:latin typeface="Cambria Math"/>
-              </a:rPr>
-              <a:t>j</a:t>
-            </a:r>
-            <a:r>
-              <a:rPr sz="1500" b="0" i="0">
-                <a:solidFill>
-                  <a:srgbClr val="262626"/>
-                </a:solidFill>
-                <a:latin typeface="Cambria Math"/>
-              </a:rPr>
-              <a:t> w</a:t>
-            </a:r>
-            <a:r>
-              <a:rPr sz="1500" b="0" i="0" baseline="-25000">
-                <a:solidFill>
-                  <a:srgbClr val="262626"/>
-                </a:solidFill>
-                <a:latin typeface="Cambria Math"/>
-              </a:rPr>
-              <a:t>j</a:t>
-            </a:r>
-            <a:r>
-              <a:rPr sz="1500" b="0" i="0">
-                <a:solidFill>
-                  <a:srgbClr val="262626"/>
-                </a:solidFill>
-                <a:latin typeface="Cambria Math"/>
-              </a:rPr>
-              <a:t>,   A</a:t>
-            </a:r>
-            <a:r>
-              <a:rPr sz="1500" b="0" i="0" baseline="-25000">
-                <a:solidFill>
-                  <a:srgbClr val="262626"/>
-                </a:solidFill>
-                <a:latin typeface="Cambria Math"/>
-              </a:rPr>
-              <a:t>i</a:t>
-            </a:r>
-            <a:r>
-              <a:rPr sz="1500" b="0" i="0">
-                <a:solidFill>
-                  <a:srgbClr val="262626"/>
-                </a:solidFill>
-                <a:latin typeface="Cambria Math"/>
-              </a:rPr>
-              <a:t> = ⌊q</a:t>
-            </a:r>
-            <a:r>
-              <a:rPr sz="1500" b="0" i="0" baseline="-25000">
-                <a:solidFill>
-                  <a:srgbClr val="262626"/>
-                </a:solidFill>
-                <a:latin typeface="Cambria Math"/>
-              </a:rPr>
-              <a:t>i</a:t>
-            </a:r>
-            <a:r>
-              <a:rPr sz="1500" b="0" i="0">
-                <a:solidFill>
-                  <a:srgbClr val="262626"/>
-                </a:solidFill>
-                <a:latin typeface="Cambria Math"/>
-              </a:rPr>
-              <a:t>⌋ or ⌊q</a:t>
-            </a:r>
-            <a:r>
-              <a:rPr sz="1500" b="0" i="0" baseline="-25000">
-                <a:solidFill>
-                  <a:srgbClr val="262626"/>
-                </a:solidFill>
-                <a:latin typeface="Cambria Math"/>
-              </a:rPr>
-              <a:t>i</a:t>
-            </a:r>
-            <a:r>
-              <a:rPr sz="1500" b="0" i="0">
-                <a:solidFill>
-                  <a:srgbClr val="262626"/>
-                </a:solidFill>
-                <a:latin typeface="Cambria Math"/>
-              </a:rPr>
-              <a:t>⌋ + 1,   Σ</a:t>
-            </a:r>
-            <a:r>
-              <a:rPr sz="1500" b="0" i="0" baseline="-25000">
-                <a:solidFill>
-                  <a:srgbClr val="262626"/>
-                </a:solidFill>
-                <a:latin typeface="Cambria Math"/>
-              </a:rPr>
-              <a:t>i</a:t>
-            </a:r>
-            <a:r>
-              <a:rPr sz="1500" b="0" i="0">
-                <a:solidFill>
-                  <a:srgbClr val="262626"/>
-                </a:solidFill>
-                <a:latin typeface="Cambria Math"/>
-              </a:rPr>
-              <a:t> A</a:t>
-            </a:r>
-            <a:r>
-              <a:rPr sz="1500" b="0" i="0" baseline="-25000">
-                <a:solidFill>
-                  <a:srgbClr val="262626"/>
-                </a:solidFill>
-                <a:latin typeface="Cambria Math"/>
-              </a:rPr>
-              <a:t>i</a:t>
-            </a:r>
-            <a:r>
-              <a:rPr sz="1500" b="0" i="0">
-                <a:solidFill>
-                  <a:srgbClr val="262626"/>
-                </a:solidFill>
-                <a:latin typeface="Cambria Math"/>
-              </a:rPr>
-              <a:t> = 50,000</a:t>
-            </a:r>
-          </a:p>
-          <a:p>
-            <a:pPr algn="l">
-              <a:spcAft>
-                <a:spcPts val="1000"/>
-              </a:spcAft>
-            </a:pPr>
-            <a:r>
-              <a:rPr sz="1150" b="0" i="0">
-                <a:solidFill>
-                  <a:srgbClr val="595959"/>
-                </a:solidFill>
-                <a:latin typeface="Candara"/>
-              </a:rPr>
-              <a:t>Unit: district i. Target: μ</a:t>
-            </a:r>
-            <a:r>
-              <a:rPr sz="1150" b="0" i="0" baseline="-25000">
-                <a:solidFill>
-                  <a:srgbClr val="595959"/>
-                </a:solidFill>
-                <a:latin typeface="Candara"/>
-              </a:rPr>
-              <a:t>i</a:t>
-            </a:r>
-            <a:r>
-              <a:rPr sz="1150" b="0" i="0">
-                <a:solidFill>
-                  <a:srgbClr val="595959"/>
-                </a:solidFill>
-                <a:latin typeface="Candara"/>
-              </a:rPr>
-              <a:t>, expected confirmed cases 2014-17, from a negative binomial (variance μ</a:t>
-            </a:r>
-            <a:r>
-              <a:rPr sz="1150" b="0" i="0" baseline="-25000">
-                <a:solidFill>
-                  <a:srgbClr val="595959"/>
-                </a:solidFill>
-                <a:latin typeface="Candara"/>
-              </a:rPr>
-              <a:t>i</a:t>
-            </a:r>
-            <a:r>
-              <a:rPr sz="1150" b="0" i="0">
-                <a:solidFill>
-                  <a:srgbClr val="595959"/>
-                </a:solidFill>
-                <a:latin typeface="Candara"/>
-              </a:rPr>
-              <a:t> + αμ</a:t>
-            </a:r>
-            <a:r>
-              <a:rPr sz="1150" b="0" i="0" baseline="-25000">
-                <a:solidFill>
-                  <a:srgbClr val="595959"/>
-                </a:solidFill>
-                <a:latin typeface="Candara"/>
-              </a:rPr>
-              <a:t>i</a:t>
-            </a:r>
-            <a:r>
-              <a:rPr sz="1150" b="0" i="0">
-                <a:solidFill>
-                  <a:srgbClr val="595959"/>
-                </a:solidFill>
-                <a:latin typeface="Candara"/>
-              </a:rPr>
-              <a:t>², α = 0.268). Metric: the weight w</a:t>
-            </a:r>
-            <a:r>
-              <a:rPr sz="1150" b="0" i="0" baseline="-25000">
-                <a:solidFill>
-                  <a:srgbClr val="595959"/>
-                </a:solidFill>
-                <a:latin typeface="Candara"/>
-              </a:rPr>
-              <a:t>i</a:t>
-            </a:r>
-            <a:r>
-              <a:rPr sz="1150" b="0" i="0">
-                <a:solidFill>
-                  <a:srgbClr val="595959"/>
-                </a:solidFill>
-                <a:latin typeface="Candara"/>
-              </a:rPr>
-              <a:t>. U</a:t>
-            </a:r>
-            <a:r>
-              <a:rPr sz="1150" b="0" i="0" baseline="-25000">
-                <a:solidFill>
-                  <a:srgbClr val="595959"/>
-                </a:solidFill>
-                <a:latin typeface="Candara"/>
-              </a:rPr>
-              <a:t>i</a:t>
-            </a:r>
-            <a:r>
-              <a:rPr sz="1150" b="0" i="0">
-                <a:solidFill>
-                  <a:srgbClr val="595959"/>
-                </a:solidFill>
-                <a:latin typeface="Candara"/>
-              </a:rPr>
-              <a:t>: upper 95% confidence bound for μ</a:t>
-            </a:r>
-            <a:r>
-              <a:rPr sz="1150" b="0" i="0" baseline="-25000">
-                <a:solidFill>
-                  <a:srgbClr val="595959"/>
-                </a:solidFill>
-                <a:latin typeface="Candara"/>
-              </a:rPr>
-              <a:t>i</a:t>
-            </a:r>
-            <a:r>
-              <a:rPr sz="1150" b="0" i="0">
-                <a:solidFill>
-                  <a:srgbClr val="595959"/>
-                </a:solidFill>
-                <a:latin typeface="Candara"/>
-              </a:rPr>
-              <a:t>. c</a:t>
-            </a:r>
-            <a:r>
-              <a:rPr sz="1150" b="0" i="0" baseline="-25000">
-                <a:solidFill>
-                  <a:srgbClr val="595959"/>
-                </a:solidFill>
-                <a:latin typeface="Candara"/>
-              </a:rPr>
-              <a:t>i</a:t>
-            </a:r>
-            <a:r>
-              <a:rPr sz="1150" b="0" i="0">
-                <a:solidFill>
-                  <a:srgbClr val="595959"/>
-                </a:solidFill>
-                <a:latin typeface="Candara"/>
-              </a:rPr>
-              <a:t>: % of homes with a net in i's region. A</a:t>
-            </a:r>
-            <a:r>
-              <a:rPr sz="1150" b="0" i="0" baseline="-25000">
-                <a:solidFill>
-                  <a:srgbClr val="595959"/>
-                </a:solidFill>
-                <a:latin typeface="Candara"/>
-              </a:rPr>
-              <a:t>i</a:t>
-            </a:r>
-            <a:r>
-              <a:rPr sz="1150" b="0" i="0">
-                <a:solidFill>
-                  <a:srgbClr val="595959"/>
-                </a:solidFill>
-                <a:latin typeface="Candara"/>
-              </a:rPr>
-              <a:t>: nets, by Hamilton's largest-remainder method.</a:t>
-            </a:r>
-          </a:p>
-          <a:p>
-            <a:pPr algn="l">
-              <a:spcAft>
-                <a:spcPts val="400"/>
-              </a:spcAft>
-            </a:pPr>
-            <a:r>
-              <a:rPr sz="1700" b="1" i="0">
-                <a:solidFill>
-                  <a:srgbClr val="AB3D3F"/>
-                </a:solidFill>
-                <a:latin typeface="Candara"/>
-              </a:rPr>
-              <a:t>What it does with our data</a:t>
-            </a:r>
-          </a:p>
-          <a:p>
-            <a:pPr marL="219456" indent="-219456" algn="l">
-              <a:spcAft>
-                <a:spcPts val="600"/>
-              </a:spcAft>
-              <a:buClr>
-                <a:srgbClr val="AB3D3F"/>
-              </a:buClr>
-              <a:buFont typeface="Arial"/>
-              <a:buChar char="•"/>
-            </a:pPr>
-            <a:r>
-              <a:rPr sz="1300" b="0" i="0">
-                <a:solidFill>
-                  <a:srgbClr val="262626"/>
-                </a:solidFill>
-                <a:latin typeface="Candara"/>
-              </a:rPr>
-              <a:t>c</a:t>
-            </a:r>
-            <a:r>
-              <a:rPr sz="1300" b="0" i="0" baseline="-25000">
-                <a:solidFill>
-                  <a:srgbClr val="262626"/>
-                </a:solidFill>
-                <a:latin typeface="Candara"/>
-              </a:rPr>
-              <a:t>i</a:t>
-            </a:r>
-            <a:r>
-              <a:rPr sz="1300" b="0" i="0">
-                <a:solidFill>
-                  <a:srgbClr val="262626"/>
-                </a:solidFill>
-                <a:latin typeface="Candara"/>
-              </a:rPr>
-              <a:t> takes one value per region, so inside a region nets follow population: 8.5, 16.0 and 9.2 per 1,000 people.</a:t>
-            </a:r>
-          </a:p>
-          <a:p>
-            <a:pPr marL="219456" indent="-219456" algn="l">
-              <a:spcAft>
-                <a:spcPts val="600"/>
-              </a:spcAft>
-              <a:buClr>
-                <a:srgbClr val="AB3D3F"/>
-              </a:buClr>
-              <a:buFont typeface="Arial"/>
-              <a:buChar char="•"/>
-            </a:pPr>
-            <a:r>
-              <a:rPr sz="1300" b="0" i="0">
-                <a:solidFill>
-                  <a:srgbClr val="262626"/>
-                </a:solidFill>
-                <a:latin typeface="Candara"/>
-              </a:rPr>
-              <a:t>U</a:t>
-            </a:r>
-            <a:r>
-              <a:rPr sz="1300" b="0" i="0" baseline="-25000">
-                <a:solidFill>
-                  <a:srgbClr val="262626"/>
-                </a:solidFill>
-                <a:latin typeface="Candara"/>
-              </a:rPr>
-              <a:t>i</a:t>
-            </a:r>
-            <a:r>
-              <a:rPr sz="1300" b="0" i="0">
-                <a:solidFill>
-                  <a:srgbClr val="262626"/>
-                </a:solidFill>
-                <a:latin typeface="Candara"/>
-              </a:rPr>
-              <a:t> = μ</a:t>
-            </a:r>
-            <a:r>
-              <a:rPr sz="1300" b="0" i="0" baseline="-25000">
-                <a:solidFill>
-                  <a:srgbClr val="262626"/>
-                </a:solidFill>
-                <a:latin typeface="Candara"/>
-              </a:rPr>
-              <a:t>i</a:t>
-            </a:r>
-            <a:r>
-              <a:rPr sz="1300" b="0" i="0">
-                <a:solidFill>
-                  <a:srgbClr val="262626"/>
-                </a:solidFill>
-                <a:latin typeface="Candara"/>
-              </a:rPr>
-              <a:t> × 1.20, 1.34 or 1.16: one multiplier per region, from a confidence interval for the mean.</a:t>
-            </a:r>
-          </a:p>
-          <a:p>
-            <a:pPr marL="219456" indent="-219456" algn="l">
-              <a:spcAft>
-                <a:spcPts val="600"/>
-              </a:spcAft>
-              <a:buClr>
-                <a:srgbClr val="AB3D3F"/>
-              </a:buClr>
-              <a:buFont typeface="Arial"/>
-              <a:buChar char="•"/>
-            </a:pPr>
-            <a:r>
-              <a:rPr sz="1300" b="0" i="0">
-                <a:solidFill>
-                  <a:srgbClr val="262626"/>
-                </a:solidFill>
-                <a:latin typeface="Candara"/>
-              </a:rPr>
-              <a:t>β</a:t>
-            </a:r>
-            <a:r>
-              <a:rPr sz="1300" b="0" i="0" baseline="-25000">
-                <a:solidFill>
-                  <a:srgbClr val="262626"/>
-                </a:solidFill>
-                <a:latin typeface="Candara"/>
-              </a:rPr>
-              <a:t>1</a:t>
-            </a:r>
-            <a:r>
-              <a:rPr sz="1300" b="0" i="0">
-                <a:solidFill>
-                  <a:srgbClr val="262626"/>
-                </a:solidFill>
-                <a:latin typeface="Candara"/>
-              </a:rPr>
-              <a:t> = +0.082 per point: more nets went with more malaria, so the split between regions is uncertain.</a:t>
-            </a:r>
-          </a:p>
-        </p:txBody>
-      </p:sp>
-      <p:graphicFrame>
-        <p:nvGraphicFramePr>
-          <p:cNvPr id="4" name="Chart 3"/>
-          <p:cNvGraphicFramePr>
-            <a:graphicFrameLocks noGrp="1"/>
-          </p:cNvGraphicFramePr>
-          <p:nvPr/>
-        </p:nvGraphicFramePr>
-        <p:xfrm>
-          <a:off x="7040880" y="1417320"/>
-          <a:ext cx="4572000" cy="3840480"/>
-        </p:xfrm>
-        <a:graphic>
-          <a:graphicData uri="http://schemas.openxmlformats.org/drawingml/2006/chart">
-            <c:chart xmlns:c="http://schemas.openxmlformats.org/drawingml/2006/chart" xmlns:r="http://schemas.openxmlformats.org/officeDocument/2006/relationships" r:id="rId3"/>
-          </a:graphicData>
-        </a:graphic>
-      </p:graphicFrame>
-      <p:sp>
-        <p:nvSpPr>
-          <p:cNvPr id="5" name="TextBox 4"/>
-          <p:cNvSpPr txBox="1"/>
-          <p:nvPr/>
-        </p:nvSpPr>
-        <p:spPr>
-          <a:xfrm>
-            <a:off x="7040880" y="5303520"/>
-            <a:ext cx="4572000" cy="548640"/>
-          </a:xfrm>
-          <a:prstGeom prst="rect">
-            <a:avLst/>
-          </a:prstGeom>
-          <a:noFill/>
-        </p:spPr>
-        <p:txBody>
-          <a:bodyPr wrap="square" lIns="0" tIns="0" rIns="0" bIns="0" anchor="t">
-            <a:spAutoFit/>
-          </a:bodyPr>
-          <a:lstStyle/>
-          <a:p>
-            <a:pPr algn="l">
-              <a:spcAft>
-                <a:spcPts val="600"/>
-              </a:spcAft>
-            </a:pPr>
-            <a:r>
-              <a:rPr sz="1100" b="0" i="0">
-                <a:solidFill>
-                  <a:srgbClr val="595959"/>
-                </a:solidFill>
-                <a:latin typeface="Candara"/>
-              </a:rPr>
-              <a:t>Nets per 1,000 people by region, with the share of households owning a net (DHS 2022). Upper East has the highest coverage and the most nets per person: the coefficient reflects region, not the effect of nets, so the regional split is uncertain (slide 13).</a:t>
+              <a:t>we used AI tools to help aggregate our information and to generate this presentation from our aggregated information.</a:t>
             </a:r>
           </a:p>
         </p:txBody>
@@ -12235,15 +12179,6 @@
 </file>
 
 <file path=customXml/item1.xml><?xml version="1.0" encoding="utf-8"?>
-<?mso-contentType ?>
-<FormTemplates xmlns="http://schemas.microsoft.com/sharepoint/v3/contenttype/forms">
-  <Display>DocumentLibraryForm</Display>
-  <Edit>DocumentLibraryForm</Edit>
-  <New>DocumentLibraryForm</New>
-</FormTemplates>
-</file>
-
-<file path=customXml/item2.xml><?xml version="1.0" encoding="utf-8"?>
 <p:properties xmlns:p="http://schemas.microsoft.com/office/2006/metadata/properties" xmlns:xsi="http://www.w3.org/2001/XMLSchema-instance" xmlns:pc="http://schemas.microsoft.com/office/infopath/2007/PartnerControls">
   <documentManagement>
     <lcf76f155ced4ddcb4097134ff3c332f xmlns="b37e7508-98d8-4d44-adcb-ef8e87c43aeb">
@@ -12252,6 +12187,15 @@
     <TaxCatchAll xmlns="029b47ac-dfc3-4a78-a146-9328422ffc22" xsi:nil="true"/>
   </documentManagement>
 </p:properties>
+</file>
+
+<file path=customXml/item2.xml><?xml version="1.0" encoding="utf-8"?>
+<?mso-contentType ?>
+<FormTemplates xmlns="http://schemas.microsoft.com/sharepoint/v3/contenttype/forms">
+  <Display>DocumentLibraryForm</Display>
+  <Edit>DocumentLibraryForm</Edit>
+  <New>DocumentLibraryForm</New>
+</FormTemplates>
 </file>
 
 <file path=customXml/item3.xml><?xml version="1.0" encoding="utf-8"?>
@@ -12504,20 +12448,20 @@
 </file>
 
 <file path=customXml/itemProps1.xml><?xml version="1.0" encoding="utf-8"?>
-<ds:datastoreItem xmlns:ds="http://schemas.openxmlformats.org/officeDocument/2006/customXml" ds:itemID="{62D7E678-0BDD-42C1-AEE2-4DC521AAA8E9}">
-  <ds:schemaRefs>
-    <ds:schemaRef ds:uri="http://schemas.microsoft.com/sharepoint/v3/contenttype/forms"/>
-  </ds:schemaRefs>
-</ds:datastoreItem>
-</file>
-
-<file path=customXml/itemProps2.xml><?xml version="1.0" encoding="utf-8"?>
 <ds:datastoreItem xmlns:ds="http://schemas.openxmlformats.org/officeDocument/2006/customXml" ds:itemID="{CCCB51B8-E36A-48C6-A6A6-3F83B4595FB1}">
   <ds:schemaRefs>
     <ds:schemaRef ds:uri="http://schemas.microsoft.com/office/2006/metadata/properties"/>
     <ds:schemaRef ds:uri="http://schemas.microsoft.com/office/infopath/2007/PartnerControls"/>
     <ds:schemaRef ds:uri="b37e7508-98d8-4d44-adcb-ef8e87c43aeb"/>
     <ds:schemaRef ds:uri="029b47ac-dfc3-4a78-a146-9328422ffc22"/>
+  </ds:schemaRefs>
+</ds:datastoreItem>
+</file>
+
+<file path=customXml/itemProps2.xml><?xml version="1.0" encoding="utf-8"?>
+<ds:datastoreItem xmlns:ds="http://schemas.openxmlformats.org/officeDocument/2006/customXml" ds:itemID="{62D7E678-0BDD-42C1-AEE2-4DC521AAA8E9}">
+  <ds:schemaRefs>
+    <ds:schemaRef ds:uri="http://schemas.microsoft.com/sharepoint/v3/contenttype/forms"/>
   </ds:schemaRefs>
 </ds:datastoreItem>
 </file>
